--- a/AT/I-Cat Poster.pptx
+++ b/AT/I-Cat Poster.pptx
@@ -4125,25 +4125,8 @@
                 <a:latin typeface="Arial" panose="020B0604020202020204" pitchFamily="34" charset="0"/>
                 <a:cs typeface="Arial" panose="020B0604020202020204" pitchFamily="34" charset="0"/>
               </a:rPr>
-              <a:t>Indexed Concatenation (I-Cat): A Method for Representing and Operating on Repeating </a:t>
-            </a:r>
-            <a:r>
-              <a:rPr lang="en-US" sz="6600" b="1" dirty="0" err="1">
-                <a:solidFill>
-                  <a:schemeClr val="bg1"/>
-                </a:solidFill>
-                <a:latin typeface="Arial" panose="020B0604020202020204" pitchFamily="34" charset="0"/>
-                <a:cs typeface="Arial" panose="020B0604020202020204" pitchFamily="34" charset="0"/>
-              </a:rPr>
-              <a:t>Numerics</a:t>
-            </a:r>
-            <a:endParaRPr lang="en-US" sz="6600" b="1" dirty="0">
-              <a:solidFill>
-                <a:schemeClr val="bg1"/>
-              </a:solidFill>
-              <a:latin typeface="Arial" panose="020B0604020202020204" pitchFamily="34" charset="0"/>
-              <a:cs typeface="Arial" panose="020B0604020202020204" pitchFamily="34" charset="0"/>
-            </a:endParaRPr>
+              <a:t>Indexed Concatenation (I-Cat): A Method for Representing and Operating on Repeating Numbers</a:t>
+            </a:r>
           </a:p>
         </p:txBody>
       </p:sp>
@@ -4986,7 +4969,7 @@
         <p:spPr bwMode="auto">
           <a:xfrm>
             <a:off x="24879397" y="15046515"/>
-            <a:ext cx="7268693" cy="381629"/>
+            <a:ext cx="7268693" cy="1520416"/>
           </a:xfrm>
           <a:prstGeom prst="rect">
             <a:avLst/>
@@ -5004,7 +4987,7 @@
           </a:ln>
         </p:spPr>
         <p:txBody>
-          <a:bodyPr wrap="square" lIns="60945" tIns="30473" rIns="60945" bIns="30473">
+          <a:bodyPr wrap="square" lIns="91440" tIns="91440" rIns="91440" bIns="91440">
             <a:spAutoFit/>
           </a:bodyPr>
           <a:lstStyle>
@@ -5118,10 +5101,12 @@
             </a:lvl9pPr>
           </a:lstStyle>
           <a:p>
-            <a:pPr algn="just">
+            <a:pPr marL="342900" indent="-342900" algn="just">
               <a:lnSpc>
                 <a:spcPct val="110000"/>
               </a:lnSpc>
+              <a:buFont typeface="Arial" panose="020B0604020202020204" pitchFamily="34" charset="0"/>
+              <a:buChar char="•"/>
             </a:pPr>
             <a:r>
               <a:rPr lang="en-US" dirty="0">
@@ -5129,7 +5114,58 @@
                 <a:ea typeface="Open Sans" panose="020B0606030504020204" pitchFamily="34" charset="0"/>
                 <a:cs typeface="Open Sans" panose="020B0606030504020204" pitchFamily="34" charset="0"/>
               </a:rPr>
-              <a:t>Add your information, graphs and images to this section.</a:t>
+              <a:t>More complex operations</a:t>
+            </a:r>
+          </a:p>
+          <a:p>
+            <a:pPr marL="342900" indent="-342900" algn="just">
+              <a:lnSpc>
+                <a:spcPct val="110000"/>
+              </a:lnSpc>
+              <a:buFont typeface="Arial" panose="020B0604020202020204" pitchFamily="34" charset="0"/>
+              <a:buChar char="•"/>
+            </a:pPr>
+            <a:r>
+              <a:rPr lang="en-US" dirty="0">
+                <a:latin typeface="Open Sans" panose="020B0606030504020204" pitchFamily="34" charset="0"/>
+                <a:ea typeface="Open Sans" panose="020B0606030504020204" pitchFamily="34" charset="0"/>
+                <a:cs typeface="Open Sans" panose="020B0606030504020204" pitchFamily="34" charset="0"/>
+              </a:rPr>
+              <a:t>Computational applications</a:t>
+            </a:r>
+          </a:p>
+          <a:p>
+            <a:pPr marL="342900" indent="-342900" algn="just">
+              <a:lnSpc>
+                <a:spcPct val="110000"/>
+              </a:lnSpc>
+              <a:buFont typeface="Arial" panose="020B0604020202020204" pitchFamily="34" charset="0"/>
+              <a:buChar char="•"/>
+            </a:pPr>
+            <a:r>
+              <a:rPr lang="en-US" dirty="0">
+                <a:latin typeface="Open Sans" panose="020B0606030504020204" pitchFamily="34" charset="0"/>
+                <a:ea typeface="Open Sans" panose="020B0606030504020204" pitchFamily="34" charset="0"/>
+                <a:cs typeface="Open Sans" panose="020B0606030504020204" pitchFamily="34" charset="0"/>
+              </a:rPr>
+              <a:t>Develop more efficient algorithms</a:t>
+            </a:r>
+          </a:p>
+          <a:p>
+            <a:pPr marL="342900" indent="-342900" algn="just">
+              <a:lnSpc>
+                <a:spcPct val="110000"/>
+              </a:lnSpc>
+              <a:buFont typeface="Arial" panose="020B0604020202020204" pitchFamily="34" charset="0"/>
+              <a:buChar char="•"/>
+            </a:pPr>
+            <a:r>
+              <a:rPr lang="en-US" dirty="0">
+                <a:latin typeface="Open Sans" panose="020B0606030504020204" pitchFamily="34" charset="0"/>
+                <a:ea typeface="Open Sans" panose="020B0606030504020204" pitchFamily="34" charset="0"/>
+                <a:cs typeface="Open Sans" panose="020B0606030504020204" pitchFamily="34" charset="0"/>
+              </a:rPr>
+              <a:t>Continue analyzing patterns</a:t>
             </a:r>
           </a:p>
         </p:txBody>
@@ -5205,7 +5241,7 @@
         <p:spPr bwMode="auto">
           <a:xfrm>
             <a:off x="24879397" y="19105121"/>
-            <a:ext cx="7268693" cy="381629"/>
+            <a:ext cx="7268693" cy="843308"/>
           </a:xfrm>
           <a:prstGeom prst="rect">
             <a:avLst/>
@@ -5223,7 +5259,7 @@
           </a:ln>
         </p:spPr>
         <p:txBody>
-          <a:bodyPr wrap="square" lIns="60945" tIns="30473" rIns="60945" bIns="30473">
+          <a:bodyPr wrap="square" lIns="91440" tIns="91440" rIns="91440" bIns="91440">
             <a:spAutoFit/>
           </a:bodyPr>
           <a:lstStyle>
@@ -5348,7 +5384,7 @@
                 <a:ea typeface="Open Sans" panose="020B0606030504020204" pitchFamily="34" charset="0"/>
                 <a:cs typeface="Open Sans" panose="020B0606030504020204" pitchFamily="34" charset="0"/>
               </a:rPr>
-              <a:t>Add your information, graphs and images to this section.</a:t>
+              <a:t>Special thanks to Dr. Kenneth Caviness for his guidance and support.</a:t>
             </a:r>
           </a:p>
         </p:txBody>
@@ -5424,7 +5460,7 @@
         <p:spPr bwMode="auto">
           <a:xfrm>
             <a:off x="24879397" y="5572470"/>
-            <a:ext cx="7268693" cy="381629"/>
+            <a:ext cx="7268693" cy="1181862"/>
           </a:xfrm>
           <a:prstGeom prst="rect">
             <a:avLst/>
@@ -5442,7 +5478,7 @@
           </a:ln>
         </p:spPr>
         <p:txBody>
-          <a:bodyPr wrap="square" lIns="60945" tIns="30473" rIns="60945" bIns="30473">
+          <a:bodyPr wrap="square" lIns="91440" tIns="91440" rIns="91440" bIns="91440">
             <a:spAutoFit/>
           </a:bodyPr>
           <a:lstStyle>
@@ -5556,10 +5592,12 @@
             </a:lvl9pPr>
           </a:lstStyle>
           <a:p>
-            <a:pPr algn="just">
+            <a:pPr marL="342900" indent="-342900" algn="just">
               <a:lnSpc>
                 <a:spcPct val="110000"/>
               </a:lnSpc>
+              <a:buFont typeface="Arial" panose="020B0604020202020204" pitchFamily="34" charset="0"/>
+              <a:buChar char="•"/>
             </a:pPr>
             <a:r>
               <a:rPr lang="en-US" dirty="0">
@@ -5567,7 +5605,41 @@
                 <a:ea typeface="Open Sans" panose="020B0606030504020204" pitchFamily="34" charset="0"/>
                 <a:cs typeface="Open Sans" panose="020B0606030504020204" pitchFamily="34" charset="0"/>
               </a:rPr>
-              <a:t>Add your information, graphs and images to this section.</a:t>
+              <a:t>Compact representation of repeating patterns.</a:t>
+            </a:r>
+          </a:p>
+          <a:p>
+            <a:pPr marL="342900" indent="-342900" algn="just">
+              <a:lnSpc>
+                <a:spcPct val="110000"/>
+              </a:lnSpc>
+              <a:buFont typeface="Arial" panose="020B0604020202020204" pitchFamily="34" charset="0"/>
+              <a:buChar char="•"/>
+            </a:pPr>
+            <a:r>
+              <a:rPr lang="en-US" dirty="0">
+                <a:latin typeface="Open Sans" panose="020B0606030504020204" pitchFamily="34" charset="0"/>
+                <a:ea typeface="Open Sans" panose="020B0606030504020204" pitchFamily="34" charset="0"/>
+                <a:cs typeface="Open Sans" panose="020B0606030504020204" pitchFamily="34" charset="0"/>
+              </a:rPr>
+              <a:t>Simplifies operations with infinite decimals.</a:t>
+            </a:r>
+          </a:p>
+          <a:p>
+            <a:pPr marL="342900" indent="-342900" algn="just">
+              <a:lnSpc>
+                <a:spcPct val="110000"/>
+              </a:lnSpc>
+              <a:buFont typeface="Arial" panose="020B0604020202020204" pitchFamily="34" charset="0"/>
+              <a:buChar char="•"/>
+            </a:pPr>
+            <a:r>
+              <a:rPr lang="en-US" dirty="0">
+                <a:latin typeface="Open Sans" panose="020B0606030504020204" pitchFamily="34" charset="0"/>
+                <a:ea typeface="Open Sans" panose="020B0606030504020204" pitchFamily="34" charset="0"/>
+                <a:cs typeface="Open Sans" panose="020B0606030504020204" pitchFamily="34" charset="0"/>
+              </a:rPr>
+              <a:t>Useful in mathematical and computational contexts.</a:t>
             </a:r>
           </a:p>
         </p:txBody>
@@ -5643,7 +5715,7 @@
         <p:spPr bwMode="auto">
           <a:xfrm>
             <a:off x="24879397" y="11725353"/>
-            <a:ext cx="7268693" cy="381629"/>
+            <a:ext cx="7268693" cy="1181862"/>
           </a:xfrm>
           <a:prstGeom prst="rect">
             <a:avLst/>
@@ -5661,7 +5733,7 @@
           </a:ln>
         </p:spPr>
         <p:txBody>
-          <a:bodyPr wrap="square" lIns="60945" tIns="30473" rIns="60945" bIns="30473">
+          <a:bodyPr wrap="square" lIns="91440" tIns="91440" rIns="91440" bIns="91440">
             <a:spAutoFit/>
           </a:bodyPr>
           <a:lstStyle>
@@ -5775,18 +5847,37 @@
             </a:lvl9pPr>
           </a:lstStyle>
           <a:p>
-            <a:pPr algn="just">
+            <a:pPr marL="342900" indent="-342900" algn="just">
               <a:lnSpc>
                 <a:spcPct val="110000"/>
               </a:lnSpc>
-            </a:pPr>
-            <a:r>
-              <a:rPr lang="en-US">
+              <a:buFont typeface="Arial" panose="020B0604020202020204" pitchFamily="34" charset="0"/>
+              <a:buChar char="•"/>
+            </a:pPr>
+            <a:r>
+              <a:rPr lang="en-US" dirty="0">
                 <a:latin typeface="Open Sans" panose="020B0606030504020204" pitchFamily="34" charset="0"/>
                 <a:ea typeface="Open Sans" panose="020B0606030504020204" pitchFamily="34" charset="0"/>
                 <a:cs typeface="Open Sans" panose="020B0606030504020204" pitchFamily="34" charset="0"/>
               </a:rPr>
-              <a:t>Add your information, graphs and images to this section.</a:t>
+              <a:t>I-Cat notation provides a structured way to represent and work with repeating numbers. </a:t>
+            </a:r>
+          </a:p>
+          <a:p>
+            <a:pPr marL="342900" indent="-342900" algn="just">
+              <a:lnSpc>
+                <a:spcPct val="110000"/>
+              </a:lnSpc>
+              <a:buFont typeface="Arial" panose="020B0604020202020204" pitchFamily="34" charset="0"/>
+              <a:buChar char="•"/>
+            </a:pPr>
+            <a:r>
+              <a:rPr lang="en-US" dirty="0">
+                <a:latin typeface="Open Sans" panose="020B0606030504020204" pitchFamily="34" charset="0"/>
+                <a:ea typeface="Open Sans" panose="020B0606030504020204" pitchFamily="34" charset="0"/>
+                <a:cs typeface="Open Sans" panose="020B0606030504020204" pitchFamily="34" charset="0"/>
+              </a:rPr>
+              <a:t>It simplifies both representation and operations.</a:t>
             </a:r>
           </a:p>
         </p:txBody>

--- a/AT/I-Cat Poster.pptx
+++ b/AT/I-Cat Poster.pptx
@@ -4407,7 +4407,7 @@
         </p:nvSpPr>
         <p:spPr bwMode="auto">
           <a:xfrm>
-            <a:off x="768353" y="5573219"/>
+            <a:off x="768353" y="5572470"/>
             <a:ext cx="7268693" cy="3213187"/>
           </a:xfrm>
           <a:prstGeom prst="rect">
@@ -4625,7 +4625,7 @@
         </p:nvSpPr>
         <p:spPr bwMode="auto">
           <a:xfrm>
-            <a:off x="768353" y="4755724"/>
+            <a:off x="768353" y="4755723"/>
             <a:ext cx="7268693" cy="582201"/>
           </a:xfrm>
           <a:prstGeom prst="rect">
@@ -4968,7 +4968,7 @@
         </p:nvSpPr>
         <p:spPr bwMode="auto">
           <a:xfrm>
-            <a:off x="24879397" y="15046515"/>
+            <a:off x="24879396" y="17030644"/>
             <a:ext cx="7268693" cy="1520416"/>
           </a:xfrm>
           <a:prstGeom prst="rect">
@@ -5186,7 +5186,7 @@
         </p:nvSpPr>
         <p:spPr bwMode="auto">
           <a:xfrm>
-            <a:off x="24879397" y="14229394"/>
+            <a:off x="24879396" y="16213523"/>
             <a:ext cx="7268693" cy="582201"/>
           </a:xfrm>
           <a:prstGeom prst="rect">
@@ -5240,7 +5240,7 @@
         </p:nvSpPr>
         <p:spPr bwMode="auto">
           <a:xfrm>
-            <a:off x="24879397" y="19105121"/>
+            <a:off x="24879397" y="19577128"/>
             <a:ext cx="7268693" cy="843308"/>
           </a:xfrm>
           <a:prstGeom prst="rect">
@@ -5405,7 +5405,7 @@
         </p:nvSpPr>
         <p:spPr bwMode="auto">
           <a:xfrm>
-            <a:off x="24879397" y="18288000"/>
+            <a:off x="24879396" y="18812720"/>
             <a:ext cx="7268693" cy="582201"/>
           </a:xfrm>
           <a:prstGeom prst="rect">
@@ -5459,7 +5459,7 @@
         </p:nvSpPr>
         <p:spPr bwMode="auto">
           <a:xfrm>
-            <a:off x="24879397" y="5572470"/>
+            <a:off x="24878694" y="12557868"/>
             <a:ext cx="7268693" cy="1181862"/>
           </a:xfrm>
           <a:prstGeom prst="rect">
@@ -5660,7 +5660,7 @@
         </p:nvSpPr>
         <p:spPr bwMode="auto">
           <a:xfrm>
-            <a:off x="24879397" y="4755724"/>
+            <a:off x="24878694" y="11741121"/>
             <a:ext cx="7268693" cy="582201"/>
           </a:xfrm>
           <a:prstGeom prst="rect">
@@ -5714,7 +5714,7 @@
         </p:nvSpPr>
         <p:spPr bwMode="auto">
           <a:xfrm>
-            <a:off x="24879397" y="11725353"/>
+            <a:off x="24878694" y="14796741"/>
             <a:ext cx="7268693" cy="1181862"/>
           </a:xfrm>
           <a:prstGeom prst="rect">
@@ -5898,7 +5898,7 @@
         </p:nvSpPr>
         <p:spPr bwMode="auto">
           <a:xfrm>
-            <a:off x="24879397" y="10908231"/>
+            <a:off x="24878694" y="13979619"/>
             <a:ext cx="7268693" cy="582201"/>
           </a:xfrm>
           <a:prstGeom prst="rect">
@@ -6261,44 +6261,8 @@
         </p:blipFill>
         <p:spPr>
           <a:xfrm>
-            <a:off x="2948548" y="14553741"/>
+            <a:off x="2948549" y="14553741"/>
             <a:ext cx="2908300" cy="596900"/>
-          </a:xfrm>
-          <a:prstGeom prst="rect">
-            <a:avLst/>
-          </a:prstGeom>
-        </p:spPr>
-      </p:pic>
-      <p:pic>
-        <p:nvPicPr>
-          <p:cNvPr id="9" name="Picture 8">
-            <a:extLst>
-              <a:ext uri="{FF2B5EF4-FFF2-40B4-BE49-F238E27FC236}">
-                <a16:creationId xmlns:a16="http://schemas.microsoft.com/office/drawing/2014/main" id="{9C6AEC37-019C-7034-D507-EEF10D28ADDE}"/>
-              </a:ext>
-            </a:extLst>
-          </p:cNvPr>
-          <p:cNvPicPr>
-            <a:picLocks noChangeAspect="1"/>
-          </p:cNvPicPr>
-          <p:nvPr/>
-        </p:nvPicPr>
-        <p:blipFill>
-          <a:blip r:embed="rId4">
-            <a:extLst>
-              <a:ext uri="{28A0092B-C50C-407E-A947-70E740481C1C}">
-                <a14:useLocalDpi xmlns:a14="http://schemas.microsoft.com/office/drawing/2010/main" val="0"/>
-              </a:ext>
-            </a:extLst>
-          </a:blip>
-          <a:stretch>
-            <a:fillRect/>
-          </a:stretch>
-        </p:blipFill>
-        <p:spPr>
-          <a:xfrm>
-            <a:off x="2719948" y="15299196"/>
-            <a:ext cx="3365500" cy="596900"/>
           </a:xfrm>
           <a:prstGeom prst="rect">
             <a:avLst/>
@@ -6566,78 +6530,6 @@
           </a:p>
         </p:txBody>
       </p:sp>
-      <p:pic>
-        <p:nvPicPr>
-          <p:cNvPr id="13" name="Picture 12">
-            <a:extLst>
-              <a:ext uri="{FF2B5EF4-FFF2-40B4-BE49-F238E27FC236}">
-                <a16:creationId xmlns:a16="http://schemas.microsoft.com/office/drawing/2014/main" id="{12F8B1EC-1F19-1280-A6BD-79B40F2F1F49}"/>
-              </a:ext>
-            </a:extLst>
-          </p:cNvPr>
-          <p:cNvPicPr>
-            <a:picLocks noChangeAspect="1"/>
-          </p:cNvPicPr>
-          <p:nvPr/>
-        </p:nvPicPr>
-        <p:blipFill>
-          <a:blip r:embed="rId5">
-            <a:extLst>
-              <a:ext uri="{28A0092B-C50C-407E-A947-70E740481C1C}">
-                <a14:useLocalDpi xmlns:a14="http://schemas.microsoft.com/office/drawing/2010/main" val="0"/>
-              </a:ext>
-            </a:extLst>
-          </a:blip>
-          <a:stretch>
-            <a:fillRect/>
-          </a:stretch>
-        </p:blipFill>
-        <p:spPr>
-          <a:xfrm>
-            <a:off x="2300848" y="16044651"/>
-            <a:ext cx="4203700" cy="660400"/>
-          </a:xfrm>
-          <a:prstGeom prst="rect">
-            <a:avLst/>
-          </a:prstGeom>
-        </p:spPr>
-      </p:pic>
-      <p:pic>
-        <p:nvPicPr>
-          <p:cNvPr id="15" name="Picture 14">
-            <a:extLst>
-              <a:ext uri="{FF2B5EF4-FFF2-40B4-BE49-F238E27FC236}">
-                <a16:creationId xmlns:a16="http://schemas.microsoft.com/office/drawing/2014/main" id="{B98414B0-57E3-D877-E836-3BA345A694D8}"/>
-              </a:ext>
-            </a:extLst>
-          </p:cNvPr>
-          <p:cNvPicPr>
-            <a:picLocks noChangeAspect="1"/>
-          </p:cNvPicPr>
-          <p:nvPr/>
-        </p:nvPicPr>
-        <p:blipFill>
-          <a:blip r:embed="rId6">
-            <a:extLst>
-              <a:ext uri="{28A0092B-C50C-407E-A947-70E740481C1C}">
-                <a14:useLocalDpi xmlns:a14="http://schemas.microsoft.com/office/drawing/2010/main" val="0"/>
-              </a:ext>
-            </a:extLst>
-          </a:blip>
-          <a:stretch>
-            <a:fillRect/>
-          </a:stretch>
-        </p:blipFill>
-        <p:spPr>
-          <a:xfrm>
-            <a:off x="2719949" y="17847520"/>
-            <a:ext cx="3365500" cy="1930400"/>
-          </a:xfrm>
-          <a:prstGeom prst="rect">
-            <a:avLst/>
-          </a:prstGeom>
-        </p:spPr>
-      </p:pic>
       <p:sp>
         <p:nvSpPr>
           <p:cNvPr id="32" name="TextBox 31">
@@ -6654,8 +6546,8 @@
         </p:nvSpPr>
         <p:spPr bwMode="auto">
           <a:xfrm>
-            <a:off x="8792147" y="5570974"/>
-            <a:ext cx="7268693" cy="9309408"/>
+            <a:off x="16198381" y="5572470"/>
+            <a:ext cx="8185619" cy="14726275"/>
           </a:xfrm>
           <a:prstGeom prst="rect">
             <a:avLst/>
@@ -7123,6 +7015,198 @@
               <a:cs typeface="Open Sans" panose="020B0606030504020204" pitchFamily="34" charset="0"/>
             </a:endParaRPr>
           </a:p>
+          <a:p>
+            <a:pPr algn="ctr">
+              <a:lnSpc>
+                <a:spcPct val="110000"/>
+              </a:lnSpc>
+            </a:pPr>
+            <a:endParaRPr lang="en-US" i="1" dirty="0">
+              <a:latin typeface="Cambria Math" panose="02040503050406030204" pitchFamily="18" charset="0"/>
+              <a:ea typeface="Open Sans" panose="020B0606030504020204" pitchFamily="34" charset="0"/>
+              <a:cs typeface="Open Sans" panose="020B0606030504020204" pitchFamily="34" charset="0"/>
+            </a:endParaRPr>
+          </a:p>
+          <a:p>
+            <a:pPr algn="ctr">
+              <a:lnSpc>
+                <a:spcPct val="110000"/>
+              </a:lnSpc>
+            </a:pPr>
+            <a:endParaRPr lang="en-US" b="0" i="1" dirty="0">
+              <a:latin typeface="Cambria Math" panose="02040503050406030204" pitchFamily="18" charset="0"/>
+              <a:ea typeface="Open Sans" panose="020B0606030504020204" pitchFamily="34" charset="0"/>
+              <a:cs typeface="Open Sans" panose="020B0606030504020204" pitchFamily="34" charset="0"/>
+            </a:endParaRPr>
+          </a:p>
+          <a:p>
+            <a:pPr algn="ctr">
+              <a:lnSpc>
+                <a:spcPct val="110000"/>
+              </a:lnSpc>
+            </a:pPr>
+            <a:endParaRPr lang="en-US" i="1" dirty="0">
+              <a:latin typeface="Cambria Math" panose="02040503050406030204" pitchFamily="18" charset="0"/>
+              <a:ea typeface="Open Sans" panose="020B0606030504020204" pitchFamily="34" charset="0"/>
+              <a:cs typeface="Open Sans" panose="020B0606030504020204" pitchFamily="34" charset="0"/>
+            </a:endParaRPr>
+          </a:p>
+          <a:p>
+            <a:pPr algn="ctr">
+              <a:lnSpc>
+                <a:spcPct val="110000"/>
+              </a:lnSpc>
+            </a:pPr>
+            <a:endParaRPr lang="en-US" b="0" i="1" dirty="0">
+              <a:latin typeface="Cambria Math" panose="02040503050406030204" pitchFamily="18" charset="0"/>
+              <a:ea typeface="Open Sans" panose="020B0606030504020204" pitchFamily="34" charset="0"/>
+              <a:cs typeface="Open Sans" panose="020B0606030504020204" pitchFamily="34" charset="0"/>
+            </a:endParaRPr>
+          </a:p>
+          <a:p>
+            <a:pPr algn="ctr">
+              <a:lnSpc>
+                <a:spcPct val="110000"/>
+              </a:lnSpc>
+            </a:pPr>
+            <a:endParaRPr lang="en-US" i="1" dirty="0">
+              <a:latin typeface="Cambria Math" panose="02040503050406030204" pitchFamily="18" charset="0"/>
+              <a:ea typeface="Open Sans" panose="020B0606030504020204" pitchFamily="34" charset="0"/>
+              <a:cs typeface="Open Sans" panose="020B0606030504020204" pitchFamily="34" charset="0"/>
+            </a:endParaRPr>
+          </a:p>
+          <a:p>
+            <a:pPr algn="ctr">
+              <a:lnSpc>
+                <a:spcPct val="110000"/>
+              </a:lnSpc>
+            </a:pPr>
+            <a:endParaRPr lang="en-US" b="0" i="1" dirty="0">
+              <a:latin typeface="Cambria Math" panose="02040503050406030204" pitchFamily="18" charset="0"/>
+              <a:ea typeface="Open Sans" panose="020B0606030504020204" pitchFamily="34" charset="0"/>
+              <a:cs typeface="Open Sans" panose="020B0606030504020204" pitchFamily="34" charset="0"/>
+            </a:endParaRPr>
+          </a:p>
+          <a:p>
+            <a:pPr algn="ctr">
+              <a:lnSpc>
+                <a:spcPct val="110000"/>
+              </a:lnSpc>
+            </a:pPr>
+            <a:endParaRPr lang="en-US" i="1" dirty="0">
+              <a:latin typeface="Cambria Math" panose="02040503050406030204" pitchFamily="18" charset="0"/>
+              <a:ea typeface="Open Sans" panose="020B0606030504020204" pitchFamily="34" charset="0"/>
+              <a:cs typeface="Open Sans" panose="020B0606030504020204" pitchFamily="34" charset="0"/>
+            </a:endParaRPr>
+          </a:p>
+          <a:p>
+            <a:pPr algn="ctr">
+              <a:lnSpc>
+                <a:spcPct val="110000"/>
+              </a:lnSpc>
+            </a:pPr>
+            <a:endParaRPr lang="en-US" b="0" i="1" dirty="0">
+              <a:latin typeface="Cambria Math" panose="02040503050406030204" pitchFamily="18" charset="0"/>
+              <a:ea typeface="Open Sans" panose="020B0606030504020204" pitchFamily="34" charset="0"/>
+              <a:cs typeface="Open Sans" panose="020B0606030504020204" pitchFamily="34" charset="0"/>
+            </a:endParaRPr>
+          </a:p>
+          <a:p>
+            <a:pPr algn="ctr">
+              <a:lnSpc>
+                <a:spcPct val="110000"/>
+              </a:lnSpc>
+            </a:pPr>
+            <a:endParaRPr lang="en-US" i="1" dirty="0">
+              <a:latin typeface="Cambria Math" panose="02040503050406030204" pitchFamily="18" charset="0"/>
+              <a:ea typeface="Open Sans" panose="020B0606030504020204" pitchFamily="34" charset="0"/>
+              <a:cs typeface="Open Sans" panose="020B0606030504020204" pitchFamily="34" charset="0"/>
+            </a:endParaRPr>
+          </a:p>
+          <a:p>
+            <a:pPr algn="ctr">
+              <a:lnSpc>
+                <a:spcPct val="110000"/>
+              </a:lnSpc>
+            </a:pPr>
+            <a:endParaRPr lang="en-US" b="0" i="1" dirty="0">
+              <a:latin typeface="Cambria Math" panose="02040503050406030204" pitchFamily="18" charset="0"/>
+              <a:ea typeface="Open Sans" panose="020B0606030504020204" pitchFamily="34" charset="0"/>
+              <a:cs typeface="Open Sans" panose="020B0606030504020204" pitchFamily="34" charset="0"/>
+            </a:endParaRPr>
+          </a:p>
+          <a:p>
+            <a:pPr algn="ctr">
+              <a:lnSpc>
+                <a:spcPct val="110000"/>
+              </a:lnSpc>
+            </a:pPr>
+            <a:endParaRPr lang="en-US" i="1" dirty="0">
+              <a:latin typeface="Cambria Math" panose="02040503050406030204" pitchFamily="18" charset="0"/>
+              <a:ea typeface="Open Sans" panose="020B0606030504020204" pitchFamily="34" charset="0"/>
+              <a:cs typeface="Open Sans" panose="020B0606030504020204" pitchFamily="34" charset="0"/>
+            </a:endParaRPr>
+          </a:p>
+          <a:p>
+            <a:pPr algn="ctr">
+              <a:lnSpc>
+                <a:spcPct val="110000"/>
+              </a:lnSpc>
+            </a:pPr>
+            <a:endParaRPr lang="en-US" b="0" i="1" dirty="0">
+              <a:latin typeface="Cambria Math" panose="02040503050406030204" pitchFamily="18" charset="0"/>
+              <a:ea typeface="Open Sans" panose="020B0606030504020204" pitchFamily="34" charset="0"/>
+              <a:cs typeface="Open Sans" panose="020B0606030504020204" pitchFamily="34" charset="0"/>
+            </a:endParaRPr>
+          </a:p>
+          <a:p>
+            <a:pPr algn="ctr">
+              <a:lnSpc>
+                <a:spcPct val="110000"/>
+              </a:lnSpc>
+            </a:pPr>
+            <a:endParaRPr lang="en-US" i="1" dirty="0">
+              <a:latin typeface="Cambria Math" panose="02040503050406030204" pitchFamily="18" charset="0"/>
+              <a:ea typeface="Open Sans" panose="020B0606030504020204" pitchFamily="34" charset="0"/>
+              <a:cs typeface="Open Sans" panose="020B0606030504020204" pitchFamily="34" charset="0"/>
+            </a:endParaRPr>
+          </a:p>
+          <a:p>
+            <a:pPr algn="ctr">
+              <a:lnSpc>
+                <a:spcPct val="110000"/>
+              </a:lnSpc>
+            </a:pPr>
+            <a:endParaRPr lang="en-US" b="0" i="1" dirty="0">
+              <a:latin typeface="Cambria Math" panose="02040503050406030204" pitchFamily="18" charset="0"/>
+              <a:ea typeface="Open Sans" panose="020B0606030504020204" pitchFamily="34" charset="0"/>
+              <a:cs typeface="Open Sans" panose="020B0606030504020204" pitchFamily="34" charset="0"/>
+            </a:endParaRPr>
+          </a:p>
+          <a:p>
+            <a:pPr algn="ctr">
+              <a:lnSpc>
+                <a:spcPct val="110000"/>
+              </a:lnSpc>
+            </a:pPr>
+            <a:endParaRPr lang="en-US" i="1" dirty="0">
+              <a:latin typeface="Cambria Math" panose="02040503050406030204" pitchFamily="18" charset="0"/>
+              <a:ea typeface="Open Sans" panose="020B0606030504020204" pitchFamily="34" charset="0"/>
+              <a:cs typeface="Open Sans" panose="020B0606030504020204" pitchFamily="34" charset="0"/>
+            </a:endParaRPr>
+          </a:p>
+          <a:p>
+            <a:pPr algn="ctr">
+              <a:lnSpc>
+                <a:spcPct val="110000"/>
+              </a:lnSpc>
+            </a:pPr>
+            <a:endParaRPr lang="en-US" i="1" dirty="0">
+              <a:latin typeface="Cambria Math" panose="02040503050406030204" pitchFamily="18" charset="0"/>
+              <a:ea typeface="Open Sans" panose="020B0606030504020204" pitchFamily="34" charset="0"/>
+              <a:cs typeface="Open Sans" panose="020B0606030504020204" pitchFamily="34" charset="0"/>
+            </a:endParaRPr>
+          </a:p>
         </p:txBody>
       </p:sp>
       <p:sp>
@@ -7141,8 +7225,8 @@
         </p:nvSpPr>
         <p:spPr bwMode="auto">
           <a:xfrm>
-            <a:off x="8818588" y="4755724"/>
-            <a:ext cx="7268693" cy="582201"/>
+            <a:off x="16193259" y="4755722"/>
+            <a:ext cx="8185619" cy="582201"/>
           </a:xfrm>
           <a:prstGeom prst="rect">
             <a:avLst/>
@@ -7194,7 +7278,7 @@
           <p:nvPr/>
         </p:nvPicPr>
         <p:blipFill>
-          <a:blip r:embed="rId7">
+          <a:blip r:embed="rId4">
             <a:extLst>
               <a:ext uri="{28A0092B-C50C-407E-A947-70E740481C1C}">
                 <a14:useLocalDpi xmlns:a14="http://schemas.microsoft.com/office/drawing/2010/main" val="0"/>
@@ -7207,8 +7291,8 @@
         </p:blipFill>
         <p:spPr>
           <a:xfrm>
-            <a:off x="9638843" y="7385261"/>
-            <a:ext cx="5575300" cy="6705600"/>
+            <a:off x="17781800" y="6871033"/>
+            <a:ext cx="5251453" cy="6316098"/>
           </a:xfrm>
           <a:prstGeom prst="rect">
             <a:avLst/>
@@ -7231,8 +7315,8 @@
         </p:nvSpPr>
         <p:spPr bwMode="auto">
           <a:xfrm>
-            <a:off x="16849071" y="5577171"/>
-            <a:ext cx="7268693" cy="4569649"/>
+            <a:off x="24878694" y="5572470"/>
+            <a:ext cx="7268693" cy="5923866"/>
           </a:xfrm>
           <a:prstGeom prst="rect">
             <a:avLst/>
@@ -7375,7 +7459,7 @@
                 <a:ea typeface="Open Sans" panose="020B0606030504020204" pitchFamily="34" charset="0"/>
                 <a:cs typeface="Open Sans" panose="020B0606030504020204" pitchFamily="34" charset="0"/>
               </a:rPr>
-              <a:t>I-Cat x I-Cat Examples:</a:t>
+              <a:t>I-Cat x I-Cat Example:</a:t>
             </a:r>
           </a:p>
           <a:p>
@@ -7433,6 +7517,54 @@
               </a:lnSpc>
             </a:pPr>
             <a:endParaRPr lang="en-US" i="1" dirty="0">
+              <a:latin typeface="Cambria Math" panose="02040503050406030204" pitchFamily="18" charset="0"/>
+              <a:ea typeface="Open Sans" panose="020B0606030504020204" pitchFamily="34" charset="0"/>
+              <a:cs typeface="Open Sans" panose="020B0606030504020204" pitchFamily="34" charset="0"/>
+            </a:endParaRPr>
+          </a:p>
+          <a:p>
+            <a:pPr algn="ctr">
+              <a:lnSpc>
+                <a:spcPct val="110000"/>
+              </a:lnSpc>
+            </a:pPr>
+            <a:endParaRPr lang="en-US" i="1" dirty="0">
+              <a:latin typeface="Cambria Math" panose="02040503050406030204" pitchFamily="18" charset="0"/>
+              <a:ea typeface="Open Sans" panose="020B0606030504020204" pitchFamily="34" charset="0"/>
+              <a:cs typeface="Open Sans" panose="020B0606030504020204" pitchFamily="34" charset="0"/>
+            </a:endParaRPr>
+          </a:p>
+          <a:p>
+            <a:pPr algn="ctr">
+              <a:lnSpc>
+                <a:spcPct val="110000"/>
+              </a:lnSpc>
+            </a:pPr>
+            <a:endParaRPr lang="en-US" b="0" i="1" dirty="0">
+              <a:latin typeface="Cambria Math" panose="02040503050406030204" pitchFamily="18" charset="0"/>
+              <a:ea typeface="Open Sans" panose="020B0606030504020204" pitchFamily="34" charset="0"/>
+              <a:cs typeface="Open Sans" panose="020B0606030504020204" pitchFamily="34" charset="0"/>
+            </a:endParaRPr>
+          </a:p>
+          <a:p>
+            <a:pPr algn="ctr">
+              <a:lnSpc>
+                <a:spcPct val="110000"/>
+              </a:lnSpc>
+            </a:pPr>
+            <a:endParaRPr lang="en-US" i="1" dirty="0">
+              <a:latin typeface="Cambria Math" panose="02040503050406030204" pitchFamily="18" charset="0"/>
+              <a:ea typeface="Open Sans" panose="020B0606030504020204" pitchFamily="34" charset="0"/>
+              <a:cs typeface="Open Sans" panose="020B0606030504020204" pitchFamily="34" charset="0"/>
+            </a:endParaRPr>
+          </a:p>
+          <a:p>
+            <a:pPr algn="ctr">
+              <a:lnSpc>
+                <a:spcPct val="110000"/>
+              </a:lnSpc>
+            </a:pPr>
+            <a:endParaRPr lang="en-US" b="0" i="1" dirty="0">
               <a:latin typeface="Cambria Math" panose="02040503050406030204" pitchFamily="18" charset="0"/>
               <a:ea typeface="Open Sans" panose="020B0606030504020204" pitchFamily="34" charset="0"/>
               <a:cs typeface="Open Sans" panose="020B0606030504020204" pitchFamily="34" charset="0"/>
@@ -7540,7 +7672,7 @@
         </p:nvSpPr>
         <p:spPr bwMode="auto">
           <a:xfrm>
-            <a:off x="16868823" y="4755724"/>
+            <a:off x="24878694" y="4755723"/>
             <a:ext cx="7268693" cy="582201"/>
           </a:xfrm>
           <a:prstGeom prst="rect">
@@ -7578,6 +7710,1104 @@
           </a:p>
         </p:txBody>
       </p:sp>
+      <p:sp>
+        <p:nvSpPr>
+          <p:cNvPr id="42" name="TextBox 41">
+            <a:extLst>
+              <a:ext uri="{FF2B5EF4-FFF2-40B4-BE49-F238E27FC236}">
+                <a16:creationId xmlns:a16="http://schemas.microsoft.com/office/drawing/2014/main" id="{68FF7854-D008-3271-1B76-D3C5BAD8A8BB}"/>
+              </a:ext>
+            </a:extLst>
+          </p:cNvPr>
+          <p:cNvSpPr txBox="1">
+            <a:spLocks noChangeArrowheads="1"/>
+          </p:cNvSpPr>
+          <p:nvPr/>
+        </p:nvSpPr>
+        <p:spPr bwMode="auto">
+          <a:xfrm>
+            <a:off x="8483367" y="5572470"/>
+            <a:ext cx="7268693" cy="13372059"/>
+          </a:xfrm>
+          <a:prstGeom prst="rect">
+            <a:avLst/>
+          </a:prstGeom>
+          <a:solidFill>
+            <a:schemeClr val="bg1"/>
+          </a:solidFill>
+          <a:ln w="9525">
+            <a:solidFill>
+              <a:srgbClr val="000000"/>
+            </a:solidFill>
+            <a:miter lim="800000"/>
+            <a:headEnd/>
+            <a:tailEnd/>
+          </a:ln>
+        </p:spPr>
+        <p:txBody>
+          <a:bodyPr wrap="square" lIns="91440" tIns="91440" rIns="91440" bIns="91440">
+            <a:spAutoFit/>
+          </a:bodyPr>
+          <a:lstStyle>
+            <a:defPPr>
+              <a:defRPr kern="1200"/>
+            </a:defPPr>
+            <a:lvl1pPr eaLnBrk="0" hangingPunct="0">
+              <a:defRPr sz="2000">
+                <a:solidFill>
+                  <a:schemeClr val="tx1"/>
+                </a:solidFill>
+                <a:latin typeface="Arial"/>
+                <a:ea typeface="ＭＳ Ｐゴシック" pitchFamily="-106" charset="-128"/>
+              </a:defRPr>
+            </a:lvl1pPr>
+            <a:lvl2pPr eaLnBrk="0" hangingPunct="0">
+              <a:defRPr sz="2000">
+                <a:solidFill>
+                  <a:schemeClr val="tx1"/>
+                </a:solidFill>
+                <a:latin typeface="Arial"/>
+                <a:ea typeface="ＭＳ Ｐゴシック" pitchFamily="-106" charset="-128"/>
+              </a:defRPr>
+            </a:lvl2pPr>
+            <a:lvl3pPr marL="1143000" indent="-228600" eaLnBrk="0" hangingPunct="0">
+              <a:defRPr sz="2000">
+                <a:solidFill>
+                  <a:schemeClr val="tx1"/>
+                </a:solidFill>
+                <a:latin typeface="Arial"/>
+                <a:ea typeface="ＭＳ Ｐゴシック" pitchFamily="-106" charset="-128"/>
+              </a:defRPr>
+            </a:lvl3pPr>
+            <a:lvl4pPr marL="1600200" indent="-228600" eaLnBrk="0" hangingPunct="0">
+              <a:defRPr sz="2000">
+                <a:solidFill>
+                  <a:schemeClr val="tx1"/>
+                </a:solidFill>
+                <a:latin typeface="Arial"/>
+                <a:ea typeface="ＭＳ Ｐゴシック" pitchFamily="-106" charset="-128"/>
+              </a:defRPr>
+            </a:lvl4pPr>
+            <a:lvl5pPr marL="2057400" indent="-228600" eaLnBrk="0" hangingPunct="0">
+              <a:defRPr sz="2000">
+                <a:solidFill>
+                  <a:schemeClr val="tx1"/>
+                </a:solidFill>
+                <a:latin typeface="Arial"/>
+                <a:ea typeface="ＭＳ Ｐゴシック" pitchFamily="-106" charset="-128"/>
+              </a:defRPr>
+            </a:lvl5pPr>
+            <a:lvl6pPr marL="2514600" indent="-228600" eaLnBrk="0" fontAlgn="base" hangingPunct="0">
+              <a:spcBef>
+                <a:spcPct val="0"/>
+              </a:spcBef>
+              <a:spcAft>
+                <a:spcPct val="0"/>
+              </a:spcAft>
+              <a:defRPr sz="2000">
+                <a:solidFill>
+                  <a:schemeClr val="tx1"/>
+                </a:solidFill>
+                <a:latin typeface="Arial"/>
+                <a:ea typeface="ＭＳ Ｐゴシック" pitchFamily="-106" charset="-128"/>
+              </a:defRPr>
+            </a:lvl6pPr>
+            <a:lvl7pPr marL="2971800" indent="-228600" eaLnBrk="0" fontAlgn="base" hangingPunct="0">
+              <a:spcBef>
+                <a:spcPct val="0"/>
+              </a:spcBef>
+              <a:spcAft>
+                <a:spcPct val="0"/>
+              </a:spcAft>
+              <a:defRPr sz="2000">
+                <a:solidFill>
+                  <a:schemeClr val="tx1"/>
+                </a:solidFill>
+                <a:latin typeface="Arial"/>
+                <a:ea typeface="ＭＳ Ｐゴシック" pitchFamily="-106" charset="-128"/>
+              </a:defRPr>
+            </a:lvl7pPr>
+            <a:lvl8pPr marL="3429000" indent="-228600" eaLnBrk="0" fontAlgn="base" hangingPunct="0">
+              <a:spcBef>
+                <a:spcPct val="0"/>
+              </a:spcBef>
+              <a:spcAft>
+                <a:spcPct val="0"/>
+              </a:spcAft>
+              <a:defRPr sz="2000">
+                <a:solidFill>
+                  <a:schemeClr val="tx1"/>
+                </a:solidFill>
+                <a:latin typeface="Arial"/>
+                <a:ea typeface="ＭＳ Ｐゴシック" pitchFamily="-106" charset="-128"/>
+              </a:defRPr>
+            </a:lvl8pPr>
+            <a:lvl9pPr marL="3886200" indent="-228600" eaLnBrk="0" fontAlgn="base" hangingPunct="0">
+              <a:spcBef>
+                <a:spcPct val="0"/>
+              </a:spcBef>
+              <a:spcAft>
+                <a:spcPct val="0"/>
+              </a:spcAft>
+              <a:defRPr sz="2000">
+                <a:solidFill>
+                  <a:schemeClr val="tx1"/>
+                </a:solidFill>
+                <a:latin typeface="Arial"/>
+                <a:ea typeface="ＭＳ Ｐゴシック" pitchFamily="-106" charset="-128"/>
+              </a:defRPr>
+            </a:lvl9pPr>
+          </a:lstStyle>
+          <a:p>
+            <a:pPr algn="just">
+              <a:lnSpc>
+                <a:spcPct val="110000"/>
+              </a:lnSpc>
+            </a:pPr>
+            <a:r>
+              <a:rPr lang="en-US" b="1" dirty="0">
+                <a:latin typeface="Open Sans" panose="020B0606030504020204" pitchFamily="34" charset="0"/>
+                <a:ea typeface="Open Sans" panose="020B0606030504020204" pitchFamily="34" charset="0"/>
+                <a:cs typeface="Open Sans" panose="020B0606030504020204" pitchFamily="34" charset="0"/>
+              </a:rPr>
+              <a:t>Addition Examples:</a:t>
+            </a:r>
+          </a:p>
+          <a:p>
+            <a:pPr algn="ctr">
+              <a:lnSpc>
+                <a:spcPct val="110000"/>
+              </a:lnSpc>
+            </a:pPr>
+            <a:endParaRPr lang="en-US" b="1" dirty="0">
+              <a:latin typeface="Open Sans" panose="020B0606030504020204" pitchFamily="34" charset="0"/>
+              <a:ea typeface="Open Sans" panose="020B0606030504020204" pitchFamily="34" charset="0"/>
+              <a:cs typeface="Open Sans" panose="020B0606030504020204" pitchFamily="34" charset="0"/>
+            </a:endParaRPr>
+          </a:p>
+          <a:p>
+            <a:pPr algn="just">
+              <a:lnSpc>
+                <a:spcPct val="110000"/>
+              </a:lnSpc>
+            </a:pPr>
+            <a:endParaRPr lang="en-US" b="1" dirty="0">
+              <a:latin typeface="Open Sans" panose="020B0606030504020204" pitchFamily="34" charset="0"/>
+              <a:ea typeface="Open Sans" panose="020B0606030504020204" pitchFamily="34" charset="0"/>
+              <a:cs typeface="Open Sans" panose="020B0606030504020204" pitchFamily="34" charset="0"/>
+            </a:endParaRPr>
+          </a:p>
+          <a:p>
+            <a:pPr algn="ctr">
+              <a:lnSpc>
+                <a:spcPct val="110000"/>
+              </a:lnSpc>
+            </a:pPr>
+            <a:endParaRPr lang="en-US" b="0" i="1" dirty="0">
+              <a:latin typeface="Cambria Math" panose="02040503050406030204" pitchFamily="18" charset="0"/>
+              <a:ea typeface="Open Sans" panose="020B0606030504020204" pitchFamily="34" charset="0"/>
+              <a:cs typeface="Open Sans" panose="020B0606030504020204" pitchFamily="34" charset="0"/>
+            </a:endParaRPr>
+          </a:p>
+          <a:p>
+            <a:pPr algn="ctr">
+              <a:lnSpc>
+                <a:spcPct val="110000"/>
+              </a:lnSpc>
+            </a:pPr>
+            <a:endParaRPr lang="en-US" i="1" dirty="0">
+              <a:latin typeface="Cambria Math" panose="02040503050406030204" pitchFamily="18" charset="0"/>
+              <a:ea typeface="Open Sans" panose="020B0606030504020204" pitchFamily="34" charset="0"/>
+              <a:cs typeface="Open Sans" panose="020B0606030504020204" pitchFamily="34" charset="0"/>
+            </a:endParaRPr>
+          </a:p>
+          <a:p>
+            <a:pPr algn="ctr">
+              <a:lnSpc>
+                <a:spcPct val="110000"/>
+              </a:lnSpc>
+            </a:pPr>
+            <a:endParaRPr lang="en-US" i="1" dirty="0">
+              <a:latin typeface="Cambria Math" panose="02040503050406030204" pitchFamily="18" charset="0"/>
+              <a:ea typeface="Open Sans" panose="020B0606030504020204" pitchFamily="34" charset="0"/>
+              <a:cs typeface="Open Sans" panose="020B0606030504020204" pitchFamily="34" charset="0"/>
+            </a:endParaRPr>
+          </a:p>
+          <a:p>
+            <a:pPr algn="ctr">
+              <a:lnSpc>
+                <a:spcPct val="110000"/>
+              </a:lnSpc>
+            </a:pPr>
+            <a:endParaRPr lang="en-US" i="1" dirty="0">
+              <a:latin typeface="Cambria Math" panose="02040503050406030204" pitchFamily="18" charset="0"/>
+              <a:ea typeface="Open Sans" panose="020B0606030504020204" pitchFamily="34" charset="0"/>
+              <a:cs typeface="Open Sans" panose="020B0606030504020204" pitchFamily="34" charset="0"/>
+            </a:endParaRPr>
+          </a:p>
+          <a:p>
+            <a:pPr algn="ctr">
+              <a:lnSpc>
+                <a:spcPct val="110000"/>
+              </a:lnSpc>
+            </a:pPr>
+            <a:endParaRPr lang="en-US" i="1" dirty="0">
+              <a:latin typeface="Cambria Math" panose="02040503050406030204" pitchFamily="18" charset="0"/>
+              <a:ea typeface="Open Sans" panose="020B0606030504020204" pitchFamily="34" charset="0"/>
+              <a:cs typeface="Open Sans" panose="020B0606030504020204" pitchFamily="34" charset="0"/>
+            </a:endParaRPr>
+          </a:p>
+          <a:p>
+            <a:pPr algn="ctr">
+              <a:lnSpc>
+                <a:spcPct val="110000"/>
+              </a:lnSpc>
+            </a:pPr>
+            <a:endParaRPr lang="en-US" i="1" dirty="0">
+              <a:latin typeface="Cambria Math" panose="02040503050406030204" pitchFamily="18" charset="0"/>
+              <a:ea typeface="Open Sans" panose="020B0606030504020204" pitchFamily="34" charset="0"/>
+              <a:cs typeface="Open Sans" panose="020B0606030504020204" pitchFamily="34" charset="0"/>
+            </a:endParaRPr>
+          </a:p>
+          <a:p>
+            <a:pPr algn="ctr">
+              <a:lnSpc>
+                <a:spcPct val="110000"/>
+              </a:lnSpc>
+            </a:pPr>
+            <a:endParaRPr lang="en-US" i="1" dirty="0">
+              <a:latin typeface="Cambria Math" panose="02040503050406030204" pitchFamily="18" charset="0"/>
+              <a:ea typeface="Open Sans" panose="020B0606030504020204" pitchFamily="34" charset="0"/>
+              <a:cs typeface="Open Sans" panose="020B0606030504020204" pitchFamily="34" charset="0"/>
+            </a:endParaRPr>
+          </a:p>
+          <a:p>
+            <a:pPr algn="ctr">
+              <a:lnSpc>
+                <a:spcPct val="110000"/>
+              </a:lnSpc>
+            </a:pPr>
+            <a:endParaRPr lang="en-US" i="1" dirty="0">
+              <a:latin typeface="Cambria Math" panose="02040503050406030204" pitchFamily="18" charset="0"/>
+              <a:ea typeface="Open Sans" panose="020B0606030504020204" pitchFamily="34" charset="0"/>
+              <a:cs typeface="Open Sans" panose="020B0606030504020204" pitchFamily="34" charset="0"/>
+            </a:endParaRPr>
+          </a:p>
+          <a:p>
+            <a:pPr algn="ctr">
+              <a:lnSpc>
+                <a:spcPct val="110000"/>
+              </a:lnSpc>
+            </a:pPr>
+            <a:endParaRPr lang="en-US" b="0" i="1" dirty="0">
+              <a:latin typeface="Cambria Math" panose="02040503050406030204" pitchFamily="18" charset="0"/>
+              <a:ea typeface="Open Sans" panose="020B0606030504020204" pitchFamily="34" charset="0"/>
+              <a:cs typeface="Open Sans" panose="020B0606030504020204" pitchFamily="34" charset="0"/>
+            </a:endParaRPr>
+          </a:p>
+          <a:p>
+            <a:pPr algn="ctr">
+              <a:lnSpc>
+                <a:spcPct val="110000"/>
+              </a:lnSpc>
+            </a:pPr>
+            <a:endParaRPr lang="en-US" i="1" dirty="0">
+              <a:latin typeface="Cambria Math" panose="02040503050406030204" pitchFamily="18" charset="0"/>
+              <a:ea typeface="Open Sans" panose="020B0606030504020204" pitchFamily="34" charset="0"/>
+              <a:cs typeface="Open Sans" panose="020B0606030504020204" pitchFamily="34" charset="0"/>
+            </a:endParaRPr>
+          </a:p>
+          <a:p>
+            <a:pPr algn="ctr">
+              <a:lnSpc>
+                <a:spcPct val="110000"/>
+              </a:lnSpc>
+            </a:pPr>
+            <a:endParaRPr lang="en-US" b="0" i="1" dirty="0">
+              <a:latin typeface="Cambria Math" panose="02040503050406030204" pitchFamily="18" charset="0"/>
+              <a:ea typeface="Open Sans" panose="020B0606030504020204" pitchFamily="34" charset="0"/>
+              <a:cs typeface="Open Sans" panose="020B0606030504020204" pitchFamily="34" charset="0"/>
+            </a:endParaRPr>
+          </a:p>
+          <a:p>
+            <a:pPr algn="ctr">
+              <a:lnSpc>
+                <a:spcPct val="110000"/>
+              </a:lnSpc>
+            </a:pPr>
+            <a:endParaRPr lang="en-US" i="1" dirty="0">
+              <a:latin typeface="Cambria Math" panose="02040503050406030204" pitchFamily="18" charset="0"/>
+              <a:ea typeface="Open Sans" panose="020B0606030504020204" pitchFamily="34" charset="0"/>
+              <a:cs typeface="Open Sans" panose="020B0606030504020204" pitchFamily="34" charset="0"/>
+            </a:endParaRPr>
+          </a:p>
+          <a:p>
+            <a:pPr algn="ctr">
+              <a:lnSpc>
+                <a:spcPct val="110000"/>
+              </a:lnSpc>
+            </a:pPr>
+            <a:endParaRPr lang="en-US" b="0" i="1" dirty="0">
+              <a:latin typeface="Cambria Math" panose="02040503050406030204" pitchFamily="18" charset="0"/>
+              <a:ea typeface="Open Sans" panose="020B0606030504020204" pitchFamily="34" charset="0"/>
+              <a:cs typeface="Open Sans" panose="020B0606030504020204" pitchFamily="34" charset="0"/>
+            </a:endParaRPr>
+          </a:p>
+          <a:p>
+            <a:pPr algn="ctr">
+              <a:lnSpc>
+                <a:spcPct val="110000"/>
+              </a:lnSpc>
+            </a:pPr>
+            <a:endParaRPr lang="en-US" i="1" dirty="0">
+              <a:latin typeface="Cambria Math" panose="02040503050406030204" pitchFamily="18" charset="0"/>
+              <a:ea typeface="Open Sans" panose="020B0606030504020204" pitchFamily="34" charset="0"/>
+              <a:cs typeface="Open Sans" panose="020B0606030504020204" pitchFamily="34" charset="0"/>
+            </a:endParaRPr>
+          </a:p>
+          <a:p>
+            <a:pPr algn="ctr">
+              <a:lnSpc>
+                <a:spcPct val="110000"/>
+              </a:lnSpc>
+            </a:pPr>
+            <a:endParaRPr lang="en-US" b="0" i="1" dirty="0">
+              <a:latin typeface="Cambria Math" panose="02040503050406030204" pitchFamily="18" charset="0"/>
+              <a:ea typeface="Open Sans" panose="020B0606030504020204" pitchFamily="34" charset="0"/>
+              <a:cs typeface="Open Sans" panose="020B0606030504020204" pitchFamily="34" charset="0"/>
+            </a:endParaRPr>
+          </a:p>
+          <a:p>
+            <a:pPr algn="ctr">
+              <a:lnSpc>
+                <a:spcPct val="110000"/>
+              </a:lnSpc>
+            </a:pPr>
+            <a:endParaRPr lang="en-US" i="1" dirty="0">
+              <a:latin typeface="Cambria Math" panose="02040503050406030204" pitchFamily="18" charset="0"/>
+              <a:ea typeface="Open Sans" panose="020B0606030504020204" pitchFamily="34" charset="0"/>
+              <a:cs typeface="Open Sans" panose="020B0606030504020204" pitchFamily="34" charset="0"/>
+            </a:endParaRPr>
+          </a:p>
+          <a:p>
+            <a:pPr algn="ctr">
+              <a:lnSpc>
+                <a:spcPct val="110000"/>
+              </a:lnSpc>
+            </a:pPr>
+            <a:endParaRPr lang="en-US" b="0" i="1" dirty="0">
+              <a:latin typeface="Cambria Math" panose="02040503050406030204" pitchFamily="18" charset="0"/>
+              <a:ea typeface="Open Sans" panose="020B0606030504020204" pitchFamily="34" charset="0"/>
+              <a:cs typeface="Open Sans" panose="020B0606030504020204" pitchFamily="34" charset="0"/>
+            </a:endParaRPr>
+          </a:p>
+          <a:p>
+            <a:pPr algn="ctr">
+              <a:lnSpc>
+                <a:spcPct val="110000"/>
+              </a:lnSpc>
+            </a:pPr>
+            <a:endParaRPr lang="en-US" i="1" dirty="0">
+              <a:latin typeface="Cambria Math" panose="02040503050406030204" pitchFamily="18" charset="0"/>
+              <a:ea typeface="Open Sans" panose="020B0606030504020204" pitchFamily="34" charset="0"/>
+              <a:cs typeface="Open Sans" panose="020B0606030504020204" pitchFamily="34" charset="0"/>
+            </a:endParaRPr>
+          </a:p>
+          <a:p>
+            <a:pPr algn="ctr">
+              <a:lnSpc>
+                <a:spcPct val="110000"/>
+              </a:lnSpc>
+            </a:pPr>
+            <a:endParaRPr lang="en-US" b="0" i="1" dirty="0">
+              <a:latin typeface="Cambria Math" panose="02040503050406030204" pitchFamily="18" charset="0"/>
+              <a:ea typeface="Open Sans" panose="020B0606030504020204" pitchFamily="34" charset="0"/>
+              <a:cs typeface="Open Sans" panose="020B0606030504020204" pitchFamily="34" charset="0"/>
+            </a:endParaRPr>
+          </a:p>
+          <a:p>
+            <a:pPr algn="ctr">
+              <a:lnSpc>
+                <a:spcPct val="110000"/>
+              </a:lnSpc>
+            </a:pPr>
+            <a:endParaRPr lang="en-US" i="1" dirty="0">
+              <a:latin typeface="Cambria Math" panose="02040503050406030204" pitchFamily="18" charset="0"/>
+              <a:ea typeface="Open Sans" panose="020B0606030504020204" pitchFamily="34" charset="0"/>
+              <a:cs typeface="Open Sans" panose="020B0606030504020204" pitchFamily="34" charset="0"/>
+            </a:endParaRPr>
+          </a:p>
+          <a:p>
+            <a:pPr algn="ctr">
+              <a:lnSpc>
+                <a:spcPct val="110000"/>
+              </a:lnSpc>
+            </a:pPr>
+            <a:endParaRPr lang="en-US" i="1" dirty="0">
+              <a:latin typeface="Cambria Math" panose="02040503050406030204" pitchFamily="18" charset="0"/>
+              <a:ea typeface="Open Sans" panose="020B0606030504020204" pitchFamily="34" charset="0"/>
+              <a:cs typeface="Open Sans" panose="020B0606030504020204" pitchFamily="34" charset="0"/>
+            </a:endParaRPr>
+          </a:p>
+          <a:p>
+            <a:pPr algn="ctr">
+              <a:lnSpc>
+                <a:spcPct val="110000"/>
+              </a:lnSpc>
+            </a:pPr>
+            <a:endParaRPr lang="en-US" i="1" dirty="0">
+              <a:latin typeface="Cambria Math" panose="02040503050406030204" pitchFamily="18" charset="0"/>
+              <a:ea typeface="Open Sans" panose="020B0606030504020204" pitchFamily="34" charset="0"/>
+              <a:cs typeface="Open Sans" panose="020B0606030504020204" pitchFamily="34" charset="0"/>
+            </a:endParaRPr>
+          </a:p>
+          <a:p>
+            <a:pPr algn="ctr">
+              <a:lnSpc>
+                <a:spcPct val="110000"/>
+              </a:lnSpc>
+            </a:pPr>
+            <a:endParaRPr lang="en-US" b="0" i="1" dirty="0">
+              <a:latin typeface="Cambria Math" panose="02040503050406030204" pitchFamily="18" charset="0"/>
+              <a:ea typeface="Open Sans" panose="020B0606030504020204" pitchFamily="34" charset="0"/>
+              <a:cs typeface="Open Sans" panose="020B0606030504020204" pitchFamily="34" charset="0"/>
+            </a:endParaRPr>
+          </a:p>
+          <a:p>
+            <a:pPr algn="ctr">
+              <a:lnSpc>
+                <a:spcPct val="110000"/>
+              </a:lnSpc>
+            </a:pPr>
+            <a:endParaRPr lang="en-US" i="1" dirty="0">
+              <a:latin typeface="Cambria Math" panose="02040503050406030204" pitchFamily="18" charset="0"/>
+              <a:ea typeface="Open Sans" panose="020B0606030504020204" pitchFamily="34" charset="0"/>
+              <a:cs typeface="Open Sans" panose="020B0606030504020204" pitchFamily="34" charset="0"/>
+            </a:endParaRPr>
+          </a:p>
+          <a:p>
+            <a:pPr algn="ctr">
+              <a:lnSpc>
+                <a:spcPct val="110000"/>
+              </a:lnSpc>
+            </a:pPr>
+            <a:endParaRPr lang="en-US" i="1" dirty="0">
+              <a:latin typeface="Cambria Math" panose="02040503050406030204" pitchFamily="18" charset="0"/>
+              <a:ea typeface="Open Sans" panose="020B0606030504020204" pitchFamily="34" charset="0"/>
+              <a:cs typeface="Open Sans" panose="020B0606030504020204" pitchFamily="34" charset="0"/>
+            </a:endParaRPr>
+          </a:p>
+          <a:p>
+            <a:pPr algn="ctr">
+              <a:lnSpc>
+                <a:spcPct val="110000"/>
+              </a:lnSpc>
+            </a:pPr>
+            <a:endParaRPr lang="en-US" i="1" dirty="0">
+              <a:latin typeface="Cambria Math" panose="02040503050406030204" pitchFamily="18" charset="0"/>
+              <a:ea typeface="Open Sans" panose="020B0606030504020204" pitchFamily="34" charset="0"/>
+              <a:cs typeface="Open Sans" panose="020B0606030504020204" pitchFamily="34" charset="0"/>
+            </a:endParaRPr>
+          </a:p>
+          <a:p>
+            <a:pPr algn="ctr">
+              <a:lnSpc>
+                <a:spcPct val="110000"/>
+              </a:lnSpc>
+            </a:pPr>
+            <a:endParaRPr lang="en-US" i="1" dirty="0">
+              <a:latin typeface="Cambria Math" panose="02040503050406030204" pitchFamily="18" charset="0"/>
+              <a:ea typeface="Open Sans" panose="020B0606030504020204" pitchFamily="34" charset="0"/>
+              <a:cs typeface="Open Sans" panose="020B0606030504020204" pitchFamily="34" charset="0"/>
+            </a:endParaRPr>
+          </a:p>
+          <a:p>
+            <a:pPr algn="ctr">
+              <a:lnSpc>
+                <a:spcPct val="110000"/>
+              </a:lnSpc>
+            </a:pPr>
+            <a:endParaRPr lang="en-US" i="1" dirty="0">
+              <a:latin typeface="Cambria Math" panose="02040503050406030204" pitchFamily="18" charset="0"/>
+              <a:ea typeface="Open Sans" panose="020B0606030504020204" pitchFamily="34" charset="0"/>
+              <a:cs typeface="Open Sans" panose="020B0606030504020204" pitchFamily="34" charset="0"/>
+            </a:endParaRPr>
+          </a:p>
+          <a:p>
+            <a:pPr algn="ctr">
+              <a:lnSpc>
+                <a:spcPct val="110000"/>
+              </a:lnSpc>
+            </a:pPr>
+            <a:endParaRPr lang="en-US" i="1" dirty="0">
+              <a:latin typeface="Cambria Math" panose="02040503050406030204" pitchFamily="18" charset="0"/>
+              <a:ea typeface="Open Sans" panose="020B0606030504020204" pitchFamily="34" charset="0"/>
+              <a:cs typeface="Open Sans" panose="020B0606030504020204" pitchFamily="34" charset="0"/>
+            </a:endParaRPr>
+          </a:p>
+          <a:p>
+            <a:pPr algn="ctr">
+              <a:lnSpc>
+                <a:spcPct val="110000"/>
+              </a:lnSpc>
+            </a:pPr>
+            <a:endParaRPr lang="en-US" i="1" dirty="0">
+              <a:latin typeface="Cambria Math" panose="02040503050406030204" pitchFamily="18" charset="0"/>
+              <a:ea typeface="Open Sans" panose="020B0606030504020204" pitchFamily="34" charset="0"/>
+              <a:cs typeface="Open Sans" panose="020B0606030504020204" pitchFamily="34" charset="0"/>
+            </a:endParaRPr>
+          </a:p>
+          <a:p>
+            <a:pPr algn="ctr">
+              <a:lnSpc>
+                <a:spcPct val="110000"/>
+              </a:lnSpc>
+            </a:pPr>
+            <a:endParaRPr lang="en-US" i="1" dirty="0">
+              <a:latin typeface="Cambria Math" panose="02040503050406030204" pitchFamily="18" charset="0"/>
+              <a:ea typeface="Open Sans" panose="020B0606030504020204" pitchFamily="34" charset="0"/>
+              <a:cs typeface="Open Sans" panose="020B0606030504020204" pitchFamily="34" charset="0"/>
+            </a:endParaRPr>
+          </a:p>
+          <a:p>
+            <a:pPr algn="ctr">
+              <a:lnSpc>
+                <a:spcPct val="110000"/>
+              </a:lnSpc>
+            </a:pPr>
+            <a:endParaRPr lang="en-US" i="1" dirty="0">
+              <a:latin typeface="Cambria Math" panose="02040503050406030204" pitchFamily="18" charset="0"/>
+              <a:ea typeface="Open Sans" panose="020B0606030504020204" pitchFamily="34" charset="0"/>
+              <a:cs typeface="Open Sans" panose="020B0606030504020204" pitchFamily="34" charset="0"/>
+            </a:endParaRPr>
+          </a:p>
+          <a:p>
+            <a:pPr algn="ctr">
+              <a:lnSpc>
+                <a:spcPct val="110000"/>
+              </a:lnSpc>
+            </a:pPr>
+            <a:endParaRPr lang="en-US" i="1" dirty="0">
+              <a:latin typeface="Cambria Math" panose="02040503050406030204" pitchFamily="18" charset="0"/>
+              <a:ea typeface="Open Sans" panose="020B0606030504020204" pitchFamily="34" charset="0"/>
+              <a:cs typeface="Open Sans" panose="020B0606030504020204" pitchFamily="34" charset="0"/>
+            </a:endParaRPr>
+          </a:p>
+          <a:p>
+            <a:pPr algn="ctr">
+              <a:lnSpc>
+                <a:spcPct val="110000"/>
+              </a:lnSpc>
+            </a:pPr>
+            <a:endParaRPr lang="en-US" i="1" dirty="0">
+              <a:latin typeface="Cambria Math" panose="02040503050406030204" pitchFamily="18" charset="0"/>
+              <a:ea typeface="Open Sans" panose="020B0606030504020204" pitchFamily="34" charset="0"/>
+              <a:cs typeface="Open Sans" panose="020B0606030504020204" pitchFamily="34" charset="0"/>
+            </a:endParaRPr>
+          </a:p>
+          <a:p>
+            <a:pPr algn="ctr">
+              <a:lnSpc>
+                <a:spcPct val="110000"/>
+              </a:lnSpc>
+            </a:pPr>
+            <a:endParaRPr lang="en-US" i="1" dirty="0">
+              <a:latin typeface="Cambria Math" panose="02040503050406030204" pitchFamily="18" charset="0"/>
+              <a:ea typeface="Open Sans" panose="020B0606030504020204" pitchFamily="34" charset="0"/>
+              <a:cs typeface="Open Sans" panose="020B0606030504020204" pitchFamily="34" charset="0"/>
+            </a:endParaRPr>
+          </a:p>
+          <a:p>
+            <a:pPr algn="ctr">
+              <a:lnSpc>
+                <a:spcPct val="110000"/>
+              </a:lnSpc>
+            </a:pPr>
+            <a:endParaRPr lang="en-US" b="0" i="1" dirty="0">
+              <a:latin typeface="Cambria Math" panose="02040503050406030204" pitchFamily="18" charset="0"/>
+              <a:ea typeface="Open Sans" panose="020B0606030504020204" pitchFamily="34" charset="0"/>
+              <a:cs typeface="Open Sans" panose="020B0606030504020204" pitchFamily="34" charset="0"/>
+            </a:endParaRPr>
+          </a:p>
+        </p:txBody>
+      </p:sp>
+      <p:sp>
+        <p:nvSpPr>
+          <p:cNvPr id="43" name="Rectangle 10">
+            <a:extLst>
+              <a:ext uri="{FF2B5EF4-FFF2-40B4-BE49-F238E27FC236}">
+                <a16:creationId xmlns:a16="http://schemas.microsoft.com/office/drawing/2014/main" id="{F9522775-0917-A637-2ED0-D78CA46CDCAC}"/>
+              </a:ext>
+            </a:extLst>
+          </p:cNvPr>
+          <p:cNvSpPr>
+            <a:spLocks noChangeArrowheads="1"/>
+          </p:cNvSpPr>
+          <p:nvPr/>
+        </p:nvSpPr>
+        <p:spPr bwMode="auto">
+          <a:xfrm>
+            <a:off x="8483367" y="4755723"/>
+            <a:ext cx="7268693" cy="582201"/>
+          </a:xfrm>
+          <a:prstGeom prst="rect">
+            <a:avLst/>
+          </a:prstGeom>
+          <a:solidFill>
+            <a:srgbClr val="1482A5"/>
+          </a:solidFill>
+          <a:ln w="12700">
+            <a:noFill/>
+            <a:miter lim="800000"/>
+          </a:ln>
+        </p:spPr>
+        <p:txBody>
+          <a:bodyPr wrap="none" lIns="182880" tIns="48768" rIns="182880" bIns="45709" anchor="ctr" anchorCtr="0"/>
+          <a:lstStyle>
+            <a:defPPr>
+              <a:defRPr kern="1200"/>
+            </a:defPPr>
+          </a:lstStyle>
+          <a:p>
+            <a:pPr algn="ctr" defTabSz="3135215">
+              <a:defRPr/>
+            </a:pPr>
+            <a:r>
+              <a:rPr lang="en-US" sz="2800" b="1" dirty="0">
+                <a:solidFill>
+                  <a:schemeClr val="bg1"/>
+                </a:solidFill>
+                <a:latin typeface="Arial" panose="020B0604020202020204" pitchFamily="34" charset="0"/>
+                <a:cs typeface="Arial" panose="020B0604020202020204" pitchFamily="34" charset="0"/>
+              </a:rPr>
+              <a:t>Operations &amp; Examples (cont.)</a:t>
+            </a:r>
+          </a:p>
+        </p:txBody>
+      </p:sp>
+      <p:grpSp>
+        <p:nvGrpSpPr>
+          <p:cNvPr id="59" name="Group 58">
+            <a:extLst>
+              <a:ext uri="{FF2B5EF4-FFF2-40B4-BE49-F238E27FC236}">
+                <a16:creationId xmlns:a16="http://schemas.microsoft.com/office/drawing/2014/main" id="{06EA08A9-EAA8-8C06-9989-D3234323F71D}"/>
+              </a:ext>
+            </a:extLst>
+          </p:cNvPr>
+          <p:cNvGrpSpPr/>
+          <p:nvPr/>
+        </p:nvGrpSpPr>
+        <p:grpSpPr>
+          <a:xfrm>
+            <a:off x="8721040" y="15021186"/>
+            <a:ext cx="6802838" cy="3529874"/>
+            <a:chOff x="9010601" y="10394569"/>
+            <a:chExt cx="6802838" cy="3529874"/>
+          </a:xfrm>
+        </p:grpSpPr>
+        <p:pic>
+          <p:nvPicPr>
+            <p:cNvPr id="49" name="Picture 48">
+              <a:extLst>
+                <a:ext uri="{FF2B5EF4-FFF2-40B4-BE49-F238E27FC236}">
+                  <a16:creationId xmlns:a16="http://schemas.microsoft.com/office/drawing/2014/main" id="{BC33A010-07EB-BB1C-F0CD-CBF7C9D67F82}"/>
+                </a:ext>
+              </a:extLst>
+            </p:cNvPr>
+            <p:cNvPicPr>
+              <a:picLocks noChangeAspect="1"/>
+            </p:cNvPicPr>
+            <p:nvPr/>
+          </p:nvPicPr>
+          <p:blipFill>
+            <a:blip r:embed="rId5">
+              <a:extLst>
+                <a:ext uri="{28A0092B-C50C-407E-A947-70E740481C1C}">
+                  <a14:useLocalDpi xmlns:a14="http://schemas.microsoft.com/office/drawing/2010/main" val="0"/>
+                </a:ext>
+              </a:extLst>
+            </a:blip>
+            <a:stretch>
+              <a:fillRect/>
+            </a:stretch>
+          </p:blipFill>
+          <p:spPr>
+            <a:xfrm>
+              <a:off x="12338719" y="10394569"/>
+              <a:ext cx="3474720" cy="3529874"/>
+            </a:xfrm>
+            <a:prstGeom prst="rect">
+              <a:avLst/>
+            </a:prstGeom>
+          </p:spPr>
+        </p:pic>
+        <p:pic>
+          <p:nvPicPr>
+            <p:cNvPr id="51" name="Picture 50">
+              <a:extLst>
+                <a:ext uri="{FF2B5EF4-FFF2-40B4-BE49-F238E27FC236}">
+                  <a16:creationId xmlns:a16="http://schemas.microsoft.com/office/drawing/2014/main" id="{B97B9133-9974-AE52-C354-C32CF578AB95}"/>
+                </a:ext>
+              </a:extLst>
+            </p:cNvPr>
+            <p:cNvPicPr>
+              <a:picLocks noChangeAspect="1"/>
+            </p:cNvPicPr>
+            <p:nvPr/>
+          </p:nvPicPr>
+          <p:blipFill>
+            <a:blip r:embed="rId6">
+              <a:extLst>
+                <a:ext uri="{28A0092B-C50C-407E-A947-70E740481C1C}">
+                  <a14:useLocalDpi xmlns:a14="http://schemas.microsoft.com/office/drawing/2010/main" val="0"/>
+                </a:ext>
+              </a:extLst>
+            </a:blip>
+            <a:stretch>
+              <a:fillRect/>
+            </a:stretch>
+          </p:blipFill>
+          <p:spPr>
+            <a:xfrm>
+              <a:off x="9010601" y="10394569"/>
+              <a:ext cx="3106591" cy="1129669"/>
+            </a:xfrm>
+            <a:prstGeom prst="rect">
+              <a:avLst/>
+            </a:prstGeom>
+          </p:spPr>
+        </p:pic>
+      </p:grpSp>
+      <p:grpSp>
+        <p:nvGrpSpPr>
+          <p:cNvPr id="60" name="Group 59">
+            <a:extLst>
+              <a:ext uri="{FF2B5EF4-FFF2-40B4-BE49-F238E27FC236}">
+                <a16:creationId xmlns:a16="http://schemas.microsoft.com/office/drawing/2014/main" id="{A662A17A-1ACF-5798-85E5-DC9D6712B66E}"/>
+              </a:ext>
+            </a:extLst>
+          </p:cNvPr>
+          <p:cNvGrpSpPr/>
+          <p:nvPr/>
+        </p:nvGrpSpPr>
+        <p:grpSpPr>
+          <a:xfrm>
+            <a:off x="8753256" y="10051620"/>
+            <a:ext cx="6743204" cy="3529874"/>
+            <a:chOff x="9041671" y="10053754"/>
+            <a:chExt cx="6743204" cy="3529874"/>
+          </a:xfrm>
+        </p:grpSpPr>
+        <p:pic>
+          <p:nvPicPr>
+            <p:cNvPr id="47" name="Picture 46">
+              <a:extLst>
+                <a:ext uri="{FF2B5EF4-FFF2-40B4-BE49-F238E27FC236}">
+                  <a16:creationId xmlns:a16="http://schemas.microsoft.com/office/drawing/2014/main" id="{50505D91-E574-2F7B-3E0E-5977FACE2CD0}"/>
+                </a:ext>
+              </a:extLst>
+            </p:cNvPr>
+            <p:cNvPicPr>
+              <a:picLocks noChangeAspect="1"/>
+            </p:cNvPicPr>
+            <p:nvPr/>
+          </p:nvPicPr>
+          <p:blipFill>
+            <a:blip r:embed="rId7">
+              <a:extLst>
+                <a:ext uri="{28A0092B-C50C-407E-A947-70E740481C1C}">
+                  <a14:useLocalDpi xmlns:a14="http://schemas.microsoft.com/office/drawing/2010/main" val="0"/>
+                </a:ext>
+              </a:extLst>
+            </a:blip>
+            <a:stretch>
+              <a:fillRect/>
+            </a:stretch>
+          </p:blipFill>
+          <p:spPr>
+            <a:xfrm>
+              <a:off x="12310155" y="10053754"/>
+              <a:ext cx="3474720" cy="3529874"/>
+            </a:xfrm>
+            <a:prstGeom prst="rect">
+              <a:avLst/>
+            </a:prstGeom>
+          </p:spPr>
+        </p:pic>
+        <p:pic>
+          <p:nvPicPr>
+            <p:cNvPr id="53" name="Picture 52">
+              <a:extLst>
+                <a:ext uri="{FF2B5EF4-FFF2-40B4-BE49-F238E27FC236}">
+                  <a16:creationId xmlns:a16="http://schemas.microsoft.com/office/drawing/2014/main" id="{B4D42461-26BA-4A57-EF64-9D88FA5AC051}"/>
+                </a:ext>
+              </a:extLst>
+            </p:cNvPr>
+            <p:cNvPicPr>
+              <a:picLocks noChangeAspect="1"/>
+            </p:cNvPicPr>
+            <p:nvPr/>
+          </p:nvPicPr>
+          <p:blipFill>
+            <a:blip r:embed="rId8">
+              <a:extLst>
+                <a:ext uri="{28A0092B-C50C-407E-A947-70E740481C1C}">
+                  <a14:useLocalDpi xmlns:a14="http://schemas.microsoft.com/office/drawing/2010/main" val="0"/>
+                </a:ext>
+              </a:extLst>
+            </a:blip>
+            <a:stretch>
+              <a:fillRect/>
+            </a:stretch>
+          </p:blipFill>
+          <p:spPr>
+            <a:xfrm>
+              <a:off x="9041671" y="10053754"/>
+              <a:ext cx="3106591" cy="1260016"/>
+            </a:xfrm>
+            <a:prstGeom prst="rect">
+              <a:avLst/>
+            </a:prstGeom>
+          </p:spPr>
+        </p:pic>
+      </p:grpSp>
+      <p:pic>
+        <p:nvPicPr>
+          <p:cNvPr id="55" name="Picture 54">
+            <a:extLst>
+              <a:ext uri="{FF2B5EF4-FFF2-40B4-BE49-F238E27FC236}">
+                <a16:creationId xmlns:a16="http://schemas.microsoft.com/office/drawing/2014/main" id="{63CAA6CC-D0DE-C436-EBF6-FC42E116B933}"/>
+              </a:ext>
+            </a:extLst>
+          </p:cNvPr>
+          <p:cNvPicPr>
+            <a:picLocks noChangeAspect="1"/>
+          </p:cNvPicPr>
+          <p:nvPr/>
+        </p:nvPicPr>
+        <p:blipFill>
+          <a:blip r:embed="rId9">
+            <a:extLst>
+              <a:ext uri="{28A0092B-C50C-407E-A947-70E740481C1C}">
+                <a14:useLocalDpi xmlns:a14="http://schemas.microsoft.com/office/drawing/2010/main" val="0"/>
+              </a:ext>
+            </a:extLst>
+          </a:blip>
+          <a:stretch>
+            <a:fillRect/>
+          </a:stretch>
+        </p:blipFill>
+        <p:spPr>
+          <a:xfrm>
+            <a:off x="2711059" y="15237333"/>
+            <a:ext cx="3383280" cy="612358"/>
+          </a:xfrm>
+          <a:prstGeom prst="rect">
+            <a:avLst/>
+          </a:prstGeom>
+        </p:spPr>
+      </p:pic>
+      <p:pic>
+        <p:nvPicPr>
+          <p:cNvPr id="57" name="Picture 56">
+            <a:extLst>
+              <a:ext uri="{FF2B5EF4-FFF2-40B4-BE49-F238E27FC236}">
+                <a16:creationId xmlns:a16="http://schemas.microsoft.com/office/drawing/2014/main" id="{84FEF396-7E2A-B792-EA42-EECA63C1FEFE}"/>
+              </a:ext>
+            </a:extLst>
+          </p:cNvPr>
+          <p:cNvPicPr>
+            <a:picLocks noChangeAspect="1"/>
+          </p:cNvPicPr>
+          <p:nvPr/>
+        </p:nvPicPr>
+        <p:blipFill>
+          <a:blip r:embed="rId10">
+            <a:extLst>
+              <a:ext uri="{28A0092B-C50C-407E-A947-70E740481C1C}">
+                <a14:useLocalDpi xmlns:a14="http://schemas.microsoft.com/office/drawing/2010/main" val="0"/>
+              </a:ext>
+            </a:extLst>
+          </a:blip>
+          <a:stretch>
+            <a:fillRect/>
+          </a:stretch>
+        </p:blipFill>
+        <p:spPr>
+          <a:xfrm>
+            <a:off x="2116699" y="15936383"/>
+            <a:ext cx="4572000" cy="641195"/>
+          </a:xfrm>
+          <a:prstGeom prst="rect">
+            <a:avLst/>
+          </a:prstGeom>
+        </p:spPr>
+      </p:pic>
+      <p:grpSp>
+        <p:nvGrpSpPr>
+          <p:cNvPr id="61" name="Group 60">
+            <a:extLst>
+              <a:ext uri="{FF2B5EF4-FFF2-40B4-BE49-F238E27FC236}">
+                <a16:creationId xmlns:a16="http://schemas.microsoft.com/office/drawing/2014/main" id="{E79EC4A9-0F88-D131-2562-DD8B20A3EC14}"/>
+              </a:ext>
+            </a:extLst>
+          </p:cNvPr>
+          <p:cNvGrpSpPr/>
+          <p:nvPr/>
+        </p:nvGrpSpPr>
+        <p:grpSpPr>
+          <a:xfrm>
+            <a:off x="8746170" y="6248461"/>
+            <a:ext cx="6752578" cy="1969998"/>
+            <a:chOff x="9041671" y="8083756"/>
+            <a:chExt cx="6752578" cy="1969998"/>
+          </a:xfrm>
+        </p:grpSpPr>
+        <p:pic>
+          <p:nvPicPr>
+            <p:cNvPr id="41" name="Picture 40">
+              <a:extLst>
+                <a:ext uri="{FF2B5EF4-FFF2-40B4-BE49-F238E27FC236}">
+                  <a16:creationId xmlns:a16="http://schemas.microsoft.com/office/drawing/2014/main" id="{D8BDAF07-ACDC-E0CA-44A3-4C00FD7E8AE2}"/>
+                </a:ext>
+              </a:extLst>
+            </p:cNvPr>
+            <p:cNvPicPr>
+              <a:picLocks noChangeAspect="1"/>
+            </p:cNvPicPr>
+            <p:nvPr/>
+          </p:nvPicPr>
+          <p:blipFill>
+            <a:blip r:embed="rId11">
+              <a:extLst>
+                <a:ext uri="{28A0092B-C50C-407E-A947-70E740481C1C}">
+                  <a14:useLocalDpi xmlns:a14="http://schemas.microsoft.com/office/drawing/2010/main" val="0"/>
+                </a:ext>
+              </a:extLst>
+            </a:blip>
+            <a:stretch>
+              <a:fillRect/>
+            </a:stretch>
+          </p:blipFill>
+          <p:spPr>
+            <a:xfrm>
+              <a:off x="9041671" y="8083756"/>
+              <a:ext cx="3108960" cy="1331023"/>
+            </a:xfrm>
+            <a:prstGeom prst="rect">
+              <a:avLst/>
+            </a:prstGeom>
+          </p:spPr>
+        </p:pic>
+        <p:pic>
+          <p:nvPicPr>
+            <p:cNvPr id="39" name="Picture 38">
+              <a:extLst>
+                <a:ext uri="{FF2B5EF4-FFF2-40B4-BE49-F238E27FC236}">
+                  <a16:creationId xmlns:a16="http://schemas.microsoft.com/office/drawing/2014/main" id="{5DC67D21-CBB5-CCA9-5E11-141C04BAB4DC}"/>
+                </a:ext>
+              </a:extLst>
+            </p:cNvPr>
+            <p:cNvPicPr>
+              <a:picLocks noChangeAspect="1"/>
+            </p:cNvPicPr>
+            <p:nvPr/>
+          </p:nvPicPr>
+          <p:blipFill>
+            <a:blip r:embed="rId12">
+              <a:extLst>
+                <a:ext uri="{28A0092B-C50C-407E-A947-70E740481C1C}">
+                  <a14:useLocalDpi xmlns:a14="http://schemas.microsoft.com/office/drawing/2010/main" val="0"/>
+                </a:ext>
+              </a:extLst>
+            </a:blip>
+            <a:stretch>
+              <a:fillRect/>
+            </a:stretch>
+          </p:blipFill>
+          <p:spPr>
+            <a:xfrm>
+              <a:off x="12319529" y="8083756"/>
+              <a:ext cx="3474720" cy="1969998"/>
+            </a:xfrm>
+            <a:prstGeom prst="rect">
+              <a:avLst/>
+            </a:prstGeom>
+          </p:spPr>
+        </p:pic>
+      </p:grpSp>
+      <p:pic>
+        <p:nvPicPr>
+          <p:cNvPr id="63" name="Picture 62">
+            <a:extLst>
+              <a:ext uri="{FF2B5EF4-FFF2-40B4-BE49-F238E27FC236}">
+                <a16:creationId xmlns:a16="http://schemas.microsoft.com/office/drawing/2014/main" id="{21F3D84B-B416-4764-CC5A-799556D9A4EB}"/>
+              </a:ext>
+            </a:extLst>
+          </p:cNvPr>
+          <p:cNvPicPr>
+            <a:picLocks noChangeAspect="1"/>
+          </p:cNvPicPr>
+          <p:nvPr/>
+        </p:nvPicPr>
+        <p:blipFill>
+          <a:blip r:embed="rId13">
+            <a:extLst>
+              <a:ext uri="{28A0092B-C50C-407E-A947-70E740481C1C}">
+                <a14:useLocalDpi xmlns:a14="http://schemas.microsoft.com/office/drawing/2010/main" val="0"/>
+              </a:ext>
+            </a:extLst>
+          </a:blip>
+          <a:stretch>
+            <a:fillRect/>
+          </a:stretch>
+        </p:blipFill>
+        <p:spPr>
+          <a:xfrm>
+            <a:off x="1129543" y="18060280"/>
+            <a:ext cx="3137657" cy="1768498"/>
+          </a:xfrm>
+          <a:prstGeom prst="rect">
+            <a:avLst/>
+          </a:prstGeom>
+        </p:spPr>
+      </p:pic>
+      <p:pic>
+        <p:nvPicPr>
+          <p:cNvPr id="2049" name="Picture 2048">
+            <a:extLst>
+              <a:ext uri="{FF2B5EF4-FFF2-40B4-BE49-F238E27FC236}">
+                <a16:creationId xmlns:a16="http://schemas.microsoft.com/office/drawing/2014/main" id="{E00599AE-D635-5713-3810-095CA0C5BDAA}"/>
+              </a:ext>
+            </a:extLst>
+          </p:cNvPr>
+          <p:cNvPicPr>
+            <a:picLocks noChangeAspect="1"/>
+          </p:cNvPicPr>
+          <p:nvPr/>
+        </p:nvPicPr>
+        <p:blipFill>
+          <a:blip r:embed="rId14">
+            <a:extLst>
+              <a:ext uri="{28A0092B-C50C-407E-A947-70E740481C1C}">
+                <a14:useLocalDpi xmlns:a14="http://schemas.microsoft.com/office/drawing/2010/main" val="0"/>
+              </a:ext>
+            </a:extLst>
+          </a:blip>
+          <a:stretch>
+            <a:fillRect/>
+          </a:stretch>
+        </p:blipFill>
+        <p:spPr>
+          <a:xfrm>
+            <a:off x="17097806" y="12917196"/>
+            <a:ext cx="6619440" cy="7174853"/>
+          </a:xfrm>
+          <a:prstGeom prst="rect">
+            <a:avLst/>
+          </a:prstGeom>
+        </p:spPr>
+      </p:pic>
     </p:spTree>
   </p:cSld>
   <p:clrMapOvr>

--- a/AT/I-Cat Poster.pptx
+++ b/AT/I-Cat Poster.pptx
@@ -4353,7 +4353,7 @@
         </p:nvSpPr>
         <p:spPr bwMode="auto">
           <a:xfrm>
-            <a:off x="768353" y="13273740"/>
+            <a:off x="771012" y="13197843"/>
             <a:ext cx="7268693" cy="582201"/>
           </a:xfrm>
           <a:prstGeom prst="rect">
@@ -4968,7 +4968,7 @@
         </p:nvSpPr>
         <p:spPr bwMode="auto">
           <a:xfrm>
-            <a:off x="24879396" y="17030644"/>
+            <a:off x="24878419" y="17847956"/>
             <a:ext cx="7268693" cy="1520416"/>
           </a:xfrm>
           <a:prstGeom prst="rect">
@@ -5186,7 +5186,7 @@
         </p:nvSpPr>
         <p:spPr bwMode="auto">
           <a:xfrm>
-            <a:off x="24879396" y="16213523"/>
+            <a:off x="24878419" y="17159259"/>
             <a:ext cx="7268693" cy="582201"/>
           </a:xfrm>
           <a:prstGeom prst="rect">
@@ -5240,7 +5240,7 @@
         </p:nvSpPr>
         <p:spPr bwMode="auto">
           <a:xfrm>
-            <a:off x="24879397" y="19577128"/>
+            <a:off x="24879749" y="20273962"/>
             <a:ext cx="7268693" cy="843308"/>
           </a:xfrm>
           <a:prstGeom prst="rect">
@@ -5405,7 +5405,7 @@
         </p:nvSpPr>
         <p:spPr bwMode="auto">
           <a:xfrm>
-            <a:off x="24879396" y="18812720"/>
+            <a:off x="24878694" y="19581363"/>
             <a:ext cx="7268693" cy="582201"/>
           </a:xfrm>
           <a:prstGeom prst="rect">
@@ -5459,7 +5459,7 @@
         </p:nvSpPr>
         <p:spPr bwMode="auto">
           <a:xfrm>
-            <a:off x="24878694" y="12557868"/>
+            <a:off x="24878417" y="13741649"/>
             <a:ext cx="7268693" cy="1181862"/>
           </a:xfrm>
           <a:prstGeom prst="rect">
@@ -5660,7 +5660,7 @@
         </p:nvSpPr>
         <p:spPr bwMode="auto">
           <a:xfrm>
-            <a:off x="24878694" y="11741121"/>
+            <a:off x="24905311" y="13052398"/>
             <a:ext cx="7268693" cy="582201"/>
           </a:xfrm>
           <a:prstGeom prst="rect">
@@ -5714,7 +5714,7 @@
         </p:nvSpPr>
         <p:spPr bwMode="auto">
           <a:xfrm>
-            <a:off x="24878694" y="14796741"/>
+            <a:off x="24878419" y="15802465"/>
             <a:ext cx="7268693" cy="1181862"/>
           </a:xfrm>
           <a:prstGeom prst="rect">
@@ -5898,7 +5898,7 @@
         </p:nvSpPr>
         <p:spPr bwMode="auto">
           <a:xfrm>
-            <a:off x="24878694" y="13979619"/>
+            <a:off x="24878418" y="15113768"/>
             <a:ext cx="7268693" cy="582201"/>
           </a:xfrm>
           <a:prstGeom prst="rect">
@@ -6000,8 +6000,8 @@
         </p:nvSpPr>
         <p:spPr bwMode="auto">
           <a:xfrm>
-            <a:off x="768353" y="14090861"/>
-            <a:ext cx="7268693" cy="2876878"/>
+            <a:off x="771013" y="14031188"/>
+            <a:ext cx="7268693" cy="3215432"/>
           </a:xfrm>
           <a:prstGeom prst="rect">
             <a:avLst/>
@@ -6214,6 +6214,18 @@
               </a:lnSpc>
             </a:pPr>
             <a:endParaRPr lang="en-US" i="1" dirty="0">
+              <a:latin typeface="Cambria Math" panose="02040503050406030204" pitchFamily="18" charset="0"/>
+              <a:ea typeface="Open Sans" panose="020B0606030504020204" pitchFamily="34" charset="0"/>
+              <a:cs typeface="Open Sans" panose="020B0606030504020204" pitchFamily="34" charset="0"/>
+            </a:endParaRPr>
+          </a:p>
+          <a:p>
+            <a:pPr algn="ctr">
+              <a:lnSpc>
+                <a:spcPct val="110000"/>
+              </a:lnSpc>
+            </a:pPr>
+            <a:endParaRPr lang="en-US" b="0" i="1" dirty="0">
               <a:latin typeface="Cambria Math" panose="02040503050406030204" pitchFamily="18" charset="0"/>
               <a:ea typeface="Open Sans" panose="020B0606030504020204" pitchFamily="34" charset="0"/>
               <a:cs typeface="Open Sans" panose="020B0606030504020204" pitchFamily="34" charset="0"/>
@@ -6285,8 +6297,8 @@
         </p:nvSpPr>
         <p:spPr bwMode="auto">
           <a:xfrm>
-            <a:off x="768353" y="17205004"/>
-            <a:ext cx="7268693" cy="3215432"/>
+            <a:off x="764096" y="17551110"/>
+            <a:ext cx="7268693" cy="3566160"/>
           </a:xfrm>
           <a:prstGeom prst="rect">
             <a:avLst/>
@@ -6522,6 +6534,18 @@
                 <a:spcPct val="110000"/>
               </a:lnSpc>
             </a:pPr>
+            <a:endParaRPr lang="en-US" i="1" dirty="0">
+              <a:latin typeface="Cambria Math" panose="02040503050406030204" pitchFamily="18" charset="0"/>
+              <a:ea typeface="Open Sans" panose="020B0606030504020204" pitchFamily="34" charset="0"/>
+              <a:cs typeface="Open Sans" panose="020B0606030504020204" pitchFamily="34" charset="0"/>
+            </a:endParaRPr>
+          </a:p>
+          <a:p>
+            <a:pPr algn="ctr">
+              <a:lnSpc>
+                <a:spcPct val="110000"/>
+              </a:lnSpc>
+            </a:pPr>
             <a:endParaRPr lang="en-US" b="0" i="1" dirty="0">
               <a:latin typeface="Cambria Math" panose="02040503050406030204" pitchFamily="18" charset="0"/>
               <a:ea typeface="Open Sans" panose="020B0606030504020204" pitchFamily="34" charset="0"/>
@@ -6546,8 +6570,8 @@
         </p:nvSpPr>
         <p:spPr bwMode="auto">
           <a:xfrm>
-            <a:off x="16198381" y="5572470"/>
-            <a:ext cx="8185619" cy="14726275"/>
+            <a:off x="16135358" y="5572470"/>
+            <a:ext cx="8359763" cy="15544800"/>
           </a:xfrm>
           <a:prstGeom prst="rect">
             <a:avLst/>
@@ -7207,6 +7231,30 @@
               <a:cs typeface="Open Sans" panose="020B0606030504020204" pitchFamily="34" charset="0"/>
             </a:endParaRPr>
           </a:p>
+          <a:p>
+            <a:pPr algn="ctr">
+              <a:lnSpc>
+                <a:spcPct val="110000"/>
+              </a:lnSpc>
+            </a:pPr>
+            <a:endParaRPr lang="en-US" i="1" dirty="0">
+              <a:latin typeface="Cambria Math" panose="02040503050406030204" pitchFamily="18" charset="0"/>
+              <a:ea typeface="Open Sans" panose="020B0606030504020204" pitchFamily="34" charset="0"/>
+              <a:cs typeface="Open Sans" panose="020B0606030504020204" pitchFamily="34" charset="0"/>
+            </a:endParaRPr>
+          </a:p>
+          <a:p>
+            <a:pPr algn="ctr">
+              <a:lnSpc>
+                <a:spcPct val="110000"/>
+              </a:lnSpc>
+            </a:pPr>
+            <a:endParaRPr lang="en-US" i="1" dirty="0">
+              <a:latin typeface="Cambria Math" panose="02040503050406030204" pitchFamily="18" charset="0"/>
+              <a:ea typeface="Open Sans" panose="020B0606030504020204" pitchFamily="34" charset="0"/>
+              <a:cs typeface="Open Sans" panose="020B0606030504020204" pitchFamily="34" charset="0"/>
+            </a:endParaRPr>
+          </a:p>
         </p:txBody>
       </p:sp>
       <p:sp>
@@ -7225,8 +7273,8 @@
         </p:nvSpPr>
         <p:spPr bwMode="auto">
           <a:xfrm>
-            <a:off x="16193259" y="4755722"/>
-            <a:ext cx="8185619" cy="582201"/>
+            <a:off x="16123635" y="4755722"/>
+            <a:ext cx="8371486" cy="582201"/>
           </a:xfrm>
           <a:prstGeom prst="rect">
             <a:avLst/>
@@ -7291,8 +7339,8 @@
         </p:blipFill>
         <p:spPr>
           <a:xfrm>
-            <a:off x="17781800" y="6871033"/>
-            <a:ext cx="5251453" cy="6316098"/>
+            <a:off x="19291680" y="6074194"/>
+            <a:ext cx="4935414" cy="5935987"/>
           </a:xfrm>
           <a:prstGeom prst="rect">
             <a:avLst/>
@@ -7316,7 +7364,7 @@
         <p:spPr bwMode="auto">
           <a:xfrm>
             <a:off x="24878694" y="5572470"/>
-            <a:ext cx="7268693" cy="5923866"/>
+            <a:ext cx="7268693" cy="7315200"/>
           </a:xfrm>
           <a:prstGeom prst="rect">
             <a:avLst/>
@@ -7517,6 +7565,30 @@
               </a:lnSpc>
             </a:pPr>
             <a:endParaRPr lang="en-US" i="1" dirty="0">
+              <a:latin typeface="Cambria Math" panose="02040503050406030204" pitchFamily="18" charset="0"/>
+              <a:ea typeface="Open Sans" panose="020B0606030504020204" pitchFamily="34" charset="0"/>
+              <a:cs typeface="Open Sans" panose="020B0606030504020204" pitchFamily="34" charset="0"/>
+            </a:endParaRPr>
+          </a:p>
+          <a:p>
+            <a:pPr algn="ctr">
+              <a:lnSpc>
+                <a:spcPct val="110000"/>
+              </a:lnSpc>
+            </a:pPr>
+            <a:endParaRPr lang="en-US" i="1" dirty="0">
+              <a:latin typeface="Cambria Math" panose="02040503050406030204" pitchFamily="18" charset="0"/>
+              <a:ea typeface="Open Sans" panose="020B0606030504020204" pitchFamily="34" charset="0"/>
+              <a:cs typeface="Open Sans" panose="020B0606030504020204" pitchFamily="34" charset="0"/>
+            </a:endParaRPr>
+          </a:p>
+          <a:p>
+            <a:pPr algn="ctr">
+              <a:lnSpc>
+                <a:spcPct val="110000"/>
+              </a:lnSpc>
+            </a:pPr>
+            <a:endParaRPr lang="en-US" b="0" i="1" dirty="0">
               <a:latin typeface="Cambria Math" panose="02040503050406030204" pitchFamily="18" charset="0"/>
               <a:ea typeface="Open Sans" panose="020B0606030504020204" pitchFamily="34" charset="0"/>
               <a:cs typeface="Open Sans" panose="020B0606030504020204" pitchFamily="34" charset="0"/>
@@ -7727,7 +7799,7 @@
         <p:spPr bwMode="auto">
           <a:xfrm>
             <a:off x="8483367" y="5572470"/>
-            <a:ext cx="7268693" cy="13372059"/>
+            <a:ext cx="7268693" cy="7955191"/>
           </a:xfrm>
           <a:prstGeom prst="rect">
             <a:avLst/>
@@ -8107,223 +8179,31 @@
                 <a:spcPct val="110000"/>
               </a:lnSpc>
             </a:pPr>
+            <a:endParaRPr lang="en-US" b="0" i="1" dirty="0">
+              <a:latin typeface="Cambria Math" panose="02040503050406030204" pitchFamily="18" charset="0"/>
+              <a:ea typeface="Open Sans" panose="020B0606030504020204" pitchFamily="34" charset="0"/>
+              <a:cs typeface="Open Sans" panose="020B0606030504020204" pitchFamily="34" charset="0"/>
+            </a:endParaRPr>
+          </a:p>
+          <a:p>
+            <a:pPr algn="ctr">
+              <a:lnSpc>
+                <a:spcPct val="110000"/>
+              </a:lnSpc>
+            </a:pPr>
+            <a:endParaRPr lang="en-US" b="0" i="1" dirty="0">
+              <a:latin typeface="Cambria Math" panose="02040503050406030204" pitchFamily="18" charset="0"/>
+              <a:ea typeface="Open Sans" panose="020B0606030504020204" pitchFamily="34" charset="0"/>
+              <a:cs typeface="Open Sans" panose="020B0606030504020204" pitchFamily="34" charset="0"/>
+            </a:endParaRPr>
+          </a:p>
+          <a:p>
+            <a:pPr algn="ctr">
+              <a:lnSpc>
+                <a:spcPct val="110000"/>
+              </a:lnSpc>
+            </a:pPr>
             <a:endParaRPr lang="en-US" i="1" dirty="0">
-              <a:latin typeface="Cambria Math" panose="02040503050406030204" pitchFamily="18" charset="0"/>
-              <a:ea typeface="Open Sans" panose="020B0606030504020204" pitchFamily="34" charset="0"/>
-              <a:cs typeface="Open Sans" panose="020B0606030504020204" pitchFamily="34" charset="0"/>
-            </a:endParaRPr>
-          </a:p>
-          <a:p>
-            <a:pPr algn="ctr">
-              <a:lnSpc>
-                <a:spcPct val="110000"/>
-              </a:lnSpc>
-            </a:pPr>
-            <a:endParaRPr lang="en-US" b="0" i="1" dirty="0">
-              <a:latin typeface="Cambria Math" panose="02040503050406030204" pitchFamily="18" charset="0"/>
-              <a:ea typeface="Open Sans" panose="020B0606030504020204" pitchFamily="34" charset="0"/>
-              <a:cs typeface="Open Sans" panose="020B0606030504020204" pitchFamily="34" charset="0"/>
-            </a:endParaRPr>
-          </a:p>
-          <a:p>
-            <a:pPr algn="ctr">
-              <a:lnSpc>
-                <a:spcPct val="110000"/>
-              </a:lnSpc>
-            </a:pPr>
-            <a:endParaRPr lang="en-US" i="1" dirty="0">
-              <a:latin typeface="Cambria Math" panose="02040503050406030204" pitchFamily="18" charset="0"/>
-              <a:ea typeface="Open Sans" panose="020B0606030504020204" pitchFamily="34" charset="0"/>
-              <a:cs typeface="Open Sans" panose="020B0606030504020204" pitchFamily="34" charset="0"/>
-            </a:endParaRPr>
-          </a:p>
-          <a:p>
-            <a:pPr algn="ctr">
-              <a:lnSpc>
-                <a:spcPct val="110000"/>
-              </a:lnSpc>
-            </a:pPr>
-            <a:endParaRPr lang="en-US" i="1" dirty="0">
-              <a:latin typeface="Cambria Math" panose="02040503050406030204" pitchFamily="18" charset="0"/>
-              <a:ea typeface="Open Sans" panose="020B0606030504020204" pitchFamily="34" charset="0"/>
-              <a:cs typeface="Open Sans" panose="020B0606030504020204" pitchFamily="34" charset="0"/>
-            </a:endParaRPr>
-          </a:p>
-          <a:p>
-            <a:pPr algn="ctr">
-              <a:lnSpc>
-                <a:spcPct val="110000"/>
-              </a:lnSpc>
-            </a:pPr>
-            <a:endParaRPr lang="en-US" i="1" dirty="0">
-              <a:latin typeface="Cambria Math" panose="02040503050406030204" pitchFamily="18" charset="0"/>
-              <a:ea typeface="Open Sans" panose="020B0606030504020204" pitchFamily="34" charset="0"/>
-              <a:cs typeface="Open Sans" panose="020B0606030504020204" pitchFamily="34" charset="0"/>
-            </a:endParaRPr>
-          </a:p>
-          <a:p>
-            <a:pPr algn="ctr">
-              <a:lnSpc>
-                <a:spcPct val="110000"/>
-              </a:lnSpc>
-            </a:pPr>
-            <a:endParaRPr lang="en-US" b="0" i="1" dirty="0">
-              <a:latin typeface="Cambria Math" panose="02040503050406030204" pitchFamily="18" charset="0"/>
-              <a:ea typeface="Open Sans" panose="020B0606030504020204" pitchFamily="34" charset="0"/>
-              <a:cs typeface="Open Sans" panose="020B0606030504020204" pitchFamily="34" charset="0"/>
-            </a:endParaRPr>
-          </a:p>
-          <a:p>
-            <a:pPr algn="ctr">
-              <a:lnSpc>
-                <a:spcPct val="110000"/>
-              </a:lnSpc>
-            </a:pPr>
-            <a:endParaRPr lang="en-US" i="1" dirty="0">
-              <a:latin typeface="Cambria Math" panose="02040503050406030204" pitchFamily="18" charset="0"/>
-              <a:ea typeface="Open Sans" panose="020B0606030504020204" pitchFamily="34" charset="0"/>
-              <a:cs typeface="Open Sans" panose="020B0606030504020204" pitchFamily="34" charset="0"/>
-            </a:endParaRPr>
-          </a:p>
-          <a:p>
-            <a:pPr algn="ctr">
-              <a:lnSpc>
-                <a:spcPct val="110000"/>
-              </a:lnSpc>
-            </a:pPr>
-            <a:endParaRPr lang="en-US" i="1" dirty="0">
-              <a:latin typeface="Cambria Math" panose="02040503050406030204" pitchFamily="18" charset="0"/>
-              <a:ea typeface="Open Sans" panose="020B0606030504020204" pitchFamily="34" charset="0"/>
-              <a:cs typeface="Open Sans" panose="020B0606030504020204" pitchFamily="34" charset="0"/>
-            </a:endParaRPr>
-          </a:p>
-          <a:p>
-            <a:pPr algn="ctr">
-              <a:lnSpc>
-                <a:spcPct val="110000"/>
-              </a:lnSpc>
-            </a:pPr>
-            <a:endParaRPr lang="en-US" i="1" dirty="0">
-              <a:latin typeface="Cambria Math" panose="02040503050406030204" pitchFamily="18" charset="0"/>
-              <a:ea typeface="Open Sans" panose="020B0606030504020204" pitchFamily="34" charset="0"/>
-              <a:cs typeface="Open Sans" panose="020B0606030504020204" pitchFamily="34" charset="0"/>
-            </a:endParaRPr>
-          </a:p>
-          <a:p>
-            <a:pPr algn="ctr">
-              <a:lnSpc>
-                <a:spcPct val="110000"/>
-              </a:lnSpc>
-            </a:pPr>
-            <a:endParaRPr lang="en-US" i="1" dirty="0">
-              <a:latin typeface="Cambria Math" panose="02040503050406030204" pitchFamily="18" charset="0"/>
-              <a:ea typeface="Open Sans" panose="020B0606030504020204" pitchFamily="34" charset="0"/>
-              <a:cs typeface="Open Sans" panose="020B0606030504020204" pitchFamily="34" charset="0"/>
-            </a:endParaRPr>
-          </a:p>
-          <a:p>
-            <a:pPr algn="ctr">
-              <a:lnSpc>
-                <a:spcPct val="110000"/>
-              </a:lnSpc>
-            </a:pPr>
-            <a:endParaRPr lang="en-US" i="1" dirty="0">
-              <a:latin typeface="Cambria Math" panose="02040503050406030204" pitchFamily="18" charset="0"/>
-              <a:ea typeface="Open Sans" panose="020B0606030504020204" pitchFamily="34" charset="0"/>
-              <a:cs typeface="Open Sans" panose="020B0606030504020204" pitchFamily="34" charset="0"/>
-            </a:endParaRPr>
-          </a:p>
-          <a:p>
-            <a:pPr algn="ctr">
-              <a:lnSpc>
-                <a:spcPct val="110000"/>
-              </a:lnSpc>
-            </a:pPr>
-            <a:endParaRPr lang="en-US" i="1" dirty="0">
-              <a:latin typeface="Cambria Math" panose="02040503050406030204" pitchFamily="18" charset="0"/>
-              <a:ea typeface="Open Sans" panose="020B0606030504020204" pitchFamily="34" charset="0"/>
-              <a:cs typeface="Open Sans" panose="020B0606030504020204" pitchFamily="34" charset="0"/>
-            </a:endParaRPr>
-          </a:p>
-          <a:p>
-            <a:pPr algn="ctr">
-              <a:lnSpc>
-                <a:spcPct val="110000"/>
-              </a:lnSpc>
-            </a:pPr>
-            <a:endParaRPr lang="en-US" i="1" dirty="0">
-              <a:latin typeface="Cambria Math" panose="02040503050406030204" pitchFamily="18" charset="0"/>
-              <a:ea typeface="Open Sans" panose="020B0606030504020204" pitchFamily="34" charset="0"/>
-              <a:cs typeface="Open Sans" panose="020B0606030504020204" pitchFamily="34" charset="0"/>
-            </a:endParaRPr>
-          </a:p>
-          <a:p>
-            <a:pPr algn="ctr">
-              <a:lnSpc>
-                <a:spcPct val="110000"/>
-              </a:lnSpc>
-            </a:pPr>
-            <a:endParaRPr lang="en-US" i="1" dirty="0">
-              <a:latin typeface="Cambria Math" panose="02040503050406030204" pitchFamily="18" charset="0"/>
-              <a:ea typeface="Open Sans" panose="020B0606030504020204" pitchFamily="34" charset="0"/>
-              <a:cs typeface="Open Sans" panose="020B0606030504020204" pitchFamily="34" charset="0"/>
-            </a:endParaRPr>
-          </a:p>
-          <a:p>
-            <a:pPr algn="ctr">
-              <a:lnSpc>
-                <a:spcPct val="110000"/>
-              </a:lnSpc>
-            </a:pPr>
-            <a:endParaRPr lang="en-US" i="1" dirty="0">
-              <a:latin typeface="Cambria Math" panose="02040503050406030204" pitchFamily="18" charset="0"/>
-              <a:ea typeface="Open Sans" panose="020B0606030504020204" pitchFamily="34" charset="0"/>
-              <a:cs typeface="Open Sans" panose="020B0606030504020204" pitchFamily="34" charset="0"/>
-            </a:endParaRPr>
-          </a:p>
-          <a:p>
-            <a:pPr algn="ctr">
-              <a:lnSpc>
-                <a:spcPct val="110000"/>
-              </a:lnSpc>
-            </a:pPr>
-            <a:endParaRPr lang="en-US" i="1" dirty="0">
-              <a:latin typeface="Cambria Math" panose="02040503050406030204" pitchFamily="18" charset="0"/>
-              <a:ea typeface="Open Sans" panose="020B0606030504020204" pitchFamily="34" charset="0"/>
-              <a:cs typeface="Open Sans" panose="020B0606030504020204" pitchFamily="34" charset="0"/>
-            </a:endParaRPr>
-          </a:p>
-          <a:p>
-            <a:pPr algn="ctr">
-              <a:lnSpc>
-                <a:spcPct val="110000"/>
-              </a:lnSpc>
-            </a:pPr>
-            <a:endParaRPr lang="en-US" i="1" dirty="0">
-              <a:latin typeface="Cambria Math" panose="02040503050406030204" pitchFamily="18" charset="0"/>
-              <a:ea typeface="Open Sans" panose="020B0606030504020204" pitchFamily="34" charset="0"/>
-              <a:cs typeface="Open Sans" panose="020B0606030504020204" pitchFamily="34" charset="0"/>
-            </a:endParaRPr>
-          </a:p>
-          <a:p>
-            <a:pPr algn="ctr">
-              <a:lnSpc>
-                <a:spcPct val="110000"/>
-              </a:lnSpc>
-            </a:pPr>
-            <a:endParaRPr lang="en-US" i="1" dirty="0">
-              <a:latin typeface="Cambria Math" panose="02040503050406030204" pitchFamily="18" charset="0"/>
-              <a:ea typeface="Open Sans" panose="020B0606030504020204" pitchFamily="34" charset="0"/>
-              <a:cs typeface="Open Sans" panose="020B0606030504020204" pitchFamily="34" charset="0"/>
-            </a:endParaRPr>
-          </a:p>
-          <a:p>
-            <a:pPr algn="ctr">
-              <a:lnSpc>
-                <a:spcPct val="110000"/>
-              </a:lnSpc>
-            </a:pPr>
-            <a:endParaRPr lang="en-US" b="0" i="1" dirty="0">
               <a:latin typeface="Cambria Math" panose="02040503050406030204" pitchFamily="18" charset="0"/>
               <a:ea typeface="Open Sans" panose="020B0606030504020204" pitchFamily="34" charset="0"/>
               <a:cs typeface="Open Sans" panose="020B0606030504020204" pitchFamily="34" charset="0"/>
@@ -8387,99 +8267,6 @@
       </p:sp>
       <p:grpSp>
         <p:nvGrpSpPr>
-          <p:cNvPr id="59" name="Group 58">
-            <a:extLst>
-              <a:ext uri="{FF2B5EF4-FFF2-40B4-BE49-F238E27FC236}">
-                <a16:creationId xmlns:a16="http://schemas.microsoft.com/office/drawing/2014/main" id="{06EA08A9-EAA8-8C06-9989-D3234323F71D}"/>
-              </a:ext>
-            </a:extLst>
-          </p:cNvPr>
-          <p:cNvGrpSpPr/>
-          <p:nvPr/>
-        </p:nvGrpSpPr>
-        <p:grpSpPr>
-          <a:xfrm>
-            <a:off x="8721040" y="15021186"/>
-            <a:ext cx="6802838" cy="3529874"/>
-            <a:chOff x="9010601" y="10394569"/>
-            <a:chExt cx="6802838" cy="3529874"/>
-          </a:xfrm>
-        </p:grpSpPr>
-        <p:pic>
-          <p:nvPicPr>
-            <p:cNvPr id="49" name="Picture 48">
-              <a:extLst>
-                <a:ext uri="{FF2B5EF4-FFF2-40B4-BE49-F238E27FC236}">
-                  <a16:creationId xmlns:a16="http://schemas.microsoft.com/office/drawing/2014/main" id="{BC33A010-07EB-BB1C-F0CD-CBF7C9D67F82}"/>
-                </a:ext>
-              </a:extLst>
-            </p:cNvPr>
-            <p:cNvPicPr>
-              <a:picLocks noChangeAspect="1"/>
-            </p:cNvPicPr>
-            <p:nvPr/>
-          </p:nvPicPr>
-          <p:blipFill>
-            <a:blip r:embed="rId5">
-              <a:extLst>
-                <a:ext uri="{28A0092B-C50C-407E-A947-70E740481C1C}">
-                  <a14:useLocalDpi xmlns:a14="http://schemas.microsoft.com/office/drawing/2010/main" val="0"/>
-                </a:ext>
-              </a:extLst>
-            </a:blip>
-            <a:stretch>
-              <a:fillRect/>
-            </a:stretch>
-          </p:blipFill>
-          <p:spPr>
-            <a:xfrm>
-              <a:off x="12338719" y="10394569"/>
-              <a:ext cx="3474720" cy="3529874"/>
-            </a:xfrm>
-            <a:prstGeom prst="rect">
-              <a:avLst/>
-            </a:prstGeom>
-          </p:spPr>
-        </p:pic>
-        <p:pic>
-          <p:nvPicPr>
-            <p:cNvPr id="51" name="Picture 50">
-              <a:extLst>
-                <a:ext uri="{FF2B5EF4-FFF2-40B4-BE49-F238E27FC236}">
-                  <a16:creationId xmlns:a16="http://schemas.microsoft.com/office/drawing/2014/main" id="{B97B9133-9974-AE52-C354-C32CF578AB95}"/>
-                </a:ext>
-              </a:extLst>
-            </p:cNvPr>
-            <p:cNvPicPr>
-              <a:picLocks noChangeAspect="1"/>
-            </p:cNvPicPr>
-            <p:nvPr/>
-          </p:nvPicPr>
-          <p:blipFill>
-            <a:blip r:embed="rId6">
-              <a:extLst>
-                <a:ext uri="{28A0092B-C50C-407E-A947-70E740481C1C}">
-                  <a14:useLocalDpi xmlns:a14="http://schemas.microsoft.com/office/drawing/2010/main" val="0"/>
-                </a:ext>
-              </a:extLst>
-            </a:blip>
-            <a:stretch>
-              <a:fillRect/>
-            </a:stretch>
-          </p:blipFill>
-          <p:spPr>
-            <a:xfrm>
-              <a:off x="9010601" y="10394569"/>
-              <a:ext cx="3106591" cy="1129669"/>
-            </a:xfrm>
-            <a:prstGeom prst="rect">
-              <a:avLst/>
-            </a:prstGeom>
-          </p:spPr>
-        </p:pic>
-      </p:grpSp>
-      <p:grpSp>
-        <p:nvGrpSpPr>
           <p:cNvPr id="60" name="Group 59">
             <a:extLst>
               <a:ext uri="{FF2B5EF4-FFF2-40B4-BE49-F238E27FC236}">
@@ -8492,7 +8279,7 @@
         </p:nvGrpSpPr>
         <p:grpSpPr>
           <a:xfrm>
-            <a:off x="8753256" y="10051620"/>
+            <a:off x="8755544" y="9177313"/>
             <a:ext cx="6743204" cy="3529874"/>
             <a:chOff x="9041671" y="10053754"/>
             <a:chExt cx="6743204" cy="3529874"/>
@@ -8513,7 +8300,7 @@
             <p:nvPr/>
           </p:nvPicPr>
           <p:blipFill>
-            <a:blip r:embed="rId7">
+            <a:blip r:embed="rId5">
               <a:extLst>
                 <a:ext uri="{28A0092B-C50C-407E-A947-70E740481C1C}">
                   <a14:useLocalDpi xmlns:a14="http://schemas.microsoft.com/office/drawing/2010/main" val="0"/>
@@ -8549,7 +8336,7 @@
             <p:nvPr/>
           </p:nvPicPr>
           <p:blipFill>
-            <a:blip r:embed="rId8">
+            <a:blip r:embed="rId6">
               <a:extLst>
                 <a:ext uri="{28A0092B-C50C-407E-A947-70E740481C1C}">
                   <a14:useLocalDpi xmlns:a14="http://schemas.microsoft.com/office/drawing/2010/main" val="0"/>
@@ -8564,6 +8351,99 @@
             <a:xfrm>
               <a:off x="9041671" y="10053754"/>
               <a:ext cx="3106591" cy="1260016"/>
+            </a:xfrm>
+            <a:prstGeom prst="rect">
+              <a:avLst/>
+            </a:prstGeom>
+          </p:spPr>
+        </p:pic>
+      </p:grpSp>
+      <p:grpSp>
+        <p:nvGrpSpPr>
+          <p:cNvPr id="61" name="Group 60">
+            <a:extLst>
+              <a:ext uri="{FF2B5EF4-FFF2-40B4-BE49-F238E27FC236}">
+                <a16:creationId xmlns:a16="http://schemas.microsoft.com/office/drawing/2014/main" id="{E79EC4A9-0F88-D131-2562-DD8B20A3EC14}"/>
+              </a:ext>
+            </a:extLst>
+          </p:cNvPr>
+          <p:cNvGrpSpPr/>
+          <p:nvPr/>
+        </p:nvGrpSpPr>
+        <p:grpSpPr>
+          <a:xfrm>
+            <a:off x="8746170" y="6248461"/>
+            <a:ext cx="6752578" cy="1969998"/>
+            <a:chOff x="9041671" y="8083756"/>
+            <a:chExt cx="6752578" cy="1969998"/>
+          </a:xfrm>
+        </p:grpSpPr>
+        <p:pic>
+          <p:nvPicPr>
+            <p:cNvPr id="41" name="Picture 40">
+              <a:extLst>
+                <a:ext uri="{FF2B5EF4-FFF2-40B4-BE49-F238E27FC236}">
+                  <a16:creationId xmlns:a16="http://schemas.microsoft.com/office/drawing/2014/main" id="{D8BDAF07-ACDC-E0CA-44A3-4C00FD7E8AE2}"/>
+                </a:ext>
+              </a:extLst>
+            </p:cNvPr>
+            <p:cNvPicPr>
+              <a:picLocks noChangeAspect="1"/>
+            </p:cNvPicPr>
+            <p:nvPr/>
+          </p:nvPicPr>
+          <p:blipFill>
+            <a:blip r:embed="rId7">
+              <a:extLst>
+                <a:ext uri="{28A0092B-C50C-407E-A947-70E740481C1C}">
+                  <a14:useLocalDpi xmlns:a14="http://schemas.microsoft.com/office/drawing/2010/main" val="0"/>
+                </a:ext>
+              </a:extLst>
+            </a:blip>
+            <a:stretch>
+              <a:fillRect/>
+            </a:stretch>
+          </p:blipFill>
+          <p:spPr>
+            <a:xfrm>
+              <a:off x="9041671" y="8083756"/>
+              <a:ext cx="3108960" cy="1331023"/>
+            </a:xfrm>
+            <a:prstGeom prst="rect">
+              <a:avLst/>
+            </a:prstGeom>
+          </p:spPr>
+        </p:pic>
+        <p:pic>
+          <p:nvPicPr>
+            <p:cNvPr id="39" name="Picture 38">
+              <a:extLst>
+                <a:ext uri="{FF2B5EF4-FFF2-40B4-BE49-F238E27FC236}">
+                  <a16:creationId xmlns:a16="http://schemas.microsoft.com/office/drawing/2014/main" id="{5DC67D21-CBB5-CCA9-5E11-141C04BAB4DC}"/>
+                </a:ext>
+              </a:extLst>
+            </p:cNvPr>
+            <p:cNvPicPr>
+              <a:picLocks noChangeAspect="1"/>
+            </p:cNvPicPr>
+            <p:nvPr/>
+          </p:nvPicPr>
+          <p:blipFill>
+            <a:blip r:embed="rId8">
+              <a:extLst>
+                <a:ext uri="{28A0092B-C50C-407E-A947-70E740481C1C}">
+                  <a14:useLocalDpi xmlns:a14="http://schemas.microsoft.com/office/drawing/2010/main" val="0"/>
+                </a:ext>
+              </a:extLst>
+            </a:blip>
+            <a:stretch>
+              <a:fillRect/>
+            </a:stretch>
+          </p:blipFill>
+          <p:spPr>
+            <a:xfrm>
+              <a:off x="12319529" y="8083756"/>
+              <a:ext cx="3474720" cy="1969998"/>
             </a:xfrm>
             <a:prstGeom prst="rect">
               <a:avLst/>
@@ -8643,105 +8523,489 @@
           </a:prstGeom>
         </p:spPr>
       </p:pic>
-      <p:grpSp>
-        <p:nvGrpSpPr>
-          <p:cNvPr id="61" name="Group 60">
-            <a:extLst>
-              <a:ext uri="{FF2B5EF4-FFF2-40B4-BE49-F238E27FC236}">
-                <a16:creationId xmlns:a16="http://schemas.microsoft.com/office/drawing/2014/main" id="{E79EC4A9-0F88-D131-2562-DD8B20A3EC14}"/>
-              </a:ext>
-            </a:extLst>
-          </p:cNvPr>
-          <p:cNvGrpSpPr/>
-          <p:nvPr/>
-        </p:nvGrpSpPr>
-        <p:grpSpPr>
-          <a:xfrm>
-            <a:off x="8746170" y="6248461"/>
-            <a:ext cx="6752578" cy="1969998"/>
-            <a:chOff x="9041671" y="8083756"/>
-            <a:chExt cx="6752578" cy="1969998"/>
-          </a:xfrm>
-        </p:grpSpPr>
-        <p:pic>
-          <p:nvPicPr>
-            <p:cNvPr id="41" name="Picture 40">
-              <a:extLst>
-                <a:ext uri="{FF2B5EF4-FFF2-40B4-BE49-F238E27FC236}">
-                  <a16:creationId xmlns:a16="http://schemas.microsoft.com/office/drawing/2014/main" id="{D8BDAF07-ACDC-E0CA-44A3-4C00FD7E8AE2}"/>
-                </a:ext>
-              </a:extLst>
-            </p:cNvPr>
-            <p:cNvPicPr>
-              <a:picLocks noChangeAspect="1"/>
-            </p:cNvPicPr>
-            <p:nvPr/>
-          </p:nvPicPr>
-          <p:blipFill>
-            <a:blip r:embed="rId11">
-              <a:extLst>
-                <a:ext uri="{28A0092B-C50C-407E-A947-70E740481C1C}">
-                  <a14:useLocalDpi xmlns:a14="http://schemas.microsoft.com/office/drawing/2010/main" val="0"/>
-                </a:ext>
-              </a:extLst>
-            </a:blip>
-            <a:stretch>
-              <a:fillRect/>
-            </a:stretch>
-          </p:blipFill>
-          <p:spPr>
-            <a:xfrm>
-              <a:off x="9041671" y="8083756"/>
-              <a:ext cx="3108960" cy="1331023"/>
-            </a:xfrm>
-            <a:prstGeom prst="rect">
-              <a:avLst/>
-            </a:prstGeom>
-          </p:spPr>
-        </p:pic>
-        <p:pic>
-          <p:nvPicPr>
-            <p:cNvPr id="39" name="Picture 38">
-              <a:extLst>
-                <a:ext uri="{FF2B5EF4-FFF2-40B4-BE49-F238E27FC236}">
-                  <a16:creationId xmlns:a16="http://schemas.microsoft.com/office/drawing/2014/main" id="{5DC67D21-CBB5-CCA9-5E11-141C04BAB4DC}"/>
-                </a:ext>
-              </a:extLst>
-            </p:cNvPr>
-            <p:cNvPicPr>
-              <a:picLocks noChangeAspect="1"/>
-            </p:cNvPicPr>
-            <p:nvPr/>
-          </p:nvPicPr>
-          <p:blipFill>
-            <a:blip r:embed="rId12">
-              <a:extLst>
-                <a:ext uri="{28A0092B-C50C-407E-A947-70E740481C1C}">
-                  <a14:useLocalDpi xmlns:a14="http://schemas.microsoft.com/office/drawing/2010/main" val="0"/>
-                </a:ext>
-              </a:extLst>
-            </a:blip>
-            <a:stretch>
-              <a:fillRect/>
-            </a:stretch>
-          </p:blipFill>
-          <p:spPr>
-            <a:xfrm>
-              <a:off x="12319529" y="8083756"/>
-              <a:ext cx="3474720" cy="1969998"/>
-            </a:xfrm>
-            <a:prstGeom prst="rect">
-              <a:avLst/>
-            </a:prstGeom>
-          </p:spPr>
-        </p:pic>
-      </p:grpSp>
       <p:pic>
         <p:nvPicPr>
           <p:cNvPr id="63" name="Picture 62">
             <a:extLst>
               <a:ext uri="{FF2B5EF4-FFF2-40B4-BE49-F238E27FC236}">
                 <a16:creationId xmlns:a16="http://schemas.microsoft.com/office/drawing/2014/main" id="{21F3D84B-B416-4764-CC5A-799556D9A4EB}"/>
+              </a:ext>
+            </a:extLst>
+          </p:cNvPr>
+          <p:cNvPicPr>
+            <a:picLocks noChangeAspect="1"/>
+          </p:cNvPicPr>
+          <p:nvPr/>
+        </p:nvPicPr>
+        <p:blipFill>
+          <a:blip r:embed="rId11">
+            <a:extLst>
+              <a:ext uri="{28A0092B-C50C-407E-A947-70E740481C1C}">
+                <a14:useLocalDpi xmlns:a14="http://schemas.microsoft.com/office/drawing/2010/main" val="0"/>
+              </a:ext>
+            </a:extLst>
+          </a:blip>
+          <a:stretch>
+            <a:fillRect/>
+          </a:stretch>
+        </p:blipFill>
+        <p:spPr>
+          <a:xfrm>
+            <a:off x="1129638" y="18338253"/>
+            <a:ext cx="3655260" cy="2060238"/>
+          </a:xfrm>
+          <a:prstGeom prst="rect">
+            <a:avLst/>
+          </a:prstGeom>
+        </p:spPr>
+      </p:pic>
+      <p:pic>
+        <p:nvPicPr>
+          <p:cNvPr id="2049" name="Picture 2048">
+            <a:extLst>
+              <a:ext uri="{FF2B5EF4-FFF2-40B4-BE49-F238E27FC236}">
+                <a16:creationId xmlns:a16="http://schemas.microsoft.com/office/drawing/2014/main" id="{E00599AE-D635-5713-3810-095CA0C5BDAA}"/>
+              </a:ext>
+            </a:extLst>
+          </p:cNvPr>
+          <p:cNvPicPr>
+            <a:picLocks noChangeAspect="1"/>
+          </p:cNvPicPr>
+          <p:nvPr/>
+        </p:nvPicPr>
+        <p:blipFill>
+          <a:blip r:embed="rId12">
+            <a:extLst>
+              <a:ext uri="{28A0092B-C50C-407E-A947-70E740481C1C}">
+                <a14:useLocalDpi xmlns:a14="http://schemas.microsoft.com/office/drawing/2010/main" val="0"/>
+              </a:ext>
+            </a:extLst>
+          </a:blip>
+          <a:stretch>
+            <a:fillRect/>
+          </a:stretch>
+        </p:blipFill>
+        <p:spPr>
+          <a:xfrm>
+            <a:off x="16403385" y="12322432"/>
+            <a:ext cx="7823709" cy="8480168"/>
+          </a:xfrm>
+          <a:prstGeom prst="rect">
+            <a:avLst/>
+          </a:prstGeom>
+        </p:spPr>
+      </p:pic>
+      <p:sp>
+        <p:nvSpPr>
+          <p:cNvPr id="2054" name="TextBox 2053">
+            <a:extLst>
+              <a:ext uri="{FF2B5EF4-FFF2-40B4-BE49-F238E27FC236}">
+                <a16:creationId xmlns:a16="http://schemas.microsoft.com/office/drawing/2014/main" id="{2A313C7D-9821-8CDD-DA1E-5919B6C4E2EE}"/>
+              </a:ext>
+            </a:extLst>
+          </p:cNvPr>
+          <p:cNvSpPr txBox="1">
+            <a:spLocks noChangeArrowheads="1"/>
+          </p:cNvSpPr>
+          <p:nvPr/>
+        </p:nvSpPr>
+        <p:spPr bwMode="auto">
+          <a:xfrm>
+            <a:off x="8484695" y="13802070"/>
+            <a:ext cx="7223760" cy="7315200"/>
+          </a:xfrm>
+          <a:prstGeom prst="rect">
+            <a:avLst/>
+          </a:prstGeom>
+          <a:solidFill>
+            <a:schemeClr val="bg1"/>
+          </a:solidFill>
+          <a:ln w="9525">
+            <a:solidFill>
+              <a:srgbClr val="000000"/>
+            </a:solidFill>
+            <a:miter lim="800000"/>
+            <a:headEnd/>
+            <a:tailEnd/>
+          </a:ln>
+        </p:spPr>
+        <p:txBody>
+          <a:bodyPr wrap="square" lIns="91440" tIns="91440" rIns="91440" bIns="91440">
+            <a:spAutoFit/>
+          </a:bodyPr>
+          <a:lstStyle>
+            <a:defPPr>
+              <a:defRPr kern="1200"/>
+            </a:defPPr>
+            <a:lvl1pPr eaLnBrk="0" hangingPunct="0">
+              <a:defRPr sz="2000">
+                <a:solidFill>
+                  <a:schemeClr val="tx1"/>
+                </a:solidFill>
+                <a:latin typeface="Arial"/>
+                <a:ea typeface="ＭＳ Ｐゴシック" pitchFamily="-106" charset="-128"/>
+              </a:defRPr>
+            </a:lvl1pPr>
+            <a:lvl2pPr eaLnBrk="0" hangingPunct="0">
+              <a:defRPr sz="2000">
+                <a:solidFill>
+                  <a:schemeClr val="tx1"/>
+                </a:solidFill>
+                <a:latin typeface="Arial"/>
+                <a:ea typeface="ＭＳ Ｐゴシック" pitchFamily="-106" charset="-128"/>
+              </a:defRPr>
+            </a:lvl2pPr>
+            <a:lvl3pPr marL="1143000" indent="-228600" eaLnBrk="0" hangingPunct="0">
+              <a:defRPr sz="2000">
+                <a:solidFill>
+                  <a:schemeClr val="tx1"/>
+                </a:solidFill>
+                <a:latin typeface="Arial"/>
+                <a:ea typeface="ＭＳ Ｐゴシック" pitchFamily="-106" charset="-128"/>
+              </a:defRPr>
+            </a:lvl3pPr>
+            <a:lvl4pPr marL="1600200" indent="-228600" eaLnBrk="0" hangingPunct="0">
+              <a:defRPr sz="2000">
+                <a:solidFill>
+                  <a:schemeClr val="tx1"/>
+                </a:solidFill>
+                <a:latin typeface="Arial"/>
+                <a:ea typeface="ＭＳ Ｐゴシック" pitchFamily="-106" charset="-128"/>
+              </a:defRPr>
+            </a:lvl4pPr>
+            <a:lvl5pPr marL="2057400" indent="-228600" eaLnBrk="0" hangingPunct="0">
+              <a:defRPr sz="2000">
+                <a:solidFill>
+                  <a:schemeClr val="tx1"/>
+                </a:solidFill>
+                <a:latin typeface="Arial"/>
+                <a:ea typeface="ＭＳ Ｐゴシック" pitchFamily="-106" charset="-128"/>
+              </a:defRPr>
+            </a:lvl5pPr>
+            <a:lvl6pPr marL="2514600" indent="-228600" eaLnBrk="0" fontAlgn="base" hangingPunct="0">
+              <a:spcBef>
+                <a:spcPct val="0"/>
+              </a:spcBef>
+              <a:spcAft>
+                <a:spcPct val="0"/>
+              </a:spcAft>
+              <a:defRPr sz="2000">
+                <a:solidFill>
+                  <a:schemeClr val="tx1"/>
+                </a:solidFill>
+                <a:latin typeface="Arial"/>
+                <a:ea typeface="ＭＳ Ｐゴシック" pitchFamily="-106" charset="-128"/>
+              </a:defRPr>
+            </a:lvl6pPr>
+            <a:lvl7pPr marL="2971800" indent="-228600" eaLnBrk="0" fontAlgn="base" hangingPunct="0">
+              <a:spcBef>
+                <a:spcPct val="0"/>
+              </a:spcBef>
+              <a:spcAft>
+                <a:spcPct val="0"/>
+              </a:spcAft>
+              <a:defRPr sz="2000">
+                <a:solidFill>
+                  <a:schemeClr val="tx1"/>
+                </a:solidFill>
+                <a:latin typeface="Arial"/>
+                <a:ea typeface="ＭＳ Ｐゴシック" pitchFamily="-106" charset="-128"/>
+              </a:defRPr>
+            </a:lvl7pPr>
+            <a:lvl8pPr marL="3429000" indent="-228600" eaLnBrk="0" fontAlgn="base" hangingPunct="0">
+              <a:spcBef>
+                <a:spcPct val="0"/>
+              </a:spcBef>
+              <a:spcAft>
+                <a:spcPct val="0"/>
+              </a:spcAft>
+              <a:defRPr sz="2000">
+                <a:solidFill>
+                  <a:schemeClr val="tx1"/>
+                </a:solidFill>
+                <a:latin typeface="Arial"/>
+                <a:ea typeface="ＭＳ Ｐゴシック" pitchFamily="-106" charset="-128"/>
+              </a:defRPr>
+            </a:lvl8pPr>
+            <a:lvl9pPr marL="3886200" indent="-228600" eaLnBrk="0" fontAlgn="base" hangingPunct="0">
+              <a:spcBef>
+                <a:spcPct val="0"/>
+              </a:spcBef>
+              <a:spcAft>
+                <a:spcPct val="0"/>
+              </a:spcAft>
+              <a:defRPr sz="2000">
+                <a:solidFill>
+                  <a:schemeClr val="tx1"/>
+                </a:solidFill>
+                <a:latin typeface="Arial"/>
+                <a:ea typeface="ＭＳ Ｐゴシック" pitchFamily="-106" charset="-128"/>
+              </a:defRPr>
+            </a:lvl9pPr>
+          </a:lstStyle>
+          <a:p>
+            <a:pPr algn="just">
+              <a:lnSpc>
+                <a:spcPct val="110000"/>
+              </a:lnSpc>
+            </a:pPr>
+            <a:r>
+              <a:rPr lang="en-US" b="1" dirty="0">
+                <a:latin typeface="Open Sans" panose="020B0606030504020204" pitchFamily="34" charset="0"/>
+                <a:ea typeface="Open Sans" panose="020B0606030504020204" pitchFamily="34" charset="0"/>
+                <a:cs typeface="Open Sans" panose="020B0606030504020204" pitchFamily="34" charset="0"/>
+              </a:rPr>
+              <a:t>Multiplication Examples:</a:t>
+            </a:r>
+          </a:p>
+          <a:p>
+            <a:pPr algn="ctr">
+              <a:lnSpc>
+                <a:spcPct val="110000"/>
+              </a:lnSpc>
+            </a:pPr>
+            <a:endParaRPr lang="en-US" b="1" dirty="0">
+              <a:latin typeface="Open Sans" panose="020B0606030504020204" pitchFamily="34" charset="0"/>
+              <a:ea typeface="Open Sans" panose="020B0606030504020204" pitchFamily="34" charset="0"/>
+              <a:cs typeface="Open Sans" panose="020B0606030504020204" pitchFamily="34" charset="0"/>
+            </a:endParaRPr>
+          </a:p>
+          <a:p>
+            <a:pPr algn="just">
+              <a:lnSpc>
+                <a:spcPct val="110000"/>
+              </a:lnSpc>
+            </a:pPr>
+            <a:endParaRPr lang="en-US" b="1" dirty="0">
+              <a:latin typeface="Open Sans" panose="020B0606030504020204" pitchFamily="34" charset="0"/>
+              <a:ea typeface="Open Sans" panose="020B0606030504020204" pitchFamily="34" charset="0"/>
+              <a:cs typeface="Open Sans" panose="020B0606030504020204" pitchFamily="34" charset="0"/>
+            </a:endParaRPr>
+          </a:p>
+          <a:p>
+            <a:pPr algn="ctr">
+              <a:lnSpc>
+                <a:spcPct val="110000"/>
+              </a:lnSpc>
+            </a:pPr>
+            <a:endParaRPr lang="en-US" b="0" i="1" dirty="0">
+              <a:latin typeface="Cambria Math" panose="02040503050406030204" pitchFamily="18" charset="0"/>
+              <a:ea typeface="Open Sans" panose="020B0606030504020204" pitchFamily="34" charset="0"/>
+              <a:cs typeface="Open Sans" panose="020B0606030504020204" pitchFamily="34" charset="0"/>
+            </a:endParaRPr>
+          </a:p>
+          <a:p>
+            <a:pPr algn="ctr">
+              <a:lnSpc>
+                <a:spcPct val="110000"/>
+              </a:lnSpc>
+            </a:pPr>
+            <a:endParaRPr lang="en-US" i="1" dirty="0">
+              <a:latin typeface="Cambria Math" panose="02040503050406030204" pitchFamily="18" charset="0"/>
+              <a:ea typeface="Open Sans" panose="020B0606030504020204" pitchFamily="34" charset="0"/>
+              <a:cs typeface="Open Sans" panose="020B0606030504020204" pitchFamily="34" charset="0"/>
+            </a:endParaRPr>
+          </a:p>
+          <a:p>
+            <a:pPr algn="ctr">
+              <a:lnSpc>
+                <a:spcPct val="110000"/>
+              </a:lnSpc>
+            </a:pPr>
+            <a:endParaRPr lang="en-US" i="1" dirty="0">
+              <a:latin typeface="Cambria Math" panose="02040503050406030204" pitchFamily="18" charset="0"/>
+              <a:ea typeface="Open Sans" panose="020B0606030504020204" pitchFamily="34" charset="0"/>
+              <a:cs typeface="Open Sans" panose="020B0606030504020204" pitchFamily="34" charset="0"/>
+            </a:endParaRPr>
+          </a:p>
+          <a:p>
+            <a:pPr algn="ctr">
+              <a:lnSpc>
+                <a:spcPct val="110000"/>
+              </a:lnSpc>
+            </a:pPr>
+            <a:endParaRPr lang="en-US" i="1" dirty="0">
+              <a:latin typeface="Cambria Math" panose="02040503050406030204" pitchFamily="18" charset="0"/>
+              <a:ea typeface="Open Sans" panose="020B0606030504020204" pitchFamily="34" charset="0"/>
+              <a:cs typeface="Open Sans" panose="020B0606030504020204" pitchFamily="34" charset="0"/>
+            </a:endParaRPr>
+          </a:p>
+          <a:p>
+            <a:pPr algn="ctr">
+              <a:lnSpc>
+                <a:spcPct val="110000"/>
+              </a:lnSpc>
+            </a:pPr>
+            <a:endParaRPr lang="en-US" i="1" dirty="0">
+              <a:latin typeface="Cambria Math" panose="02040503050406030204" pitchFamily="18" charset="0"/>
+              <a:ea typeface="Open Sans" panose="020B0606030504020204" pitchFamily="34" charset="0"/>
+              <a:cs typeface="Open Sans" panose="020B0606030504020204" pitchFamily="34" charset="0"/>
+            </a:endParaRPr>
+          </a:p>
+          <a:p>
+            <a:pPr algn="ctr">
+              <a:lnSpc>
+                <a:spcPct val="110000"/>
+              </a:lnSpc>
+            </a:pPr>
+            <a:endParaRPr lang="en-US" i="1" dirty="0">
+              <a:latin typeface="Cambria Math" panose="02040503050406030204" pitchFamily="18" charset="0"/>
+              <a:ea typeface="Open Sans" panose="020B0606030504020204" pitchFamily="34" charset="0"/>
+              <a:cs typeface="Open Sans" panose="020B0606030504020204" pitchFamily="34" charset="0"/>
+            </a:endParaRPr>
+          </a:p>
+          <a:p>
+            <a:pPr algn="ctr">
+              <a:lnSpc>
+                <a:spcPct val="110000"/>
+              </a:lnSpc>
+            </a:pPr>
+            <a:endParaRPr lang="en-US" i="1" dirty="0">
+              <a:latin typeface="Cambria Math" panose="02040503050406030204" pitchFamily="18" charset="0"/>
+              <a:ea typeface="Open Sans" panose="020B0606030504020204" pitchFamily="34" charset="0"/>
+              <a:cs typeface="Open Sans" panose="020B0606030504020204" pitchFamily="34" charset="0"/>
+            </a:endParaRPr>
+          </a:p>
+          <a:p>
+            <a:pPr algn="ctr">
+              <a:lnSpc>
+                <a:spcPct val="110000"/>
+              </a:lnSpc>
+            </a:pPr>
+            <a:endParaRPr lang="en-US" i="1" dirty="0">
+              <a:latin typeface="Cambria Math" panose="02040503050406030204" pitchFamily="18" charset="0"/>
+              <a:ea typeface="Open Sans" panose="020B0606030504020204" pitchFamily="34" charset="0"/>
+              <a:cs typeface="Open Sans" panose="020B0606030504020204" pitchFamily="34" charset="0"/>
+            </a:endParaRPr>
+          </a:p>
+          <a:p>
+            <a:pPr algn="ctr">
+              <a:lnSpc>
+                <a:spcPct val="110000"/>
+              </a:lnSpc>
+            </a:pPr>
+            <a:endParaRPr lang="en-US" i="1" dirty="0">
+              <a:latin typeface="Cambria Math" panose="02040503050406030204" pitchFamily="18" charset="0"/>
+              <a:ea typeface="Open Sans" panose="020B0606030504020204" pitchFamily="34" charset="0"/>
+              <a:cs typeface="Open Sans" panose="020B0606030504020204" pitchFamily="34" charset="0"/>
+            </a:endParaRPr>
+          </a:p>
+          <a:p>
+            <a:pPr algn="ctr">
+              <a:lnSpc>
+                <a:spcPct val="110000"/>
+              </a:lnSpc>
+            </a:pPr>
+            <a:endParaRPr lang="en-US" i="1" dirty="0">
+              <a:latin typeface="Cambria Math" panose="02040503050406030204" pitchFamily="18" charset="0"/>
+              <a:ea typeface="Open Sans" panose="020B0606030504020204" pitchFamily="34" charset="0"/>
+              <a:cs typeface="Open Sans" panose="020B0606030504020204" pitchFamily="34" charset="0"/>
+            </a:endParaRPr>
+          </a:p>
+          <a:p>
+            <a:pPr algn="ctr">
+              <a:lnSpc>
+                <a:spcPct val="110000"/>
+              </a:lnSpc>
+            </a:pPr>
+            <a:endParaRPr lang="en-US" i="1" dirty="0">
+              <a:latin typeface="Cambria Math" panose="02040503050406030204" pitchFamily="18" charset="0"/>
+              <a:ea typeface="Open Sans" panose="020B0606030504020204" pitchFamily="34" charset="0"/>
+              <a:cs typeface="Open Sans" panose="020B0606030504020204" pitchFamily="34" charset="0"/>
+            </a:endParaRPr>
+          </a:p>
+          <a:p>
+            <a:pPr algn="ctr">
+              <a:lnSpc>
+                <a:spcPct val="110000"/>
+              </a:lnSpc>
+            </a:pPr>
+            <a:endParaRPr lang="en-US" i="1" dirty="0">
+              <a:latin typeface="Cambria Math" panose="02040503050406030204" pitchFamily="18" charset="0"/>
+              <a:ea typeface="Open Sans" panose="020B0606030504020204" pitchFamily="34" charset="0"/>
+              <a:cs typeface="Open Sans" panose="020B0606030504020204" pitchFamily="34" charset="0"/>
+            </a:endParaRPr>
+          </a:p>
+          <a:p>
+            <a:pPr algn="ctr">
+              <a:lnSpc>
+                <a:spcPct val="110000"/>
+              </a:lnSpc>
+            </a:pPr>
+            <a:endParaRPr lang="en-US" i="1" dirty="0">
+              <a:latin typeface="Cambria Math" panose="02040503050406030204" pitchFamily="18" charset="0"/>
+              <a:ea typeface="Open Sans" panose="020B0606030504020204" pitchFamily="34" charset="0"/>
+              <a:cs typeface="Open Sans" panose="020B0606030504020204" pitchFamily="34" charset="0"/>
+            </a:endParaRPr>
+          </a:p>
+          <a:p>
+            <a:pPr algn="ctr">
+              <a:lnSpc>
+                <a:spcPct val="110000"/>
+              </a:lnSpc>
+            </a:pPr>
+            <a:endParaRPr lang="en-US" i="1" dirty="0">
+              <a:latin typeface="Cambria Math" panose="02040503050406030204" pitchFamily="18" charset="0"/>
+              <a:ea typeface="Open Sans" panose="020B0606030504020204" pitchFamily="34" charset="0"/>
+              <a:cs typeface="Open Sans" panose="020B0606030504020204" pitchFamily="34" charset="0"/>
+            </a:endParaRPr>
+          </a:p>
+          <a:p>
+            <a:pPr algn="ctr">
+              <a:lnSpc>
+                <a:spcPct val="110000"/>
+              </a:lnSpc>
+            </a:pPr>
+            <a:endParaRPr lang="en-US" i="1" dirty="0">
+              <a:latin typeface="Cambria Math" panose="02040503050406030204" pitchFamily="18" charset="0"/>
+              <a:ea typeface="Open Sans" panose="020B0606030504020204" pitchFamily="34" charset="0"/>
+              <a:cs typeface="Open Sans" panose="020B0606030504020204" pitchFamily="34" charset="0"/>
+            </a:endParaRPr>
+          </a:p>
+          <a:p>
+            <a:pPr algn="ctr">
+              <a:lnSpc>
+                <a:spcPct val="110000"/>
+              </a:lnSpc>
+            </a:pPr>
+            <a:endParaRPr lang="en-US" b="0" i="1" dirty="0">
+              <a:latin typeface="Cambria Math" panose="02040503050406030204" pitchFamily="18" charset="0"/>
+              <a:ea typeface="Open Sans" panose="020B0606030504020204" pitchFamily="34" charset="0"/>
+              <a:cs typeface="Open Sans" panose="020B0606030504020204" pitchFamily="34" charset="0"/>
+            </a:endParaRPr>
+          </a:p>
+          <a:p>
+            <a:pPr algn="ctr">
+              <a:lnSpc>
+                <a:spcPct val="110000"/>
+              </a:lnSpc>
+            </a:pPr>
+            <a:endParaRPr lang="en-US" i="1" dirty="0">
+              <a:latin typeface="Cambria Math" panose="02040503050406030204" pitchFamily="18" charset="0"/>
+              <a:ea typeface="Open Sans" panose="020B0606030504020204" pitchFamily="34" charset="0"/>
+              <a:cs typeface="Open Sans" panose="020B0606030504020204" pitchFamily="34" charset="0"/>
+            </a:endParaRPr>
+          </a:p>
+          <a:p>
+            <a:pPr algn="ctr">
+              <a:lnSpc>
+                <a:spcPct val="110000"/>
+              </a:lnSpc>
+            </a:pPr>
+            <a:endParaRPr lang="en-US" b="0" i="1" dirty="0">
+              <a:latin typeface="Cambria Math" panose="02040503050406030204" pitchFamily="18" charset="0"/>
+              <a:ea typeface="Open Sans" panose="020B0606030504020204" pitchFamily="34" charset="0"/>
+              <a:cs typeface="Open Sans" panose="020B0606030504020204" pitchFamily="34" charset="0"/>
+            </a:endParaRPr>
+          </a:p>
+        </p:txBody>
+      </p:sp>
+      <p:pic>
+        <p:nvPicPr>
+          <p:cNvPr id="2059" name="Picture 2058">
+            <a:extLst>
+              <a:ext uri="{FF2B5EF4-FFF2-40B4-BE49-F238E27FC236}">
+                <a16:creationId xmlns:a16="http://schemas.microsoft.com/office/drawing/2014/main" id="{3EF30F8A-9952-F084-6E7B-9EB1307E5384}"/>
               </a:ext>
             </a:extLst>
           </p:cNvPr>
@@ -8764,50 +9028,94 @@
         </p:blipFill>
         <p:spPr>
           <a:xfrm>
-            <a:off x="1129543" y="18060280"/>
-            <a:ext cx="3137657" cy="1768498"/>
+            <a:off x="8829048" y="14305016"/>
+            <a:ext cx="6535055" cy="5858548"/>
           </a:xfrm>
           <a:prstGeom prst="rect">
             <a:avLst/>
           </a:prstGeom>
         </p:spPr>
       </p:pic>
-      <p:pic>
-        <p:nvPicPr>
-          <p:cNvPr id="2049" name="Picture 2048">
+      <p:sp>
+        <p:nvSpPr>
+          <p:cNvPr id="2060" name="Rectangle 2059">
             <a:extLst>
               <a:ext uri="{FF2B5EF4-FFF2-40B4-BE49-F238E27FC236}">
-                <a16:creationId xmlns:a16="http://schemas.microsoft.com/office/drawing/2014/main" id="{E00599AE-D635-5713-3810-095CA0C5BDAA}"/>
+                <a16:creationId xmlns:a16="http://schemas.microsoft.com/office/drawing/2014/main" id="{740165E8-6502-4369-62B6-7D830E42FC11}"/>
               </a:ext>
             </a:extLst>
           </p:cNvPr>
-          <p:cNvPicPr>
-            <a:picLocks noChangeAspect="1"/>
-          </p:cNvPicPr>
+          <p:cNvSpPr/>
           <p:nvPr/>
-        </p:nvPicPr>
-        <p:blipFill>
-          <a:blip r:embed="rId14">
-            <a:extLst>
-              <a:ext uri="{28A0092B-C50C-407E-A947-70E740481C1C}">
-                <a14:useLocalDpi xmlns:a14="http://schemas.microsoft.com/office/drawing/2010/main" val="0"/>
-              </a:ext>
-            </a:extLst>
-          </a:blip>
-          <a:stretch>
-            <a:fillRect/>
-          </a:stretch>
-        </p:blipFill>
-        <p:spPr>
+        </p:nvSpPr>
+        <p:spPr bwMode="auto">
           <a:xfrm>
-            <a:off x="17097806" y="12917196"/>
-            <a:ext cx="6619440" cy="7174853"/>
+            <a:off x="15087600" y="15392400"/>
+            <a:ext cx="228600" cy="609600"/>
           </a:xfrm>
           <a:prstGeom prst="rect">
             <a:avLst/>
           </a:prstGeom>
+          <a:solidFill>
+            <a:srgbClr val="FFFF00">
+              <a:alpha val="29804"/>
+            </a:srgbClr>
+          </a:solidFill>
+          <a:ln>
+            <a:noFill/>
+          </a:ln>
         </p:spPr>
-      </p:pic>
+        <p:style>
+          <a:lnRef idx="0">
+            <a:scrgbClr r="0" g="0" b="0"/>
+          </a:lnRef>
+          <a:fillRef idx="0">
+            <a:scrgbClr r="0" g="0" b="0"/>
+          </a:fillRef>
+          <a:effectRef idx="0">
+            <a:scrgbClr r="0" g="0" b="0"/>
+          </a:effectRef>
+          <a:fontRef idx="minor">
+            <a:schemeClr val="lt1"/>
+          </a:fontRef>
+        </p:style>
+        <p:txBody>
+          <a:bodyPr vert="horz" wrap="square" lIns="91440" tIns="45720" rIns="91440" bIns="45720" numCol="1" rtlCol="0" anchor="t" anchorCtr="0" compatLnSpc="1">
+            <a:prstTxWarp prst="textNoShape">
+              <a:avLst/>
+            </a:prstTxWarp>
+          </a:bodyPr>
+          <a:lstStyle/>
+          <a:p>
+            <a:pPr marL="0" marR="0" indent="0" algn="l" defTabSz="4703763" rtl="0" eaLnBrk="1" fontAlgn="base" latinLnBrk="0" hangingPunct="1">
+              <a:lnSpc>
+                <a:spcPct val="100000"/>
+              </a:lnSpc>
+              <a:spcBef>
+                <a:spcPct val="0"/>
+              </a:spcBef>
+              <a:spcAft>
+                <a:spcPct val="0"/>
+              </a:spcAft>
+              <a:buClrTx/>
+              <a:buSzTx/>
+              <a:buFontTx/>
+              <a:buNone/>
+              <a:tabLst/>
+            </a:pPr>
+            <a:endParaRPr kumimoji="0" lang="en-US" sz="3000" b="0" i="0" u="none" strike="noStrike" cap="none" normalizeH="0" baseline="0">
+              <a:ln>
+                <a:noFill/>
+              </a:ln>
+              <a:solidFill>
+                <a:schemeClr val="tx1"/>
+              </a:solidFill>
+              <a:effectLst/>
+              <a:latin typeface="Arial" pitchFamily="34" charset="0"/>
+            </a:endParaRPr>
+          </a:p>
+        </p:txBody>
+      </p:sp>
     </p:spTree>
   </p:cSld>
   <p:clrMapOvr>

--- a/AT/I-Cat Poster.pptx
+++ b/AT/I-Cat Poster.pptx
@@ -7311,42 +7311,6 @@
           </a:p>
         </p:txBody>
       </p:sp>
-      <p:pic>
-        <p:nvPicPr>
-          <p:cNvPr id="35" name="Picture 34">
-            <a:extLst>
-              <a:ext uri="{FF2B5EF4-FFF2-40B4-BE49-F238E27FC236}">
-                <a16:creationId xmlns:a16="http://schemas.microsoft.com/office/drawing/2014/main" id="{2DF73556-BCD1-760B-7D21-8335D0FF1E99}"/>
-              </a:ext>
-            </a:extLst>
-          </p:cNvPr>
-          <p:cNvPicPr>
-            <a:picLocks noChangeAspect="1"/>
-          </p:cNvPicPr>
-          <p:nvPr/>
-        </p:nvPicPr>
-        <p:blipFill>
-          <a:blip r:embed="rId4">
-            <a:extLst>
-              <a:ext uri="{28A0092B-C50C-407E-A947-70E740481C1C}">
-                <a14:useLocalDpi xmlns:a14="http://schemas.microsoft.com/office/drawing/2010/main" val="0"/>
-              </a:ext>
-            </a:extLst>
-          </a:blip>
-          <a:stretch>
-            <a:fillRect/>
-          </a:stretch>
-        </p:blipFill>
-        <p:spPr>
-          <a:xfrm>
-            <a:off x="19291680" y="6074194"/>
-            <a:ext cx="4935414" cy="5935987"/>
-          </a:xfrm>
-          <a:prstGeom prst="rect">
-            <a:avLst/>
-          </a:prstGeom>
-        </p:spPr>
-      </p:pic>
       <p:sp>
         <p:nvSpPr>
           <p:cNvPr id="36" name="TextBox 35">
@@ -7728,6 +7692,99 @@
           </a:p>
         </p:txBody>
       </p:sp>
+      <p:grpSp>
+        <p:nvGrpSpPr>
+          <p:cNvPr id="60" name="Group 59">
+            <a:extLst>
+              <a:ext uri="{FF2B5EF4-FFF2-40B4-BE49-F238E27FC236}">
+                <a16:creationId xmlns:a16="http://schemas.microsoft.com/office/drawing/2014/main" id="{A662A17A-1ACF-5798-85E5-DC9D6712B66E}"/>
+              </a:ext>
+            </a:extLst>
+          </p:cNvPr>
+          <p:cNvGrpSpPr/>
+          <p:nvPr/>
+        </p:nvGrpSpPr>
+        <p:grpSpPr>
+          <a:xfrm>
+            <a:off x="8755544" y="9177313"/>
+            <a:ext cx="6743204" cy="3529874"/>
+            <a:chOff x="9041671" y="10053754"/>
+            <a:chExt cx="6743204" cy="3529874"/>
+          </a:xfrm>
+        </p:grpSpPr>
+        <p:pic>
+          <p:nvPicPr>
+            <p:cNvPr id="47" name="Picture 46">
+              <a:extLst>
+                <a:ext uri="{FF2B5EF4-FFF2-40B4-BE49-F238E27FC236}">
+                  <a16:creationId xmlns:a16="http://schemas.microsoft.com/office/drawing/2014/main" id="{50505D91-E574-2F7B-3E0E-5977FACE2CD0}"/>
+                </a:ext>
+              </a:extLst>
+            </p:cNvPr>
+            <p:cNvPicPr>
+              <a:picLocks noChangeAspect="1"/>
+            </p:cNvPicPr>
+            <p:nvPr/>
+          </p:nvPicPr>
+          <p:blipFill>
+            <a:blip r:embed="rId4">
+              <a:extLst>
+                <a:ext uri="{28A0092B-C50C-407E-A947-70E740481C1C}">
+                  <a14:useLocalDpi xmlns:a14="http://schemas.microsoft.com/office/drawing/2010/main" val="0"/>
+                </a:ext>
+              </a:extLst>
+            </a:blip>
+            <a:stretch>
+              <a:fillRect/>
+            </a:stretch>
+          </p:blipFill>
+          <p:spPr>
+            <a:xfrm>
+              <a:off x="12310155" y="10053754"/>
+              <a:ext cx="3474720" cy="3529874"/>
+            </a:xfrm>
+            <a:prstGeom prst="rect">
+              <a:avLst/>
+            </a:prstGeom>
+          </p:spPr>
+        </p:pic>
+        <p:pic>
+          <p:nvPicPr>
+            <p:cNvPr id="53" name="Picture 52">
+              <a:extLst>
+                <a:ext uri="{FF2B5EF4-FFF2-40B4-BE49-F238E27FC236}">
+                  <a16:creationId xmlns:a16="http://schemas.microsoft.com/office/drawing/2014/main" id="{B4D42461-26BA-4A57-EF64-9D88FA5AC051}"/>
+                </a:ext>
+              </a:extLst>
+            </p:cNvPr>
+            <p:cNvPicPr>
+              <a:picLocks noChangeAspect="1"/>
+            </p:cNvPicPr>
+            <p:nvPr/>
+          </p:nvPicPr>
+          <p:blipFill>
+            <a:blip r:embed="rId5">
+              <a:extLst>
+                <a:ext uri="{28A0092B-C50C-407E-A947-70E740481C1C}">
+                  <a14:useLocalDpi xmlns:a14="http://schemas.microsoft.com/office/drawing/2010/main" val="0"/>
+                </a:ext>
+              </a:extLst>
+            </a:blip>
+            <a:stretch>
+              <a:fillRect/>
+            </a:stretch>
+          </p:blipFill>
+          <p:spPr>
+            <a:xfrm>
+              <a:off x="9041671" y="10053754"/>
+              <a:ext cx="3106591" cy="1260016"/>
+            </a:xfrm>
+            <a:prstGeom prst="rect">
+              <a:avLst/>
+            </a:prstGeom>
+          </p:spPr>
+        </p:pic>
+      </p:grpSp>
       <p:sp>
         <p:nvSpPr>
           <p:cNvPr id="37" name="Rectangle 10">
@@ -8267,99 +8324,6 @@
       </p:sp>
       <p:grpSp>
         <p:nvGrpSpPr>
-          <p:cNvPr id="60" name="Group 59">
-            <a:extLst>
-              <a:ext uri="{FF2B5EF4-FFF2-40B4-BE49-F238E27FC236}">
-                <a16:creationId xmlns:a16="http://schemas.microsoft.com/office/drawing/2014/main" id="{A662A17A-1ACF-5798-85E5-DC9D6712B66E}"/>
-              </a:ext>
-            </a:extLst>
-          </p:cNvPr>
-          <p:cNvGrpSpPr/>
-          <p:nvPr/>
-        </p:nvGrpSpPr>
-        <p:grpSpPr>
-          <a:xfrm>
-            <a:off x="8755544" y="9177313"/>
-            <a:ext cx="6743204" cy="3529874"/>
-            <a:chOff x="9041671" y="10053754"/>
-            <a:chExt cx="6743204" cy="3529874"/>
-          </a:xfrm>
-        </p:grpSpPr>
-        <p:pic>
-          <p:nvPicPr>
-            <p:cNvPr id="47" name="Picture 46">
-              <a:extLst>
-                <a:ext uri="{FF2B5EF4-FFF2-40B4-BE49-F238E27FC236}">
-                  <a16:creationId xmlns:a16="http://schemas.microsoft.com/office/drawing/2014/main" id="{50505D91-E574-2F7B-3E0E-5977FACE2CD0}"/>
-                </a:ext>
-              </a:extLst>
-            </p:cNvPr>
-            <p:cNvPicPr>
-              <a:picLocks noChangeAspect="1"/>
-            </p:cNvPicPr>
-            <p:nvPr/>
-          </p:nvPicPr>
-          <p:blipFill>
-            <a:blip r:embed="rId5">
-              <a:extLst>
-                <a:ext uri="{28A0092B-C50C-407E-A947-70E740481C1C}">
-                  <a14:useLocalDpi xmlns:a14="http://schemas.microsoft.com/office/drawing/2010/main" val="0"/>
-                </a:ext>
-              </a:extLst>
-            </a:blip>
-            <a:stretch>
-              <a:fillRect/>
-            </a:stretch>
-          </p:blipFill>
-          <p:spPr>
-            <a:xfrm>
-              <a:off x="12310155" y="10053754"/>
-              <a:ext cx="3474720" cy="3529874"/>
-            </a:xfrm>
-            <a:prstGeom prst="rect">
-              <a:avLst/>
-            </a:prstGeom>
-          </p:spPr>
-        </p:pic>
-        <p:pic>
-          <p:nvPicPr>
-            <p:cNvPr id="53" name="Picture 52">
-              <a:extLst>
-                <a:ext uri="{FF2B5EF4-FFF2-40B4-BE49-F238E27FC236}">
-                  <a16:creationId xmlns:a16="http://schemas.microsoft.com/office/drawing/2014/main" id="{B4D42461-26BA-4A57-EF64-9D88FA5AC051}"/>
-                </a:ext>
-              </a:extLst>
-            </p:cNvPr>
-            <p:cNvPicPr>
-              <a:picLocks noChangeAspect="1"/>
-            </p:cNvPicPr>
-            <p:nvPr/>
-          </p:nvPicPr>
-          <p:blipFill>
-            <a:blip r:embed="rId6">
-              <a:extLst>
-                <a:ext uri="{28A0092B-C50C-407E-A947-70E740481C1C}">
-                  <a14:useLocalDpi xmlns:a14="http://schemas.microsoft.com/office/drawing/2010/main" val="0"/>
-                </a:ext>
-              </a:extLst>
-            </a:blip>
-            <a:stretch>
-              <a:fillRect/>
-            </a:stretch>
-          </p:blipFill>
-          <p:spPr>
-            <a:xfrm>
-              <a:off x="9041671" y="10053754"/>
-              <a:ext cx="3106591" cy="1260016"/>
-            </a:xfrm>
-            <a:prstGeom prst="rect">
-              <a:avLst/>
-            </a:prstGeom>
-          </p:spPr>
-        </p:pic>
-      </p:grpSp>
-      <p:grpSp>
-        <p:nvGrpSpPr>
           <p:cNvPr id="61" name="Group 60">
             <a:extLst>
               <a:ext uri="{FF2B5EF4-FFF2-40B4-BE49-F238E27FC236}">
@@ -8393,7 +8357,7 @@
             <p:nvPr/>
           </p:nvPicPr>
           <p:blipFill>
-            <a:blip r:embed="rId7">
+            <a:blip r:embed="rId6">
               <a:extLst>
                 <a:ext uri="{28A0092B-C50C-407E-A947-70E740481C1C}">
                   <a14:useLocalDpi xmlns:a14="http://schemas.microsoft.com/office/drawing/2010/main" val="0"/>
@@ -8429,7 +8393,7 @@
             <p:nvPr/>
           </p:nvPicPr>
           <p:blipFill>
-            <a:blip r:embed="rId8">
+            <a:blip r:embed="rId7">
               <a:extLst>
                 <a:ext uri="{28A0092B-C50C-407E-A947-70E740481C1C}">
                   <a14:useLocalDpi xmlns:a14="http://schemas.microsoft.com/office/drawing/2010/main" val="0"/>
@@ -8451,6 +8415,42 @@
           </p:spPr>
         </p:pic>
       </p:grpSp>
+      <p:pic>
+        <p:nvPicPr>
+          <p:cNvPr id="63" name="Picture 62">
+            <a:extLst>
+              <a:ext uri="{FF2B5EF4-FFF2-40B4-BE49-F238E27FC236}">
+                <a16:creationId xmlns:a16="http://schemas.microsoft.com/office/drawing/2014/main" id="{21F3D84B-B416-4764-CC5A-799556D9A4EB}"/>
+              </a:ext>
+            </a:extLst>
+          </p:cNvPr>
+          <p:cNvPicPr>
+            <a:picLocks noChangeAspect="1"/>
+          </p:cNvPicPr>
+          <p:nvPr/>
+        </p:nvPicPr>
+        <p:blipFill>
+          <a:blip r:embed="rId8">
+            <a:extLst>
+              <a:ext uri="{28A0092B-C50C-407E-A947-70E740481C1C}">
+                <a14:useLocalDpi xmlns:a14="http://schemas.microsoft.com/office/drawing/2010/main" val="0"/>
+              </a:ext>
+            </a:extLst>
+          </a:blip>
+          <a:stretch>
+            <a:fillRect/>
+          </a:stretch>
+        </p:blipFill>
+        <p:spPr>
+          <a:xfrm>
+            <a:off x="1129638" y="18338253"/>
+            <a:ext cx="3655260" cy="2060238"/>
+          </a:xfrm>
+          <a:prstGeom prst="rect">
+            <a:avLst/>
+          </a:prstGeom>
+        </p:spPr>
+      </p:pic>
       <p:pic>
         <p:nvPicPr>
           <p:cNvPr id="55" name="Picture 54">
@@ -8523,78 +8523,6 @@
           </a:prstGeom>
         </p:spPr>
       </p:pic>
-      <p:pic>
-        <p:nvPicPr>
-          <p:cNvPr id="63" name="Picture 62">
-            <a:extLst>
-              <a:ext uri="{FF2B5EF4-FFF2-40B4-BE49-F238E27FC236}">
-                <a16:creationId xmlns:a16="http://schemas.microsoft.com/office/drawing/2014/main" id="{21F3D84B-B416-4764-CC5A-799556D9A4EB}"/>
-              </a:ext>
-            </a:extLst>
-          </p:cNvPr>
-          <p:cNvPicPr>
-            <a:picLocks noChangeAspect="1"/>
-          </p:cNvPicPr>
-          <p:nvPr/>
-        </p:nvPicPr>
-        <p:blipFill>
-          <a:blip r:embed="rId11">
-            <a:extLst>
-              <a:ext uri="{28A0092B-C50C-407E-A947-70E740481C1C}">
-                <a14:useLocalDpi xmlns:a14="http://schemas.microsoft.com/office/drawing/2010/main" val="0"/>
-              </a:ext>
-            </a:extLst>
-          </a:blip>
-          <a:stretch>
-            <a:fillRect/>
-          </a:stretch>
-        </p:blipFill>
-        <p:spPr>
-          <a:xfrm>
-            <a:off x="1129638" y="18338253"/>
-            <a:ext cx="3655260" cy="2060238"/>
-          </a:xfrm>
-          <a:prstGeom prst="rect">
-            <a:avLst/>
-          </a:prstGeom>
-        </p:spPr>
-      </p:pic>
-      <p:pic>
-        <p:nvPicPr>
-          <p:cNvPr id="2049" name="Picture 2048">
-            <a:extLst>
-              <a:ext uri="{FF2B5EF4-FFF2-40B4-BE49-F238E27FC236}">
-                <a16:creationId xmlns:a16="http://schemas.microsoft.com/office/drawing/2014/main" id="{E00599AE-D635-5713-3810-095CA0C5BDAA}"/>
-              </a:ext>
-            </a:extLst>
-          </p:cNvPr>
-          <p:cNvPicPr>
-            <a:picLocks noChangeAspect="1"/>
-          </p:cNvPicPr>
-          <p:nvPr/>
-        </p:nvPicPr>
-        <p:blipFill>
-          <a:blip r:embed="rId12">
-            <a:extLst>
-              <a:ext uri="{28A0092B-C50C-407E-A947-70E740481C1C}">
-                <a14:useLocalDpi xmlns:a14="http://schemas.microsoft.com/office/drawing/2010/main" val="0"/>
-              </a:ext>
-            </a:extLst>
-          </a:blip>
-          <a:stretch>
-            <a:fillRect/>
-          </a:stretch>
-        </p:blipFill>
-        <p:spPr>
-          <a:xfrm>
-            <a:off x="16403385" y="12322432"/>
-            <a:ext cx="7823709" cy="8480168"/>
-          </a:xfrm>
-          <a:prstGeom prst="rect">
-            <a:avLst/>
-          </a:prstGeom>
-        </p:spPr>
-      </p:pic>
       <p:sp>
         <p:nvSpPr>
           <p:cNvPr id="2054" name="TextBox 2053">
@@ -9015,7 +8943,7 @@
           <p:nvPr/>
         </p:nvPicPr>
         <p:blipFill>
-          <a:blip r:embed="rId13">
+          <a:blip r:embed="rId11">
             <a:extLst>
               <a:ext uri="{28A0092B-C50C-407E-A947-70E740481C1C}">
                 <a14:useLocalDpi xmlns:a14="http://schemas.microsoft.com/office/drawing/2010/main" val="0"/>
@@ -9116,6 +9044,78 @@
           </a:p>
         </p:txBody>
       </p:sp>
+      <p:pic>
+        <p:nvPicPr>
+          <p:cNvPr id="2062" name="Picture 2061">
+            <a:extLst>
+              <a:ext uri="{FF2B5EF4-FFF2-40B4-BE49-F238E27FC236}">
+                <a16:creationId xmlns:a16="http://schemas.microsoft.com/office/drawing/2014/main" id="{BF5F4C9B-2239-9822-9A6C-E99DDF205E5A}"/>
+              </a:ext>
+            </a:extLst>
+          </p:cNvPr>
+          <p:cNvPicPr>
+            <a:picLocks noChangeAspect="1"/>
+          </p:cNvPicPr>
+          <p:nvPr/>
+        </p:nvPicPr>
+        <p:blipFill>
+          <a:blip r:embed="rId12">
+            <a:extLst>
+              <a:ext uri="{28A0092B-C50C-407E-A947-70E740481C1C}">
+                <a14:useLocalDpi xmlns:a14="http://schemas.microsoft.com/office/drawing/2010/main" val="0"/>
+              </a:ext>
+            </a:extLst>
+          </a:blip>
+          <a:stretch>
+            <a:fillRect/>
+          </a:stretch>
+        </p:blipFill>
+        <p:spPr>
+          <a:xfrm>
+            <a:off x="19466035" y="6249485"/>
+            <a:ext cx="4826844" cy="5854408"/>
+          </a:xfrm>
+          <a:prstGeom prst="rect">
+            <a:avLst/>
+          </a:prstGeom>
+        </p:spPr>
+      </p:pic>
+      <p:pic>
+        <p:nvPicPr>
+          <p:cNvPr id="2064" name="Picture 2063">
+            <a:extLst>
+              <a:ext uri="{FF2B5EF4-FFF2-40B4-BE49-F238E27FC236}">
+                <a16:creationId xmlns:a16="http://schemas.microsoft.com/office/drawing/2014/main" id="{46463C44-30E2-4529-CA50-2F6100785FA2}"/>
+              </a:ext>
+            </a:extLst>
+          </p:cNvPr>
+          <p:cNvPicPr>
+            <a:picLocks noChangeAspect="1"/>
+          </p:cNvPicPr>
+          <p:nvPr/>
+        </p:nvPicPr>
+        <p:blipFill>
+          <a:blip r:embed="rId13">
+            <a:extLst>
+              <a:ext uri="{28A0092B-C50C-407E-A947-70E740481C1C}">
+                <a14:useLocalDpi xmlns:a14="http://schemas.microsoft.com/office/drawing/2010/main" val="0"/>
+              </a:ext>
+            </a:extLst>
+          </a:blip>
+          <a:stretch>
+            <a:fillRect/>
+          </a:stretch>
+        </p:blipFill>
+        <p:spPr>
+          <a:xfrm>
+            <a:off x="16337599" y="12247837"/>
+            <a:ext cx="7955280" cy="8659481"/>
+          </a:xfrm>
+          <a:prstGeom prst="rect">
+            <a:avLst/>
+          </a:prstGeom>
+        </p:spPr>
+      </p:pic>
     </p:spTree>
   </p:cSld>
   <p:clrMapOvr>

--- a/AT/I-Cat Poster.pptx
+++ b/AT/I-Cat Poster.pptx
@@ -7,7 +7,7 @@
   <p:sldIdLst>
     <p:sldId id="256" r:id="rId2"/>
   </p:sldIdLst>
-  <p:sldSz cx="32918400" cy="21945600"/>
+  <p:sldSz cx="43891200" cy="32918400"/>
   <p:notesSz cx="6858000" cy="9144000"/>
   <p:embeddedFontLst>
     <p:embeddedFont>
@@ -36,7 +36,7 @@
       <a:spcAft>
         <a:spcPct val="0"/>
       </a:spcAft>
-      <a:defRPr sz="2143" kern="1200">
+      <a:defRPr sz="3000" kern="1200">
         <a:solidFill>
           <a:schemeClr val="tx1"/>
         </a:solidFill>
@@ -45,14 +45,14 @@
         <a:cs typeface="+mn-cs"/>
       </a:defRPr>
     </a:lvl1pPr>
-    <a:lvl2pPr marL="326532" algn="l" rtl="0" fontAlgn="base">
+    <a:lvl2pPr marL="457145" algn="l" rtl="0" fontAlgn="base">
       <a:spcBef>
         <a:spcPct val="0"/>
       </a:spcBef>
       <a:spcAft>
         <a:spcPct val="0"/>
       </a:spcAft>
-      <a:defRPr sz="2143" kern="1200">
+      <a:defRPr sz="3000" kern="1200">
         <a:solidFill>
           <a:schemeClr val="tx1"/>
         </a:solidFill>
@@ -61,14 +61,14 @@
         <a:cs typeface="+mn-cs"/>
       </a:defRPr>
     </a:lvl2pPr>
-    <a:lvl3pPr marL="653064" algn="l" rtl="0" fontAlgn="base">
+    <a:lvl3pPr marL="914290" algn="l" rtl="0" fontAlgn="base">
       <a:spcBef>
         <a:spcPct val="0"/>
       </a:spcBef>
       <a:spcAft>
         <a:spcPct val="0"/>
       </a:spcAft>
-      <a:defRPr sz="2143" kern="1200">
+      <a:defRPr sz="3000" kern="1200">
         <a:solidFill>
           <a:schemeClr val="tx1"/>
         </a:solidFill>
@@ -77,14 +77,14 @@
         <a:cs typeface="+mn-cs"/>
       </a:defRPr>
     </a:lvl3pPr>
-    <a:lvl4pPr marL="979597" algn="l" rtl="0" fontAlgn="base">
+    <a:lvl4pPr marL="1371436" algn="l" rtl="0" fontAlgn="base">
       <a:spcBef>
         <a:spcPct val="0"/>
       </a:spcBef>
       <a:spcAft>
         <a:spcPct val="0"/>
       </a:spcAft>
-      <a:defRPr sz="2143" kern="1200">
+      <a:defRPr sz="3000" kern="1200">
         <a:solidFill>
           <a:schemeClr val="tx1"/>
         </a:solidFill>
@@ -93,14 +93,14 @@
         <a:cs typeface="+mn-cs"/>
       </a:defRPr>
     </a:lvl4pPr>
-    <a:lvl5pPr marL="1306129" algn="l" rtl="0" fontAlgn="base">
+    <a:lvl5pPr marL="1828581" algn="l" rtl="0" fontAlgn="base">
       <a:spcBef>
         <a:spcPct val="0"/>
       </a:spcBef>
       <a:spcAft>
         <a:spcPct val="0"/>
       </a:spcAft>
-      <a:defRPr sz="2143" kern="1200">
+      <a:defRPr sz="3000" kern="1200">
         <a:solidFill>
           <a:schemeClr val="tx1"/>
         </a:solidFill>
@@ -109,8 +109,8 @@
         <a:cs typeface="+mn-cs"/>
       </a:defRPr>
     </a:lvl5pPr>
-    <a:lvl6pPr marL="1632661" algn="l" defTabSz="653064" rtl="0" eaLnBrk="1" latinLnBrk="0" hangingPunct="1">
-      <a:defRPr sz="2143" kern="1200">
+    <a:lvl6pPr marL="2285725" algn="l" defTabSz="914290" rtl="0" eaLnBrk="1" latinLnBrk="0" hangingPunct="1">
+      <a:defRPr sz="3000" kern="1200">
         <a:solidFill>
           <a:schemeClr val="tx1"/>
         </a:solidFill>
@@ -119,8 +119,8 @@
         <a:cs typeface="+mn-cs"/>
       </a:defRPr>
     </a:lvl6pPr>
-    <a:lvl7pPr marL="1959193" algn="l" defTabSz="653064" rtl="0" eaLnBrk="1" latinLnBrk="0" hangingPunct="1">
-      <a:defRPr sz="2143" kern="1200">
+    <a:lvl7pPr marL="2742870" algn="l" defTabSz="914290" rtl="0" eaLnBrk="1" latinLnBrk="0" hangingPunct="1">
+      <a:defRPr sz="3000" kern="1200">
         <a:solidFill>
           <a:schemeClr val="tx1"/>
         </a:solidFill>
@@ -129,8 +129,8 @@
         <a:cs typeface="+mn-cs"/>
       </a:defRPr>
     </a:lvl7pPr>
-    <a:lvl8pPr marL="2285726" algn="l" defTabSz="653064" rtl="0" eaLnBrk="1" latinLnBrk="0" hangingPunct="1">
-      <a:defRPr sz="2143" kern="1200">
+    <a:lvl8pPr marL="3200016" algn="l" defTabSz="914290" rtl="0" eaLnBrk="1" latinLnBrk="0" hangingPunct="1">
+      <a:defRPr sz="3000" kern="1200">
         <a:solidFill>
           <a:schemeClr val="tx1"/>
         </a:solidFill>
@@ -139,8 +139,8 @@
         <a:cs typeface="+mn-cs"/>
       </a:defRPr>
     </a:lvl8pPr>
-    <a:lvl9pPr marL="2612258" algn="l" defTabSz="653064" rtl="0" eaLnBrk="1" latinLnBrk="0" hangingPunct="1">
-      <a:defRPr sz="2143" kern="1200">
+    <a:lvl9pPr marL="3657161" algn="l" defTabSz="914290" rtl="0" eaLnBrk="1" latinLnBrk="0" hangingPunct="1">
+      <a:defRPr sz="3000" kern="1200">
         <a:solidFill>
           <a:schemeClr val="tx1"/>
         </a:solidFill>
@@ -153,12 +153,12 @@
   <p:extLst>
     <p:ext uri="{EFAFB233-063F-42B5-8137-9DF3F51BA10A}">
       <p15:sldGuideLst xmlns:p15="http://schemas.microsoft.com/office/powerpoint/2012/main">
-        <p15:guide id="1" orient="horz" pos="6912" userDrawn="1">
+        <p15:guide id="1" orient="horz" pos="10368" userDrawn="1">
           <p15:clr>
             <a:srgbClr val="A4A3A4"/>
           </p15:clr>
         </p15:guide>
-        <p15:guide id="2" pos="10368" userDrawn="1">
+        <p15:guide id="2" pos="13824" userDrawn="1">
           <p15:clr>
             <a:srgbClr val="A4A3A4"/>
           </p15:clr>
@@ -201,8 +201,8 @@
         </p:nvSpPr>
         <p:spPr>
           <a:xfrm>
-            <a:off x="2469356" y="6817784"/>
-            <a:ext cx="27979688" cy="4703233"/>
+            <a:off x="3292475" y="10226677"/>
+            <a:ext cx="37306251" cy="7054850"/>
           </a:xfrm>
         </p:spPr>
         <p:txBody>
@@ -232,8 +232,8 @@
         </p:nvSpPr>
         <p:spPr>
           <a:xfrm>
-            <a:off x="4937523" y="12435417"/>
-            <a:ext cx="23043356" cy="5609167"/>
+            <a:off x="6583364" y="18653126"/>
+            <a:ext cx="30724475" cy="8413751"/>
           </a:xfrm>
         </p:spPr>
         <p:txBody>
@@ -246,35 +246,35 @@
               <a:buNone/>
               <a:defRPr/>
             </a:lvl1pPr>
-            <a:lvl2pPr marL="304815" indent="0" algn="ctr">
+            <a:lvl2pPr marL="406410" indent="0" algn="ctr">
               <a:buNone/>
               <a:defRPr/>
             </a:lvl2pPr>
-            <a:lvl3pPr marL="609630" indent="0" algn="ctr">
+            <a:lvl3pPr marL="812820" indent="0" algn="ctr">
               <a:buNone/>
               <a:defRPr/>
             </a:lvl3pPr>
-            <a:lvl4pPr marL="914446" indent="0" algn="ctr">
+            <a:lvl4pPr marL="1219231" indent="0" algn="ctr">
               <a:buNone/>
               <a:defRPr/>
             </a:lvl4pPr>
-            <a:lvl5pPr marL="1219261" indent="0" algn="ctr">
+            <a:lvl5pPr marL="1625641" indent="0" algn="ctr">
               <a:buNone/>
               <a:defRPr/>
             </a:lvl5pPr>
-            <a:lvl6pPr marL="1524076" indent="0" algn="ctr">
+            <a:lvl6pPr marL="2032051" indent="0" algn="ctr">
               <a:buNone/>
               <a:defRPr/>
             </a:lvl6pPr>
-            <a:lvl7pPr marL="1828891" indent="0" algn="ctr">
+            <a:lvl7pPr marL="2438460" indent="0" algn="ctr">
               <a:buNone/>
               <a:defRPr/>
             </a:lvl7pPr>
-            <a:lvl8pPr marL="2133707" indent="0" algn="ctr">
+            <a:lvl8pPr marL="2844872" indent="0" algn="ctr">
               <a:buNone/>
               <a:defRPr/>
             </a:lvl8pPr>
-            <a:lvl9pPr marL="2438522" indent="0" algn="ctr">
+            <a:lvl9pPr marL="3251281" indent="0" algn="ctr">
               <a:buNone/>
               <a:defRPr/>
             </a:lvl9pPr>
@@ -630,8 +630,8 @@
         </p:nvSpPr>
         <p:spPr>
           <a:xfrm>
-            <a:off x="23867269" y="879475"/>
-            <a:ext cx="7405688" cy="18725093"/>
+            <a:off x="31823025" y="1319213"/>
+            <a:ext cx="9874251" cy="28087640"/>
           </a:xfrm>
         </p:spPr>
         <p:txBody>
@@ -661,8 +661,8 @@
         </p:nvSpPr>
         <p:spPr>
           <a:xfrm>
-            <a:off x="1646635" y="879475"/>
-            <a:ext cx="22106334" cy="18725093"/>
+            <a:off x="2195513" y="1319213"/>
+            <a:ext cx="29475112" cy="28087640"/>
           </a:xfrm>
         </p:spPr>
         <p:txBody>
@@ -1052,8 +1052,8 @@
         </p:nvSpPr>
         <p:spPr>
           <a:xfrm>
-            <a:off x="2600325" y="14102293"/>
-            <a:ext cx="27980878" cy="4358217"/>
+            <a:off x="3467100" y="21153440"/>
+            <a:ext cx="37307837" cy="6537326"/>
           </a:xfrm>
         </p:spPr>
         <p:txBody>
@@ -1063,7 +1063,7 @@
               <a:defRPr kern="1200"/>
             </a:defPPr>
             <a:lvl1pPr algn="l">
-              <a:defRPr sz="2667" b="1" cap="all"/>
+              <a:defRPr sz="3556" b="1" cap="all"/>
             </a:lvl1pPr>
           </a:lstStyle>
           <a:p>
@@ -1086,8 +1086,8 @@
         </p:nvSpPr>
         <p:spPr>
           <a:xfrm>
-            <a:off x="2600325" y="9301692"/>
-            <a:ext cx="27980878" cy="4800600"/>
+            <a:off x="3467100" y="13952538"/>
+            <a:ext cx="37307837" cy="7200900"/>
           </a:xfrm>
         </p:spPr>
         <p:txBody>
@@ -1098,39 +1098,39 @@
             </a:defPPr>
             <a:lvl1pPr marL="0" indent="0">
               <a:buNone/>
-              <a:defRPr sz="1333"/>
+              <a:defRPr sz="1777"/>
             </a:lvl1pPr>
-            <a:lvl2pPr marL="304815" indent="0">
+            <a:lvl2pPr marL="406410" indent="0">
               <a:buNone/>
-              <a:defRPr sz="1200"/>
+              <a:defRPr sz="1600"/>
             </a:lvl2pPr>
-            <a:lvl3pPr marL="609630" indent="0">
+            <a:lvl3pPr marL="812820" indent="0">
               <a:buNone/>
-              <a:defRPr sz="1067"/>
+              <a:defRPr sz="1423"/>
             </a:lvl3pPr>
-            <a:lvl4pPr marL="914446" indent="0">
+            <a:lvl4pPr marL="1219231" indent="0">
               <a:buNone/>
-              <a:defRPr sz="933"/>
+              <a:defRPr sz="1244"/>
             </a:lvl4pPr>
-            <a:lvl5pPr marL="1219261" indent="0">
+            <a:lvl5pPr marL="1625641" indent="0">
               <a:buNone/>
-              <a:defRPr sz="933"/>
+              <a:defRPr sz="1244"/>
             </a:lvl5pPr>
-            <a:lvl6pPr marL="1524076" indent="0">
+            <a:lvl6pPr marL="2032051" indent="0">
               <a:buNone/>
-              <a:defRPr sz="933"/>
+              <a:defRPr sz="1244"/>
             </a:lvl6pPr>
-            <a:lvl7pPr marL="1828891" indent="0">
+            <a:lvl7pPr marL="2438460" indent="0">
               <a:buNone/>
-              <a:defRPr sz="933"/>
+              <a:defRPr sz="1244"/>
             </a:lvl7pPr>
-            <a:lvl8pPr marL="2133707" indent="0">
+            <a:lvl8pPr marL="2844872" indent="0">
               <a:buNone/>
-              <a:defRPr sz="933"/>
+              <a:defRPr sz="1244"/>
             </a:lvl8pPr>
-            <a:lvl9pPr marL="2438522" indent="0">
+            <a:lvl9pPr marL="3251281" indent="0">
               <a:buNone/>
-              <a:defRPr sz="933"/>
+              <a:defRPr sz="1244"/>
             </a:lvl9pPr>
           </a:lstStyle>
           <a:p>
@@ -1305,8 +1305,8 @@
         </p:nvSpPr>
         <p:spPr>
           <a:xfrm>
-            <a:off x="1646635" y="5121275"/>
-            <a:ext cx="14755416" cy="14483293"/>
+            <a:off x="2195513" y="7681913"/>
+            <a:ext cx="19673888" cy="21724940"/>
           </a:xfrm>
         </p:spPr>
         <p:txBody>
@@ -1316,31 +1316,31 @@
               <a:defRPr kern="1200"/>
             </a:defPPr>
             <a:lvl1pPr>
-              <a:defRPr sz="1867"/>
+              <a:defRPr sz="2489"/>
             </a:lvl1pPr>
             <a:lvl2pPr>
-              <a:defRPr sz="1600"/>
+              <a:defRPr sz="2133"/>
             </a:lvl2pPr>
             <a:lvl3pPr>
-              <a:defRPr sz="1333"/>
+              <a:defRPr sz="1777"/>
             </a:lvl3pPr>
             <a:lvl4pPr>
-              <a:defRPr sz="1200"/>
+              <a:defRPr sz="1600"/>
             </a:lvl4pPr>
             <a:lvl5pPr>
-              <a:defRPr sz="1200"/>
+              <a:defRPr sz="1600"/>
             </a:lvl5pPr>
             <a:lvl6pPr>
-              <a:defRPr sz="1200"/>
+              <a:defRPr sz="1600"/>
             </a:lvl6pPr>
             <a:lvl7pPr>
-              <a:defRPr sz="1200"/>
+              <a:defRPr sz="1600"/>
             </a:lvl7pPr>
             <a:lvl8pPr>
-              <a:defRPr sz="1200"/>
+              <a:defRPr sz="1600"/>
             </a:lvl8pPr>
             <a:lvl9pPr>
-              <a:defRPr sz="1200"/>
+              <a:defRPr sz="1600"/>
             </a:lvl9pPr>
           </a:lstStyle>
           <a:p>
@@ -1392,8 +1392,8 @@
         </p:nvSpPr>
         <p:spPr>
           <a:xfrm>
-            <a:off x="16516352" y="5121275"/>
-            <a:ext cx="14756606" cy="14483293"/>
+            <a:off x="22021803" y="7681913"/>
+            <a:ext cx="19675475" cy="21724940"/>
           </a:xfrm>
         </p:spPr>
         <p:txBody>
@@ -1403,31 +1403,31 @@
               <a:defRPr kern="1200"/>
             </a:defPPr>
             <a:lvl1pPr>
-              <a:defRPr sz="1867"/>
+              <a:defRPr sz="2489"/>
             </a:lvl1pPr>
             <a:lvl2pPr>
-              <a:defRPr sz="1600"/>
+              <a:defRPr sz="2133"/>
             </a:lvl2pPr>
             <a:lvl3pPr>
-              <a:defRPr sz="1333"/>
+              <a:defRPr sz="1777"/>
             </a:lvl3pPr>
             <a:lvl4pPr>
-              <a:defRPr sz="1200"/>
+              <a:defRPr sz="1600"/>
             </a:lvl4pPr>
             <a:lvl5pPr>
-              <a:defRPr sz="1200"/>
+              <a:defRPr sz="1600"/>
             </a:lvl5pPr>
             <a:lvl6pPr>
-              <a:defRPr sz="1200"/>
+              <a:defRPr sz="1600"/>
             </a:lvl6pPr>
             <a:lvl7pPr>
-              <a:defRPr sz="1200"/>
+              <a:defRPr sz="1600"/>
             </a:lvl7pPr>
             <a:lvl8pPr>
-              <a:defRPr sz="1200"/>
+              <a:defRPr sz="1600"/>
             </a:lvl8pPr>
             <a:lvl9pPr>
-              <a:defRPr sz="1200"/>
+              <a:defRPr sz="1600"/>
             </a:lvl9pPr>
           </a:lstStyle>
           <a:p>
@@ -1604,8 +1604,8 @@
         </p:nvSpPr>
         <p:spPr>
           <a:xfrm>
-            <a:off x="1645444" y="878417"/>
-            <a:ext cx="29627512" cy="3657600"/>
+            <a:off x="2193926" y="1317625"/>
+            <a:ext cx="39503349" cy="5486400"/>
           </a:xfrm>
         </p:spPr>
         <p:txBody>
@@ -1638,8 +1638,8 @@
         </p:nvSpPr>
         <p:spPr>
           <a:xfrm>
-            <a:off x="1645444" y="4912784"/>
-            <a:ext cx="14544675" cy="2046817"/>
+            <a:off x="2193926" y="7369177"/>
+            <a:ext cx="19392900" cy="3070226"/>
           </a:xfrm>
         </p:spPr>
         <p:txBody>
@@ -1650,39 +1650,39 @@
             </a:defPPr>
             <a:lvl1pPr marL="0" indent="0">
               <a:buNone/>
+              <a:defRPr sz="2133" b="1"/>
+            </a:lvl1pPr>
+            <a:lvl2pPr marL="406410" indent="0">
+              <a:buNone/>
+              <a:defRPr sz="1777" b="1"/>
+            </a:lvl2pPr>
+            <a:lvl3pPr marL="812820" indent="0">
+              <a:buNone/>
               <a:defRPr sz="1600" b="1"/>
-            </a:lvl1pPr>
-            <a:lvl2pPr marL="304815" indent="0">
+            </a:lvl3pPr>
+            <a:lvl4pPr marL="1219231" indent="0">
               <a:buNone/>
-              <a:defRPr sz="1333" b="1"/>
-            </a:lvl2pPr>
-            <a:lvl3pPr marL="609630" indent="0">
+              <a:defRPr sz="1423" b="1"/>
+            </a:lvl4pPr>
+            <a:lvl5pPr marL="1625641" indent="0">
               <a:buNone/>
-              <a:defRPr sz="1200" b="1"/>
-            </a:lvl3pPr>
-            <a:lvl4pPr marL="914446" indent="0">
+              <a:defRPr sz="1423" b="1"/>
+            </a:lvl5pPr>
+            <a:lvl6pPr marL="2032051" indent="0">
               <a:buNone/>
-              <a:defRPr sz="1067" b="1"/>
-            </a:lvl4pPr>
-            <a:lvl5pPr marL="1219261" indent="0">
+              <a:defRPr sz="1423" b="1"/>
+            </a:lvl6pPr>
+            <a:lvl7pPr marL="2438460" indent="0">
               <a:buNone/>
-              <a:defRPr sz="1067" b="1"/>
-            </a:lvl5pPr>
-            <a:lvl6pPr marL="1524076" indent="0">
+              <a:defRPr sz="1423" b="1"/>
+            </a:lvl7pPr>
+            <a:lvl8pPr marL="2844872" indent="0">
               <a:buNone/>
-              <a:defRPr sz="1067" b="1"/>
-            </a:lvl6pPr>
-            <a:lvl7pPr marL="1828891" indent="0">
+              <a:defRPr sz="1423" b="1"/>
+            </a:lvl8pPr>
+            <a:lvl9pPr marL="3251281" indent="0">
               <a:buNone/>
-              <a:defRPr sz="1067" b="1"/>
-            </a:lvl7pPr>
-            <a:lvl8pPr marL="2133707" indent="0">
-              <a:buNone/>
-              <a:defRPr sz="1067" b="1"/>
-            </a:lvl8pPr>
-            <a:lvl9pPr marL="2438522" indent="0">
-              <a:buNone/>
-              <a:defRPr sz="1067" b="1"/>
+              <a:defRPr sz="1423" b="1"/>
             </a:lvl9pPr>
           </a:lstStyle>
           <a:p>
@@ -1706,8 +1706,8 @@
         </p:nvSpPr>
         <p:spPr>
           <a:xfrm>
-            <a:off x="1645444" y="6959600"/>
-            <a:ext cx="14544675" cy="12643908"/>
+            <a:off x="2193926" y="10439400"/>
+            <a:ext cx="19392900" cy="18965862"/>
           </a:xfrm>
         </p:spPr>
         <p:txBody>
@@ -1717,31 +1717,31 @@
               <a:defRPr kern="1200"/>
             </a:defPPr>
             <a:lvl1pPr>
-              <a:defRPr sz="1600"/>
+              <a:defRPr sz="2133"/>
             </a:lvl1pPr>
             <a:lvl2pPr>
-              <a:defRPr sz="1333"/>
+              <a:defRPr sz="1777"/>
             </a:lvl2pPr>
             <a:lvl3pPr>
-              <a:defRPr sz="1200"/>
+              <a:defRPr sz="1600"/>
             </a:lvl3pPr>
             <a:lvl4pPr>
-              <a:defRPr sz="1067"/>
+              <a:defRPr sz="1423"/>
             </a:lvl4pPr>
             <a:lvl5pPr>
-              <a:defRPr sz="1067"/>
+              <a:defRPr sz="1423"/>
             </a:lvl5pPr>
             <a:lvl6pPr>
-              <a:defRPr sz="1067"/>
+              <a:defRPr sz="1423"/>
             </a:lvl6pPr>
             <a:lvl7pPr>
-              <a:defRPr sz="1067"/>
+              <a:defRPr sz="1423"/>
             </a:lvl7pPr>
             <a:lvl8pPr>
-              <a:defRPr sz="1067"/>
+              <a:defRPr sz="1423"/>
             </a:lvl8pPr>
             <a:lvl9pPr>
-              <a:defRPr sz="1067"/>
+              <a:defRPr sz="1423"/>
             </a:lvl9pPr>
           </a:lstStyle>
           <a:p>
@@ -1793,8 +1793,8 @@
         </p:nvSpPr>
         <p:spPr>
           <a:xfrm>
-            <a:off x="16722328" y="4912784"/>
-            <a:ext cx="14550630" cy="2046817"/>
+            <a:off x="22296437" y="7369177"/>
+            <a:ext cx="19400840" cy="3070226"/>
           </a:xfrm>
         </p:spPr>
         <p:txBody>
@@ -1805,39 +1805,39 @@
             </a:defPPr>
             <a:lvl1pPr marL="0" indent="0">
               <a:buNone/>
+              <a:defRPr sz="2133" b="1"/>
+            </a:lvl1pPr>
+            <a:lvl2pPr marL="406410" indent="0">
+              <a:buNone/>
+              <a:defRPr sz="1777" b="1"/>
+            </a:lvl2pPr>
+            <a:lvl3pPr marL="812820" indent="0">
+              <a:buNone/>
               <a:defRPr sz="1600" b="1"/>
-            </a:lvl1pPr>
-            <a:lvl2pPr marL="304815" indent="0">
+            </a:lvl3pPr>
+            <a:lvl4pPr marL="1219231" indent="0">
               <a:buNone/>
-              <a:defRPr sz="1333" b="1"/>
-            </a:lvl2pPr>
-            <a:lvl3pPr marL="609630" indent="0">
+              <a:defRPr sz="1423" b="1"/>
+            </a:lvl4pPr>
+            <a:lvl5pPr marL="1625641" indent="0">
               <a:buNone/>
-              <a:defRPr sz="1200" b="1"/>
-            </a:lvl3pPr>
-            <a:lvl4pPr marL="914446" indent="0">
+              <a:defRPr sz="1423" b="1"/>
+            </a:lvl5pPr>
+            <a:lvl6pPr marL="2032051" indent="0">
               <a:buNone/>
-              <a:defRPr sz="1067" b="1"/>
-            </a:lvl4pPr>
-            <a:lvl5pPr marL="1219261" indent="0">
+              <a:defRPr sz="1423" b="1"/>
+            </a:lvl6pPr>
+            <a:lvl7pPr marL="2438460" indent="0">
               <a:buNone/>
-              <a:defRPr sz="1067" b="1"/>
-            </a:lvl5pPr>
-            <a:lvl6pPr marL="1524076" indent="0">
+              <a:defRPr sz="1423" b="1"/>
+            </a:lvl7pPr>
+            <a:lvl8pPr marL="2844872" indent="0">
               <a:buNone/>
-              <a:defRPr sz="1067" b="1"/>
-            </a:lvl6pPr>
-            <a:lvl7pPr marL="1828891" indent="0">
+              <a:defRPr sz="1423" b="1"/>
+            </a:lvl8pPr>
+            <a:lvl9pPr marL="3251281" indent="0">
               <a:buNone/>
-              <a:defRPr sz="1067" b="1"/>
-            </a:lvl7pPr>
-            <a:lvl8pPr marL="2133707" indent="0">
-              <a:buNone/>
-              <a:defRPr sz="1067" b="1"/>
-            </a:lvl8pPr>
-            <a:lvl9pPr marL="2438522" indent="0">
-              <a:buNone/>
-              <a:defRPr sz="1067" b="1"/>
+              <a:defRPr sz="1423" b="1"/>
             </a:lvl9pPr>
           </a:lstStyle>
           <a:p>
@@ -1861,8 +1861,8 @@
         </p:nvSpPr>
         <p:spPr>
           <a:xfrm>
-            <a:off x="16722328" y="6959600"/>
-            <a:ext cx="14550630" cy="12643908"/>
+            <a:off x="22296437" y="10439400"/>
+            <a:ext cx="19400840" cy="18965862"/>
           </a:xfrm>
         </p:spPr>
         <p:txBody>
@@ -1872,31 +1872,31 @@
               <a:defRPr kern="1200"/>
             </a:defPPr>
             <a:lvl1pPr>
-              <a:defRPr sz="1600"/>
+              <a:defRPr sz="2133"/>
             </a:lvl1pPr>
             <a:lvl2pPr>
-              <a:defRPr sz="1333"/>
+              <a:defRPr sz="1777"/>
             </a:lvl2pPr>
             <a:lvl3pPr>
-              <a:defRPr sz="1200"/>
+              <a:defRPr sz="1600"/>
             </a:lvl3pPr>
             <a:lvl4pPr>
-              <a:defRPr sz="1067"/>
+              <a:defRPr sz="1423"/>
             </a:lvl4pPr>
             <a:lvl5pPr>
-              <a:defRPr sz="1067"/>
+              <a:defRPr sz="1423"/>
             </a:lvl5pPr>
             <a:lvl6pPr>
-              <a:defRPr sz="1067"/>
+              <a:defRPr sz="1423"/>
             </a:lvl6pPr>
             <a:lvl7pPr>
-              <a:defRPr sz="1067"/>
+              <a:defRPr sz="1423"/>
             </a:lvl7pPr>
             <a:lvl8pPr>
-              <a:defRPr sz="1067"/>
+              <a:defRPr sz="1423"/>
             </a:lvl8pPr>
             <a:lvl9pPr>
-              <a:defRPr sz="1067"/>
+              <a:defRPr sz="1423"/>
             </a:lvl9pPr>
           </a:lstStyle>
           <a:p>
@@ -2349,8 +2349,8 @@
         </p:nvSpPr>
         <p:spPr>
           <a:xfrm>
-            <a:off x="1645444" y="874184"/>
-            <a:ext cx="10829925" cy="3717925"/>
+            <a:off x="2193926" y="1311277"/>
+            <a:ext cx="14439900" cy="5576888"/>
           </a:xfrm>
         </p:spPr>
         <p:txBody>
@@ -2360,7 +2360,7 @@
               <a:defRPr kern="1200"/>
             </a:defPPr>
             <a:lvl1pPr algn="l">
-              <a:defRPr sz="1333" b="1"/>
+              <a:defRPr sz="1777" b="1"/>
             </a:lvl1pPr>
           </a:lstStyle>
           <a:p>
@@ -2383,8 +2383,8 @@
         </p:nvSpPr>
         <p:spPr>
           <a:xfrm>
-            <a:off x="12870656" y="874184"/>
-            <a:ext cx="18402300" cy="18729325"/>
+            <a:off x="17160875" y="1311277"/>
+            <a:ext cx="24536400" cy="28093988"/>
           </a:xfrm>
         </p:spPr>
         <p:txBody>
@@ -2394,31 +2394,31 @@
               <a:defRPr kern="1200"/>
             </a:defPPr>
             <a:lvl1pPr>
-              <a:defRPr sz="2133"/>
+              <a:defRPr sz="2844"/>
             </a:lvl1pPr>
             <a:lvl2pPr>
-              <a:defRPr sz="1867"/>
+              <a:defRPr sz="2489"/>
             </a:lvl2pPr>
             <a:lvl3pPr>
-              <a:defRPr sz="1600"/>
+              <a:defRPr sz="2133"/>
             </a:lvl3pPr>
             <a:lvl4pPr>
-              <a:defRPr sz="1333"/>
+              <a:defRPr sz="1777"/>
             </a:lvl4pPr>
             <a:lvl5pPr>
-              <a:defRPr sz="1333"/>
+              <a:defRPr sz="1777"/>
             </a:lvl5pPr>
             <a:lvl6pPr>
-              <a:defRPr sz="1333"/>
+              <a:defRPr sz="1777"/>
             </a:lvl6pPr>
             <a:lvl7pPr>
-              <a:defRPr sz="1333"/>
+              <a:defRPr sz="1777"/>
             </a:lvl7pPr>
             <a:lvl8pPr>
-              <a:defRPr sz="1333"/>
+              <a:defRPr sz="1777"/>
             </a:lvl8pPr>
             <a:lvl9pPr>
-              <a:defRPr sz="1333"/>
+              <a:defRPr sz="1777"/>
             </a:lvl9pPr>
           </a:lstStyle>
           <a:p>
@@ -2470,8 +2470,8 @@
         </p:nvSpPr>
         <p:spPr>
           <a:xfrm>
-            <a:off x="1645444" y="4592109"/>
-            <a:ext cx="10829925" cy="15011400"/>
+            <a:off x="2193926" y="6888163"/>
+            <a:ext cx="14439900" cy="22517100"/>
           </a:xfrm>
         </p:spPr>
         <p:txBody>
@@ -2482,39 +2482,39 @@
             </a:defPPr>
             <a:lvl1pPr marL="0" indent="0">
               <a:buNone/>
-              <a:defRPr sz="933"/>
+              <a:defRPr sz="1244"/>
             </a:lvl1pPr>
-            <a:lvl2pPr marL="304815" indent="0">
+            <a:lvl2pPr marL="406410" indent="0">
+              <a:buNone/>
+              <a:defRPr sz="1067"/>
+            </a:lvl2pPr>
+            <a:lvl3pPr marL="812820" indent="0">
+              <a:buNone/>
+              <a:defRPr sz="889"/>
+            </a:lvl3pPr>
+            <a:lvl4pPr marL="1219231" indent="0">
               <a:buNone/>
               <a:defRPr sz="800"/>
-            </a:lvl2pPr>
-            <a:lvl3pPr marL="609630" indent="0">
+            </a:lvl4pPr>
+            <a:lvl5pPr marL="1625641" indent="0">
               <a:buNone/>
-              <a:defRPr sz="667"/>
-            </a:lvl3pPr>
-            <a:lvl4pPr marL="914446" indent="0">
+              <a:defRPr sz="800"/>
+            </a:lvl5pPr>
+            <a:lvl6pPr marL="2032051" indent="0">
               <a:buNone/>
-              <a:defRPr sz="600"/>
-            </a:lvl4pPr>
-            <a:lvl5pPr marL="1219261" indent="0">
+              <a:defRPr sz="800"/>
+            </a:lvl6pPr>
+            <a:lvl7pPr marL="2438460" indent="0">
               <a:buNone/>
-              <a:defRPr sz="600"/>
-            </a:lvl5pPr>
-            <a:lvl6pPr marL="1524076" indent="0">
+              <a:defRPr sz="800"/>
+            </a:lvl7pPr>
+            <a:lvl8pPr marL="2844872" indent="0">
               <a:buNone/>
-              <a:defRPr sz="600"/>
-            </a:lvl6pPr>
-            <a:lvl7pPr marL="1828891" indent="0">
+              <a:defRPr sz="800"/>
+            </a:lvl8pPr>
+            <a:lvl9pPr marL="3251281" indent="0">
               <a:buNone/>
-              <a:defRPr sz="600"/>
-            </a:lvl7pPr>
-            <a:lvl8pPr marL="2133707" indent="0">
-              <a:buNone/>
-              <a:defRPr sz="600"/>
-            </a:lvl8pPr>
-            <a:lvl9pPr marL="2438522" indent="0">
-              <a:buNone/>
-              <a:defRPr sz="600"/>
+              <a:defRPr sz="800"/>
             </a:lvl9pPr>
           </a:lstStyle>
           <a:p>
@@ -2663,8 +2663,8 @@
         </p:nvSpPr>
         <p:spPr>
           <a:xfrm>
-            <a:off x="6451997" y="15361709"/>
-            <a:ext cx="19751280" cy="1813983"/>
+            <a:off x="8602663" y="23042564"/>
+            <a:ext cx="26335040" cy="2720975"/>
           </a:xfrm>
         </p:spPr>
         <p:txBody>
@@ -2674,7 +2674,7 @@
               <a:defRPr kern="1200"/>
             </a:defPPr>
             <a:lvl1pPr algn="l">
-              <a:defRPr sz="1333" b="1"/>
+              <a:defRPr sz="1777" b="1"/>
             </a:lvl1pPr>
           </a:lstStyle>
           <a:p>
@@ -2697,8 +2697,8 @@
         </p:nvSpPr>
         <p:spPr>
           <a:xfrm>
-            <a:off x="6451997" y="1961092"/>
-            <a:ext cx="19751280" cy="13166725"/>
+            <a:off x="8602663" y="2941639"/>
+            <a:ext cx="26335040" cy="19750088"/>
           </a:xfrm>
         </p:spPr>
         <p:txBody>
@@ -2709,39 +2709,39 @@
             </a:defPPr>
             <a:lvl1pPr marL="0" indent="0">
               <a:buNone/>
+              <a:defRPr sz="2844"/>
+            </a:lvl1pPr>
+            <a:lvl2pPr marL="406410" indent="0">
+              <a:buNone/>
+              <a:defRPr sz="2489"/>
+            </a:lvl2pPr>
+            <a:lvl3pPr marL="812820" indent="0">
+              <a:buNone/>
               <a:defRPr sz="2133"/>
-            </a:lvl1pPr>
-            <a:lvl2pPr marL="304815" indent="0">
+            </a:lvl3pPr>
+            <a:lvl4pPr marL="1219231" indent="0">
               <a:buNone/>
-              <a:defRPr sz="1867"/>
-            </a:lvl2pPr>
-            <a:lvl3pPr marL="609630" indent="0">
+              <a:defRPr sz="1777"/>
+            </a:lvl4pPr>
+            <a:lvl5pPr marL="1625641" indent="0">
               <a:buNone/>
-              <a:defRPr sz="1600"/>
-            </a:lvl3pPr>
-            <a:lvl4pPr marL="914446" indent="0">
+              <a:defRPr sz="1777"/>
+            </a:lvl5pPr>
+            <a:lvl6pPr marL="2032051" indent="0">
               <a:buNone/>
-              <a:defRPr sz="1333"/>
-            </a:lvl4pPr>
-            <a:lvl5pPr marL="1219261" indent="0">
+              <a:defRPr sz="1777"/>
+            </a:lvl6pPr>
+            <a:lvl7pPr marL="2438460" indent="0">
               <a:buNone/>
-              <a:defRPr sz="1333"/>
-            </a:lvl5pPr>
-            <a:lvl6pPr marL="1524076" indent="0">
+              <a:defRPr sz="1777"/>
+            </a:lvl7pPr>
+            <a:lvl8pPr marL="2844872" indent="0">
               <a:buNone/>
-              <a:defRPr sz="1333"/>
-            </a:lvl6pPr>
-            <a:lvl7pPr marL="1828891" indent="0">
+              <a:defRPr sz="1777"/>
+            </a:lvl8pPr>
+            <a:lvl9pPr marL="3251281" indent="0">
               <a:buNone/>
-              <a:defRPr sz="1333"/>
-            </a:lvl7pPr>
-            <a:lvl8pPr marL="2133707" indent="0">
-              <a:buNone/>
-              <a:defRPr sz="1333"/>
-            </a:lvl8pPr>
-            <a:lvl9pPr marL="2438522" indent="0">
-              <a:buNone/>
-              <a:defRPr sz="1333"/>
+              <a:defRPr sz="1777"/>
             </a:lvl9pPr>
           </a:lstStyle>
           <a:p>
@@ -2762,8 +2762,8 @@
         </p:nvSpPr>
         <p:spPr>
           <a:xfrm>
-            <a:off x="6451997" y="17175693"/>
-            <a:ext cx="19751280" cy="2574925"/>
+            <a:off x="8602663" y="25763540"/>
+            <a:ext cx="26335040" cy="3862388"/>
           </a:xfrm>
         </p:spPr>
         <p:txBody>
@@ -2774,39 +2774,39 @@
             </a:defPPr>
             <a:lvl1pPr marL="0" indent="0">
               <a:buNone/>
-              <a:defRPr sz="933"/>
+              <a:defRPr sz="1244"/>
             </a:lvl1pPr>
-            <a:lvl2pPr marL="304815" indent="0">
+            <a:lvl2pPr marL="406410" indent="0">
+              <a:buNone/>
+              <a:defRPr sz="1067"/>
+            </a:lvl2pPr>
+            <a:lvl3pPr marL="812820" indent="0">
+              <a:buNone/>
+              <a:defRPr sz="889"/>
+            </a:lvl3pPr>
+            <a:lvl4pPr marL="1219231" indent="0">
               <a:buNone/>
               <a:defRPr sz="800"/>
-            </a:lvl2pPr>
-            <a:lvl3pPr marL="609630" indent="0">
+            </a:lvl4pPr>
+            <a:lvl5pPr marL="1625641" indent="0">
               <a:buNone/>
-              <a:defRPr sz="667"/>
-            </a:lvl3pPr>
-            <a:lvl4pPr marL="914446" indent="0">
+              <a:defRPr sz="800"/>
+            </a:lvl5pPr>
+            <a:lvl6pPr marL="2032051" indent="0">
               <a:buNone/>
-              <a:defRPr sz="600"/>
-            </a:lvl4pPr>
-            <a:lvl5pPr marL="1219261" indent="0">
+              <a:defRPr sz="800"/>
+            </a:lvl6pPr>
+            <a:lvl7pPr marL="2438460" indent="0">
               <a:buNone/>
-              <a:defRPr sz="600"/>
-            </a:lvl5pPr>
-            <a:lvl6pPr marL="1524076" indent="0">
+              <a:defRPr sz="800"/>
+            </a:lvl7pPr>
+            <a:lvl8pPr marL="2844872" indent="0">
               <a:buNone/>
-              <a:defRPr sz="600"/>
-            </a:lvl6pPr>
-            <a:lvl7pPr marL="1828891" indent="0">
+              <a:defRPr sz="800"/>
+            </a:lvl8pPr>
+            <a:lvl9pPr marL="3251281" indent="0">
               <a:buNone/>
-              <a:defRPr sz="600"/>
-            </a:lvl7pPr>
-            <a:lvl8pPr marL="2133707" indent="0">
-              <a:buNone/>
-              <a:defRPr sz="600"/>
-            </a:lvl8pPr>
-            <a:lvl9pPr marL="2438522" indent="0">
-              <a:buNone/>
-              <a:defRPr sz="600"/>
+              <a:defRPr sz="800"/>
             </a:lvl9pPr>
           </a:lstStyle>
           <a:p>
@@ -2963,8 +2963,8 @@
         </p:nvSpPr>
         <p:spPr bwMode="auto">
           <a:xfrm>
-            <a:off x="1646635" y="879475"/>
-            <a:ext cx="29626322" cy="3657600"/>
+            <a:off x="2195513" y="1319212"/>
+            <a:ext cx="39501763" cy="5486400"/>
           </a:xfrm>
           <a:prstGeom prst="rect">
             <a:avLst/>
@@ -3034,8 +3034,8 @@
         </p:nvSpPr>
         <p:spPr bwMode="auto">
           <a:xfrm>
-            <a:off x="1646635" y="5121275"/>
-            <a:ext cx="29626322" cy="14483293"/>
+            <a:off x="2195513" y="7681913"/>
+            <a:ext cx="39501763" cy="21724940"/>
           </a:xfrm>
           <a:prstGeom prst="rect">
             <a:avLst/>
@@ -3133,8 +3133,8 @@
         </p:nvSpPr>
         <p:spPr bwMode="auto">
           <a:xfrm>
-            <a:off x="1646635" y="19985568"/>
-            <a:ext cx="7680722" cy="1524000"/>
+            <a:off x="2195513" y="29978352"/>
+            <a:ext cx="10240963" cy="2286000"/>
           </a:xfrm>
           <a:prstGeom prst="rect">
             <a:avLst/>
@@ -3182,8 +3182,8 @@
             <a:defPPr>
               <a:defRPr kern="1200"/>
             </a:defPPr>
-            <a:lvl1pPr defTabSz="3135999">
-              <a:defRPr sz="4800" smtClean="0">
+            <a:lvl1pPr defTabSz="4181227">
+              <a:defRPr sz="6400" smtClean="0">
                 <a:latin typeface="Arial" pitchFamily="34" charset="0"/>
               </a:defRPr>
             </a:lvl1pPr>
@@ -3208,8 +3208,8 @@
         </p:nvSpPr>
         <p:spPr bwMode="auto">
           <a:xfrm>
-            <a:off x="11247834" y="19985568"/>
-            <a:ext cx="10423922" cy="1524000"/>
+            <a:off x="14997112" y="29978352"/>
+            <a:ext cx="13898563" cy="2286000"/>
           </a:xfrm>
           <a:prstGeom prst="rect">
             <a:avLst/>
@@ -3257,8 +3257,8 @@
             <a:defPPr>
               <a:defRPr kern="1200"/>
             </a:defPPr>
-            <a:lvl1pPr algn="ctr" defTabSz="3135999">
-              <a:defRPr sz="4800" smtClean="0">
+            <a:lvl1pPr algn="ctr" defTabSz="4181227">
+              <a:defRPr sz="6400" smtClean="0">
                 <a:latin typeface="Arial" pitchFamily="34" charset="0"/>
               </a:defRPr>
             </a:lvl1pPr>
@@ -3283,8 +3283,8 @@
         </p:nvSpPr>
         <p:spPr bwMode="auto">
           <a:xfrm>
-            <a:off x="23592234" y="19985568"/>
-            <a:ext cx="7680722" cy="1524000"/>
+            <a:off x="31456312" y="29978352"/>
+            <a:ext cx="10240963" cy="2286000"/>
           </a:xfrm>
           <a:prstGeom prst="rect">
             <a:avLst/>
@@ -3332,8 +3332,8 @@
             <a:defPPr>
               <a:defRPr kern="1200"/>
             </a:defPPr>
-            <a:lvl1pPr algn="r" defTabSz="3135999">
-              <a:defRPr sz="4800" smtClean="0">
+            <a:lvl1pPr algn="r" defTabSz="4181227">
+              <a:defRPr sz="6400" smtClean="0">
                 <a:latin typeface="Arial" pitchFamily="34" charset="0"/>
               </a:defRPr>
             </a:lvl1pPr>
@@ -3367,8 +3367,8 @@
         </p:blipFill>
         <p:spPr>
           <a:xfrm rot="16200000">
-            <a:off x="-11074400" y="10972800"/>
-            <a:ext cx="14274800" cy="3937000"/>
+            <a:off x="-15955433" y="16787284"/>
+            <a:ext cx="21412200" cy="5249333"/>
           </a:xfrm>
           <a:prstGeom prst="rect">
             <a:avLst/>
@@ -3389,8 +3389,8 @@
         </p:blipFill>
         <p:spPr>
           <a:xfrm rot="5400000">
-            <a:off x="29718000" y="10972800"/>
-            <a:ext cx="14274800" cy="3937000"/>
+            <a:off x="38434433" y="16787284"/>
+            <a:ext cx="21412200" cy="5249333"/>
           </a:xfrm>
           <a:prstGeom prst="rect">
             <a:avLst/>
@@ -3411,8 +3411,8 @@
         </p:blipFill>
         <p:spPr>
           <a:xfrm>
-            <a:off x="1460500" y="22453600"/>
-            <a:ext cx="29997400" cy="1447800"/>
+            <a:off x="1947334" y="33680400"/>
+            <a:ext cx="39996533" cy="2171700"/>
           </a:xfrm>
           <a:prstGeom prst="rect">
             <a:avLst/>
@@ -3427,8 +3427,8 @@
         </p:nvSpPr>
         <p:spPr>
           <a:xfrm>
-            <a:off x="1460500" y="23025100"/>
-            <a:ext cx="16459200" cy="1270000"/>
+            <a:off x="1947333" y="34537650"/>
+            <a:ext cx="21945600" cy="1905000"/>
           </a:xfrm>
           <a:prstGeom prst="rect">
             <a:avLst/>
@@ -3460,7 +3460,7 @@
           <a:p>
             <a:pPr algn="l"/>
             <a:r>
-              <a:rPr sz="4560">
+              <a:rPr sz="6080">
                 <a:solidFill>
                   <a:srgbClr val="808080"/>
                 </a:solidFill>
@@ -3492,14 +3492,14 @@
       <a:defPPr>
         <a:defRPr kern="1200"/>
       </a:defPPr>
-      <a:lvl1pPr algn="ctr" defTabSz="3135999" rtl="0" eaLnBrk="0" fontAlgn="base" hangingPunct="0">
+      <a:lvl1pPr algn="ctr" defTabSz="4181227" rtl="0" eaLnBrk="0" fontAlgn="base" hangingPunct="0">
         <a:spcBef>
           <a:spcPct val="0"/>
         </a:spcBef>
         <a:spcAft>
           <a:spcPct val="0"/>
         </a:spcAft>
-        <a:defRPr sz="15134">
+        <a:defRPr sz="20178">
           <a:solidFill>
             <a:schemeClr val="tx2"/>
           </a:solidFill>
@@ -3508,112 +3508,112 @@
           <a:cs typeface="+mj-cs"/>
         </a:defRPr>
       </a:lvl1pPr>
-      <a:lvl2pPr algn="ctr" defTabSz="3135999" rtl="0" eaLnBrk="0" fontAlgn="base" hangingPunct="0">
+      <a:lvl2pPr algn="ctr" defTabSz="4181227" rtl="0" eaLnBrk="0" fontAlgn="base" hangingPunct="0">
         <a:spcBef>
           <a:spcPct val="0"/>
         </a:spcBef>
         <a:spcAft>
           <a:spcPct val="0"/>
         </a:spcAft>
-        <a:defRPr sz="15134">
+        <a:defRPr sz="20178">
           <a:solidFill>
             <a:schemeClr val="tx2"/>
           </a:solidFill>
           <a:latin typeface="Arial" pitchFamily="34" charset="0"/>
         </a:defRPr>
       </a:lvl2pPr>
-      <a:lvl3pPr algn="ctr" defTabSz="3135999" rtl="0" eaLnBrk="0" fontAlgn="base" hangingPunct="0">
+      <a:lvl3pPr algn="ctr" defTabSz="4181227" rtl="0" eaLnBrk="0" fontAlgn="base" hangingPunct="0">
         <a:spcBef>
           <a:spcPct val="0"/>
         </a:spcBef>
         <a:spcAft>
           <a:spcPct val="0"/>
         </a:spcAft>
-        <a:defRPr sz="15134">
+        <a:defRPr sz="20178">
           <a:solidFill>
             <a:schemeClr val="tx2"/>
           </a:solidFill>
           <a:latin typeface="Arial" pitchFamily="34" charset="0"/>
         </a:defRPr>
       </a:lvl3pPr>
-      <a:lvl4pPr algn="ctr" defTabSz="3135999" rtl="0" eaLnBrk="0" fontAlgn="base" hangingPunct="0">
+      <a:lvl4pPr algn="ctr" defTabSz="4181227" rtl="0" eaLnBrk="0" fontAlgn="base" hangingPunct="0">
         <a:spcBef>
           <a:spcPct val="0"/>
         </a:spcBef>
         <a:spcAft>
           <a:spcPct val="0"/>
         </a:spcAft>
-        <a:defRPr sz="15134">
+        <a:defRPr sz="20178">
           <a:solidFill>
             <a:schemeClr val="tx2"/>
           </a:solidFill>
           <a:latin typeface="Arial" pitchFamily="34" charset="0"/>
         </a:defRPr>
       </a:lvl4pPr>
-      <a:lvl5pPr algn="ctr" defTabSz="3135999" rtl="0" eaLnBrk="0" fontAlgn="base" hangingPunct="0">
+      <a:lvl5pPr algn="ctr" defTabSz="4181227" rtl="0" eaLnBrk="0" fontAlgn="base" hangingPunct="0">
         <a:spcBef>
           <a:spcPct val="0"/>
         </a:spcBef>
         <a:spcAft>
           <a:spcPct val="0"/>
         </a:spcAft>
-        <a:defRPr sz="15134">
+        <a:defRPr sz="20178">
           <a:solidFill>
             <a:schemeClr val="tx2"/>
           </a:solidFill>
           <a:latin typeface="Arial" pitchFamily="34" charset="0"/>
         </a:defRPr>
       </a:lvl5pPr>
-      <a:lvl6pPr marL="304815" algn="ctr" defTabSz="3135999" rtl="0" fontAlgn="base">
+      <a:lvl6pPr marL="406410" algn="ctr" defTabSz="4181227" rtl="0" fontAlgn="base">
         <a:spcBef>
           <a:spcPct val="0"/>
         </a:spcBef>
         <a:spcAft>
           <a:spcPct val="0"/>
         </a:spcAft>
-        <a:defRPr sz="15134">
+        <a:defRPr sz="20178">
           <a:solidFill>
             <a:schemeClr val="tx2"/>
           </a:solidFill>
           <a:latin typeface="Arial" pitchFamily="34" charset="0"/>
         </a:defRPr>
       </a:lvl6pPr>
-      <a:lvl7pPr marL="609630" algn="ctr" defTabSz="3135999" rtl="0" fontAlgn="base">
+      <a:lvl7pPr marL="812820" algn="ctr" defTabSz="4181227" rtl="0" fontAlgn="base">
         <a:spcBef>
           <a:spcPct val="0"/>
         </a:spcBef>
         <a:spcAft>
           <a:spcPct val="0"/>
         </a:spcAft>
-        <a:defRPr sz="15134">
+        <a:defRPr sz="20178">
           <a:solidFill>
             <a:schemeClr val="tx2"/>
           </a:solidFill>
           <a:latin typeface="Arial" pitchFamily="34" charset="0"/>
         </a:defRPr>
       </a:lvl7pPr>
-      <a:lvl8pPr marL="914446" algn="ctr" defTabSz="3135999" rtl="0" fontAlgn="base">
+      <a:lvl8pPr marL="1219231" algn="ctr" defTabSz="4181227" rtl="0" fontAlgn="base">
         <a:spcBef>
           <a:spcPct val="0"/>
         </a:spcBef>
         <a:spcAft>
           <a:spcPct val="0"/>
         </a:spcAft>
-        <a:defRPr sz="15134">
+        <a:defRPr sz="20178">
           <a:solidFill>
             <a:schemeClr val="tx2"/>
           </a:solidFill>
           <a:latin typeface="Arial" pitchFamily="34" charset="0"/>
         </a:defRPr>
       </a:lvl8pPr>
-      <a:lvl9pPr marL="1219261" algn="ctr" defTabSz="3135999" rtl="0" fontAlgn="base">
+      <a:lvl9pPr marL="1625641" algn="ctr" defTabSz="4181227" rtl="0" fontAlgn="base">
         <a:spcBef>
           <a:spcPct val="0"/>
         </a:spcBef>
         <a:spcAft>
           <a:spcPct val="0"/>
         </a:spcAft>
-        <a:defRPr sz="15134">
+        <a:defRPr sz="20178">
           <a:solidFill>
             <a:schemeClr val="tx2"/>
           </a:solidFill>
@@ -3625,7 +3625,7 @@
       <a:defPPr>
         <a:defRPr kern="1200"/>
       </a:defPPr>
-      <a:lvl1pPr marL="1176926" indent="-1176926" algn="l" defTabSz="3135999" rtl="0" eaLnBrk="0" fontAlgn="base" hangingPunct="0">
+      <a:lvl1pPr marL="1569195" indent="-1569195" algn="l" defTabSz="4181227" rtl="0" eaLnBrk="0" fontAlgn="base" hangingPunct="0">
         <a:spcBef>
           <a:spcPct val="20000"/>
         </a:spcBef>
@@ -3633,7 +3633,7 @@
           <a:spcPct val="0"/>
         </a:spcAft>
         <a:buChar char="•"/>
-        <a:defRPr sz="11001">
+        <a:defRPr sz="14668">
           <a:solidFill>
             <a:schemeClr val="tx1"/>
           </a:solidFill>
@@ -3642,7 +3642,7 @@
           <a:cs typeface="+mn-cs"/>
         </a:defRPr>
       </a:lvl1pPr>
-      <a:lvl2pPr marL="2548594" indent="-981124" algn="l" defTabSz="3135999" rtl="0" eaLnBrk="0" fontAlgn="base" hangingPunct="0">
+      <a:lvl2pPr marL="3398040" indent="-1308133" algn="l" defTabSz="4181227" rtl="0" eaLnBrk="0" fontAlgn="base" hangingPunct="0">
         <a:spcBef>
           <a:spcPct val="20000"/>
         </a:spcBef>
@@ -3650,14 +3650,14 @@
           <a:spcPct val="0"/>
         </a:spcAft>
         <a:buChar char="–"/>
-        <a:defRPr sz="9600">
+        <a:defRPr sz="12800">
           <a:solidFill>
             <a:schemeClr val="tx1"/>
           </a:solidFill>
           <a:latin typeface="+mn-lt"/>
         </a:defRPr>
       </a:lvl2pPr>
-      <a:lvl3pPr marL="3920263" indent="-784265" algn="l" defTabSz="3135999" rtl="0" eaLnBrk="0" fontAlgn="base" hangingPunct="0">
+      <a:lvl3pPr marL="5226887" indent="-1045661" algn="l" defTabSz="4181227" rtl="0" eaLnBrk="0" fontAlgn="base" hangingPunct="0">
         <a:spcBef>
           <a:spcPct val="20000"/>
         </a:spcBef>
@@ -3665,14 +3665,14 @@
           <a:spcPct val="0"/>
         </a:spcAft>
         <a:buChar char="•"/>
-        <a:defRPr sz="8200">
+        <a:defRPr sz="10933">
           <a:solidFill>
             <a:schemeClr val="tx1"/>
           </a:solidFill>
           <a:latin typeface="+mn-lt"/>
         </a:defRPr>
       </a:lvl3pPr>
-      <a:lvl4pPr marL="5486674" indent="-784265" algn="l" defTabSz="3135999" rtl="0" eaLnBrk="0" fontAlgn="base" hangingPunct="0">
+      <a:lvl4pPr marL="7315382" indent="-1045661" algn="l" defTabSz="4181227" rtl="0" eaLnBrk="0" fontAlgn="base" hangingPunct="0">
         <a:spcBef>
           <a:spcPct val="20000"/>
         </a:spcBef>
@@ -3680,14 +3680,14 @@
           <a:spcPct val="0"/>
         </a:spcAft>
         <a:buChar char="–"/>
-        <a:defRPr sz="6934">
+        <a:defRPr sz="9245">
           <a:solidFill>
             <a:schemeClr val="tx1"/>
           </a:solidFill>
           <a:latin typeface="+mn-lt"/>
         </a:defRPr>
       </a:lvl4pPr>
-      <a:lvl5pPr marL="7054145" indent="-783206" algn="l" defTabSz="3135999" rtl="0" eaLnBrk="0" fontAlgn="base" hangingPunct="0">
+      <a:lvl5pPr marL="9405292" indent="-1044249" algn="l" defTabSz="4181227" rtl="0" eaLnBrk="0" fontAlgn="base" hangingPunct="0">
         <a:spcBef>
           <a:spcPct val="20000"/>
         </a:spcBef>
@@ -3695,14 +3695,14 @@
           <a:spcPct val="0"/>
         </a:spcAft>
         <a:buChar char="»"/>
-        <a:defRPr sz="6934">
+        <a:defRPr sz="9245">
           <a:solidFill>
             <a:schemeClr val="tx1"/>
           </a:solidFill>
           <a:latin typeface="+mn-lt"/>
         </a:defRPr>
       </a:lvl5pPr>
-      <a:lvl6pPr marL="7358960" indent="-783206" algn="l" defTabSz="3135999" rtl="0" fontAlgn="base">
+      <a:lvl6pPr marL="9811701" indent="-1044249" algn="l" defTabSz="4181227" rtl="0" fontAlgn="base">
         <a:spcBef>
           <a:spcPct val="20000"/>
         </a:spcBef>
@@ -3710,14 +3710,14 @@
           <a:spcPct val="0"/>
         </a:spcAft>
         <a:buChar char="»"/>
-        <a:defRPr sz="6934">
+        <a:defRPr sz="9245">
           <a:solidFill>
             <a:schemeClr val="tx1"/>
           </a:solidFill>
           <a:latin typeface="+mn-lt"/>
         </a:defRPr>
       </a:lvl6pPr>
-      <a:lvl7pPr marL="7663775" indent="-783206" algn="l" defTabSz="3135999" rtl="0" fontAlgn="base">
+      <a:lvl7pPr marL="10218111" indent="-1044249" algn="l" defTabSz="4181227" rtl="0" fontAlgn="base">
         <a:spcBef>
           <a:spcPct val="20000"/>
         </a:spcBef>
@@ -3725,14 +3725,14 @@
           <a:spcPct val="0"/>
         </a:spcAft>
         <a:buChar char="»"/>
-        <a:defRPr sz="6934">
+        <a:defRPr sz="9245">
           <a:solidFill>
             <a:schemeClr val="tx1"/>
           </a:solidFill>
           <a:latin typeface="+mn-lt"/>
         </a:defRPr>
       </a:lvl7pPr>
-      <a:lvl8pPr marL="7968590" indent="-783206" algn="l" defTabSz="3135999" rtl="0" fontAlgn="base">
+      <a:lvl8pPr marL="10624521" indent="-1044249" algn="l" defTabSz="4181227" rtl="0" fontAlgn="base">
         <a:spcBef>
           <a:spcPct val="20000"/>
         </a:spcBef>
@@ -3740,14 +3740,14 @@
           <a:spcPct val="0"/>
         </a:spcAft>
         <a:buChar char="»"/>
-        <a:defRPr sz="6934">
+        <a:defRPr sz="9245">
           <a:solidFill>
             <a:schemeClr val="tx1"/>
           </a:solidFill>
           <a:latin typeface="+mn-lt"/>
         </a:defRPr>
       </a:lvl8pPr>
-      <a:lvl9pPr marL="8273406" indent="-783206" algn="l" defTabSz="3135999" rtl="0" fontAlgn="base">
+      <a:lvl9pPr marL="11030932" indent="-1044249" algn="l" defTabSz="4181227" rtl="0" fontAlgn="base">
         <a:spcBef>
           <a:spcPct val="20000"/>
         </a:spcBef>
@@ -3755,7 +3755,7 @@
           <a:spcPct val="0"/>
         </a:spcAft>
         <a:buChar char="»"/>
-        <a:defRPr sz="6934">
+        <a:defRPr sz="9245">
           <a:solidFill>
             <a:schemeClr val="tx1"/>
           </a:solidFill>
@@ -3767,8 +3767,8 @@
       <a:defPPr>
         <a:defRPr lang="en-US"/>
       </a:defPPr>
-      <a:lvl1pPr marL="0" algn="l" defTabSz="609630" rtl="0" eaLnBrk="1" latinLnBrk="0" hangingPunct="1">
-        <a:defRPr sz="1200" kern="1200">
+      <a:lvl1pPr marL="0" algn="l" defTabSz="812820" rtl="0" eaLnBrk="1" latinLnBrk="0" hangingPunct="1">
+        <a:defRPr sz="1600" kern="1200">
           <a:solidFill>
             <a:schemeClr val="tx1"/>
           </a:solidFill>
@@ -3777,8 +3777,8 @@
           <a:cs typeface="+mn-cs"/>
         </a:defRPr>
       </a:lvl1pPr>
-      <a:lvl2pPr marL="304815" algn="l" defTabSz="609630" rtl="0" eaLnBrk="1" latinLnBrk="0" hangingPunct="1">
-        <a:defRPr sz="1200" kern="1200">
+      <a:lvl2pPr marL="406410" algn="l" defTabSz="812820" rtl="0" eaLnBrk="1" latinLnBrk="0" hangingPunct="1">
+        <a:defRPr sz="1600" kern="1200">
           <a:solidFill>
             <a:schemeClr val="tx1"/>
           </a:solidFill>
@@ -3787,8 +3787,8 @@
           <a:cs typeface="+mn-cs"/>
         </a:defRPr>
       </a:lvl2pPr>
-      <a:lvl3pPr marL="609630" algn="l" defTabSz="609630" rtl="0" eaLnBrk="1" latinLnBrk="0" hangingPunct="1">
-        <a:defRPr sz="1200" kern="1200">
+      <a:lvl3pPr marL="812820" algn="l" defTabSz="812820" rtl="0" eaLnBrk="1" latinLnBrk="0" hangingPunct="1">
+        <a:defRPr sz="1600" kern="1200">
           <a:solidFill>
             <a:schemeClr val="tx1"/>
           </a:solidFill>
@@ -3797,8 +3797,8 @@
           <a:cs typeface="+mn-cs"/>
         </a:defRPr>
       </a:lvl3pPr>
-      <a:lvl4pPr marL="914446" algn="l" defTabSz="609630" rtl="0" eaLnBrk="1" latinLnBrk="0" hangingPunct="1">
-        <a:defRPr sz="1200" kern="1200">
+      <a:lvl4pPr marL="1219231" algn="l" defTabSz="812820" rtl="0" eaLnBrk="1" latinLnBrk="0" hangingPunct="1">
+        <a:defRPr sz="1600" kern="1200">
           <a:solidFill>
             <a:schemeClr val="tx1"/>
           </a:solidFill>
@@ -3807,8 +3807,8 @@
           <a:cs typeface="+mn-cs"/>
         </a:defRPr>
       </a:lvl4pPr>
-      <a:lvl5pPr marL="1219261" algn="l" defTabSz="609630" rtl="0" eaLnBrk="1" latinLnBrk="0" hangingPunct="1">
-        <a:defRPr sz="1200" kern="1200">
+      <a:lvl5pPr marL="1625641" algn="l" defTabSz="812820" rtl="0" eaLnBrk="1" latinLnBrk="0" hangingPunct="1">
+        <a:defRPr sz="1600" kern="1200">
           <a:solidFill>
             <a:schemeClr val="tx1"/>
           </a:solidFill>
@@ -3817,8 +3817,8 @@
           <a:cs typeface="+mn-cs"/>
         </a:defRPr>
       </a:lvl5pPr>
-      <a:lvl6pPr marL="1524076" algn="l" defTabSz="609630" rtl="0" eaLnBrk="1" latinLnBrk="0" hangingPunct="1">
-        <a:defRPr sz="1200" kern="1200">
+      <a:lvl6pPr marL="2032051" algn="l" defTabSz="812820" rtl="0" eaLnBrk="1" latinLnBrk="0" hangingPunct="1">
+        <a:defRPr sz="1600" kern="1200">
           <a:solidFill>
             <a:schemeClr val="tx1"/>
           </a:solidFill>
@@ -3827,8 +3827,8 @@
           <a:cs typeface="+mn-cs"/>
         </a:defRPr>
       </a:lvl6pPr>
-      <a:lvl7pPr marL="1828891" algn="l" defTabSz="609630" rtl="0" eaLnBrk="1" latinLnBrk="0" hangingPunct="1">
-        <a:defRPr sz="1200" kern="1200">
+      <a:lvl7pPr marL="2438460" algn="l" defTabSz="812820" rtl="0" eaLnBrk="1" latinLnBrk="0" hangingPunct="1">
+        <a:defRPr sz="1600" kern="1200">
           <a:solidFill>
             <a:schemeClr val="tx1"/>
           </a:solidFill>
@@ -3837,8 +3837,8 @@
           <a:cs typeface="+mn-cs"/>
         </a:defRPr>
       </a:lvl7pPr>
-      <a:lvl8pPr marL="2133707" algn="l" defTabSz="609630" rtl="0" eaLnBrk="1" latinLnBrk="0" hangingPunct="1">
-        <a:defRPr sz="1200" kern="1200">
+      <a:lvl8pPr marL="2844872" algn="l" defTabSz="812820" rtl="0" eaLnBrk="1" latinLnBrk="0" hangingPunct="1">
+        <a:defRPr sz="1600" kern="1200">
           <a:solidFill>
             <a:schemeClr val="tx1"/>
           </a:solidFill>
@@ -3847,8 +3847,8 @@
           <a:cs typeface="+mn-cs"/>
         </a:defRPr>
       </a:lvl8pPr>
-      <a:lvl9pPr marL="2438522" algn="l" defTabSz="609630" rtl="0" eaLnBrk="1" latinLnBrk="0" hangingPunct="1">
-        <a:defRPr sz="1200" kern="1200">
+      <a:lvl9pPr marL="3251281" algn="l" defTabSz="812820" rtl="0" eaLnBrk="1" latinLnBrk="0" hangingPunct="1">
+        <a:defRPr sz="1600" kern="1200">
           <a:solidFill>
             <a:schemeClr val="tx1"/>
           </a:solidFill>
@@ -3897,448 +3897,6 @@
       </p:grpSpPr>
       <p:sp>
         <p:nvSpPr>
-          <p:cNvPr id="2050" name="Rectangle 6"/>
-          <p:cNvSpPr>
-            <a:spLocks noChangeArrowheads="1"/>
-          </p:cNvSpPr>
-          <p:nvPr/>
-        </p:nvSpPr>
-        <p:spPr bwMode="auto">
-          <a:xfrm>
-            <a:off x="0" y="0"/>
-            <a:ext cx="32918400" cy="4316056"/>
-          </a:xfrm>
-          <a:prstGeom prst="rect">
-            <a:avLst/>
-          </a:prstGeom>
-          <a:solidFill>
-            <a:srgbClr val="1482A5"/>
-          </a:solidFill>
-          <a:ln w="9525">
-            <a:noFill/>
-            <a:miter lim="800000"/>
-          </a:ln>
-          <a:effectLst/>
-        </p:spPr>
-        <p:txBody>
-          <a:bodyPr lIns="91440" tIns="45720" rIns="91440" bIns="45720" anchor="ctr"/>
-          <a:lstStyle>
-            <a:defPPr>
-              <a:defRPr kern="1200"/>
-            </a:defPPr>
-          </a:lstStyle>
-          <a:p>
-            <a:pPr algn="ctr" defTabSz="3135999"/>
-            <a:endParaRPr lang="en-US" sz="3200">
-              <a:solidFill>
-                <a:schemeClr val="bg1"/>
-              </a:solidFill>
-            </a:endParaRPr>
-          </a:p>
-        </p:txBody>
-      </p:sp>
-      <p:sp>
-        <p:nvSpPr>
-          <p:cNvPr id="16" name="Text Placeholder 5">
-            <a:extLst>
-              <a:ext uri="{FF2B5EF4-FFF2-40B4-BE49-F238E27FC236}">
-                <a16:creationId xmlns:a16="http://schemas.microsoft.com/office/drawing/2014/main" id="{D3B51F6E-41A5-4D7C-9B15-CDBAC096BAD1}"/>
-              </a:ext>
-            </a:extLst>
-          </p:cNvPr>
-          <p:cNvSpPr txBox="1"/>
-          <p:nvPr/>
-        </p:nvSpPr>
-        <p:spPr>
-          <a:xfrm>
-            <a:off x="4267200" y="468434"/>
-            <a:ext cx="24384000" cy="1958293"/>
-          </a:xfrm>
-          <a:prstGeom prst="rect">
-            <a:avLst/>
-          </a:prstGeom>
-        </p:spPr>
-        <p:txBody>
-          <a:bodyPr lIns="0" tIns="0" rIns="0" bIns="0">
-            <a:noAutofit/>
-          </a:bodyPr>
-          <a:lstStyle>
-            <a:defPPr>
-              <a:defRPr kern="1200"/>
-            </a:defPPr>
-            <a:lvl1pPr marL="0" marR="0" indent="0" algn="l" defTabSz="3783013" rtl="0" eaLnBrk="1" fontAlgn="auto" latinLnBrk="0" hangingPunct="1">
-              <a:lnSpc>
-                <a:spcPct val="100000"/>
-              </a:lnSpc>
-              <a:spcBef>
-                <a:spcPts val="600"/>
-              </a:spcBef>
-              <a:spcAft>
-                <a:spcPct val="0"/>
-              </a:spcAft>
-              <a:buClrTx/>
-              <a:buSzTx/>
-              <a:buFontTx/>
-              <a:buNone/>
-              <a:defRPr sz="6000" kern="1200" baseline="0">
-                <a:solidFill>
-                  <a:schemeClr val="tx2"/>
-                </a:solidFill>
-                <a:latin typeface="Franklin Gothic Heavy" pitchFamily="34" charset="0"/>
-                <a:ea typeface="+mn-ea"/>
-                <a:cs typeface="+mn-cs"/>
-              </a:defRPr>
-            </a:lvl1pPr>
-            <a:lvl2pPr marL="1880543" indent="0" algn="l" defTabSz="3761086" rtl="0" eaLnBrk="1" latinLnBrk="0" hangingPunct="1">
-              <a:spcBef>
-                <a:spcPct val="20000"/>
-              </a:spcBef>
-              <a:buFontTx/>
-              <a:buNone/>
-              <a:defRPr sz="11500" kern="1200">
-                <a:solidFill>
-                  <a:schemeClr val="tx1"/>
-                </a:solidFill>
-                <a:latin typeface="+mn-lt"/>
-                <a:ea typeface="+mn-ea"/>
-                <a:cs typeface="+mn-cs"/>
-              </a:defRPr>
-            </a:lvl2pPr>
-            <a:lvl3pPr marL="3761086" indent="0" algn="l" defTabSz="3761086" rtl="0" eaLnBrk="1" latinLnBrk="0" hangingPunct="1">
-              <a:spcBef>
-                <a:spcPct val="20000"/>
-              </a:spcBef>
-              <a:buFontTx/>
-              <a:buNone/>
-              <a:defRPr sz="9900" kern="1200">
-                <a:solidFill>
-                  <a:schemeClr val="tx1"/>
-                </a:solidFill>
-                <a:latin typeface="+mn-lt"/>
-                <a:ea typeface="+mn-ea"/>
-                <a:cs typeface="+mn-cs"/>
-              </a:defRPr>
-            </a:lvl3pPr>
-            <a:lvl4pPr marL="5641629" indent="0" algn="l" defTabSz="3761086" rtl="0" eaLnBrk="1" latinLnBrk="0" hangingPunct="1">
-              <a:spcBef>
-                <a:spcPct val="20000"/>
-              </a:spcBef>
-              <a:buFontTx/>
-              <a:buNone/>
-              <a:defRPr sz="8200" kern="1200">
-                <a:solidFill>
-                  <a:schemeClr val="tx1"/>
-                </a:solidFill>
-                <a:latin typeface="+mn-lt"/>
-                <a:ea typeface="+mn-ea"/>
-                <a:cs typeface="+mn-cs"/>
-              </a:defRPr>
-            </a:lvl4pPr>
-            <a:lvl5pPr marL="7522172" indent="0" algn="l" defTabSz="3761086" rtl="0" eaLnBrk="1" latinLnBrk="0" hangingPunct="1">
-              <a:spcBef>
-                <a:spcPct val="20000"/>
-              </a:spcBef>
-              <a:buFontTx/>
-              <a:buNone/>
-              <a:defRPr sz="8200" kern="1200">
-                <a:solidFill>
-                  <a:schemeClr val="tx1"/>
-                </a:solidFill>
-                <a:latin typeface="+mn-lt"/>
-                <a:ea typeface="+mn-ea"/>
-                <a:cs typeface="+mn-cs"/>
-              </a:defRPr>
-            </a:lvl5pPr>
-            <a:lvl6pPr marL="10342988" indent="-940272" algn="l" defTabSz="3761086" rtl="0" eaLnBrk="1" latinLnBrk="0" hangingPunct="1">
-              <a:spcBef>
-                <a:spcPct val="20000"/>
-              </a:spcBef>
-              <a:buFont typeface="Arial" pitchFamily="34" charset="0"/>
-              <a:buChar char="•"/>
-              <a:defRPr sz="8200" kern="1200">
-                <a:solidFill>
-                  <a:schemeClr val="tx1"/>
-                </a:solidFill>
-                <a:latin typeface="+mn-lt"/>
-                <a:ea typeface="+mn-ea"/>
-                <a:cs typeface="+mn-cs"/>
-              </a:defRPr>
-            </a:lvl6pPr>
-            <a:lvl7pPr marL="12223531" indent="-940272" algn="l" defTabSz="3761086" rtl="0" eaLnBrk="1" latinLnBrk="0" hangingPunct="1">
-              <a:spcBef>
-                <a:spcPct val="20000"/>
-              </a:spcBef>
-              <a:buFont typeface="Arial" pitchFamily="34" charset="0"/>
-              <a:buChar char="•"/>
-              <a:defRPr sz="8200" kern="1200">
-                <a:solidFill>
-                  <a:schemeClr val="tx1"/>
-                </a:solidFill>
-                <a:latin typeface="+mn-lt"/>
-                <a:ea typeface="+mn-ea"/>
-                <a:cs typeface="+mn-cs"/>
-              </a:defRPr>
-            </a:lvl7pPr>
-            <a:lvl8pPr marL="14104074" indent="-940272" algn="l" defTabSz="3761086" rtl="0" eaLnBrk="1" latinLnBrk="0" hangingPunct="1">
-              <a:spcBef>
-                <a:spcPct val="20000"/>
-              </a:spcBef>
-              <a:buFont typeface="Arial" pitchFamily="34" charset="0"/>
-              <a:buChar char="•"/>
-              <a:defRPr sz="8200" kern="1200">
-                <a:solidFill>
-                  <a:schemeClr val="tx1"/>
-                </a:solidFill>
-                <a:latin typeface="+mn-lt"/>
-                <a:ea typeface="+mn-ea"/>
-                <a:cs typeface="+mn-cs"/>
-              </a:defRPr>
-            </a:lvl8pPr>
-            <a:lvl9pPr marL="15984617" indent="-940272" algn="l" defTabSz="3761086" rtl="0" eaLnBrk="1" latinLnBrk="0" hangingPunct="1">
-              <a:spcBef>
-                <a:spcPct val="20000"/>
-              </a:spcBef>
-              <a:buFont typeface="Arial" pitchFamily="34" charset="0"/>
-              <a:buChar char="•"/>
-              <a:defRPr sz="8200" kern="1200">
-                <a:solidFill>
-                  <a:schemeClr val="tx1"/>
-                </a:solidFill>
-                <a:latin typeface="+mn-lt"/>
-                <a:ea typeface="+mn-ea"/>
-                <a:cs typeface="+mn-cs"/>
-              </a:defRPr>
-            </a:lvl9pPr>
-          </a:lstStyle>
-          <a:p>
-            <a:pPr algn="ctr" defTabSz="2507516">
-              <a:spcBef>
-                <a:spcPct val="20000"/>
-              </a:spcBef>
-              <a:defRPr/>
-            </a:pPr>
-            <a:r>
-              <a:rPr lang="en-US" sz="6600" b="1" dirty="0">
-                <a:solidFill>
-                  <a:schemeClr val="bg1"/>
-                </a:solidFill>
-                <a:latin typeface="Arial" panose="020B0604020202020204" pitchFamily="34" charset="0"/>
-                <a:cs typeface="Arial" panose="020B0604020202020204" pitchFamily="34" charset="0"/>
-              </a:rPr>
-              <a:t>Indexed Concatenation (I-Cat): A Method for Representing and Operating on Repeating Numbers</a:t>
-            </a:r>
-          </a:p>
-        </p:txBody>
-      </p:sp>
-      <p:sp>
-        <p:nvSpPr>
-          <p:cNvPr id="17" name="Text Placeholder 5">
-            <a:extLst>
-              <a:ext uri="{FF2B5EF4-FFF2-40B4-BE49-F238E27FC236}">
-                <a16:creationId xmlns:a16="http://schemas.microsoft.com/office/drawing/2014/main" id="{0A363635-BCEE-4B55-ADB3-58433C0697E0}"/>
-              </a:ext>
-            </a:extLst>
-          </p:cNvPr>
-          <p:cNvSpPr txBox="1"/>
-          <p:nvPr/>
-        </p:nvSpPr>
-        <p:spPr>
-          <a:xfrm>
-            <a:off x="4267200" y="2766702"/>
-            <a:ext cx="24384000" cy="1280351"/>
-          </a:xfrm>
-          <a:prstGeom prst="rect">
-            <a:avLst/>
-          </a:prstGeom>
-        </p:spPr>
-        <p:txBody>
-          <a:bodyPr lIns="0" tIns="0" rIns="0" bIns="0">
-            <a:spAutoFit/>
-          </a:bodyPr>
-          <a:lstStyle>
-            <a:defPPr>
-              <a:defRPr kern="1200"/>
-            </a:defPPr>
-            <a:lvl1pPr marL="0" marR="0" indent="0" algn="l" defTabSz="3761086" rtl="0" eaLnBrk="1" fontAlgn="auto" latinLnBrk="0" hangingPunct="1">
-              <a:lnSpc>
-                <a:spcPct val="100000"/>
-              </a:lnSpc>
-              <a:spcBef>
-                <a:spcPct val="20000"/>
-              </a:spcBef>
-              <a:spcAft>
-                <a:spcPct val="0"/>
-              </a:spcAft>
-              <a:buClrTx/>
-              <a:buSzTx/>
-              <a:buFont typeface="Arial" pitchFamily="34" charset="0"/>
-              <a:buNone/>
-              <a:defRPr sz="6000" kern="1200" baseline="0">
-                <a:solidFill>
-                  <a:schemeClr val="tx2"/>
-                </a:solidFill>
-                <a:latin typeface="Franklin Gothic Heavy" pitchFamily="34" charset="0"/>
-                <a:ea typeface="+mn-ea"/>
-                <a:cs typeface="+mn-cs"/>
-              </a:defRPr>
-            </a:lvl1pPr>
-            <a:lvl2pPr marL="1880543" indent="0" algn="l" defTabSz="3761086" rtl="0" eaLnBrk="1" latinLnBrk="0" hangingPunct="1">
-              <a:spcBef>
-                <a:spcPct val="20000"/>
-              </a:spcBef>
-              <a:buFontTx/>
-              <a:buNone/>
-              <a:defRPr sz="11500" kern="1200">
-                <a:solidFill>
-                  <a:schemeClr val="tx1"/>
-                </a:solidFill>
-                <a:latin typeface="+mn-lt"/>
-                <a:ea typeface="+mn-ea"/>
-                <a:cs typeface="+mn-cs"/>
-              </a:defRPr>
-            </a:lvl2pPr>
-            <a:lvl3pPr marL="3761086" indent="0" algn="l" defTabSz="3761086" rtl="0" eaLnBrk="1" latinLnBrk="0" hangingPunct="1">
-              <a:spcBef>
-                <a:spcPct val="20000"/>
-              </a:spcBef>
-              <a:buFontTx/>
-              <a:buNone/>
-              <a:defRPr sz="9900" kern="1200">
-                <a:solidFill>
-                  <a:schemeClr val="tx1"/>
-                </a:solidFill>
-                <a:latin typeface="+mn-lt"/>
-                <a:ea typeface="+mn-ea"/>
-                <a:cs typeface="+mn-cs"/>
-              </a:defRPr>
-            </a:lvl3pPr>
-            <a:lvl4pPr marL="5641629" indent="0" algn="l" defTabSz="3761086" rtl="0" eaLnBrk="1" latinLnBrk="0" hangingPunct="1">
-              <a:spcBef>
-                <a:spcPct val="20000"/>
-              </a:spcBef>
-              <a:buFontTx/>
-              <a:buNone/>
-              <a:defRPr sz="8200" kern="1200">
-                <a:solidFill>
-                  <a:schemeClr val="tx1"/>
-                </a:solidFill>
-                <a:latin typeface="+mn-lt"/>
-                <a:ea typeface="+mn-ea"/>
-                <a:cs typeface="+mn-cs"/>
-              </a:defRPr>
-            </a:lvl4pPr>
-            <a:lvl5pPr marL="7522172" indent="0" algn="l" defTabSz="3761086" rtl="0" eaLnBrk="1" latinLnBrk="0" hangingPunct="1">
-              <a:spcBef>
-                <a:spcPct val="20000"/>
-              </a:spcBef>
-              <a:buFontTx/>
-              <a:buNone/>
-              <a:defRPr sz="8200" kern="1200">
-                <a:solidFill>
-                  <a:schemeClr val="tx1"/>
-                </a:solidFill>
-                <a:latin typeface="+mn-lt"/>
-                <a:ea typeface="+mn-ea"/>
-                <a:cs typeface="+mn-cs"/>
-              </a:defRPr>
-            </a:lvl5pPr>
-            <a:lvl6pPr marL="10342988" indent="-940272" algn="l" defTabSz="3761086" rtl="0" eaLnBrk="1" latinLnBrk="0" hangingPunct="1">
-              <a:spcBef>
-                <a:spcPct val="20000"/>
-              </a:spcBef>
-              <a:buFont typeface="Arial" pitchFamily="34" charset="0"/>
-              <a:buChar char="•"/>
-              <a:defRPr sz="8200" kern="1200">
-                <a:solidFill>
-                  <a:schemeClr val="tx1"/>
-                </a:solidFill>
-                <a:latin typeface="+mn-lt"/>
-                <a:ea typeface="+mn-ea"/>
-                <a:cs typeface="+mn-cs"/>
-              </a:defRPr>
-            </a:lvl6pPr>
-            <a:lvl7pPr marL="12223531" indent="-940272" algn="l" defTabSz="3761086" rtl="0" eaLnBrk="1" latinLnBrk="0" hangingPunct="1">
-              <a:spcBef>
-                <a:spcPct val="20000"/>
-              </a:spcBef>
-              <a:buFont typeface="Arial" pitchFamily="34" charset="0"/>
-              <a:buChar char="•"/>
-              <a:defRPr sz="8200" kern="1200">
-                <a:solidFill>
-                  <a:schemeClr val="tx1"/>
-                </a:solidFill>
-                <a:latin typeface="+mn-lt"/>
-                <a:ea typeface="+mn-ea"/>
-                <a:cs typeface="+mn-cs"/>
-              </a:defRPr>
-            </a:lvl7pPr>
-            <a:lvl8pPr marL="14104074" indent="-940272" algn="l" defTabSz="3761086" rtl="0" eaLnBrk="1" latinLnBrk="0" hangingPunct="1">
-              <a:spcBef>
-                <a:spcPct val="20000"/>
-              </a:spcBef>
-              <a:buFont typeface="Arial" pitchFamily="34" charset="0"/>
-              <a:buChar char="•"/>
-              <a:defRPr sz="8200" kern="1200">
-                <a:solidFill>
-                  <a:schemeClr val="tx1"/>
-                </a:solidFill>
-                <a:latin typeface="+mn-lt"/>
-                <a:ea typeface="+mn-ea"/>
-                <a:cs typeface="+mn-cs"/>
-              </a:defRPr>
-            </a:lvl8pPr>
-            <a:lvl9pPr marL="15984617" indent="-940272" algn="l" defTabSz="3761086" rtl="0" eaLnBrk="1" latinLnBrk="0" hangingPunct="1">
-              <a:spcBef>
-                <a:spcPct val="20000"/>
-              </a:spcBef>
-              <a:buFont typeface="Arial" pitchFamily="34" charset="0"/>
-              <a:buChar char="•"/>
-              <a:defRPr sz="8200" kern="1200">
-                <a:solidFill>
-                  <a:schemeClr val="tx1"/>
-                </a:solidFill>
-                <a:latin typeface="+mn-lt"/>
-                <a:ea typeface="+mn-ea"/>
-                <a:cs typeface="+mn-cs"/>
-              </a:defRPr>
-            </a:lvl9pPr>
-          </a:lstStyle>
-          <a:p>
-            <a:pPr algn="ctr">
-              <a:defRPr/>
-            </a:pPr>
-            <a:r>
-              <a:rPr lang="en-US" sz="4000" dirty="0">
-                <a:solidFill>
-                  <a:schemeClr val="bg1"/>
-                </a:solidFill>
-                <a:latin typeface="Arial" panose="020B0604020202020204" pitchFamily="34" charset="0"/>
-                <a:ea typeface="Open Sans" panose="020B0606030504020204" pitchFamily="34" charset="0"/>
-                <a:cs typeface="Arial" panose="020B0604020202020204" pitchFamily="34" charset="0"/>
-              </a:rPr>
-              <a:t>Abigail Touma, Isaac Wolford, and Kenneth Caviness</a:t>
-            </a:r>
-          </a:p>
-          <a:p>
-            <a:pPr algn="ctr">
-              <a:defRPr/>
-            </a:pPr>
-            <a:r>
-              <a:rPr lang="en-US" sz="3600" dirty="0">
-                <a:solidFill>
-                  <a:schemeClr val="bg1"/>
-                </a:solidFill>
-                <a:latin typeface="Arial" panose="020B0604020202020204" pitchFamily="34" charset="0"/>
-                <a:ea typeface="Open Sans" panose="020B0606030504020204" pitchFamily="34" charset="0"/>
-                <a:cs typeface="Arial" panose="020B0604020202020204" pitchFamily="34" charset="0"/>
-              </a:rPr>
-              <a:t>School of Engineering and Physics, Department of Mathematics</a:t>
-            </a:r>
-          </a:p>
-        </p:txBody>
-      </p:sp>
-      <p:sp>
-        <p:nvSpPr>
           <p:cNvPr id="21" name="Rectangle 10">
             <a:extLst>
               <a:ext uri="{FF2B5EF4-FFF2-40B4-BE49-F238E27FC236}">
@@ -4353,8 +3911,8 @@
         </p:nvSpPr>
         <p:spPr bwMode="auto">
           <a:xfrm>
-            <a:off x="771012" y="13197843"/>
-            <a:ext cx="7268693" cy="582201"/>
+            <a:off x="684499" y="18427057"/>
+            <a:ext cx="9691591" cy="776268"/>
           </a:xfrm>
           <a:prstGeom prst="rect">
             <a:avLst/>
@@ -4368,18 +3926,18 @@
           </a:ln>
         </p:spPr>
         <p:txBody>
-          <a:bodyPr wrap="none" lIns="182880" tIns="48768" rIns="182880" bIns="45709" anchor="ctr" anchorCtr="0"/>
+          <a:bodyPr wrap="none" lIns="243840" tIns="65024" rIns="243840" bIns="60945" anchor="ctr" anchorCtr="0"/>
           <a:lstStyle>
             <a:defPPr>
               <a:defRPr kern="1200"/>
             </a:defPPr>
           </a:lstStyle>
           <a:p>
-            <a:pPr algn="ctr" defTabSz="3135215">
+            <a:pPr algn="ctr" defTabSz="4180182">
               <a:defRPr/>
             </a:pPr>
             <a:r>
-              <a:rPr lang="en-US" sz="2800" b="1" dirty="0">
+              <a:rPr lang="en-US" sz="3733" b="1" dirty="0">
                 <a:solidFill>
                   <a:schemeClr val="bg1"/>
                 </a:solidFill>
@@ -4407,8 +3965,8 @@
         </p:nvSpPr>
         <p:spPr bwMode="auto">
           <a:xfrm>
-            <a:off x="768353" y="5572470"/>
-            <a:ext cx="7268693" cy="3213187"/>
+            <a:off x="713194" y="7549492"/>
+            <a:ext cx="9691591" cy="4284891"/>
           </a:xfrm>
           <a:prstGeom prst="rect">
             <a:avLst/>
@@ -4426,7 +3984,7 @@
           </a:ln>
         </p:spPr>
         <p:txBody>
-          <a:bodyPr wrap="square" lIns="91440" tIns="91440" rIns="182880" bIns="91440">
+          <a:bodyPr wrap="square" lIns="121920" tIns="121920" rIns="243840" bIns="121920">
             <a:spAutoFit/>
           </a:bodyPr>
           <a:lstStyle>
@@ -4540,7 +4098,7 @@
             </a:lvl9pPr>
           </a:lstStyle>
           <a:p>
-            <a:pPr marL="285750" indent="-285750" algn="just">
+            <a:pPr marL="380990" indent="-380990" algn="just">
               <a:lnSpc>
                 <a:spcPct val="110000"/>
               </a:lnSpc>
@@ -4548,7 +4106,7 @@
               <a:buChar char="•"/>
             </a:pPr>
             <a:r>
-              <a:rPr lang="en-US" dirty="0">
+              <a:rPr lang="en-US" sz="2667" dirty="0">
                 <a:latin typeface="Open Sans" panose="020B0606030504020204" pitchFamily="34" charset="0"/>
                 <a:ea typeface="Open Sans" panose="020B0606030504020204" pitchFamily="34" charset="0"/>
                 <a:cs typeface="Open Sans" panose="020B0606030504020204" pitchFamily="34" charset="0"/>
@@ -4557,7 +4115,7 @@
             </a:r>
           </a:p>
           <a:p>
-            <a:pPr marL="285750" indent="-285750" algn="just">
+            <a:pPr marL="380990" indent="-380990" algn="just">
               <a:lnSpc>
                 <a:spcPct val="110000"/>
               </a:lnSpc>
@@ -4565,7 +4123,7 @@
               <a:buChar char="•"/>
             </a:pPr>
             <a:r>
-              <a:rPr lang="en-US" dirty="0">
+              <a:rPr lang="en-US" sz="2667" dirty="0">
                 <a:latin typeface="Open Sans" panose="020B0606030504020204" pitchFamily="34" charset="0"/>
                 <a:ea typeface="Open Sans" panose="020B0606030504020204" pitchFamily="34" charset="0"/>
                 <a:cs typeface="Open Sans" panose="020B0606030504020204" pitchFamily="34" charset="0"/>
@@ -4574,7 +4132,7 @@
             </a:r>
           </a:p>
           <a:p>
-            <a:pPr marL="285750" indent="-285750" algn="just">
+            <a:pPr marL="380990" indent="-380990" algn="just">
               <a:lnSpc>
                 <a:spcPct val="110000"/>
               </a:lnSpc>
@@ -4582,7 +4140,7 @@
               <a:buChar char="•"/>
             </a:pPr>
             <a:r>
-              <a:rPr lang="en-US" dirty="0">
+              <a:rPr lang="en-US" sz="2667" dirty="0">
                 <a:latin typeface="Open Sans" panose="020B0606030504020204" pitchFamily="34" charset="0"/>
                 <a:ea typeface="Open Sans" panose="020B0606030504020204" pitchFamily="34" charset="0"/>
                 <a:cs typeface="Open Sans" panose="020B0606030504020204" pitchFamily="34" charset="0"/>
@@ -4591,7 +4149,7 @@
             </a:r>
           </a:p>
           <a:p>
-            <a:pPr marL="285750" indent="-285750" algn="just">
+            <a:pPr marL="380990" indent="-380990" algn="just">
               <a:lnSpc>
                 <a:spcPct val="110000"/>
               </a:lnSpc>
@@ -4599,7 +4157,7 @@
               <a:buChar char="•"/>
             </a:pPr>
             <a:r>
-              <a:rPr lang="en-US" dirty="0">
+              <a:rPr lang="en-US" sz="2667" dirty="0">
                 <a:latin typeface="Open Sans" panose="020B0606030504020204" pitchFamily="34" charset="0"/>
                 <a:ea typeface="Open Sans" panose="020B0606030504020204" pitchFamily="34" charset="0"/>
                 <a:cs typeface="Open Sans" panose="020B0606030504020204" pitchFamily="34" charset="0"/>
@@ -4625,8 +4183,8 @@
         </p:nvSpPr>
         <p:spPr bwMode="auto">
           <a:xfrm>
-            <a:off x="768353" y="4755723"/>
-            <a:ext cx="7268693" cy="582201"/>
+            <a:off x="713195" y="6551340"/>
+            <a:ext cx="9691591" cy="776268"/>
           </a:xfrm>
           <a:prstGeom prst="rect">
             <a:avLst/>
@@ -4640,18 +4198,18 @@
           </a:ln>
         </p:spPr>
         <p:txBody>
-          <a:bodyPr wrap="none" lIns="182880" tIns="48768" rIns="182880" bIns="45709" anchor="ctr" anchorCtr="0"/>
+          <a:bodyPr wrap="none" lIns="243840" tIns="65024" rIns="243840" bIns="60945" anchor="ctr" anchorCtr="0"/>
           <a:lstStyle>
             <a:defPPr>
               <a:defRPr kern="1200"/>
             </a:defPPr>
           </a:lstStyle>
           <a:p>
-            <a:pPr algn="ctr" defTabSz="3135215">
+            <a:pPr algn="ctr" defTabSz="4180182">
               <a:defRPr/>
             </a:pPr>
             <a:r>
-              <a:rPr lang="en-US" sz="2800" b="1" dirty="0">
+              <a:rPr lang="en-US" sz="3733" b="1" dirty="0">
                 <a:solidFill>
                   <a:schemeClr val="bg1"/>
                 </a:solidFill>
@@ -4679,8 +4237,8 @@
         </p:nvSpPr>
         <p:spPr bwMode="auto">
           <a:xfrm>
-            <a:off x="768353" y="9953058"/>
-            <a:ext cx="7268693" cy="2874633"/>
+            <a:off x="684499" y="14042418"/>
+            <a:ext cx="9691591" cy="3833422"/>
           </a:xfrm>
           <a:prstGeom prst="rect">
             <a:avLst/>
@@ -4698,7 +4256,7 @@
           </a:ln>
         </p:spPr>
         <p:txBody>
-          <a:bodyPr wrap="square" lIns="91440" tIns="91440" rIns="182880" bIns="91440">
+          <a:bodyPr wrap="square" lIns="121920" tIns="121920" rIns="243840" bIns="121920">
             <a:spAutoFit/>
           </a:bodyPr>
           <a:lstStyle>
@@ -4812,7 +4370,7 @@
             </a:lvl9pPr>
           </a:lstStyle>
           <a:p>
-            <a:pPr marL="285750" indent="-285750" algn="just">
+            <a:pPr marL="380990" indent="-380990" algn="just">
               <a:lnSpc>
                 <a:spcPct val="110000"/>
               </a:lnSpc>
@@ -4820,7 +4378,7 @@
               <a:buChar char="•"/>
             </a:pPr>
             <a:r>
-              <a:rPr lang="en-US" dirty="0">
+              <a:rPr lang="en-US" sz="2667" dirty="0">
                 <a:latin typeface="Open Sans" panose="020B0606030504020204" pitchFamily="34" charset="0"/>
                 <a:ea typeface="Open Sans" panose="020B0606030504020204" pitchFamily="34" charset="0"/>
                 <a:cs typeface="Open Sans" panose="020B0606030504020204" pitchFamily="34" charset="0"/>
@@ -4829,7 +4387,7 @@
             </a:r>
           </a:p>
           <a:p>
-            <a:pPr marL="285750" indent="-285750" algn="just">
+            <a:pPr marL="380990" indent="-380990" algn="just">
               <a:lnSpc>
                 <a:spcPct val="110000"/>
               </a:lnSpc>
@@ -4837,7 +4395,7 @@
               <a:buChar char="•"/>
             </a:pPr>
             <a:r>
-              <a:rPr lang="en-US" dirty="0">
+              <a:rPr lang="en-US" sz="2667" dirty="0">
                 <a:latin typeface="Open Sans" panose="020B0606030504020204" pitchFamily="34" charset="0"/>
                 <a:ea typeface="Open Sans" panose="020B0606030504020204" pitchFamily="34" charset="0"/>
                 <a:cs typeface="Open Sans" panose="020B0606030504020204" pitchFamily="34" charset="0"/>
@@ -4846,7 +4404,7 @@
             </a:r>
           </a:p>
           <a:p>
-            <a:pPr marL="285750" indent="-285750" algn="just">
+            <a:pPr marL="380990" indent="-380990" algn="just">
               <a:lnSpc>
                 <a:spcPct val="110000"/>
               </a:lnSpc>
@@ -4854,7 +4412,7 @@
               <a:buChar char="•"/>
             </a:pPr>
             <a:r>
-              <a:rPr lang="en-US" dirty="0">
+              <a:rPr lang="en-US" sz="2667" dirty="0">
                 <a:latin typeface="Open Sans" panose="020B0606030504020204" pitchFamily="34" charset="0"/>
                 <a:ea typeface="Open Sans" panose="020B0606030504020204" pitchFamily="34" charset="0"/>
                 <a:cs typeface="Open Sans" panose="020B0606030504020204" pitchFamily="34" charset="0"/>
@@ -4863,7 +4421,7 @@
             </a:r>
           </a:p>
           <a:p>
-            <a:pPr marL="285750" indent="-285750" algn="just">
+            <a:pPr marL="380990" indent="-380990" algn="just">
               <a:lnSpc>
                 <a:spcPct val="110000"/>
               </a:lnSpc>
@@ -4871,7 +4429,7 @@
               <a:buChar char="•"/>
             </a:pPr>
             <a:r>
-              <a:rPr lang="en-US" dirty="0">
+              <a:rPr lang="en-US" sz="2667" dirty="0">
                 <a:latin typeface="Open Sans" panose="020B0606030504020204" pitchFamily="34" charset="0"/>
                 <a:ea typeface="Open Sans" panose="020B0606030504020204" pitchFamily="34" charset="0"/>
                 <a:cs typeface="Open Sans" panose="020B0606030504020204" pitchFamily="34" charset="0"/>
@@ -4880,7 +4438,7 @@
             </a:r>
           </a:p>
           <a:p>
-            <a:pPr marL="285750" indent="-285750" algn="just">
+            <a:pPr marL="380990" indent="-380990" algn="just">
               <a:lnSpc>
                 <a:spcPct val="110000"/>
               </a:lnSpc>
@@ -4888,7 +4446,7 @@
               <a:buChar char="•"/>
             </a:pPr>
             <a:r>
-              <a:rPr lang="en-US" dirty="0">
+              <a:rPr lang="en-US" sz="2667" dirty="0">
                 <a:latin typeface="Open Sans" panose="020B0606030504020204" pitchFamily="34" charset="0"/>
                 <a:ea typeface="Open Sans" panose="020B0606030504020204" pitchFamily="34" charset="0"/>
                 <a:cs typeface="Open Sans" panose="020B0606030504020204" pitchFamily="34" charset="0"/>
@@ -4914,8 +4472,8 @@
         </p:nvSpPr>
         <p:spPr bwMode="auto">
           <a:xfrm>
-            <a:off x="768353" y="9135936"/>
-            <a:ext cx="7268693" cy="582201"/>
+            <a:off x="690290" y="12714933"/>
+            <a:ext cx="9691591" cy="776268"/>
           </a:xfrm>
           <a:prstGeom prst="rect">
             <a:avLst/>
@@ -4929,18 +4487,18 @@
           </a:ln>
         </p:spPr>
         <p:txBody>
-          <a:bodyPr wrap="none" lIns="182880" tIns="48768" rIns="182880" bIns="45709" anchor="ctr" anchorCtr="0"/>
+          <a:bodyPr wrap="none" lIns="243840" tIns="65024" rIns="243840" bIns="60945" anchor="ctr" anchorCtr="0"/>
           <a:lstStyle>
             <a:defPPr>
               <a:defRPr kern="1200"/>
             </a:defPPr>
           </a:lstStyle>
           <a:p>
-            <a:pPr algn="ctr" defTabSz="3135215">
+            <a:pPr algn="ctr" defTabSz="4180182">
               <a:defRPr/>
             </a:pPr>
             <a:r>
-              <a:rPr lang="en-US" sz="2800" b="1" dirty="0">
+              <a:rPr lang="en-US" sz="3733" b="1" dirty="0">
                 <a:solidFill>
                   <a:schemeClr val="bg1"/>
                 </a:solidFill>
@@ -4968,8 +4526,8 @@
         </p:nvSpPr>
         <p:spPr bwMode="auto">
           <a:xfrm>
-            <a:off x="24878419" y="17847956"/>
-            <a:ext cx="7268693" cy="1520416"/>
+            <a:off x="32178408" y="27013832"/>
+            <a:ext cx="10972800" cy="2027543"/>
           </a:xfrm>
           <a:prstGeom prst="rect">
             <a:avLst/>
@@ -4987,7 +4545,7 @@
           </a:ln>
         </p:spPr>
         <p:txBody>
-          <a:bodyPr wrap="square" lIns="91440" tIns="91440" rIns="91440" bIns="91440">
+          <a:bodyPr wrap="square" lIns="121920" tIns="121920" rIns="121920" bIns="121920">
             <a:spAutoFit/>
           </a:bodyPr>
           <a:lstStyle>
@@ -5101,7 +4659,7 @@
             </a:lvl9pPr>
           </a:lstStyle>
           <a:p>
-            <a:pPr marL="342900" indent="-342900" algn="just">
+            <a:pPr marL="457189" indent="-457189" algn="just">
               <a:lnSpc>
                 <a:spcPct val="110000"/>
               </a:lnSpc>
@@ -5109,7 +4667,7 @@
               <a:buChar char="•"/>
             </a:pPr>
             <a:r>
-              <a:rPr lang="en-US" dirty="0">
+              <a:rPr lang="en-US" sz="2667" dirty="0">
                 <a:latin typeface="Open Sans" panose="020B0606030504020204" pitchFamily="34" charset="0"/>
                 <a:ea typeface="Open Sans" panose="020B0606030504020204" pitchFamily="34" charset="0"/>
                 <a:cs typeface="Open Sans" panose="020B0606030504020204" pitchFamily="34" charset="0"/>
@@ -5118,7 +4676,7 @@
             </a:r>
           </a:p>
           <a:p>
-            <a:pPr marL="342900" indent="-342900" algn="just">
+            <a:pPr marL="457189" indent="-457189" algn="just">
               <a:lnSpc>
                 <a:spcPct val="110000"/>
               </a:lnSpc>
@@ -5126,7 +4684,7 @@
               <a:buChar char="•"/>
             </a:pPr>
             <a:r>
-              <a:rPr lang="en-US" dirty="0">
+              <a:rPr lang="en-US" sz="2667" dirty="0">
                 <a:latin typeface="Open Sans" panose="020B0606030504020204" pitchFamily="34" charset="0"/>
                 <a:ea typeface="Open Sans" panose="020B0606030504020204" pitchFamily="34" charset="0"/>
                 <a:cs typeface="Open Sans" panose="020B0606030504020204" pitchFamily="34" charset="0"/>
@@ -5135,7 +4693,7 @@
             </a:r>
           </a:p>
           <a:p>
-            <a:pPr marL="342900" indent="-342900" algn="just">
+            <a:pPr marL="457189" indent="-457189" algn="just">
               <a:lnSpc>
                 <a:spcPct val="110000"/>
               </a:lnSpc>
@@ -5143,7 +4701,7 @@
               <a:buChar char="•"/>
             </a:pPr>
             <a:r>
-              <a:rPr lang="en-US" dirty="0">
+              <a:rPr lang="en-US" sz="2667" dirty="0">
                 <a:latin typeface="Open Sans" panose="020B0606030504020204" pitchFamily="34" charset="0"/>
                 <a:ea typeface="Open Sans" panose="020B0606030504020204" pitchFamily="34" charset="0"/>
                 <a:cs typeface="Open Sans" panose="020B0606030504020204" pitchFamily="34" charset="0"/>
@@ -5152,7 +4710,7 @@
             </a:r>
           </a:p>
           <a:p>
-            <a:pPr marL="342900" indent="-342900" algn="just">
+            <a:pPr marL="457189" indent="-457189" algn="just">
               <a:lnSpc>
                 <a:spcPct val="110000"/>
               </a:lnSpc>
@@ -5160,7 +4718,7 @@
               <a:buChar char="•"/>
             </a:pPr>
             <a:r>
-              <a:rPr lang="en-US" dirty="0">
+              <a:rPr lang="en-US" sz="2667" dirty="0">
                 <a:latin typeface="Open Sans" panose="020B0606030504020204" pitchFamily="34" charset="0"/>
                 <a:ea typeface="Open Sans" panose="020B0606030504020204" pitchFamily="34" charset="0"/>
                 <a:cs typeface="Open Sans" panose="020B0606030504020204" pitchFamily="34" charset="0"/>
@@ -5186,8 +4744,8 @@
         </p:nvSpPr>
         <p:spPr bwMode="auto">
           <a:xfrm>
-            <a:off x="24878419" y="17159259"/>
-            <a:ext cx="7268693" cy="582201"/>
+            <a:off x="32178408" y="26040073"/>
+            <a:ext cx="10972800" cy="776268"/>
           </a:xfrm>
           <a:prstGeom prst="rect">
             <a:avLst/>
@@ -5201,18 +4759,18 @@
           </a:ln>
         </p:spPr>
         <p:txBody>
-          <a:bodyPr wrap="none" lIns="182880" tIns="48768" rIns="182880" bIns="45709" anchor="ctr" anchorCtr="0"/>
+          <a:bodyPr wrap="none" lIns="243840" tIns="65024" rIns="243840" bIns="60945" anchor="ctr" anchorCtr="0"/>
           <a:lstStyle>
             <a:defPPr>
               <a:defRPr kern="1200"/>
             </a:defPPr>
           </a:lstStyle>
           <a:p>
-            <a:pPr algn="ctr" defTabSz="3135215">
+            <a:pPr algn="ctr" defTabSz="4180182">
               <a:defRPr/>
             </a:pPr>
             <a:r>
-              <a:rPr lang="en-US" sz="2800" b="1" dirty="0">
+              <a:rPr lang="en-US" sz="3733" b="1" dirty="0">
                 <a:solidFill>
                   <a:schemeClr val="bg1"/>
                 </a:solidFill>
@@ -5240,8 +4798,8 @@
         </p:nvSpPr>
         <p:spPr bwMode="auto">
           <a:xfrm>
-            <a:off x="24879749" y="20273962"/>
-            <a:ext cx="7268693" cy="843308"/>
+            <a:off x="32178408" y="30445693"/>
+            <a:ext cx="10972800" cy="1124603"/>
           </a:xfrm>
           <a:prstGeom prst="rect">
             <a:avLst/>
@@ -5259,7 +4817,7 @@
           </a:ln>
         </p:spPr>
         <p:txBody>
-          <a:bodyPr wrap="square" lIns="91440" tIns="91440" rIns="91440" bIns="91440">
+          <a:bodyPr wrap="square" lIns="121920" tIns="121920" rIns="121920" bIns="121920">
             <a:spAutoFit/>
           </a:bodyPr>
           <a:lstStyle>
@@ -5379,7 +4937,7 @@
               </a:lnSpc>
             </a:pPr>
             <a:r>
-              <a:rPr lang="en-US" dirty="0">
+              <a:rPr lang="en-US" sz="2667" dirty="0">
                 <a:latin typeface="Open Sans" panose="020B0606030504020204" pitchFamily="34" charset="0"/>
                 <a:ea typeface="Open Sans" panose="020B0606030504020204" pitchFamily="34" charset="0"/>
                 <a:cs typeface="Open Sans" panose="020B0606030504020204" pitchFamily="34" charset="0"/>
@@ -5405,8 +4963,8 @@
         </p:nvSpPr>
         <p:spPr bwMode="auto">
           <a:xfrm>
-            <a:off x="24878694" y="19581363"/>
-            <a:ext cx="7268693" cy="582201"/>
+            <a:off x="32178408" y="29471934"/>
+            <a:ext cx="10972800" cy="776268"/>
           </a:xfrm>
           <a:prstGeom prst="rect">
             <a:avLst/>
@@ -5420,18 +4978,18 @@
           </a:ln>
         </p:spPr>
         <p:txBody>
-          <a:bodyPr wrap="none" lIns="182880" tIns="48768" rIns="182880" bIns="45709" anchor="ctr" anchorCtr="0"/>
+          <a:bodyPr wrap="none" lIns="243840" tIns="65024" rIns="243840" bIns="60945" anchor="ctr" anchorCtr="0"/>
           <a:lstStyle>
             <a:defPPr>
               <a:defRPr kern="1200"/>
             </a:defPPr>
           </a:lstStyle>
           <a:p>
-            <a:pPr algn="ctr" defTabSz="3135215">
+            <a:pPr algn="ctr" defTabSz="4180182">
               <a:defRPr/>
             </a:pPr>
             <a:r>
-              <a:rPr lang="en-US" sz="2800" b="1">
+              <a:rPr lang="en-US" sz="3733" b="1">
                 <a:solidFill>
                   <a:schemeClr val="bg1"/>
                 </a:solidFill>
@@ -5459,8 +5017,8 @@
         </p:nvSpPr>
         <p:spPr bwMode="auto">
           <a:xfrm>
-            <a:off x="24878417" y="13741649"/>
-            <a:ext cx="7268693" cy="1181862"/>
+            <a:off x="32178408" y="20692277"/>
+            <a:ext cx="10972800" cy="1576072"/>
           </a:xfrm>
           <a:prstGeom prst="rect">
             <a:avLst/>
@@ -5478,7 +5036,7 @@
           </a:ln>
         </p:spPr>
         <p:txBody>
-          <a:bodyPr wrap="square" lIns="91440" tIns="91440" rIns="91440" bIns="91440">
+          <a:bodyPr wrap="square" lIns="121920" tIns="121920" rIns="121920" bIns="121920">
             <a:spAutoFit/>
           </a:bodyPr>
           <a:lstStyle>
@@ -5592,7 +5150,7 @@
             </a:lvl9pPr>
           </a:lstStyle>
           <a:p>
-            <a:pPr marL="342900" indent="-342900" algn="just">
+            <a:pPr marL="457189" indent="-457189" algn="just">
               <a:lnSpc>
                 <a:spcPct val="110000"/>
               </a:lnSpc>
@@ -5600,7 +5158,7 @@
               <a:buChar char="•"/>
             </a:pPr>
             <a:r>
-              <a:rPr lang="en-US" dirty="0">
+              <a:rPr lang="en-US" sz="2667" dirty="0">
                 <a:latin typeface="Open Sans" panose="020B0606030504020204" pitchFamily="34" charset="0"/>
                 <a:ea typeface="Open Sans" panose="020B0606030504020204" pitchFamily="34" charset="0"/>
                 <a:cs typeface="Open Sans" panose="020B0606030504020204" pitchFamily="34" charset="0"/>
@@ -5609,7 +5167,7 @@
             </a:r>
           </a:p>
           <a:p>
-            <a:pPr marL="342900" indent="-342900" algn="just">
+            <a:pPr marL="457189" indent="-457189" algn="just">
               <a:lnSpc>
                 <a:spcPct val="110000"/>
               </a:lnSpc>
@@ -5617,16 +5175,16 @@
               <a:buChar char="•"/>
             </a:pPr>
             <a:r>
-              <a:rPr lang="en-US" dirty="0">
+              <a:rPr lang="en-US" sz="2667" dirty="0">
                 <a:latin typeface="Open Sans" panose="020B0606030504020204" pitchFamily="34" charset="0"/>
                 <a:ea typeface="Open Sans" panose="020B0606030504020204" pitchFamily="34" charset="0"/>
                 <a:cs typeface="Open Sans" panose="020B0606030504020204" pitchFamily="34" charset="0"/>
               </a:rPr>
-              <a:t>Simplifies operations with infinite decimals.</a:t>
-            </a:r>
-          </a:p>
-          <a:p>
-            <a:pPr marL="342900" indent="-342900" algn="just">
+              <a:t>Simplifies arithmetic with infinite decimals.</a:t>
+            </a:r>
+          </a:p>
+          <a:p>
+            <a:pPr marL="457189" indent="-457189" algn="just">
               <a:lnSpc>
                 <a:spcPct val="110000"/>
               </a:lnSpc>
@@ -5634,7 +5192,7 @@
               <a:buChar char="•"/>
             </a:pPr>
             <a:r>
-              <a:rPr lang="en-US" dirty="0">
+              <a:rPr lang="en-US" sz="2667" dirty="0">
                 <a:latin typeface="Open Sans" panose="020B0606030504020204" pitchFamily="34" charset="0"/>
                 <a:ea typeface="Open Sans" panose="020B0606030504020204" pitchFamily="34" charset="0"/>
                 <a:cs typeface="Open Sans" panose="020B0606030504020204" pitchFamily="34" charset="0"/>
@@ -5660,8 +5218,8 @@
         </p:nvSpPr>
         <p:spPr bwMode="auto">
           <a:xfrm>
-            <a:off x="24905311" y="13052398"/>
-            <a:ext cx="7268693" cy="582201"/>
+            <a:off x="32178408" y="19749577"/>
+            <a:ext cx="10972800" cy="776268"/>
           </a:xfrm>
           <a:prstGeom prst="rect">
             <a:avLst/>
@@ -5675,18 +5233,18 @@
           </a:ln>
         </p:spPr>
         <p:txBody>
-          <a:bodyPr wrap="none" lIns="182880" tIns="48768" rIns="182880" bIns="45709" anchor="ctr" anchorCtr="0"/>
+          <a:bodyPr wrap="none" lIns="243840" tIns="65024" rIns="243840" bIns="60945" anchor="ctr" anchorCtr="0"/>
           <a:lstStyle>
             <a:defPPr>
               <a:defRPr kern="1200"/>
             </a:defPPr>
           </a:lstStyle>
           <a:p>
-            <a:pPr algn="ctr" defTabSz="3135215">
+            <a:pPr algn="ctr" defTabSz="4180182">
               <a:defRPr/>
             </a:pPr>
             <a:r>
-              <a:rPr lang="en-US" sz="2800" b="1" dirty="0">
+              <a:rPr lang="en-US" sz="3733" b="1" dirty="0">
                 <a:solidFill>
                   <a:schemeClr val="bg1"/>
                 </a:solidFill>
@@ -5714,8 +5272,8 @@
         </p:nvSpPr>
         <p:spPr bwMode="auto">
           <a:xfrm>
-            <a:off x="24878419" y="15802465"/>
-            <a:ext cx="7268693" cy="1181862"/>
+            <a:off x="32178408" y="23665520"/>
+            <a:ext cx="10972800" cy="1576072"/>
           </a:xfrm>
           <a:prstGeom prst="rect">
             <a:avLst/>
@@ -5733,7 +5291,7 @@
           </a:ln>
         </p:spPr>
         <p:txBody>
-          <a:bodyPr wrap="square" lIns="91440" tIns="91440" rIns="91440" bIns="91440">
+          <a:bodyPr wrap="square" lIns="121920" tIns="121920" rIns="121920" bIns="121920">
             <a:spAutoFit/>
           </a:bodyPr>
           <a:lstStyle>
@@ -5847,7 +5405,7 @@
             </a:lvl9pPr>
           </a:lstStyle>
           <a:p>
-            <a:pPr marL="342900" indent="-342900" algn="just">
+            <a:pPr marL="457189" indent="-457189" algn="just">
               <a:lnSpc>
                 <a:spcPct val="110000"/>
               </a:lnSpc>
@@ -5855,7 +5413,7 @@
               <a:buChar char="•"/>
             </a:pPr>
             <a:r>
-              <a:rPr lang="en-US" dirty="0">
+              <a:rPr lang="en-US" sz="2667" dirty="0">
                 <a:latin typeface="Open Sans" panose="020B0606030504020204" pitchFamily="34" charset="0"/>
                 <a:ea typeface="Open Sans" panose="020B0606030504020204" pitchFamily="34" charset="0"/>
                 <a:cs typeface="Open Sans" panose="020B0606030504020204" pitchFamily="34" charset="0"/>
@@ -5864,7 +5422,7 @@
             </a:r>
           </a:p>
           <a:p>
-            <a:pPr marL="342900" indent="-342900" algn="just">
+            <a:pPr marL="457189" indent="-457189" algn="just">
               <a:lnSpc>
                 <a:spcPct val="110000"/>
               </a:lnSpc>
@@ -5872,7 +5430,7 @@
               <a:buChar char="•"/>
             </a:pPr>
             <a:r>
-              <a:rPr lang="en-US" dirty="0">
+              <a:rPr lang="en-US" sz="2667" dirty="0">
                 <a:latin typeface="Open Sans" panose="020B0606030504020204" pitchFamily="34" charset="0"/>
                 <a:ea typeface="Open Sans" panose="020B0606030504020204" pitchFamily="34" charset="0"/>
                 <a:cs typeface="Open Sans" panose="020B0606030504020204" pitchFamily="34" charset="0"/>
@@ -5898,8 +5456,8 @@
         </p:nvSpPr>
         <p:spPr bwMode="auto">
           <a:xfrm>
-            <a:off x="24878418" y="15113768"/>
-            <a:ext cx="7268693" cy="582201"/>
+            <a:off x="32205207" y="22720286"/>
+            <a:ext cx="10972800" cy="776268"/>
           </a:xfrm>
           <a:prstGeom prst="rect">
             <a:avLst/>
@@ -5913,18 +5471,18 @@
           </a:ln>
         </p:spPr>
         <p:txBody>
-          <a:bodyPr wrap="none" lIns="182880" tIns="48768" rIns="182880" bIns="45709" anchor="ctr" anchorCtr="0"/>
+          <a:bodyPr wrap="none" lIns="243840" tIns="65024" rIns="243840" bIns="60945" anchor="ctr" anchorCtr="0"/>
           <a:lstStyle>
             <a:defPPr>
               <a:defRPr kern="1200"/>
             </a:defPPr>
           </a:lstStyle>
           <a:p>
-            <a:pPr algn="ctr" defTabSz="3135215">
+            <a:pPr algn="ctr" defTabSz="4180182">
               <a:defRPr/>
             </a:pPr>
             <a:r>
-              <a:rPr lang="en-US" sz="2800" b="1">
+              <a:rPr lang="en-US" sz="3733" b="1" dirty="0">
                 <a:solidFill>
                   <a:schemeClr val="bg1"/>
                 </a:solidFill>
@@ -5936,54 +5494,6 @@
           </a:p>
         </p:txBody>
       </p:sp>
-      <p:pic>
-        <p:nvPicPr>
-          <p:cNvPr id="2" name="Picture 2" descr="Southern Adventist University | Choose Chattanooga®">
-            <a:extLst>
-              <a:ext uri="{FF2B5EF4-FFF2-40B4-BE49-F238E27FC236}">
-                <a16:creationId xmlns:a16="http://schemas.microsoft.com/office/drawing/2014/main" id="{3994A800-1F1F-B490-6674-C4B7A87127BA}"/>
-              </a:ext>
-            </a:extLst>
-          </p:cNvPr>
-          <p:cNvPicPr>
-            <a:picLocks noChangeAspect="1" noChangeArrowheads="1"/>
-          </p:cNvPicPr>
-          <p:nvPr/>
-        </p:nvPicPr>
-        <p:blipFill>
-          <a:blip r:embed="rId2">
-            <a:biLevel thresh="25000"/>
-            <a:extLst>
-              <a:ext uri="{28A0092B-C50C-407E-A947-70E740481C1C}">
-                <a14:useLocalDpi xmlns:a14="http://schemas.microsoft.com/office/drawing/2010/main" val="0"/>
-              </a:ext>
-            </a:extLst>
-          </a:blip>
-          <a:srcRect/>
-          <a:stretch>
-            <a:fillRect/>
-          </a:stretch>
-        </p:blipFill>
-        <p:spPr bwMode="auto">
-          <a:xfrm>
-            <a:off x="768353" y="100628"/>
-            <a:ext cx="4114800" cy="4114800"/>
-          </a:xfrm>
-          <a:prstGeom prst="rect">
-            <a:avLst/>
-          </a:prstGeom>
-          <a:noFill/>
-          <a:extLst>
-            <a:ext uri="{909E8E84-426E-40DD-AFC4-6F175D3DCCD1}">
-              <a14:hiddenFill xmlns:a14="http://schemas.microsoft.com/office/drawing/2010/main">
-                <a:solidFill>
-                  <a:srgbClr val="FFFFFF"/>
-                </a:solidFill>
-              </a14:hiddenFill>
-            </a:ext>
-          </a:extLst>
-        </p:spPr>
-      </p:pic>
       <p:sp>
         <p:nvSpPr>
           <p:cNvPr id="20" name="TextBox 19">
@@ -6000,8 +5510,8 @@
         </p:nvSpPr>
         <p:spPr bwMode="auto">
           <a:xfrm>
-            <a:off x="771013" y="14031188"/>
-            <a:ext cx="7268693" cy="3215432"/>
+            <a:off x="713193" y="19754542"/>
+            <a:ext cx="9691591" cy="4287777"/>
           </a:xfrm>
           <a:prstGeom prst="rect">
             <a:avLst/>
@@ -6019,7 +5529,7 @@
           </a:ln>
         </p:spPr>
         <p:txBody>
-          <a:bodyPr wrap="square" lIns="91440" tIns="91440" rIns="182880" bIns="91440">
+          <a:bodyPr wrap="square" lIns="121920" tIns="121920" rIns="243840" bIns="121920">
             <a:spAutoFit/>
           </a:bodyPr>
           <a:lstStyle>
@@ -6139,7 +5649,7 @@
               </a:lnSpc>
             </a:pPr>
             <a:r>
-              <a:rPr lang="en-US" b="1" dirty="0">
+              <a:rPr lang="en-US" sz="2667" b="1" dirty="0">
                 <a:latin typeface="Open Sans" panose="020B0606030504020204" pitchFamily="34" charset="0"/>
                 <a:ea typeface="Open Sans" panose="020B0606030504020204" pitchFamily="34" charset="0"/>
                 <a:cs typeface="Open Sans" panose="020B0606030504020204" pitchFamily="34" charset="0"/>
@@ -6153,7 +5663,7 @@
                 <a:spcPct val="110000"/>
               </a:lnSpc>
             </a:pPr>
-            <a:endParaRPr lang="en-US" b="1" dirty="0">
+            <a:endParaRPr lang="en-US" sz="2667" b="1" dirty="0">
               <a:latin typeface="Open Sans" panose="020B0606030504020204" pitchFamily="34" charset="0"/>
               <a:ea typeface="Open Sans" panose="020B0606030504020204" pitchFamily="34" charset="0"/>
               <a:cs typeface="Open Sans" panose="020B0606030504020204" pitchFamily="34" charset="0"/>
@@ -6165,7 +5675,7 @@
                 <a:spcPct val="110000"/>
               </a:lnSpc>
             </a:pPr>
-            <a:endParaRPr lang="en-US" b="1" dirty="0">
+            <a:endParaRPr lang="en-US" sz="2667" b="1" dirty="0">
               <a:latin typeface="Open Sans" panose="020B0606030504020204" pitchFamily="34" charset="0"/>
               <a:ea typeface="Open Sans" panose="020B0606030504020204" pitchFamily="34" charset="0"/>
               <a:cs typeface="Open Sans" panose="020B0606030504020204" pitchFamily="34" charset="0"/>
@@ -6177,7 +5687,7 @@
                 <a:spcPct val="110000"/>
               </a:lnSpc>
             </a:pPr>
-            <a:endParaRPr lang="en-US" b="0" i="1" dirty="0">
+            <a:endParaRPr lang="en-US" sz="2667" i="1" dirty="0">
               <a:latin typeface="Cambria Math" panose="02040503050406030204" pitchFamily="18" charset="0"/>
               <a:ea typeface="Open Sans" panose="020B0606030504020204" pitchFamily="34" charset="0"/>
               <a:cs typeface="Open Sans" panose="020B0606030504020204" pitchFamily="34" charset="0"/>
@@ -6189,7 +5699,7 @@
                 <a:spcPct val="110000"/>
               </a:lnSpc>
             </a:pPr>
-            <a:endParaRPr lang="en-US" i="1" dirty="0">
+            <a:endParaRPr lang="en-US" sz="2667" i="1" dirty="0">
               <a:latin typeface="Cambria Math" panose="02040503050406030204" pitchFamily="18" charset="0"/>
               <a:ea typeface="Open Sans" panose="020B0606030504020204" pitchFamily="34" charset="0"/>
               <a:cs typeface="Open Sans" panose="020B0606030504020204" pitchFamily="34" charset="0"/>
@@ -6201,7 +5711,7 @@
                 <a:spcPct val="110000"/>
               </a:lnSpc>
             </a:pPr>
-            <a:endParaRPr lang="en-US" b="0" i="1" dirty="0">
+            <a:endParaRPr lang="en-US" sz="2667" i="1" dirty="0">
               <a:latin typeface="Cambria Math" panose="02040503050406030204" pitchFamily="18" charset="0"/>
               <a:ea typeface="Open Sans" panose="020B0606030504020204" pitchFamily="34" charset="0"/>
               <a:cs typeface="Open Sans" panose="020B0606030504020204" pitchFamily="34" charset="0"/>
@@ -6213,7 +5723,7 @@
                 <a:spcPct val="110000"/>
               </a:lnSpc>
             </a:pPr>
-            <a:endParaRPr lang="en-US" i="1" dirty="0">
+            <a:endParaRPr lang="en-US" sz="2667" i="1" dirty="0">
               <a:latin typeface="Cambria Math" panose="02040503050406030204" pitchFamily="18" charset="0"/>
               <a:ea typeface="Open Sans" panose="020B0606030504020204" pitchFamily="34" charset="0"/>
               <a:cs typeface="Open Sans" panose="020B0606030504020204" pitchFamily="34" charset="0"/>
@@ -6225,7 +5735,7 @@
                 <a:spcPct val="110000"/>
               </a:lnSpc>
             </a:pPr>
-            <a:endParaRPr lang="en-US" b="0" i="1" dirty="0">
+            <a:endParaRPr lang="en-US" sz="2667" i="1" dirty="0">
               <a:latin typeface="Cambria Math" panose="02040503050406030204" pitchFamily="18" charset="0"/>
               <a:ea typeface="Open Sans" panose="020B0606030504020204" pitchFamily="34" charset="0"/>
               <a:cs typeface="Open Sans" panose="020B0606030504020204" pitchFamily="34" charset="0"/>
@@ -6237,7 +5747,7 @@
                 <a:spcPct val="110000"/>
               </a:lnSpc>
             </a:pPr>
-            <a:endParaRPr lang="en-US" b="0" i="1" dirty="0">
+            <a:endParaRPr lang="en-US" sz="2667" i="1" dirty="0">
               <a:latin typeface="Cambria Math" panose="02040503050406030204" pitchFamily="18" charset="0"/>
               <a:ea typeface="Open Sans" panose="020B0606030504020204" pitchFamily="34" charset="0"/>
               <a:cs typeface="Open Sans" panose="020B0606030504020204" pitchFamily="34" charset="0"/>
@@ -6251,6 +5761,1038 @@
             <a:extLst>
               <a:ext uri="{FF2B5EF4-FFF2-40B4-BE49-F238E27FC236}">
                 <a16:creationId xmlns:a16="http://schemas.microsoft.com/office/drawing/2014/main" id="{BA57DD92-2174-13DF-9BCF-253E4BFA3282}"/>
+              </a:ext>
+            </a:extLst>
+          </p:cNvPr>
+          <p:cNvPicPr>
+            <a:picLocks noChangeAspect="1"/>
+          </p:cNvPicPr>
+          <p:nvPr/>
+        </p:nvPicPr>
+        <p:blipFill>
+          <a:blip r:embed="rId2">
+            <a:extLst>
+              <a:ext uri="{28A0092B-C50C-407E-A947-70E740481C1C}">
+                <a14:useLocalDpi xmlns:a14="http://schemas.microsoft.com/office/drawing/2010/main" val="0"/>
+              </a:ext>
+            </a:extLst>
+          </a:blip>
+          <a:stretch>
+            <a:fillRect/>
+          </a:stretch>
+        </p:blipFill>
+        <p:spPr>
+          <a:xfrm>
+            <a:off x="3140504" y="20746301"/>
+            <a:ext cx="4836965" cy="992740"/>
+          </a:xfrm>
+          <a:prstGeom prst="rect">
+            <a:avLst/>
+          </a:prstGeom>
+        </p:spPr>
+      </p:pic>
+      <p:sp>
+        <p:nvSpPr>
+          <p:cNvPr id="11" name="TextBox 10">
+            <a:extLst>
+              <a:ext uri="{FF2B5EF4-FFF2-40B4-BE49-F238E27FC236}">
+                <a16:creationId xmlns:a16="http://schemas.microsoft.com/office/drawing/2014/main" id="{C7BDF367-08F0-DF9E-D264-4756264A94FE}"/>
+              </a:ext>
+            </a:extLst>
+          </p:cNvPr>
+          <p:cNvSpPr txBox="1">
+            <a:spLocks noChangeArrowheads="1"/>
+          </p:cNvSpPr>
+          <p:nvPr/>
+        </p:nvSpPr>
+        <p:spPr bwMode="auto">
+          <a:xfrm>
+            <a:off x="684499" y="25718136"/>
+            <a:ext cx="9691591" cy="5852160"/>
+          </a:xfrm>
+          <a:prstGeom prst="rect">
+            <a:avLst/>
+          </a:prstGeom>
+          <a:solidFill>
+            <a:schemeClr val="bg1"/>
+          </a:solidFill>
+          <a:ln w="9525">
+            <a:solidFill>
+              <a:srgbClr val="000000"/>
+            </a:solidFill>
+            <a:miter lim="800000"/>
+            <a:headEnd/>
+            <a:tailEnd/>
+          </a:ln>
+        </p:spPr>
+        <p:txBody>
+          <a:bodyPr wrap="square" lIns="121920" tIns="121920" rIns="121920" bIns="121920">
+            <a:spAutoFit/>
+          </a:bodyPr>
+          <a:lstStyle>
+            <a:defPPr>
+              <a:defRPr kern="1200"/>
+            </a:defPPr>
+            <a:lvl1pPr eaLnBrk="0" hangingPunct="0">
+              <a:defRPr sz="2000">
+                <a:solidFill>
+                  <a:schemeClr val="tx1"/>
+                </a:solidFill>
+                <a:latin typeface="Arial"/>
+                <a:ea typeface="ＭＳ Ｐゴシック" pitchFamily="-106" charset="-128"/>
+              </a:defRPr>
+            </a:lvl1pPr>
+            <a:lvl2pPr eaLnBrk="0" hangingPunct="0">
+              <a:defRPr sz="2000">
+                <a:solidFill>
+                  <a:schemeClr val="tx1"/>
+                </a:solidFill>
+                <a:latin typeface="Arial"/>
+                <a:ea typeface="ＭＳ Ｐゴシック" pitchFamily="-106" charset="-128"/>
+              </a:defRPr>
+            </a:lvl2pPr>
+            <a:lvl3pPr marL="1143000" indent="-228600" eaLnBrk="0" hangingPunct="0">
+              <a:defRPr sz="2000">
+                <a:solidFill>
+                  <a:schemeClr val="tx1"/>
+                </a:solidFill>
+                <a:latin typeface="Arial"/>
+                <a:ea typeface="ＭＳ Ｐゴシック" pitchFamily="-106" charset="-128"/>
+              </a:defRPr>
+            </a:lvl3pPr>
+            <a:lvl4pPr marL="1600200" indent="-228600" eaLnBrk="0" hangingPunct="0">
+              <a:defRPr sz="2000">
+                <a:solidFill>
+                  <a:schemeClr val="tx1"/>
+                </a:solidFill>
+                <a:latin typeface="Arial"/>
+                <a:ea typeface="ＭＳ Ｐゴシック" pitchFamily="-106" charset="-128"/>
+              </a:defRPr>
+            </a:lvl4pPr>
+            <a:lvl5pPr marL="2057400" indent="-228600" eaLnBrk="0" hangingPunct="0">
+              <a:defRPr sz="2000">
+                <a:solidFill>
+                  <a:schemeClr val="tx1"/>
+                </a:solidFill>
+                <a:latin typeface="Arial"/>
+                <a:ea typeface="ＭＳ Ｐゴシック" pitchFamily="-106" charset="-128"/>
+              </a:defRPr>
+            </a:lvl5pPr>
+            <a:lvl6pPr marL="2514600" indent="-228600" eaLnBrk="0" fontAlgn="base" hangingPunct="0">
+              <a:spcBef>
+                <a:spcPct val="0"/>
+              </a:spcBef>
+              <a:spcAft>
+                <a:spcPct val="0"/>
+              </a:spcAft>
+              <a:defRPr sz="2000">
+                <a:solidFill>
+                  <a:schemeClr val="tx1"/>
+                </a:solidFill>
+                <a:latin typeface="Arial"/>
+                <a:ea typeface="ＭＳ Ｐゴシック" pitchFamily="-106" charset="-128"/>
+              </a:defRPr>
+            </a:lvl6pPr>
+            <a:lvl7pPr marL="2971800" indent="-228600" eaLnBrk="0" fontAlgn="base" hangingPunct="0">
+              <a:spcBef>
+                <a:spcPct val="0"/>
+              </a:spcBef>
+              <a:spcAft>
+                <a:spcPct val="0"/>
+              </a:spcAft>
+              <a:defRPr sz="2000">
+                <a:solidFill>
+                  <a:schemeClr val="tx1"/>
+                </a:solidFill>
+                <a:latin typeface="Arial"/>
+                <a:ea typeface="ＭＳ Ｐゴシック" pitchFamily="-106" charset="-128"/>
+              </a:defRPr>
+            </a:lvl7pPr>
+            <a:lvl8pPr marL="3429000" indent="-228600" eaLnBrk="0" fontAlgn="base" hangingPunct="0">
+              <a:spcBef>
+                <a:spcPct val="0"/>
+              </a:spcBef>
+              <a:spcAft>
+                <a:spcPct val="0"/>
+              </a:spcAft>
+              <a:defRPr sz="2000">
+                <a:solidFill>
+                  <a:schemeClr val="tx1"/>
+                </a:solidFill>
+                <a:latin typeface="Arial"/>
+                <a:ea typeface="ＭＳ Ｐゴシック" pitchFamily="-106" charset="-128"/>
+              </a:defRPr>
+            </a:lvl8pPr>
+            <a:lvl9pPr marL="3886200" indent="-228600" eaLnBrk="0" fontAlgn="base" hangingPunct="0">
+              <a:spcBef>
+                <a:spcPct val="0"/>
+              </a:spcBef>
+              <a:spcAft>
+                <a:spcPct val="0"/>
+              </a:spcAft>
+              <a:defRPr sz="2000">
+                <a:solidFill>
+                  <a:schemeClr val="tx1"/>
+                </a:solidFill>
+                <a:latin typeface="Arial"/>
+                <a:ea typeface="ＭＳ Ｐゴシック" pitchFamily="-106" charset="-128"/>
+              </a:defRPr>
+            </a:lvl9pPr>
+          </a:lstStyle>
+          <a:p>
+            <a:pPr algn="just">
+              <a:lnSpc>
+                <a:spcPct val="110000"/>
+              </a:lnSpc>
+            </a:pPr>
+            <a:r>
+              <a:rPr lang="en-US" sz="2667" b="1" dirty="0">
+                <a:latin typeface="Open Sans" panose="020B0606030504020204" pitchFamily="34" charset="0"/>
+                <a:ea typeface="Open Sans" panose="020B0606030504020204" pitchFamily="34" charset="0"/>
+                <a:cs typeface="Open Sans" panose="020B0606030504020204" pitchFamily="34" charset="0"/>
+              </a:rPr>
+              <a:t>Addition Examples:</a:t>
+            </a:r>
+          </a:p>
+          <a:p>
+            <a:pPr algn="just">
+              <a:lnSpc>
+                <a:spcPct val="110000"/>
+              </a:lnSpc>
+            </a:pPr>
+            <a:endParaRPr lang="en-US" sz="2667" b="1" dirty="0">
+              <a:latin typeface="Open Sans" panose="020B0606030504020204" pitchFamily="34" charset="0"/>
+              <a:ea typeface="Open Sans" panose="020B0606030504020204" pitchFamily="34" charset="0"/>
+              <a:cs typeface="Open Sans" panose="020B0606030504020204" pitchFamily="34" charset="0"/>
+            </a:endParaRPr>
+          </a:p>
+          <a:p>
+            <a:pPr algn="just">
+              <a:lnSpc>
+                <a:spcPct val="110000"/>
+              </a:lnSpc>
+            </a:pPr>
+            <a:endParaRPr lang="en-US" sz="2667" b="1" dirty="0">
+              <a:latin typeface="Open Sans" panose="020B0606030504020204" pitchFamily="34" charset="0"/>
+              <a:ea typeface="Open Sans" panose="020B0606030504020204" pitchFamily="34" charset="0"/>
+              <a:cs typeface="Open Sans" panose="020B0606030504020204" pitchFamily="34" charset="0"/>
+            </a:endParaRPr>
+          </a:p>
+          <a:p>
+            <a:pPr algn="just">
+              <a:lnSpc>
+                <a:spcPct val="110000"/>
+              </a:lnSpc>
+            </a:pPr>
+            <a:endParaRPr lang="en-US" sz="2667" b="1" dirty="0">
+              <a:latin typeface="Open Sans" panose="020B0606030504020204" pitchFamily="34" charset="0"/>
+              <a:ea typeface="Open Sans" panose="020B0606030504020204" pitchFamily="34" charset="0"/>
+              <a:cs typeface="Open Sans" panose="020B0606030504020204" pitchFamily="34" charset="0"/>
+            </a:endParaRPr>
+          </a:p>
+          <a:p>
+            <a:pPr algn="just">
+              <a:lnSpc>
+                <a:spcPct val="110000"/>
+              </a:lnSpc>
+            </a:pPr>
+            <a:endParaRPr lang="en-US" sz="2667" i="1" dirty="0">
+              <a:latin typeface="Cambria Math" panose="02040503050406030204" pitchFamily="18" charset="0"/>
+              <a:ea typeface="Open Sans" panose="020B0606030504020204" pitchFamily="34" charset="0"/>
+              <a:cs typeface="Open Sans" panose="020B0606030504020204" pitchFamily="34" charset="0"/>
+            </a:endParaRPr>
+          </a:p>
+          <a:p>
+            <a:pPr algn="just">
+              <a:lnSpc>
+                <a:spcPct val="110000"/>
+              </a:lnSpc>
+            </a:pPr>
+            <a:endParaRPr lang="en-US" sz="2667" i="1" dirty="0">
+              <a:latin typeface="Cambria Math" panose="02040503050406030204" pitchFamily="18" charset="0"/>
+              <a:ea typeface="Open Sans" panose="020B0606030504020204" pitchFamily="34" charset="0"/>
+              <a:cs typeface="Open Sans" panose="020B0606030504020204" pitchFamily="34" charset="0"/>
+            </a:endParaRPr>
+          </a:p>
+          <a:p>
+            <a:pPr algn="just">
+              <a:lnSpc>
+                <a:spcPct val="110000"/>
+              </a:lnSpc>
+            </a:pPr>
+            <a:endParaRPr lang="en-US" sz="2667" i="1" dirty="0">
+              <a:latin typeface="Cambria Math" panose="02040503050406030204" pitchFamily="18" charset="0"/>
+              <a:ea typeface="Open Sans" panose="020B0606030504020204" pitchFamily="34" charset="0"/>
+              <a:cs typeface="Open Sans" panose="020B0606030504020204" pitchFamily="34" charset="0"/>
+            </a:endParaRPr>
+          </a:p>
+          <a:p>
+            <a:pPr algn="just">
+              <a:lnSpc>
+                <a:spcPct val="110000"/>
+              </a:lnSpc>
+            </a:pPr>
+            <a:endParaRPr lang="en-US" sz="2667" i="1" dirty="0">
+              <a:latin typeface="Cambria Math" panose="02040503050406030204" pitchFamily="18" charset="0"/>
+              <a:ea typeface="Open Sans" panose="020B0606030504020204" pitchFamily="34" charset="0"/>
+              <a:cs typeface="Open Sans" panose="020B0606030504020204" pitchFamily="34" charset="0"/>
+            </a:endParaRPr>
+          </a:p>
+          <a:p>
+            <a:pPr algn="just">
+              <a:lnSpc>
+                <a:spcPct val="110000"/>
+              </a:lnSpc>
+            </a:pPr>
+            <a:endParaRPr lang="en-US" sz="2667" i="1" dirty="0">
+              <a:latin typeface="Cambria Math" panose="02040503050406030204" pitchFamily="18" charset="0"/>
+              <a:ea typeface="Open Sans" panose="020B0606030504020204" pitchFamily="34" charset="0"/>
+              <a:cs typeface="Open Sans" panose="020B0606030504020204" pitchFamily="34" charset="0"/>
+            </a:endParaRPr>
+          </a:p>
+          <a:p>
+            <a:pPr algn="just">
+              <a:lnSpc>
+                <a:spcPct val="110000"/>
+              </a:lnSpc>
+            </a:pPr>
+            <a:endParaRPr lang="en-US" sz="2667" i="1" dirty="0">
+              <a:latin typeface="Cambria Math" panose="02040503050406030204" pitchFamily="18" charset="0"/>
+              <a:ea typeface="Open Sans" panose="020B0606030504020204" pitchFamily="34" charset="0"/>
+              <a:cs typeface="Open Sans" panose="020B0606030504020204" pitchFamily="34" charset="0"/>
+            </a:endParaRPr>
+          </a:p>
+        </p:txBody>
+      </p:sp>
+      <p:sp>
+        <p:nvSpPr>
+          <p:cNvPr id="32" name="TextBox 31">
+            <a:extLst>
+              <a:ext uri="{FF2B5EF4-FFF2-40B4-BE49-F238E27FC236}">
+                <a16:creationId xmlns:a16="http://schemas.microsoft.com/office/drawing/2014/main" id="{0A31EC4C-50ED-1FA3-A522-A41AB3F42EA0}"/>
+              </a:ext>
+            </a:extLst>
+          </p:cNvPr>
+          <p:cNvSpPr txBox="1">
+            <a:spLocks noChangeArrowheads="1"/>
+          </p:cNvSpPr>
+          <p:nvPr/>
+        </p:nvSpPr>
+        <p:spPr bwMode="auto">
+          <a:xfrm>
+            <a:off x="20633013" y="7549491"/>
+            <a:ext cx="11247120" cy="15910560"/>
+          </a:xfrm>
+          <a:prstGeom prst="rect">
+            <a:avLst/>
+          </a:prstGeom>
+          <a:solidFill>
+            <a:schemeClr val="bg1"/>
+          </a:solidFill>
+          <a:ln w="9525">
+            <a:solidFill>
+              <a:srgbClr val="000000"/>
+            </a:solidFill>
+            <a:miter lim="800000"/>
+            <a:headEnd/>
+            <a:tailEnd/>
+          </a:ln>
+        </p:spPr>
+        <p:txBody>
+          <a:bodyPr wrap="square" lIns="121920" tIns="121920" rIns="121920" bIns="121920">
+            <a:spAutoFit/>
+          </a:bodyPr>
+          <a:lstStyle>
+            <a:defPPr>
+              <a:defRPr kern="1200"/>
+            </a:defPPr>
+            <a:lvl1pPr eaLnBrk="0" hangingPunct="0">
+              <a:defRPr sz="2000">
+                <a:solidFill>
+                  <a:schemeClr val="tx1"/>
+                </a:solidFill>
+                <a:latin typeface="Arial"/>
+                <a:ea typeface="ＭＳ Ｐゴシック" pitchFamily="-106" charset="-128"/>
+              </a:defRPr>
+            </a:lvl1pPr>
+            <a:lvl2pPr eaLnBrk="0" hangingPunct="0">
+              <a:defRPr sz="2000">
+                <a:solidFill>
+                  <a:schemeClr val="tx1"/>
+                </a:solidFill>
+                <a:latin typeface="Arial"/>
+                <a:ea typeface="ＭＳ Ｐゴシック" pitchFamily="-106" charset="-128"/>
+              </a:defRPr>
+            </a:lvl2pPr>
+            <a:lvl3pPr marL="1143000" indent="-228600" eaLnBrk="0" hangingPunct="0">
+              <a:defRPr sz="2000">
+                <a:solidFill>
+                  <a:schemeClr val="tx1"/>
+                </a:solidFill>
+                <a:latin typeface="Arial"/>
+                <a:ea typeface="ＭＳ Ｐゴシック" pitchFamily="-106" charset="-128"/>
+              </a:defRPr>
+            </a:lvl3pPr>
+            <a:lvl4pPr marL="1600200" indent="-228600" eaLnBrk="0" hangingPunct="0">
+              <a:defRPr sz="2000">
+                <a:solidFill>
+                  <a:schemeClr val="tx1"/>
+                </a:solidFill>
+                <a:latin typeface="Arial"/>
+                <a:ea typeface="ＭＳ Ｐゴシック" pitchFamily="-106" charset="-128"/>
+              </a:defRPr>
+            </a:lvl4pPr>
+            <a:lvl5pPr marL="2057400" indent="-228600" eaLnBrk="0" hangingPunct="0">
+              <a:defRPr sz="2000">
+                <a:solidFill>
+                  <a:schemeClr val="tx1"/>
+                </a:solidFill>
+                <a:latin typeface="Arial"/>
+                <a:ea typeface="ＭＳ Ｐゴシック" pitchFamily="-106" charset="-128"/>
+              </a:defRPr>
+            </a:lvl5pPr>
+            <a:lvl6pPr marL="2514600" indent="-228600" eaLnBrk="0" fontAlgn="base" hangingPunct="0">
+              <a:spcBef>
+                <a:spcPct val="0"/>
+              </a:spcBef>
+              <a:spcAft>
+                <a:spcPct val="0"/>
+              </a:spcAft>
+              <a:defRPr sz="2000">
+                <a:solidFill>
+                  <a:schemeClr val="tx1"/>
+                </a:solidFill>
+                <a:latin typeface="Arial"/>
+                <a:ea typeface="ＭＳ Ｐゴシック" pitchFamily="-106" charset="-128"/>
+              </a:defRPr>
+            </a:lvl6pPr>
+            <a:lvl7pPr marL="2971800" indent="-228600" eaLnBrk="0" fontAlgn="base" hangingPunct="0">
+              <a:spcBef>
+                <a:spcPct val="0"/>
+              </a:spcBef>
+              <a:spcAft>
+                <a:spcPct val="0"/>
+              </a:spcAft>
+              <a:defRPr sz="2000">
+                <a:solidFill>
+                  <a:schemeClr val="tx1"/>
+                </a:solidFill>
+                <a:latin typeface="Arial"/>
+                <a:ea typeface="ＭＳ Ｐゴシック" pitchFamily="-106" charset="-128"/>
+              </a:defRPr>
+            </a:lvl7pPr>
+            <a:lvl8pPr marL="3429000" indent="-228600" eaLnBrk="0" fontAlgn="base" hangingPunct="0">
+              <a:spcBef>
+                <a:spcPct val="0"/>
+              </a:spcBef>
+              <a:spcAft>
+                <a:spcPct val="0"/>
+              </a:spcAft>
+              <a:defRPr sz="2000">
+                <a:solidFill>
+                  <a:schemeClr val="tx1"/>
+                </a:solidFill>
+                <a:latin typeface="Arial"/>
+                <a:ea typeface="ＭＳ Ｐゴシック" pitchFamily="-106" charset="-128"/>
+              </a:defRPr>
+            </a:lvl8pPr>
+            <a:lvl9pPr marL="3886200" indent="-228600" eaLnBrk="0" fontAlgn="base" hangingPunct="0">
+              <a:spcBef>
+                <a:spcPct val="0"/>
+              </a:spcBef>
+              <a:spcAft>
+                <a:spcPct val="0"/>
+              </a:spcAft>
+              <a:defRPr sz="2000">
+                <a:solidFill>
+                  <a:schemeClr val="tx1"/>
+                </a:solidFill>
+                <a:latin typeface="Arial"/>
+                <a:ea typeface="ＭＳ Ｐゴシック" pitchFamily="-106" charset="-128"/>
+              </a:defRPr>
+            </a:lvl9pPr>
+          </a:lstStyle>
+          <a:p>
+            <a:pPr>
+              <a:lnSpc>
+                <a:spcPct val="110000"/>
+              </a:lnSpc>
+            </a:pPr>
+            <a:r>
+              <a:rPr lang="en-US" sz="2400" b="1" dirty="0">
+                <a:latin typeface="Open Sans" panose="020B0606030504020204" pitchFamily="34" charset="0"/>
+                <a:ea typeface="Open Sans" panose="020B0606030504020204" pitchFamily="34" charset="0"/>
+                <a:cs typeface="Open Sans" panose="020B0606030504020204" pitchFamily="34" charset="0"/>
+              </a:rPr>
+              <a:t>(multiplication cont.)</a:t>
+            </a:r>
+          </a:p>
+          <a:p>
+            <a:pPr>
+              <a:lnSpc>
+                <a:spcPct val="110000"/>
+              </a:lnSpc>
+            </a:pPr>
+            <a:endParaRPr lang="en-US" sz="2667" b="1" dirty="0">
+              <a:latin typeface="Open Sans" panose="020B0606030504020204" pitchFamily="34" charset="0"/>
+              <a:ea typeface="Open Sans" panose="020B0606030504020204" pitchFamily="34" charset="0"/>
+              <a:cs typeface="Open Sans" panose="020B0606030504020204" pitchFamily="34" charset="0"/>
+            </a:endParaRPr>
+          </a:p>
+          <a:p>
+            <a:pPr algn="ctr">
+              <a:lnSpc>
+                <a:spcPct val="110000"/>
+              </a:lnSpc>
+            </a:pPr>
+            <a:endParaRPr lang="en-US" sz="2667" i="1" dirty="0">
+              <a:latin typeface="Cambria Math" panose="02040503050406030204" pitchFamily="18" charset="0"/>
+              <a:ea typeface="Open Sans" panose="020B0606030504020204" pitchFamily="34" charset="0"/>
+              <a:cs typeface="Open Sans" panose="020B0606030504020204" pitchFamily="34" charset="0"/>
+            </a:endParaRPr>
+          </a:p>
+          <a:p>
+            <a:pPr algn="ctr">
+              <a:lnSpc>
+                <a:spcPct val="110000"/>
+              </a:lnSpc>
+            </a:pPr>
+            <a:endParaRPr lang="en-US" sz="2667" i="1" dirty="0">
+              <a:latin typeface="Cambria Math" panose="02040503050406030204" pitchFamily="18" charset="0"/>
+              <a:ea typeface="Open Sans" panose="020B0606030504020204" pitchFamily="34" charset="0"/>
+              <a:cs typeface="Open Sans" panose="020B0606030504020204" pitchFamily="34" charset="0"/>
+            </a:endParaRPr>
+          </a:p>
+          <a:p>
+            <a:pPr algn="ctr">
+              <a:lnSpc>
+                <a:spcPct val="110000"/>
+              </a:lnSpc>
+            </a:pPr>
+            <a:endParaRPr lang="en-US" sz="2667" i="1" dirty="0">
+              <a:latin typeface="Cambria Math" panose="02040503050406030204" pitchFamily="18" charset="0"/>
+              <a:ea typeface="Open Sans" panose="020B0606030504020204" pitchFamily="34" charset="0"/>
+              <a:cs typeface="Open Sans" panose="020B0606030504020204" pitchFamily="34" charset="0"/>
+            </a:endParaRPr>
+          </a:p>
+          <a:p>
+            <a:pPr algn="ctr">
+              <a:lnSpc>
+                <a:spcPct val="110000"/>
+              </a:lnSpc>
+            </a:pPr>
+            <a:endParaRPr lang="en-US" sz="2667" i="1" dirty="0">
+              <a:latin typeface="Cambria Math" panose="02040503050406030204" pitchFamily="18" charset="0"/>
+              <a:ea typeface="Open Sans" panose="020B0606030504020204" pitchFamily="34" charset="0"/>
+              <a:cs typeface="Open Sans" panose="020B0606030504020204" pitchFamily="34" charset="0"/>
+            </a:endParaRPr>
+          </a:p>
+          <a:p>
+            <a:pPr algn="ctr">
+              <a:lnSpc>
+                <a:spcPct val="110000"/>
+              </a:lnSpc>
+            </a:pPr>
+            <a:endParaRPr lang="en-US" sz="2667" i="1" dirty="0">
+              <a:latin typeface="Cambria Math" panose="02040503050406030204" pitchFamily="18" charset="0"/>
+              <a:ea typeface="Open Sans" panose="020B0606030504020204" pitchFamily="34" charset="0"/>
+              <a:cs typeface="Open Sans" panose="020B0606030504020204" pitchFamily="34" charset="0"/>
+            </a:endParaRPr>
+          </a:p>
+          <a:p>
+            <a:pPr algn="ctr">
+              <a:lnSpc>
+                <a:spcPct val="110000"/>
+              </a:lnSpc>
+            </a:pPr>
+            <a:endParaRPr lang="en-US" sz="2667" i="1" dirty="0">
+              <a:latin typeface="Cambria Math" panose="02040503050406030204" pitchFamily="18" charset="0"/>
+              <a:ea typeface="Open Sans" panose="020B0606030504020204" pitchFamily="34" charset="0"/>
+              <a:cs typeface="Open Sans" panose="020B0606030504020204" pitchFamily="34" charset="0"/>
+            </a:endParaRPr>
+          </a:p>
+          <a:p>
+            <a:pPr algn="ctr">
+              <a:lnSpc>
+                <a:spcPct val="110000"/>
+              </a:lnSpc>
+            </a:pPr>
+            <a:endParaRPr lang="en-US" sz="2667" i="1" dirty="0">
+              <a:latin typeface="Cambria Math" panose="02040503050406030204" pitchFamily="18" charset="0"/>
+              <a:ea typeface="Open Sans" panose="020B0606030504020204" pitchFamily="34" charset="0"/>
+              <a:cs typeface="Open Sans" panose="020B0606030504020204" pitchFamily="34" charset="0"/>
+            </a:endParaRPr>
+          </a:p>
+          <a:p>
+            <a:pPr algn="ctr">
+              <a:lnSpc>
+                <a:spcPct val="110000"/>
+              </a:lnSpc>
+            </a:pPr>
+            <a:endParaRPr lang="en-US" sz="2667" i="1" dirty="0">
+              <a:latin typeface="Cambria Math" panose="02040503050406030204" pitchFamily="18" charset="0"/>
+              <a:ea typeface="Open Sans" panose="020B0606030504020204" pitchFamily="34" charset="0"/>
+              <a:cs typeface="Open Sans" panose="020B0606030504020204" pitchFamily="34" charset="0"/>
+            </a:endParaRPr>
+          </a:p>
+          <a:p>
+            <a:pPr algn="ctr">
+              <a:lnSpc>
+                <a:spcPct val="110000"/>
+              </a:lnSpc>
+            </a:pPr>
+            <a:endParaRPr lang="en-US" sz="2667" i="1" dirty="0">
+              <a:latin typeface="Cambria Math" panose="02040503050406030204" pitchFamily="18" charset="0"/>
+              <a:ea typeface="Open Sans" panose="020B0606030504020204" pitchFamily="34" charset="0"/>
+              <a:cs typeface="Open Sans" panose="020B0606030504020204" pitchFamily="34" charset="0"/>
+            </a:endParaRPr>
+          </a:p>
+          <a:p>
+            <a:pPr algn="ctr">
+              <a:lnSpc>
+                <a:spcPct val="110000"/>
+              </a:lnSpc>
+            </a:pPr>
+            <a:endParaRPr lang="en-US" sz="2667" i="1" dirty="0">
+              <a:latin typeface="Cambria Math" panose="02040503050406030204" pitchFamily="18" charset="0"/>
+              <a:ea typeface="Open Sans" panose="020B0606030504020204" pitchFamily="34" charset="0"/>
+              <a:cs typeface="Open Sans" panose="020B0606030504020204" pitchFamily="34" charset="0"/>
+            </a:endParaRPr>
+          </a:p>
+          <a:p>
+            <a:pPr algn="ctr">
+              <a:lnSpc>
+                <a:spcPct val="110000"/>
+              </a:lnSpc>
+            </a:pPr>
+            <a:endParaRPr lang="en-US" sz="2667" i="1" dirty="0">
+              <a:latin typeface="Cambria Math" panose="02040503050406030204" pitchFamily="18" charset="0"/>
+              <a:ea typeface="Open Sans" panose="020B0606030504020204" pitchFamily="34" charset="0"/>
+              <a:cs typeface="Open Sans" panose="020B0606030504020204" pitchFamily="34" charset="0"/>
+            </a:endParaRPr>
+          </a:p>
+          <a:p>
+            <a:pPr algn="ctr">
+              <a:lnSpc>
+                <a:spcPct val="110000"/>
+              </a:lnSpc>
+            </a:pPr>
+            <a:endParaRPr lang="en-US" sz="2667" i="1" dirty="0">
+              <a:latin typeface="Cambria Math" panose="02040503050406030204" pitchFamily="18" charset="0"/>
+              <a:ea typeface="Open Sans" panose="020B0606030504020204" pitchFamily="34" charset="0"/>
+              <a:cs typeface="Open Sans" panose="020B0606030504020204" pitchFamily="34" charset="0"/>
+            </a:endParaRPr>
+          </a:p>
+          <a:p>
+            <a:pPr algn="ctr">
+              <a:lnSpc>
+                <a:spcPct val="110000"/>
+              </a:lnSpc>
+            </a:pPr>
+            <a:endParaRPr lang="en-US" sz="2667" i="1" dirty="0">
+              <a:latin typeface="Cambria Math" panose="02040503050406030204" pitchFamily="18" charset="0"/>
+              <a:ea typeface="Open Sans" panose="020B0606030504020204" pitchFamily="34" charset="0"/>
+              <a:cs typeface="Open Sans" panose="020B0606030504020204" pitchFamily="34" charset="0"/>
+            </a:endParaRPr>
+          </a:p>
+          <a:p>
+            <a:pPr algn="ctr">
+              <a:lnSpc>
+                <a:spcPct val="110000"/>
+              </a:lnSpc>
+            </a:pPr>
+            <a:endParaRPr lang="en-US" sz="2667" i="1" dirty="0">
+              <a:latin typeface="Cambria Math" panose="02040503050406030204" pitchFamily="18" charset="0"/>
+              <a:ea typeface="Open Sans" panose="020B0606030504020204" pitchFamily="34" charset="0"/>
+              <a:cs typeface="Open Sans" panose="020B0606030504020204" pitchFamily="34" charset="0"/>
+            </a:endParaRPr>
+          </a:p>
+          <a:p>
+            <a:pPr algn="ctr">
+              <a:lnSpc>
+                <a:spcPct val="110000"/>
+              </a:lnSpc>
+            </a:pPr>
+            <a:endParaRPr lang="en-US" sz="2667" i="1" dirty="0">
+              <a:latin typeface="Cambria Math" panose="02040503050406030204" pitchFamily="18" charset="0"/>
+              <a:ea typeface="Open Sans" panose="020B0606030504020204" pitchFamily="34" charset="0"/>
+              <a:cs typeface="Open Sans" panose="020B0606030504020204" pitchFamily="34" charset="0"/>
+            </a:endParaRPr>
+          </a:p>
+          <a:p>
+            <a:pPr algn="ctr">
+              <a:lnSpc>
+                <a:spcPct val="110000"/>
+              </a:lnSpc>
+            </a:pPr>
+            <a:endParaRPr lang="en-US" sz="2667" i="1" dirty="0">
+              <a:latin typeface="Cambria Math" panose="02040503050406030204" pitchFamily="18" charset="0"/>
+              <a:ea typeface="Open Sans" panose="020B0606030504020204" pitchFamily="34" charset="0"/>
+              <a:cs typeface="Open Sans" panose="020B0606030504020204" pitchFamily="34" charset="0"/>
+            </a:endParaRPr>
+          </a:p>
+          <a:p>
+            <a:pPr algn="ctr">
+              <a:lnSpc>
+                <a:spcPct val="110000"/>
+              </a:lnSpc>
+            </a:pPr>
+            <a:endParaRPr lang="en-US" sz="2667" i="1" dirty="0">
+              <a:latin typeface="Cambria Math" panose="02040503050406030204" pitchFamily="18" charset="0"/>
+              <a:ea typeface="Open Sans" panose="020B0606030504020204" pitchFamily="34" charset="0"/>
+              <a:cs typeface="Open Sans" panose="020B0606030504020204" pitchFamily="34" charset="0"/>
+            </a:endParaRPr>
+          </a:p>
+          <a:p>
+            <a:pPr algn="ctr">
+              <a:lnSpc>
+                <a:spcPct val="110000"/>
+              </a:lnSpc>
+            </a:pPr>
+            <a:endParaRPr lang="en-US" sz="2667" i="1" dirty="0">
+              <a:latin typeface="Cambria Math" panose="02040503050406030204" pitchFamily="18" charset="0"/>
+              <a:ea typeface="Open Sans" panose="020B0606030504020204" pitchFamily="34" charset="0"/>
+              <a:cs typeface="Open Sans" panose="020B0606030504020204" pitchFamily="34" charset="0"/>
+            </a:endParaRPr>
+          </a:p>
+          <a:p>
+            <a:pPr algn="ctr">
+              <a:lnSpc>
+                <a:spcPct val="110000"/>
+              </a:lnSpc>
+            </a:pPr>
+            <a:endParaRPr lang="en-US" sz="2667" i="1" dirty="0">
+              <a:latin typeface="Cambria Math" panose="02040503050406030204" pitchFamily="18" charset="0"/>
+              <a:ea typeface="Open Sans" panose="020B0606030504020204" pitchFamily="34" charset="0"/>
+              <a:cs typeface="Open Sans" panose="020B0606030504020204" pitchFamily="34" charset="0"/>
+            </a:endParaRPr>
+          </a:p>
+          <a:p>
+            <a:pPr algn="ctr">
+              <a:lnSpc>
+                <a:spcPct val="110000"/>
+              </a:lnSpc>
+            </a:pPr>
+            <a:endParaRPr lang="en-US" sz="2667" i="1" dirty="0">
+              <a:latin typeface="Cambria Math" panose="02040503050406030204" pitchFamily="18" charset="0"/>
+              <a:ea typeface="Open Sans" panose="020B0606030504020204" pitchFamily="34" charset="0"/>
+              <a:cs typeface="Open Sans" panose="020B0606030504020204" pitchFamily="34" charset="0"/>
+            </a:endParaRPr>
+          </a:p>
+          <a:p>
+            <a:pPr algn="ctr">
+              <a:lnSpc>
+                <a:spcPct val="110000"/>
+              </a:lnSpc>
+            </a:pPr>
+            <a:endParaRPr lang="en-US" sz="2667" i="1" dirty="0">
+              <a:latin typeface="Cambria Math" panose="02040503050406030204" pitchFamily="18" charset="0"/>
+              <a:ea typeface="Open Sans" panose="020B0606030504020204" pitchFamily="34" charset="0"/>
+              <a:cs typeface="Open Sans" panose="020B0606030504020204" pitchFamily="34" charset="0"/>
+            </a:endParaRPr>
+          </a:p>
+          <a:p>
+            <a:pPr algn="ctr">
+              <a:lnSpc>
+                <a:spcPct val="110000"/>
+              </a:lnSpc>
+            </a:pPr>
+            <a:endParaRPr lang="en-US" sz="2667" i="1" dirty="0">
+              <a:latin typeface="Cambria Math" panose="02040503050406030204" pitchFamily="18" charset="0"/>
+              <a:ea typeface="Open Sans" panose="020B0606030504020204" pitchFamily="34" charset="0"/>
+              <a:cs typeface="Open Sans" panose="020B0606030504020204" pitchFamily="34" charset="0"/>
+            </a:endParaRPr>
+          </a:p>
+          <a:p>
+            <a:pPr algn="ctr">
+              <a:lnSpc>
+                <a:spcPct val="110000"/>
+              </a:lnSpc>
+            </a:pPr>
+            <a:endParaRPr lang="en-US" sz="2667" i="1" dirty="0">
+              <a:latin typeface="Cambria Math" panose="02040503050406030204" pitchFamily="18" charset="0"/>
+              <a:ea typeface="Open Sans" panose="020B0606030504020204" pitchFamily="34" charset="0"/>
+              <a:cs typeface="Open Sans" panose="020B0606030504020204" pitchFamily="34" charset="0"/>
+            </a:endParaRPr>
+          </a:p>
+          <a:p>
+            <a:pPr algn="ctr">
+              <a:lnSpc>
+                <a:spcPct val="110000"/>
+              </a:lnSpc>
+            </a:pPr>
+            <a:endParaRPr lang="en-US" sz="2667" i="1" dirty="0">
+              <a:latin typeface="Cambria Math" panose="02040503050406030204" pitchFamily="18" charset="0"/>
+              <a:ea typeface="Open Sans" panose="020B0606030504020204" pitchFamily="34" charset="0"/>
+              <a:cs typeface="Open Sans" panose="020B0606030504020204" pitchFamily="34" charset="0"/>
+            </a:endParaRPr>
+          </a:p>
+          <a:p>
+            <a:pPr algn="ctr">
+              <a:lnSpc>
+                <a:spcPct val="110000"/>
+              </a:lnSpc>
+            </a:pPr>
+            <a:endParaRPr lang="en-US" sz="2667" i="1" dirty="0">
+              <a:latin typeface="Cambria Math" panose="02040503050406030204" pitchFamily="18" charset="0"/>
+              <a:ea typeface="Open Sans" panose="020B0606030504020204" pitchFamily="34" charset="0"/>
+              <a:cs typeface="Open Sans" panose="020B0606030504020204" pitchFamily="34" charset="0"/>
+            </a:endParaRPr>
+          </a:p>
+          <a:p>
+            <a:pPr algn="ctr">
+              <a:lnSpc>
+                <a:spcPct val="110000"/>
+              </a:lnSpc>
+            </a:pPr>
+            <a:endParaRPr lang="en-US" sz="2667" i="1" dirty="0">
+              <a:latin typeface="Cambria Math" panose="02040503050406030204" pitchFamily="18" charset="0"/>
+              <a:ea typeface="Open Sans" panose="020B0606030504020204" pitchFamily="34" charset="0"/>
+              <a:cs typeface="Open Sans" panose="020B0606030504020204" pitchFamily="34" charset="0"/>
+            </a:endParaRPr>
+          </a:p>
+          <a:p>
+            <a:pPr algn="ctr">
+              <a:lnSpc>
+                <a:spcPct val="110000"/>
+              </a:lnSpc>
+            </a:pPr>
+            <a:endParaRPr lang="en-US" sz="2667" i="1" dirty="0">
+              <a:latin typeface="Cambria Math" panose="02040503050406030204" pitchFamily="18" charset="0"/>
+              <a:ea typeface="Open Sans" panose="020B0606030504020204" pitchFamily="34" charset="0"/>
+              <a:cs typeface="Open Sans" panose="020B0606030504020204" pitchFamily="34" charset="0"/>
+            </a:endParaRPr>
+          </a:p>
+          <a:p>
+            <a:pPr algn="ctr">
+              <a:lnSpc>
+                <a:spcPct val="110000"/>
+              </a:lnSpc>
+            </a:pPr>
+            <a:endParaRPr lang="en-US" sz="2667" i="1" dirty="0">
+              <a:latin typeface="Cambria Math" panose="02040503050406030204" pitchFamily="18" charset="0"/>
+              <a:ea typeface="Open Sans" panose="020B0606030504020204" pitchFamily="34" charset="0"/>
+              <a:cs typeface="Open Sans" panose="020B0606030504020204" pitchFamily="34" charset="0"/>
+            </a:endParaRPr>
+          </a:p>
+          <a:p>
+            <a:pPr algn="ctr">
+              <a:lnSpc>
+                <a:spcPct val="110000"/>
+              </a:lnSpc>
+            </a:pPr>
+            <a:endParaRPr lang="en-US" sz="2667" i="1" dirty="0">
+              <a:latin typeface="Cambria Math" panose="02040503050406030204" pitchFamily="18" charset="0"/>
+              <a:ea typeface="Open Sans" panose="020B0606030504020204" pitchFamily="34" charset="0"/>
+              <a:cs typeface="Open Sans" panose="020B0606030504020204" pitchFamily="34" charset="0"/>
+            </a:endParaRPr>
+          </a:p>
+          <a:p>
+            <a:pPr algn="ctr">
+              <a:lnSpc>
+                <a:spcPct val="110000"/>
+              </a:lnSpc>
+            </a:pPr>
+            <a:endParaRPr lang="en-US" sz="2667" i="1" dirty="0">
+              <a:latin typeface="Cambria Math" panose="02040503050406030204" pitchFamily="18" charset="0"/>
+              <a:ea typeface="Open Sans" panose="020B0606030504020204" pitchFamily="34" charset="0"/>
+              <a:cs typeface="Open Sans" panose="020B0606030504020204" pitchFamily="34" charset="0"/>
+            </a:endParaRPr>
+          </a:p>
+          <a:p>
+            <a:pPr algn="ctr">
+              <a:lnSpc>
+                <a:spcPct val="110000"/>
+              </a:lnSpc>
+            </a:pPr>
+            <a:endParaRPr lang="en-US" sz="2667" i="1" dirty="0">
+              <a:latin typeface="Cambria Math" panose="02040503050406030204" pitchFamily="18" charset="0"/>
+              <a:ea typeface="Open Sans" panose="020B0606030504020204" pitchFamily="34" charset="0"/>
+              <a:cs typeface="Open Sans" panose="020B0606030504020204" pitchFamily="34" charset="0"/>
+            </a:endParaRPr>
+          </a:p>
+          <a:p>
+            <a:pPr algn="ctr">
+              <a:lnSpc>
+                <a:spcPct val="110000"/>
+              </a:lnSpc>
+            </a:pPr>
+            <a:endParaRPr lang="en-US" sz="2667" i="1" dirty="0">
+              <a:latin typeface="Cambria Math" panose="02040503050406030204" pitchFamily="18" charset="0"/>
+              <a:ea typeface="Open Sans" panose="020B0606030504020204" pitchFamily="34" charset="0"/>
+              <a:cs typeface="Open Sans" panose="020B0606030504020204" pitchFamily="34" charset="0"/>
+            </a:endParaRPr>
+          </a:p>
+          <a:p>
+            <a:pPr algn="ctr">
+              <a:lnSpc>
+                <a:spcPct val="110000"/>
+              </a:lnSpc>
+            </a:pPr>
+            <a:endParaRPr lang="en-US" sz="2667" i="1" dirty="0">
+              <a:latin typeface="Cambria Math" panose="02040503050406030204" pitchFamily="18" charset="0"/>
+              <a:ea typeface="Open Sans" panose="020B0606030504020204" pitchFamily="34" charset="0"/>
+              <a:cs typeface="Open Sans" panose="020B0606030504020204" pitchFamily="34" charset="0"/>
+            </a:endParaRPr>
+          </a:p>
+          <a:p>
+            <a:pPr algn="ctr">
+              <a:lnSpc>
+                <a:spcPct val="110000"/>
+              </a:lnSpc>
+            </a:pPr>
+            <a:endParaRPr lang="en-US" sz="2667" i="1" dirty="0">
+              <a:latin typeface="Cambria Math" panose="02040503050406030204" pitchFamily="18" charset="0"/>
+              <a:ea typeface="Open Sans" panose="020B0606030504020204" pitchFamily="34" charset="0"/>
+              <a:cs typeface="Open Sans" panose="020B0606030504020204" pitchFamily="34" charset="0"/>
+            </a:endParaRPr>
+          </a:p>
+          <a:p>
+            <a:pPr algn="ctr">
+              <a:lnSpc>
+                <a:spcPct val="110000"/>
+              </a:lnSpc>
+            </a:pPr>
+            <a:endParaRPr lang="en-US" sz="2667" i="1" dirty="0">
+              <a:latin typeface="Cambria Math" panose="02040503050406030204" pitchFamily="18" charset="0"/>
+              <a:ea typeface="Open Sans" panose="020B0606030504020204" pitchFamily="34" charset="0"/>
+              <a:cs typeface="Open Sans" panose="020B0606030504020204" pitchFamily="34" charset="0"/>
+            </a:endParaRPr>
+          </a:p>
+          <a:p>
+            <a:pPr algn="ctr">
+              <a:lnSpc>
+                <a:spcPct val="110000"/>
+              </a:lnSpc>
+            </a:pPr>
+            <a:endParaRPr lang="en-US" sz="2667" i="1" dirty="0">
+              <a:latin typeface="Cambria Math" panose="02040503050406030204" pitchFamily="18" charset="0"/>
+              <a:ea typeface="Open Sans" panose="020B0606030504020204" pitchFamily="34" charset="0"/>
+              <a:cs typeface="Open Sans" panose="020B0606030504020204" pitchFamily="34" charset="0"/>
+            </a:endParaRPr>
+          </a:p>
+          <a:p>
+            <a:pPr algn="ctr">
+              <a:lnSpc>
+                <a:spcPct val="110000"/>
+              </a:lnSpc>
+            </a:pPr>
+            <a:endParaRPr lang="en-US" sz="2667" i="1" dirty="0">
+              <a:latin typeface="Cambria Math" panose="02040503050406030204" pitchFamily="18" charset="0"/>
+              <a:ea typeface="Open Sans" panose="020B0606030504020204" pitchFamily="34" charset="0"/>
+              <a:cs typeface="Open Sans" panose="020B0606030504020204" pitchFamily="34" charset="0"/>
+            </a:endParaRPr>
+          </a:p>
+          <a:p>
+            <a:pPr algn="ctr">
+              <a:lnSpc>
+                <a:spcPct val="110000"/>
+              </a:lnSpc>
+            </a:pPr>
+            <a:endParaRPr lang="en-US" sz="2667" i="1" dirty="0">
+              <a:latin typeface="Cambria Math" panose="02040503050406030204" pitchFamily="18" charset="0"/>
+              <a:ea typeface="Open Sans" panose="020B0606030504020204" pitchFamily="34" charset="0"/>
+              <a:cs typeface="Open Sans" panose="020B0606030504020204" pitchFamily="34" charset="0"/>
+            </a:endParaRPr>
+          </a:p>
+          <a:p>
+            <a:pPr algn="ctr">
+              <a:lnSpc>
+                <a:spcPct val="110000"/>
+              </a:lnSpc>
+            </a:pPr>
+            <a:endParaRPr lang="en-US" sz="2667" i="1" dirty="0">
+              <a:latin typeface="Cambria Math" panose="02040503050406030204" pitchFamily="18" charset="0"/>
+              <a:ea typeface="Open Sans" panose="020B0606030504020204" pitchFamily="34" charset="0"/>
+              <a:cs typeface="Open Sans" panose="020B0606030504020204" pitchFamily="34" charset="0"/>
+            </a:endParaRPr>
+          </a:p>
+          <a:p>
+            <a:pPr algn="ctr">
+              <a:lnSpc>
+                <a:spcPct val="110000"/>
+              </a:lnSpc>
+            </a:pPr>
+            <a:endParaRPr lang="en-US" sz="2667" i="1" dirty="0">
+              <a:latin typeface="Cambria Math" panose="02040503050406030204" pitchFamily="18" charset="0"/>
+              <a:ea typeface="Open Sans" panose="020B0606030504020204" pitchFamily="34" charset="0"/>
+              <a:cs typeface="Open Sans" panose="020B0606030504020204" pitchFamily="34" charset="0"/>
+            </a:endParaRPr>
+          </a:p>
+          <a:p>
+            <a:pPr algn="ctr">
+              <a:lnSpc>
+                <a:spcPct val="110000"/>
+              </a:lnSpc>
+            </a:pPr>
+            <a:endParaRPr lang="en-US" sz="2667" i="1" dirty="0">
+              <a:latin typeface="Cambria Math" panose="02040503050406030204" pitchFamily="18" charset="0"/>
+              <a:ea typeface="Open Sans" panose="020B0606030504020204" pitchFamily="34" charset="0"/>
+              <a:cs typeface="Open Sans" panose="020B0606030504020204" pitchFamily="34" charset="0"/>
+            </a:endParaRPr>
+          </a:p>
+        </p:txBody>
+      </p:sp>
+      <p:sp>
+        <p:nvSpPr>
+          <p:cNvPr id="33" name="Rectangle 10">
+            <a:extLst>
+              <a:ext uri="{FF2B5EF4-FFF2-40B4-BE49-F238E27FC236}">
+                <a16:creationId xmlns:a16="http://schemas.microsoft.com/office/drawing/2014/main" id="{6F49D22B-21A3-8433-0D97-F04EE82FF85D}"/>
+              </a:ext>
+            </a:extLst>
+          </p:cNvPr>
+          <p:cNvSpPr>
+            <a:spLocks noChangeArrowheads="1"/>
+          </p:cNvSpPr>
+          <p:nvPr/>
+        </p:nvSpPr>
+        <p:spPr bwMode="auto">
+          <a:xfrm>
+            <a:off x="20633013" y="6551340"/>
+            <a:ext cx="11247120" cy="776268"/>
+          </a:xfrm>
+          <a:prstGeom prst="rect">
+            <a:avLst/>
+          </a:prstGeom>
+          <a:solidFill>
+            <a:srgbClr val="1482A5"/>
+          </a:solidFill>
+          <a:ln w="12700">
+            <a:noFill/>
+            <a:miter lim="800000"/>
+          </a:ln>
+        </p:spPr>
+        <p:txBody>
+          <a:bodyPr wrap="none" lIns="243840" tIns="65024" rIns="243840" bIns="60945" anchor="ctr" anchorCtr="0"/>
+          <a:lstStyle>
+            <a:defPPr>
+              <a:defRPr kern="1200"/>
+            </a:defPPr>
+          </a:lstStyle>
+          <a:p>
+            <a:pPr algn="ctr" defTabSz="4180182">
+              <a:defRPr/>
+            </a:pPr>
+            <a:r>
+              <a:rPr lang="en-US" sz="3733" b="1" dirty="0">
+                <a:solidFill>
+                  <a:schemeClr val="bg1"/>
+                </a:solidFill>
+                <a:latin typeface="Arial" panose="020B0604020202020204" pitchFamily="34" charset="0"/>
+                <a:cs typeface="Arial" panose="020B0604020202020204" pitchFamily="34" charset="0"/>
+              </a:rPr>
+              <a:t>Operations &amp; Examples (cont.)</a:t>
+            </a:r>
+          </a:p>
+        </p:txBody>
+      </p:sp>
+      <p:pic>
+        <p:nvPicPr>
+          <p:cNvPr id="63" name="Picture 62">
+            <a:extLst>
+              <a:ext uri="{FF2B5EF4-FFF2-40B4-BE49-F238E27FC236}">
+                <a16:creationId xmlns:a16="http://schemas.microsoft.com/office/drawing/2014/main" id="{21F3D84B-B416-4764-CC5A-799556D9A4EB}"/>
               </a:ext>
             </a:extLst>
           </p:cNvPr>
@@ -6273,8 +6815,8 @@
         </p:blipFill>
         <p:spPr>
           <a:xfrm>
-            <a:off x="2948549" y="14553741"/>
-            <a:ext cx="2908300" cy="596900"/>
+            <a:off x="2826422" y="26862993"/>
+            <a:ext cx="5407740" cy="3048000"/>
           </a:xfrm>
           <a:prstGeom prst="rect">
             <a:avLst/>
@@ -6283,10 +6825,10 @@
       </p:pic>
       <p:sp>
         <p:nvSpPr>
-          <p:cNvPr id="11" name="TextBox 10">
+          <p:cNvPr id="36" name="TextBox 35">
             <a:extLst>
               <a:ext uri="{FF2B5EF4-FFF2-40B4-BE49-F238E27FC236}">
-                <a16:creationId xmlns:a16="http://schemas.microsoft.com/office/drawing/2014/main" id="{C7BDF367-08F0-DF9E-D264-4756264A94FE}"/>
+                <a16:creationId xmlns:a16="http://schemas.microsoft.com/office/drawing/2014/main" id="{1D92BEE1-3701-025B-B25B-F953248466AC}"/>
               </a:ext>
             </a:extLst>
           </p:cNvPr>
@@ -6297,8 +6839,8 @@
         </p:nvSpPr>
         <p:spPr bwMode="auto">
           <a:xfrm>
-            <a:off x="764096" y="17551110"/>
-            <a:ext cx="7268693" cy="3566160"/>
+            <a:off x="32178408" y="7549492"/>
+            <a:ext cx="10972800" cy="11704320"/>
           </a:xfrm>
           <a:prstGeom prst="rect">
             <a:avLst/>
@@ -6316,7 +6858,7 @@
           </a:ln>
         </p:spPr>
         <p:txBody>
-          <a:bodyPr wrap="square" lIns="91440" tIns="91440" rIns="91440" bIns="91440">
+          <a:bodyPr wrap="square" lIns="121920" tIns="121920" rIns="121920" bIns="121920">
             <a:spAutoFit/>
           </a:bodyPr>
           <a:lstStyle>
@@ -6436,13 +6978,25 @@
               </a:lnSpc>
             </a:pPr>
             <a:r>
-              <a:rPr lang="en-US" b="1" dirty="0">
+              <a:rPr lang="en-US" sz="2667" b="1" dirty="0">
                 <a:latin typeface="Open Sans" panose="020B0606030504020204" pitchFamily="34" charset="0"/>
                 <a:ea typeface="Open Sans" panose="020B0606030504020204" pitchFamily="34" charset="0"/>
                 <a:cs typeface="Open Sans" panose="020B0606030504020204" pitchFamily="34" charset="0"/>
               </a:rPr>
-              <a:t>Addition Examples:</a:t>
-            </a:r>
+              <a:t>I-Cat x I-Cat Example:</a:t>
+            </a:r>
+          </a:p>
+          <a:p>
+            <a:pPr>
+              <a:lnSpc>
+                <a:spcPct val="110000"/>
+              </a:lnSpc>
+            </a:pPr>
+            <a:endParaRPr lang="en-US" sz="2667" b="1" dirty="0">
+              <a:latin typeface="Open Sans" panose="020B0606030504020204" pitchFamily="34" charset="0"/>
+              <a:ea typeface="Open Sans" panose="020B0606030504020204" pitchFamily="34" charset="0"/>
+              <a:cs typeface="Open Sans" panose="020B0606030504020204" pitchFamily="34" charset="0"/>
+            </a:endParaRPr>
           </a:p>
           <a:p>
             <a:pPr algn="ctr">
@@ -6450,20 +7004,8 @@
                 <a:spcPct val="110000"/>
               </a:lnSpc>
             </a:pPr>
-            <a:endParaRPr lang="en-US" b="1" dirty="0">
-              <a:latin typeface="Open Sans" panose="020B0606030504020204" pitchFamily="34" charset="0"/>
-              <a:ea typeface="Open Sans" panose="020B0606030504020204" pitchFamily="34" charset="0"/>
-              <a:cs typeface="Open Sans" panose="020B0606030504020204" pitchFamily="34" charset="0"/>
-            </a:endParaRPr>
-          </a:p>
-          <a:p>
-            <a:pPr algn="just">
-              <a:lnSpc>
-                <a:spcPct val="110000"/>
-              </a:lnSpc>
-            </a:pPr>
-            <a:endParaRPr lang="en-US" b="1" dirty="0">
-              <a:latin typeface="Open Sans" panose="020B0606030504020204" pitchFamily="34" charset="0"/>
+            <a:endParaRPr lang="en-US" sz="2667" i="1" dirty="0">
+              <a:latin typeface="Cambria Math" panose="02040503050406030204" pitchFamily="18" charset="0"/>
               <a:ea typeface="Open Sans" panose="020B0606030504020204" pitchFamily="34" charset="0"/>
               <a:cs typeface="Open Sans" panose="020B0606030504020204" pitchFamily="34" charset="0"/>
             </a:endParaRPr>
@@ -6474,7 +7016,7 @@
                 <a:spcPct val="110000"/>
               </a:lnSpc>
             </a:pPr>
-            <a:endParaRPr lang="en-US" b="0" i="1" dirty="0">
+            <a:endParaRPr lang="en-US" sz="2667" i="1" dirty="0">
               <a:latin typeface="Cambria Math" panose="02040503050406030204" pitchFamily="18" charset="0"/>
               <a:ea typeface="Open Sans" panose="020B0606030504020204" pitchFamily="34" charset="0"/>
               <a:cs typeface="Open Sans" panose="020B0606030504020204" pitchFamily="34" charset="0"/>
@@ -6486,7 +7028,7 @@
                 <a:spcPct val="110000"/>
               </a:lnSpc>
             </a:pPr>
-            <a:endParaRPr lang="en-US" i="1" dirty="0">
+            <a:endParaRPr lang="en-US" sz="2667" i="1" dirty="0">
               <a:latin typeface="Cambria Math" panose="02040503050406030204" pitchFamily="18" charset="0"/>
               <a:ea typeface="Open Sans" panose="020B0606030504020204" pitchFamily="34" charset="0"/>
               <a:cs typeface="Open Sans" panose="020B0606030504020204" pitchFamily="34" charset="0"/>
@@ -6498,7 +7040,7 @@
                 <a:spcPct val="110000"/>
               </a:lnSpc>
             </a:pPr>
-            <a:endParaRPr lang="en-US" i="1" dirty="0">
+            <a:endParaRPr lang="en-US" sz="2667" i="1" dirty="0">
               <a:latin typeface="Cambria Math" panose="02040503050406030204" pitchFamily="18" charset="0"/>
               <a:ea typeface="Open Sans" panose="020B0606030504020204" pitchFamily="34" charset="0"/>
               <a:cs typeface="Open Sans" panose="020B0606030504020204" pitchFamily="34" charset="0"/>
@@ -6510,7 +7052,7 @@
                 <a:spcPct val="110000"/>
               </a:lnSpc>
             </a:pPr>
-            <a:endParaRPr lang="en-US" i="1" dirty="0">
+            <a:endParaRPr lang="en-US" sz="2667" i="1" dirty="0">
               <a:latin typeface="Cambria Math" panose="02040503050406030204" pitchFamily="18" charset="0"/>
               <a:ea typeface="Open Sans" panose="020B0606030504020204" pitchFamily="34" charset="0"/>
               <a:cs typeface="Open Sans" panose="020B0606030504020204" pitchFamily="34" charset="0"/>
@@ -6522,7 +7064,7 @@
                 <a:spcPct val="110000"/>
               </a:lnSpc>
             </a:pPr>
-            <a:endParaRPr lang="en-US" i="1" dirty="0">
+            <a:endParaRPr lang="en-US" sz="2667" i="1" dirty="0">
               <a:latin typeface="Cambria Math" panose="02040503050406030204" pitchFamily="18" charset="0"/>
               <a:ea typeface="Open Sans" panose="020B0606030504020204" pitchFamily="34" charset="0"/>
               <a:cs typeface="Open Sans" panose="020B0606030504020204" pitchFamily="34" charset="0"/>
@@ -6534,7 +7076,7 @@
                 <a:spcPct val="110000"/>
               </a:lnSpc>
             </a:pPr>
-            <a:endParaRPr lang="en-US" i="1" dirty="0">
+            <a:endParaRPr lang="en-US" sz="2667" i="1" dirty="0">
               <a:latin typeface="Cambria Math" panose="02040503050406030204" pitchFamily="18" charset="0"/>
               <a:ea typeface="Open Sans" panose="020B0606030504020204" pitchFamily="34" charset="0"/>
               <a:cs typeface="Open Sans" panose="020B0606030504020204" pitchFamily="34" charset="0"/>
@@ -6546,7 +7088,115 @@
                 <a:spcPct val="110000"/>
               </a:lnSpc>
             </a:pPr>
-            <a:endParaRPr lang="en-US" b="0" i="1" dirty="0">
+            <a:endParaRPr lang="en-US" sz="2667" i="1" dirty="0">
+              <a:latin typeface="Cambria Math" panose="02040503050406030204" pitchFamily="18" charset="0"/>
+              <a:ea typeface="Open Sans" panose="020B0606030504020204" pitchFamily="34" charset="0"/>
+              <a:cs typeface="Open Sans" panose="020B0606030504020204" pitchFamily="34" charset="0"/>
+            </a:endParaRPr>
+          </a:p>
+          <a:p>
+            <a:pPr algn="ctr">
+              <a:lnSpc>
+                <a:spcPct val="110000"/>
+              </a:lnSpc>
+            </a:pPr>
+            <a:endParaRPr lang="en-US" sz="2667" i="1" dirty="0">
+              <a:latin typeface="Cambria Math" panose="02040503050406030204" pitchFamily="18" charset="0"/>
+              <a:ea typeface="Open Sans" panose="020B0606030504020204" pitchFamily="34" charset="0"/>
+              <a:cs typeface="Open Sans" panose="020B0606030504020204" pitchFamily="34" charset="0"/>
+            </a:endParaRPr>
+          </a:p>
+          <a:p>
+            <a:pPr algn="ctr">
+              <a:lnSpc>
+                <a:spcPct val="110000"/>
+              </a:lnSpc>
+            </a:pPr>
+            <a:endParaRPr lang="en-US" sz="2667" i="1" dirty="0">
+              <a:latin typeface="Cambria Math" panose="02040503050406030204" pitchFamily="18" charset="0"/>
+              <a:ea typeface="Open Sans" panose="020B0606030504020204" pitchFamily="34" charset="0"/>
+              <a:cs typeface="Open Sans" panose="020B0606030504020204" pitchFamily="34" charset="0"/>
+            </a:endParaRPr>
+          </a:p>
+          <a:p>
+            <a:pPr algn="ctr">
+              <a:lnSpc>
+                <a:spcPct val="110000"/>
+              </a:lnSpc>
+            </a:pPr>
+            <a:endParaRPr lang="en-US" sz="2667" i="1" dirty="0">
+              <a:latin typeface="Cambria Math" panose="02040503050406030204" pitchFamily="18" charset="0"/>
+              <a:ea typeface="Open Sans" panose="020B0606030504020204" pitchFamily="34" charset="0"/>
+              <a:cs typeface="Open Sans" panose="020B0606030504020204" pitchFamily="34" charset="0"/>
+            </a:endParaRPr>
+          </a:p>
+          <a:p>
+            <a:pPr algn="ctr">
+              <a:lnSpc>
+                <a:spcPct val="110000"/>
+              </a:lnSpc>
+            </a:pPr>
+            <a:endParaRPr lang="en-US" sz="2667" i="1" dirty="0">
+              <a:latin typeface="Cambria Math" panose="02040503050406030204" pitchFamily="18" charset="0"/>
+              <a:ea typeface="Open Sans" panose="020B0606030504020204" pitchFamily="34" charset="0"/>
+              <a:cs typeface="Open Sans" panose="020B0606030504020204" pitchFamily="34" charset="0"/>
+            </a:endParaRPr>
+          </a:p>
+          <a:p>
+            <a:pPr algn="ctr">
+              <a:lnSpc>
+                <a:spcPct val="110000"/>
+              </a:lnSpc>
+            </a:pPr>
+            <a:endParaRPr lang="en-US" sz="2667" i="1" dirty="0">
+              <a:latin typeface="Cambria Math" panose="02040503050406030204" pitchFamily="18" charset="0"/>
+              <a:ea typeface="Open Sans" panose="020B0606030504020204" pitchFamily="34" charset="0"/>
+              <a:cs typeface="Open Sans" panose="020B0606030504020204" pitchFamily="34" charset="0"/>
+            </a:endParaRPr>
+          </a:p>
+          <a:p>
+            <a:pPr algn="ctr">
+              <a:lnSpc>
+                <a:spcPct val="110000"/>
+              </a:lnSpc>
+            </a:pPr>
+            <a:endParaRPr lang="en-US" sz="2667" i="1" dirty="0">
+              <a:latin typeface="Cambria Math" panose="02040503050406030204" pitchFamily="18" charset="0"/>
+              <a:ea typeface="Open Sans" panose="020B0606030504020204" pitchFamily="34" charset="0"/>
+              <a:cs typeface="Open Sans" panose="020B0606030504020204" pitchFamily="34" charset="0"/>
+            </a:endParaRPr>
+          </a:p>
+          <a:p>
+            <a:pPr algn="ctr">
+              <a:lnSpc>
+                <a:spcPct val="110000"/>
+              </a:lnSpc>
+            </a:pPr>
+            <a:endParaRPr lang="en-US" sz="2667" i="1" dirty="0">
+              <a:latin typeface="Cambria Math" panose="02040503050406030204" pitchFamily="18" charset="0"/>
+              <a:ea typeface="Open Sans" panose="020B0606030504020204" pitchFamily="34" charset="0"/>
+              <a:cs typeface="Open Sans" panose="020B0606030504020204" pitchFamily="34" charset="0"/>
+            </a:endParaRPr>
+          </a:p>
+          <a:p>
+            <a:pPr algn="ctr">
+              <a:lnSpc>
+                <a:spcPct val="110000"/>
+              </a:lnSpc>
+            </a:pPr>
+            <a:endParaRPr lang="en-US" sz="2667" i="1" dirty="0">
+              <a:latin typeface="Cambria Math" panose="02040503050406030204" pitchFamily="18" charset="0"/>
+              <a:ea typeface="Open Sans" panose="020B0606030504020204" pitchFamily="34" charset="0"/>
+              <a:cs typeface="Open Sans" panose="020B0606030504020204" pitchFamily="34" charset="0"/>
+            </a:endParaRPr>
+          </a:p>
+          <a:p>
+            <a:pPr algn="ctr">
+              <a:lnSpc>
+                <a:spcPct val="110000"/>
+              </a:lnSpc>
+            </a:pPr>
+            <a:endParaRPr lang="en-US" sz="2667" i="1" dirty="0">
               <a:latin typeface="Cambria Math" panose="02040503050406030204" pitchFamily="18" charset="0"/>
               <a:ea typeface="Open Sans" panose="020B0606030504020204" pitchFamily="34" charset="0"/>
               <a:cs typeface="Open Sans" panose="020B0606030504020204" pitchFamily="34" charset="0"/>
@@ -6556,10 +7206,64 @@
       </p:sp>
       <p:sp>
         <p:nvSpPr>
-          <p:cNvPr id="32" name="TextBox 31">
+          <p:cNvPr id="37" name="Rectangle 10">
             <a:extLst>
               <a:ext uri="{FF2B5EF4-FFF2-40B4-BE49-F238E27FC236}">
-                <a16:creationId xmlns:a16="http://schemas.microsoft.com/office/drawing/2014/main" id="{0A31EC4C-50ED-1FA3-A522-A41AB3F42EA0}"/>
+                <a16:creationId xmlns:a16="http://schemas.microsoft.com/office/drawing/2014/main" id="{9E2B1263-E340-3921-4347-4A8AF3F28462}"/>
+              </a:ext>
+            </a:extLst>
+          </p:cNvPr>
+          <p:cNvSpPr>
+            <a:spLocks noChangeArrowheads="1"/>
+          </p:cNvSpPr>
+          <p:nvPr/>
+        </p:nvSpPr>
+        <p:spPr bwMode="auto">
+          <a:xfrm>
+            <a:off x="32178409" y="6551340"/>
+            <a:ext cx="10972800" cy="776268"/>
+          </a:xfrm>
+          <a:prstGeom prst="rect">
+            <a:avLst/>
+          </a:prstGeom>
+          <a:solidFill>
+            <a:srgbClr val="1482A5"/>
+          </a:solidFill>
+          <a:ln w="12700">
+            <a:noFill/>
+            <a:miter lim="800000"/>
+          </a:ln>
+        </p:spPr>
+        <p:txBody>
+          <a:bodyPr wrap="none" lIns="243840" tIns="65024" rIns="243840" bIns="60945" anchor="ctr" anchorCtr="0"/>
+          <a:lstStyle>
+            <a:defPPr>
+              <a:defRPr kern="1200"/>
+            </a:defPPr>
+          </a:lstStyle>
+          <a:p>
+            <a:pPr algn="ctr" defTabSz="4180182">
+              <a:defRPr/>
+            </a:pPr>
+            <a:r>
+              <a:rPr lang="en-US" sz="3733" b="1" dirty="0">
+                <a:solidFill>
+                  <a:schemeClr val="bg1"/>
+                </a:solidFill>
+                <a:latin typeface="Arial" panose="020B0604020202020204" pitchFamily="34" charset="0"/>
+                <a:cs typeface="Arial" panose="020B0604020202020204" pitchFamily="34" charset="0"/>
+              </a:rPr>
+              <a:t>Operations &amp; Examples (cont.)</a:t>
+            </a:r>
+          </a:p>
+        </p:txBody>
+      </p:sp>
+      <p:sp>
+        <p:nvSpPr>
+          <p:cNvPr id="42" name="TextBox 41">
+            <a:extLst>
+              <a:ext uri="{FF2B5EF4-FFF2-40B4-BE49-F238E27FC236}">
+                <a16:creationId xmlns:a16="http://schemas.microsoft.com/office/drawing/2014/main" id="{68FF7854-D008-3271-1B76-D3C5BAD8A8BB}"/>
               </a:ext>
             </a:extLst>
           </p:cNvPr>
@@ -6570,8 +7274,8 @@
         </p:nvSpPr>
         <p:spPr bwMode="auto">
           <a:xfrm>
-            <a:off x="16135358" y="5572470"/>
-            <a:ext cx="8359763" cy="15544800"/>
+            <a:off x="10703059" y="7549491"/>
+            <a:ext cx="9631680" cy="11521440"/>
           </a:xfrm>
           <a:prstGeom prst="rect">
             <a:avLst/>
@@ -6589,7 +7293,7 @@
           </a:ln>
         </p:spPr>
         <p:txBody>
-          <a:bodyPr wrap="square" lIns="91440" tIns="91440" rIns="91440" bIns="91440">
+          <a:bodyPr wrap="square" lIns="121920" tIns="121920" rIns="121920" bIns="121920">
             <a:spAutoFit/>
           </a:bodyPr>
           <a:lstStyle>
@@ -6709,12 +7413,12 @@
               </a:lnSpc>
             </a:pPr>
             <a:r>
-              <a:rPr lang="en-US" b="1" dirty="0">
+              <a:rPr lang="en-US" sz="2667" b="1" dirty="0">
                 <a:latin typeface="Open Sans" panose="020B0606030504020204" pitchFamily="34" charset="0"/>
                 <a:ea typeface="Open Sans" panose="020B0606030504020204" pitchFamily="34" charset="0"/>
                 <a:cs typeface="Open Sans" panose="020B0606030504020204" pitchFamily="34" charset="0"/>
               </a:rPr>
-              <a:t>Multiplication Examples:</a:t>
+              <a:t>Addition Examples (Increased Complexity):</a:t>
             </a:r>
           </a:p>
           <a:p>
@@ -6723,45 +7427,23 @@
                 <a:spcPct val="110000"/>
               </a:lnSpc>
             </a:pPr>
-            <a:endParaRPr lang="en-US" b="1" dirty="0">
+            <a:endParaRPr lang="en-US" sz="2667" b="1" dirty="0">
               <a:latin typeface="Open Sans" panose="020B0606030504020204" pitchFamily="34" charset="0"/>
               <a:ea typeface="Open Sans" panose="020B0606030504020204" pitchFamily="34" charset="0"/>
               <a:cs typeface="Open Sans" panose="020B0606030504020204" pitchFamily="34" charset="0"/>
             </a:endParaRPr>
           </a:p>
           <a:p>
-            <a:pPr marL="342900" indent="-342900" algn="just">
-              <a:lnSpc>
-                <a:spcPct val="110000"/>
-              </a:lnSpc>
-              <a:buFont typeface="Arial" panose="020B0604020202020204" pitchFamily="34" charset="0"/>
-              <a:buChar char="•"/>
-            </a:pPr>
-            <a:r>
-              <a:rPr lang="en-US" b="1" dirty="0">
-                <a:latin typeface="Open Sans" panose="020B0606030504020204" pitchFamily="34" charset="0"/>
-                <a:ea typeface="Open Sans" panose="020B0606030504020204" pitchFamily="34" charset="0"/>
-                <a:cs typeface="Open Sans" panose="020B0606030504020204" pitchFamily="34" charset="0"/>
-              </a:rPr>
-              <a:t>U = M/C method</a:t>
-            </a:r>
-          </a:p>
-          <a:p>
-            <a:pPr marL="342900" indent="-342900" algn="just">
-              <a:lnSpc>
-                <a:spcPct val="110000"/>
-              </a:lnSpc>
-              <a:buFont typeface="Arial" panose="020B0604020202020204" pitchFamily="34" charset="0"/>
-              <a:buChar char="•"/>
-            </a:pPr>
-            <a:r>
-              <a:rPr lang="en-US" b="1" dirty="0">
-                <a:latin typeface="Open Sans" panose="020B0606030504020204" pitchFamily="34" charset="0"/>
-                <a:ea typeface="Open Sans" panose="020B0606030504020204" pitchFamily="34" charset="0"/>
-                <a:cs typeface="Open Sans" panose="020B0606030504020204" pitchFamily="34" charset="0"/>
-              </a:rPr>
-              <a:t>Carries</a:t>
-            </a:r>
+            <a:pPr algn="just">
+              <a:lnSpc>
+                <a:spcPct val="110000"/>
+              </a:lnSpc>
+            </a:pPr>
+            <a:endParaRPr lang="en-US" sz="2667" b="1" dirty="0">
+              <a:latin typeface="Open Sans" panose="020B0606030504020204" pitchFamily="34" charset="0"/>
+              <a:ea typeface="Open Sans" panose="020B0606030504020204" pitchFamily="34" charset="0"/>
+              <a:cs typeface="Open Sans" panose="020B0606030504020204" pitchFamily="34" charset="0"/>
+            </a:endParaRPr>
           </a:p>
           <a:p>
             <a:pPr algn="ctr">
@@ -6769,7 +7451,7 @@
                 <a:spcPct val="110000"/>
               </a:lnSpc>
             </a:pPr>
-            <a:endParaRPr lang="en-US" b="0" i="1" dirty="0">
+            <a:endParaRPr lang="en-US" sz="2667" i="1" dirty="0">
               <a:latin typeface="Cambria Math" panose="02040503050406030204" pitchFamily="18" charset="0"/>
               <a:ea typeface="Open Sans" panose="020B0606030504020204" pitchFamily="34" charset="0"/>
               <a:cs typeface="Open Sans" panose="020B0606030504020204" pitchFamily="34" charset="0"/>
@@ -6781,7 +7463,7 @@
                 <a:spcPct val="110000"/>
               </a:lnSpc>
             </a:pPr>
-            <a:endParaRPr lang="en-US" i="1" dirty="0">
+            <a:endParaRPr lang="en-US" sz="2667" i="1" dirty="0">
               <a:latin typeface="Cambria Math" panose="02040503050406030204" pitchFamily="18" charset="0"/>
               <a:ea typeface="Open Sans" panose="020B0606030504020204" pitchFamily="34" charset="0"/>
               <a:cs typeface="Open Sans" panose="020B0606030504020204" pitchFamily="34" charset="0"/>
@@ -6793,7 +7475,7 @@
                 <a:spcPct val="110000"/>
               </a:lnSpc>
             </a:pPr>
-            <a:endParaRPr lang="en-US" i="1" dirty="0">
+            <a:endParaRPr lang="en-US" sz="2667" i="1" dirty="0">
               <a:latin typeface="Cambria Math" panose="02040503050406030204" pitchFamily="18" charset="0"/>
               <a:ea typeface="Open Sans" panose="020B0606030504020204" pitchFamily="34" charset="0"/>
               <a:cs typeface="Open Sans" panose="020B0606030504020204" pitchFamily="34" charset="0"/>
@@ -6805,7 +7487,7 @@
                 <a:spcPct val="110000"/>
               </a:lnSpc>
             </a:pPr>
-            <a:endParaRPr lang="en-US" i="1" dirty="0">
+            <a:endParaRPr lang="en-US" sz="2667" i="1" dirty="0">
               <a:latin typeface="Cambria Math" panose="02040503050406030204" pitchFamily="18" charset="0"/>
               <a:ea typeface="Open Sans" panose="020B0606030504020204" pitchFamily="34" charset="0"/>
               <a:cs typeface="Open Sans" panose="020B0606030504020204" pitchFamily="34" charset="0"/>
@@ -6817,7 +7499,7 @@
                 <a:spcPct val="110000"/>
               </a:lnSpc>
             </a:pPr>
-            <a:endParaRPr lang="en-US" i="1" dirty="0">
+            <a:endParaRPr lang="en-US" sz="2667" i="1" dirty="0">
               <a:latin typeface="Cambria Math" panose="02040503050406030204" pitchFamily="18" charset="0"/>
               <a:ea typeface="Open Sans" panose="020B0606030504020204" pitchFamily="34" charset="0"/>
               <a:cs typeface="Open Sans" panose="020B0606030504020204" pitchFamily="34" charset="0"/>
@@ -6829,7 +7511,7 @@
                 <a:spcPct val="110000"/>
               </a:lnSpc>
             </a:pPr>
-            <a:endParaRPr lang="en-US" b="0" i="1" dirty="0">
+            <a:endParaRPr lang="en-US" sz="2667" i="1" dirty="0">
               <a:latin typeface="Cambria Math" panose="02040503050406030204" pitchFamily="18" charset="0"/>
               <a:ea typeface="Open Sans" panose="020B0606030504020204" pitchFamily="34" charset="0"/>
               <a:cs typeface="Open Sans" panose="020B0606030504020204" pitchFamily="34" charset="0"/>
@@ -6841,7 +7523,7 @@
                 <a:spcPct val="110000"/>
               </a:lnSpc>
             </a:pPr>
-            <a:endParaRPr lang="en-US" i="1" dirty="0">
+            <a:endParaRPr lang="en-US" sz="2667" i="1" dirty="0">
               <a:latin typeface="Cambria Math" panose="02040503050406030204" pitchFamily="18" charset="0"/>
               <a:ea typeface="Open Sans" panose="020B0606030504020204" pitchFamily="34" charset="0"/>
               <a:cs typeface="Open Sans" panose="020B0606030504020204" pitchFamily="34" charset="0"/>
@@ -6853,7 +7535,7 @@
                 <a:spcPct val="110000"/>
               </a:lnSpc>
             </a:pPr>
-            <a:endParaRPr lang="en-US" b="0" i="1" dirty="0">
+            <a:endParaRPr lang="en-US" sz="2667" i="1" dirty="0">
               <a:latin typeface="Cambria Math" panose="02040503050406030204" pitchFamily="18" charset="0"/>
               <a:ea typeface="Open Sans" panose="020B0606030504020204" pitchFamily="34" charset="0"/>
               <a:cs typeface="Open Sans" panose="020B0606030504020204" pitchFamily="34" charset="0"/>
@@ -6865,7 +7547,7 @@
                 <a:spcPct val="110000"/>
               </a:lnSpc>
             </a:pPr>
-            <a:endParaRPr lang="en-US" i="1" dirty="0">
+            <a:endParaRPr lang="en-US" sz="2667" i="1" dirty="0">
               <a:latin typeface="Cambria Math" panose="02040503050406030204" pitchFamily="18" charset="0"/>
               <a:ea typeface="Open Sans" panose="020B0606030504020204" pitchFamily="34" charset="0"/>
               <a:cs typeface="Open Sans" panose="020B0606030504020204" pitchFamily="34" charset="0"/>
@@ -6877,7 +7559,7 @@
                 <a:spcPct val="110000"/>
               </a:lnSpc>
             </a:pPr>
-            <a:endParaRPr lang="en-US" b="0" i="1" dirty="0">
+            <a:endParaRPr lang="en-US" sz="2667" i="1" dirty="0">
               <a:latin typeface="Cambria Math" panose="02040503050406030204" pitchFamily="18" charset="0"/>
               <a:ea typeface="Open Sans" panose="020B0606030504020204" pitchFamily="34" charset="0"/>
               <a:cs typeface="Open Sans" panose="020B0606030504020204" pitchFamily="34" charset="0"/>
@@ -6889,7 +7571,7 @@
                 <a:spcPct val="110000"/>
               </a:lnSpc>
             </a:pPr>
-            <a:endParaRPr lang="en-US" i="1" dirty="0">
+            <a:endParaRPr lang="en-US" sz="2667" i="1" dirty="0">
               <a:latin typeface="Cambria Math" panose="02040503050406030204" pitchFamily="18" charset="0"/>
               <a:ea typeface="Open Sans" panose="020B0606030504020204" pitchFamily="34" charset="0"/>
               <a:cs typeface="Open Sans" panose="020B0606030504020204" pitchFamily="34" charset="0"/>
@@ -6901,7 +7583,7 @@
                 <a:spcPct val="110000"/>
               </a:lnSpc>
             </a:pPr>
-            <a:endParaRPr lang="en-US" b="0" i="1" dirty="0">
+            <a:endParaRPr lang="en-US" sz="2667" i="1" dirty="0">
               <a:latin typeface="Cambria Math" panose="02040503050406030204" pitchFamily="18" charset="0"/>
               <a:ea typeface="Open Sans" panose="020B0606030504020204" pitchFamily="34" charset="0"/>
               <a:cs typeface="Open Sans" panose="020B0606030504020204" pitchFamily="34" charset="0"/>
@@ -6913,7 +7595,7 @@
                 <a:spcPct val="110000"/>
               </a:lnSpc>
             </a:pPr>
-            <a:endParaRPr lang="en-US" i="1" dirty="0">
+            <a:endParaRPr lang="en-US" sz="2667" i="1" dirty="0">
               <a:latin typeface="Cambria Math" panose="02040503050406030204" pitchFamily="18" charset="0"/>
               <a:ea typeface="Open Sans" panose="020B0606030504020204" pitchFamily="34" charset="0"/>
               <a:cs typeface="Open Sans" panose="020B0606030504020204" pitchFamily="34" charset="0"/>
@@ -6925,7 +7607,7 @@
                 <a:spcPct val="110000"/>
               </a:lnSpc>
             </a:pPr>
-            <a:endParaRPr lang="en-US" b="0" i="1" dirty="0">
+            <a:endParaRPr lang="en-US" sz="2667" i="1" dirty="0">
               <a:latin typeface="Cambria Math" panose="02040503050406030204" pitchFamily="18" charset="0"/>
               <a:ea typeface="Open Sans" panose="020B0606030504020204" pitchFamily="34" charset="0"/>
               <a:cs typeface="Open Sans" panose="020B0606030504020204" pitchFamily="34" charset="0"/>
@@ -6937,7 +7619,7 @@
                 <a:spcPct val="110000"/>
               </a:lnSpc>
             </a:pPr>
-            <a:endParaRPr lang="en-US" i="1" dirty="0">
+            <a:endParaRPr lang="en-US" sz="2667" i="1" dirty="0">
               <a:latin typeface="Cambria Math" panose="02040503050406030204" pitchFamily="18" charset="0"/>
               <a:ea typeface="Open Sans" panose="020B0606030504020204" pitchFamily="34" charset="0"/>
               <a:cs typeface="Open Sans" panose="020B0606030504020204" pitchFamily="34" charset="0"/>
@@ -6949,7 +7631,7 @@
                 <a:spcPct val="110000"/>
               </a:lnSpc>
             </a:pPr>
-            <a:endParaRPr lang="en-US" b="0" i="1" dirty="0">
+            <a:endParaRPr lang="en-US" sz="2667" i="1" dirty="0">
               <a:latin typeface="Cambria Math" panose="02040503050406030204" pitchFamily="18" charset="0"/>
               <a:ea typeface="Open Sans" panose="020B0606030504020204" pitchFamily="34" charset="0"/>
               <a:cs typeface="Open Sans" panose="020B0606030504020204" pitchFamily="34" charset="0"/>
@@ -6961,7 +7643,7 @@
                 <a:spcPct val="110000"/>
               </a:lnSpc>
             </a:pPr>
-            <a:endParaRPr lang="en-US" i="1" dirty="0">
+            <a:endParaRPr lang="en-US" sz="2667" i="1" dirty="0">
               <a:latin typeface="Cambria Math" panose="02040503050406030204" pitchFamily="18" charset="0"/>
               <a:ea typeface="Open Sans" panose="020B0606030504020204" pitchFamily="34" charset="0"/>
               <a:cs typeface="Open Sans" panose="020B0606030504020204" pitchFamily="34" charset="0"/>
@@ -6973,7 +7655,7 @@
                 <a:spcPct val="110000"/>
               </a:lnSpc>
             </a:pPr>
-            <a:endParaRPr lang="en-US" b="0" i="1" dirty="0">
+            <a:endParaRPr lang="en-US" sz="2667" i="1" dirty="0">
               <a:latin typeface="Cambria Math" panose="02040503050406030204" pitchFamily="18" charset="0"/>
               <a:ea typeface="Open Sans" panose="020B0606030504020204" pitchFamily="34" charset="0"/>
               <a:cs typeface="Open Sans" panose="020B0606030504020204" pitchFamily="34" charset="0"/>
@@ -6985,7 +7667,7 @@
                 <a:spcPct val="110000"/>
               </a:lnSpc>
             </a:pPr>
-            <a:endParaRPr lang="en-US" i="1" dirty="0">
+            <a:endParaRPr lang="en-US" sz="2667" i="1" dirty="0">
               <a:latin typeface="Cambria Math" panose="02040503050406030204" pitchFamily="18" charset="0"/>
               <a:ea typeface="Open Sans" panose="020B0606030504020204" pitchFamily="34" charset="0"/>
               <a:cs typeface="Open Sans" panose="020B0606030504020204" pitchFamily="34" charset="0"/>
@@ -6997,259 +7679,7 @@
                 <a:spcPct val="110000"/>
               </a:lnSpc>
             </a:pPr>
-            <a:endParaRPr lang="en-US" b="0" i="1" dirty="0">
-              <a:latin typeface="Cambria Math" panose="02040503050406030204" pitchFamily="18" charset="0"/>
-              <a:ea typeface="Open Sans" panose="020B0606030504020204" pitchFamily="34" charset="0"/>
-              <a:cs typeface="Open Sans" panose="020B0606030504020204" pitchFamily="34" charset="0"/>
-            </a:endParaRPr>
-          </a:p>
-          <a:p>
-            <a:pPr algn="ctr">
-              <a:lnSpc>
-                <a:spcPct val="110000"/>
-              </a:lnSpc>
-            </a:pPr>
-            <a:endParaRPr lang="en-US" i="1" dirty="0">
-              <a:latin typeface="Cambria Math" panose="02040503050406030204" pitchFamily="18" charset="0"/>
-              <a:ea typeface="Open Sans" panose="020B0606030504020204" pitchFamily="34" charset="0"/>
-              <a:cs typeface="Open Sans" panose="020B0606030504020204" pitchFamily="34" charset="0"/>
-            </a:endParaRPr>
-          </a:p>
-          <a:p>
-            <a:pPr algn="ctr">
-              <a:lnSpc>
-                <a:spcPct val="110000"/>
-              </a:lnSpc>
-            </a:pPr>
-            <a:endParaRPr lang="en-US" b="0" i="1" dirty="0">
-              <a:latin typeface="Cambria Math" panose="02040503050406030204" pitchFamily="18" charset="0"/>
-              <a:ea typeface="Open Sans" panose="020B0606030504020204" pitchFamily="34" charset="0"/>
-              <a:cs typeface="Open Sans" panose="020B0606030504020204" pitchFamily="34" charset="0"/>
-            </a:endParaRPr>
-          </a:p>
-          <a:p>
-            <a:pPr algn="ctr">
-              <a:lnSpc>
-                <a:spcPct val="110000"/>
-              </a:lnSpc>
-            </a:pPr>
-            <a:endParaRPr lang="en-US" b="0" i="1" dirty="0">
-              <a:latin typeface="Cambria Math" panose="02040503050406030204" pitchFamily="18" charset="0"/>
-              <a:ea typeface="Open Sans" panose="020B0606030504020204" pitchFamily="34" charset="0"/>
-              <a:cs typeface="Open Sans" panose="020B0606030504020204" pitchFamily="34" charset="0"/>
-            </a:endParaRPr>
-          </a:p>
-          <a:p>
-            <a:pPr algn="ctr">
-              <a:lnSpc>
-                <a:spcPct val="110000"/>
-              </a:lnSpc>
-            </a:pPr>
-            <a:endParaRPr lang="en-US" i="1" dirty="0">
-              <a:latin typeface="Cambria Math" panose="02040503050406030204" pitchFamily="18" charset="0"/>
-              <a:ea typeface="Open Sans" panose="020B0606030504020204" pitchFamily="34" charset="0"/>
-              <a:cs typeface="Open Sans" panose="020B0606030504020204" pitchFamily="34" charset="0"/>
-            </a:endParaRPr>
-          </a:p>
-          <a:p>
-            <a:pPr algn="ctr">
-              <a:lnSpc>
-                <a:spcPct val="110000"/>
-              </a:lnSpc>
-            </a:pPr>
-            <a:endParaRPr lang="en-US" b="0" i="1" dirty="0">
-              <a:latin typeface="Cambria Math" panose="02040503050406030204" pitchFamily="18" charset="0"/>
-              <a:ea typeface="Open Sans" panose="020B0606030504020204" pitchFamily="34" charset="0"/>
-              <a:cs typeface="Open Sans" panose="020B0606030504020204" pitchFamily="34" charset="0"/>
-            </a:endParaRPr>
-          </a:p>
-          <a:p>
-            <a:pPr algn="ctr">
-              <a:lnSpc>
-                <a:spcPct val="110000"/>
-              </a:lnSpc>
-            </a:pPr>
-            <a:endParaRPr lang="en-US" i="1" dirty="0">
-              <a:latin typeface="Cambria Math" panose="02040503050406030204" pitchFamily="18" charset="0"/>
-              <a:ea typeface="Open Sans" panose="020B0606030504020204" pitchFamily="34" charset="0"/>
-              <a:cs typeface="Open Sans" panose="020B0606030504020204" pitchFamily="34" charset="0"/>
-            </a:endParaRPr>
-          </a:p>
-          <a:p>
-            <a:pPr algn="ctr">
-              <a:lnSpc>
-                <a:spcPct val="110000"/>
-              </a:lnSpc>
-            </a:pPr>
-            <a:endParaRPr lang="en-US" b="0" i="1" dirty="0">
-              <a:latin typeface="Cambria Math" panose="02040503050406030204" pitchFamily="18" charset="0"/>
-              <a:ea typeface="Open Sans" panose="020B0606030504020204" pitchFamily="34" charset="0"/>
-              <a:cs typeface="Open Sans" panose="020B0606030504020204" pitchFamily="34" charset="0"/>
-            </a:endParaRPr>
-          </a:p>
-          <a:p>
-            <a:pPr algn="ctr">
-              <a:lnSpc>
-                <a:spcPct val="110000"/>
-              </a:lnSpc>
-            </a:pPr>
-            <a:endParaRPr lang="en-US" i="1" dirty="0">
-              <a:latin typeface="Cambria Math" panose="02040503050406030204" pitchFamily="18" charset="0"/>
-              <a:ea typeface="Open Sans" panose="020B0606030504020204" pitchFamily="34" charset="0"/>
-              <a:cs typeface="Open Sans" panose="020B0606030504020204" pitchFamily="34" charset="0"/>
-            </a:endParaRPr>
-          </a:p>
-          <a:p>
-            <a:pPr algn="ctr">
-              <a:lnSpc>
-                <a:spcPct val="110000"/>
-              </a:lnSpc>
-            </a:pPr>
-            <a:endParaRPr lang="en-US" b="0" i="1" dirty="0">
-              <a:latin typeface="Cambria Math" panose="02040503050406030204" pitchFamily="18" charset="0"/>
-              <a:ea typeface="Open Sans" panose="020B0606030504020204" pitchFamily="34" charset="0"/>
-              <a:cs typeface="Open Sans" panose="020B0606030504020204" pitchFamily="34" charset="0"/>
-            </a:endParaRPr>
-          </a:p>
-          <a:p>
-            <a:pPr algn="ctr">
-              <a:lnSpc>
-                <a:spcPct val="110000"/>
-              </a:lnSpc>
-            </a:pPr>
-            <a:endParaRPr lang="en-US" i="1" dirty="0">
-              <a:latin typeface="Cambria Math" panose="02040503050406030204" pitchFamily="18" charset="0"/>
-              <a:ea typeface="Open Sans" panose="020B0606030504020204" pitchFamily="34" charset="0"/>
-              <a:cs typeface="Open Sans" panose="020B0606030504020204" pitchFamily="34" charset="0"/>
-            </a:endParaRPr>
-          </a:p>
-          <a:p>
-            <a:pPr algn="ctr">
-              <a:lnSpc>
-                <a:spcPct val="110000"/>
-              </a:lnSpc>
-            </a:pPr>
-            <a:endParaRPr lang="en-US" b="0" i="1" dirty="0">
-              <a:latin typeface="Cambria Math" panose="02040503050406030204" pitchFamily="18" charset="0"/>
-              <a:ea typeface="Open Sans" panose="020B0606030504020204" pitchFamily="34" charset="0"/>
-              <a:cs typeface="Open Sans" panose="020B0606030504020204" pitchFamily="34" charset="0"/>
-            </a:endParaRPr>
-          </a:p>
-          <a:p>
-            <a:pPr algn="ctr">
-              <a:lnSpc>
-                <a:spcPct val="110000"/>
-              </a:lnSpc>
-            </a:pPr>
-            <a:endParaRPr lang="en-US" i="1" dirty="0">
-              <a:latin typeface="Cambria Math" panose="02040503050406030204" pitchFamily="18" charset="0"/>
-              <a:ea typeface="Open Sans" panose="020B0606030504020204" pitchFamily="34" charset="0"/>
-              <a:cs typeface="Open Sans" panose="020B0606030504020204" pitchFamily="34" charset="0"/>
-            </a:endParaRPr>
-          </a:p>
-          <a:p>
-            <a:pPr algn="ctr">
-              <a:lnSpc>
-                <a:spcPct val="110000"/>
-              </a:lnSpc>
-            </a:pPr>
-            <a:endParaRPr lang="en-US" b="0" i="1" dirty="0">
-              <a:latin typeface="Cambria Math" panose="02040503050406030204" pitchFamily="18" charset="0"/>
-              <a:ea typeface="Open Sans" panose="020B0606030504020204" pitchFamily="34" charset="0"/>
-              <a:cs typeface="Open Sans" panose="020B0606030504020204" pitchFamily="34" charset="0"/>
-            </a:endParaRPr>
-          </a:p>
-          <a:p>
-            <a:pPr algn="ctr">
-              <a:lnSpc>
-                <a:spcPct val="110000"/>
-              </a:lnSpc>
-            </a:pPr>
-            <a:endParaRPr lang="en-US" i="1" dirty="0">
-              <a:latin typeface="Cambria Math" panose="02040503050406030204" pitchFamily="18" charset="0"/>
-              <a:ea typeface="Open Sans" panose="020B0606030504020204" pitchFamily="34" charset="0"/>
-              <a:cs typeface="Open Sans" panose="020B0606030504020204" pitchFamily="34" charset="0"/>
-            </a:endParaRPr>
-          </a:p>
-          <a:p>
-            <a:pPr algn="ctr">
-              <a:lnSpc>
-                <a:spcPct val="110000"/>
-              </a:lnSpc>
-            </a:pPr>
-            <a:endParaRPr lang="en-US" b="0" i="1" dirty="0">
-              <a:latin typeface="Cambria Math" panose="02040503050406030204" pitchFamily="18" charset="0"/>
-              <a:ea typeface="Open Sans" panose="020B0606030504020204" pitchFamily="34" charset="0"/>
-              <a:cs typeface="Open Sans" panose="020B0606030504020204" pitchFamily="34" charset="0"/>
-            </a:endParaRPr>
-          </a:p>
-          <a:p>
-            <a:pPr algn="ctr">
-              <a:lnSpc>
-                <a:spcPct val="110000"/>
-              </a:lnSpc>
-            </a:pPr>
-            <a:endParaRPr lang="en-US" i="1" dirty="0">
-              <a:latin typeface="Cambria Math" panose="02040503050406030204" pitchFamily="18" charset="0"/>
-              <a:ea typeface="Open Sans" panose="020B0606030504020204" pitchFamily="34" charset="0"/>
-              <a:cs typeface="Open Sans" panose="020B0606030504020204" pitchFamily="34" charset="0"/>
-            </a:endParaRPr>
-          </a:p>
-          <a:p>
-            <a:pPr algn="ctr">
-              <a:lnSpc>
-                <a:spcPct val="110000"/>
-              </a:lnSpc>
-            </a:pPr>
-            <a:endParaRPr lang="en-US" b="0" i="1" dirty="0">
-              <a:latin typeface="Cambria Math" panose="02040503050406030204" pitchFamily="18" charset="0"/>
-              <a:ea typeface="Open Sans" panose="020B0606030504020204" pitchFamily="34" charset="0"/>
-              <a:cs typeface="Open Sans" panose="020B0606030504020204" pitchFamily="34" charset="0"/>
-            </a:endParaRPr>
-          </a:p>
-          <a:p>
-            <a:pPr algn="ctr">
-              <a:lnSpc>
-                <a:spcPct val="110000"/>
-              </a:lnSpc>
-            </a:pPr>
-            <a:endParaRPr lang="en-US" i="1" dirty="0">
-              <a:latin typeface="Cambria Math" panose="02040503050406030204" pitchFamily="18" charset="0"/>
-              <a:ea typeface="Open Sans" panose="020B0606030504020204" pitchFamily="34" charset="0"/>
-              <a:cs typeface="Open Sans" panose="020B0606030504020204" pitchFamily="34" charset="0"/>
-            </a:endParaRPr>
-          </a:p>
-          <a:p>
-            <a:pPr algn="ctr">
-              <a:lnSpc>
-                <a:spcPct val="110000"/>
-              </a:lnSpc>
-            </a:pPr>
-            <a:endParaRPr lang="en-US" i="1" dirty="0">
-              <a:latin typeface="Cambria Math" panose="02040503050406030204" pitchFamily="18" charset="0"/>
-              <a:ea typeface="Open Sans" panose="020B0606030504020204" pitchFamily="34" charset="0"/>
-              <a:cs typeface="Open Sans" panose="020B0606030504020204" pitchFamily="34" charset="0"/>
-            </a:endParaRPr>
-          </a:p>
-          <a:p>
-            <a:pPr algn="ctr">
-              <a:lnSpc>
-                <a:spcPct val="110000"/>
-              </a:lnSpc>
-            </a:pPr>
-            <a:endParaRPr lang="en-US" i="1" dirty="0">
-              <a:latin typeface="Cambria Math" panose="02040503050406030204" pitchFamily="18" charset="0"/>
-              <a:ea typeface="Open Sans" panose="020B0606030504020204" pitchFamily="34" charset="0"/>
-              <a:cs typeface="Open Sans" panose="020B0606030504020204" pitchFamily="34" charset="0"/>
-            </a:endParaRPr>
-          </a:p>
-          <a:p>
-            <a:pPr algn="ctr">
-              <a:lnSpc>
-                <a:spcPct val="110000"/>
-              </a:lnSpc>
-            </a:pPr>
-            <a:endParaRPr lang="en-US" i="1" dirty="0">
+            <a:endParaRPr lang="en-US" sz="2667" i="1" dirty="0">
               <a:latin typeface="Cambria Math" panose="02040503050406030204" pitchFamily="18" charset="0"/>
               <a:ea typeface="Open Sans" panose="020B0606030504020204" pitchFamily="34" charset="0"/>
               <a:cs typeface="Open Sans" panose="020B0606030504020204" pitchFamily="34" charset="0"/>
@@ -7259,10 +7689,10 @@
       </p:sp>
       <p:sp>
         <p:nvSpPr>
-          <p:cNvPr id="33" name="Rectangle 10">
+          <p:cNvPr id="43" name="Rectangle 10">
             <a:extLst>
               <a:ext uri="{FF2B5EF4-FFF2-40B4-BE49-F238E27FC236}">
-                <a16:creationId xmlns:a16="http://schemas.microsoft.com/office/drawing/2014/main" id="{6F49D22B-21A3-8433-0D97-F04EE82FF85D}"/>
+                <a16:creationId xmlns:a16="http://schemas.microsoft.com/office/drawing/2014/main" id="{F9522775-0917-A637-2ED0-D78CA46CDCAC}"/>
               </a:ext>
             </a:extLst>
           </p:cNvPr>
@@ -7273,8 +7703,8 @@
         </p:nvSpPr>
         <p:spPr bwMode="auto">
           <a:xfrm>
-            <a:off x="16123635" y="4755722"/>
-            <a:ext cx="8371486" cy="582201"/>
+            <a:off x="10736649" y="6551340"/>
+            <a:ext cx="9631680" cy="776268"/>
           </a:xfrm>
           <a:prstGeom prst="rect">
             <a:avLst/>
@@ -7288,18 +7718,18 @@
           </a:ln>
         </p:spPr>
         <p:txBody>
-          <a:bodyPr wrap="none" lIns="182880" tIns="48768" rIns="182880" bIns="45709" anchor="ctr" anchorCtr="0"/>
+          <a:bodyPr wrap="none" lIns="243840" tIns="65024" rIns="243840" bIns="60945" anchor="ctr" anchorCtr="0"/>
           <a:lstStyle>
             <a:defPPr>
               <a:defRPr kern="1200"/>
             </a:defPPr>
           </a:lstStyle>
           <a:p>
-            <a:pPr algn="ctr" defTabSz="3135215">
+            <a:pPr algn="ctr" defTabSz="4180182">
               <a:defRPr/>
             </a:pPr>
             <a:r>
-              <a:rPr lang="en-US" sz="2800" b="1" dirty="0">
+              <a:rPr lang="en-US" sz="3733" b="1" dirty="0">
                 <a:solidFill>
                   <a:schemeClr val="bg1"/>
                 </a:solidFill>
@@ -7313,10 +7743,10 @@
       </p:sp>
       <p:sp>
         <p:nvSpPr>
-          <p:cNvPr id="36" name="TextBox 35">
+          <p:cNvPr id="2054" name="TextBox 2053">
             <a:extLst>
               <a:ext uri="{FF2B5EF4-FFF2-40B4-BE49-F238E27FC236}">
-                <a16:creationId xmlns:a16="http://schemas.microsoft.com/office/drawing/2014/main" id="{1D92BEE1-3701-025B-B25B-F953248466AC}"/>
+                <a16:creationId xmlns:a16="http://schemas.microsoft.com/office/drawing/2014/main" id="{2A313C7D-9821-8CDD-DA1E-5919B6C4E2EE}"/>
               </a:ext>
             </a:extLst>
           </p:cNvPr>
@@ -7327,8 +7757,8 @@
         </p:nvSpPr>
         <p:spPr bwMode="auto">
           <a:xfrm>
-            <a:off x="24878694" y="5572470"/>
-            <a:ext cx="7268693" cy="7315200"/>
+            <a:off x="10736648" y="19774536"/>
+            <a:ext cx="9631680" cy="11795760"/>
           </a:xfrm>
           <a:prstGeom prst="rect">
             <a:avLst/>
@@ -7346,7 +7776,7 @@
           </a:ln>
         </p:spPr>
         <p:txBody>
-          <a:bodyPr wrap="square" lIns="91440" tIns="91440" rIns="91440" bIns="91440">
+          <a:bodyPr wrap="square" lIns="121920" tIns="121920" rIns="121920" bIns="121920">
             <a:spAutoFit/>
           </a:bodyPr>
           <a:lstStyle>
@@ -7466,12 +7896,12 @@
               </a:lnSpc>
             </a:pPr>
             <a:r>
-              <a:rPr lang="en-US" b="1" dirty="0">
+              <a:rPr lang="en-US" sz="2667" b="1" dirty="0">
                 <a:latin typeface="Open Sans" panose="020B0606030504020204" pitchFamily="34" charset="0"/>
                 <a:ea typeface="Open Sans" panose="020B0606030504020204" pitchFamily="34" charset="0"/>
                 <a:cs typeface="Open Sans" panose="020B0606030504020204" pitchFamily="34" charset="0"/>
               </a:rPr>
-              <a:t>I-Cat x I-Cat Example:</a:t>
+              <a:t>Multiplication Method &amp; Examples:</a:t>
             </a:r>
           </a:p>
           <a:p>
@@ -7480,19 +7910,31 @@
                 <a:spcPct val="110000"/>
               </a:lnSpc>
             </a:pPr>
-            <a:endParaRPr lang="en-US" b="1" dirty="0">
+            <a:endParaRPr lang="en-US" sz="2667" b="1" dirty="0">
               <a:latin typeface="Open Sans" panose="020B0606030504020204" pitchFamily="34" charset="0"/>
               <a:ea typeface="Open Sans" panose="020B0606030504020204" pitchFamily="34" charset="0"/>
               <a:cs typeface="Open Sans" panose="020B0606030504020204" pitchFamily="34" charset="0"/>
             </a:endParaRPr>
           </a:p>
           <a:p>
+            <a:pPr algn="just">
+              <a:lnSpc>
+                <a:spcPct val="110000"/>
+              </a:lnSpc>
+            </a:pPr>
+            <a:endParaRPr lang="en-US" sz="2667" b="1" dirty="0">
+              <a:latin typeface="Open Sans" panose="020B0606030504020204" pitchFamily="34" charset="0"/>
+              <a:ea typeface="Open Sans" panose="020B0606030504020204" pitchFamily="34" charset="0"/>
+              <a:cs typeface="Open Sans" panose="020B0606030504020204" pitchFamily="34" charset="0"/>
+            </a:endParaRPr>
+          </a:p>
+          <a:p>
             <a:pPr algn="ctr">
               <a:lnSpc>
                 <a:spcPct val="110000"/>
               </a:lnSpc>
             </a:pPr>
-            <a:endParaRPr lang="en-US" b="0" i="1" dirty="0">
+            <a:endParaRPr lang="en-US" sz="2667" i="1" dirty="0">
               <a:latin typeface="Cambria Math" panose="02040503050406030204" pitchFamily="18" charset="0"/>
               <a:ea typeface="Open Sans" panose="020B0606030504020204" pitchFamily="34" charset="0"/>
               <a:cs typeface="Open Sans" panose="020B0606030504020204" pitchFamily="34" charset="0"/>
@@ -7504,7 +7946,7 @@
                 <a:spcPct val="110000"/>
               </a:lnSpc>
             </a:pPr>
-            <a:endParaRPr lang="en-US" i="1" dirty="0">
+            <a:endParaRPr lang="en-US" sz="2667" i="1" dirty="0">
               <a:latin typeface="Cambria Math" panose="02040503050406030204" pitchFamily="18" charset="0"/>
               <a:ea typeface="Open Sans" panose="020B0606030504020204" pitchFamily="34" charset="0"/>
               <a:cs typeface="Open Sans" panose="020B0606030504020204" pitchFamily="34" charset="0"/>
@@ -7516,7 +7958,7 @@
                 <a:spcPct val="110000"/>
               </a:lnSpc>
             </a:pPr>
-            <a:endParaRPr lang="en-US" i="1" dirty="0">
+            <a:endParaRPr lang="en-US" sz="2667" i="1" dirty="0">
               <a:latin typeface="Cambria Math" panose="02040503050406030204" pitchFamily="18" charset="0"/>
               <a:ea typeface="Open Sans" panose="020B0606030504020204" pitchFamily="34" charset="0"/>
               <a:cs typeface="Open Sans" panose="020B0606030504020204" pitchFamily="34" charset="0"/>
@@ -7528,7 +7970,7 @@
                 <a:spcPct val="110000"/>
               </a:lnSpc>
             </a:pPr>
-            <a:endParaRPr lang="en-US" i="1" dirty="0">
+            <a:endParaRPr lang="en-US" sz="2667" i="1" dirty="0">
               <a:latin typeface="Cambria Math" panose="02040503050406030204" pitchFamily="18" charset="0"/>
               <a:ea typeface="Open Sans" panose="020B0606030504020204" pitchFamily="34" charset="0"/>
               <a:cs typeface="Open Sans" panose="020B0606030504020204" pitchFamily="34" charset="0"/>
@@ -7540,7 +7982,7 @@
                 <a:spcPct val="110000"/>
               </a:lnSpc>
             </a:pPr>
-            <a:endParaRPr lang="en-US" i="1" dirty="0">
+            <a:endParaRPr lang="en-US" sz="2667" i="1" dirty="0">
               <a:latin typeface="Cambria Math" panose="02040503050406030204" pitchFamily="18" charset="0"/>
               <a:ea typeface="Open Sans" panose="020B0606030504020204" pitchFamily="34" charset="0"/>
               <a:cs typeface="Open Sans" panose="020B0606030504020204" pitchFamily="34" charset="0"/>
@@ -7552,7 +7994,7 @@
                 <a:spcPct val="110000"/>
               </a:lnSpc>
             </a:pPr>
-            <a:endParaRPr lang="en-US" b="0" i="1" dirty="0">
+            <a:endParaRPr lang="en-US" sz="2667" i="1" dirty="0">
               <a:latin typeface="Cambria Math" panose="02040503050406030204" pitchFamily="18" charset="0"/>
               <a:ea typeface="Open Sans" panose="020B0606030504020204" pitchFamily="34" charset="0"/>
               <a:cs typeface="Open Sans" panose="020B0606030504020204" pitchFamily="34" charset="0"/>
@@ -7564,7 +8006,7 @@
                 <a:spcPct val="110000"/>
               </a:lnSpc>
             </a:pPr>
-            <a:endParaRPr lang="en-US" i="1" dirty="0">
+            <a:endParaRPr lang="en-US" sz="2667" i="1" dirty="0">
               <a:latin typeface="Cambria Math" panose="02040503050406030204" pitchFamily="18" charset="0"/>
               <a:ea typeface="Open Sans" panose="020B0606030504020204" pitchFamily="34" charset="0"/>
               <a:cs typeface="Open Sans" panose="020B0606030504020204" pitchFamily="34" charset="0"/>
@@ -7576,7 +8018,7 @@
                 <a:spcPct val="110000"/>
               </a:lnSpc>
             </a:pPr>
-            <a:endParaRPr lang="en-US" b="0" i="1" dirty="0">
+            <a:endParaRPr lang="en-US" sz="2667" i="1" dirty="0">
               <a:latin typeface="Cambria Math" panose="02040503050406030204" pitchFamily="18" charset="0"/>
               <a:ea typeface="Open Sans" panose="020B0606030504020204" pitchFamily="34" charset="0"/>
               <a:cs typeface="Open Sans" panose="020B0606030504020204" pitchFamily="34" charset="0"/>
@@ -7588,7 +8030,7 @@
                 <a:spcPct val="110000"/>
               </a:lnSpc>
             </a:pPr>
-            <a:endParaRPr lang="en-US" i="1" dirty="0">
+            <a:endParaRPr lang="en-US" sz="2667" i="1" dirty="0">
               <a:latin typeface="Cambria Math" panose="02040503050406030204" pitchFamily="18" charset="0"/>
               <a:ea typeface="Open Sans" panose="020B0606030504020204" pitchFamily="34" charset="0"/>
               <a:cs typeface="Open Sans" panose="020B0606030504020204" pitchFamily="34" charset="0"/>
@@ -7600,7 +8042,7 @@
                 <a:spcPct val="110000"/>
               </a:lnSpc>
             </a:pPr>
-            <a:endParaRPr lang="en-US" b="0" i="1" dirty="0">
+            <a:endParaRPr lang="en-US" sz="2667" i="1" dirty="0">
               <a:latin typeface="Cambria Math" panose="02040503050406030204" pitchFamily="18" charset="0"/>
               <a:ea typeface="Open Sans" panose="020B0606030504020204" pitchFamily="34" charset="0"/>
               <a:cs typeface="Open Sans" panose="020B0606030504020204" pitchFamily="34" charset="0"/>
@@ -7612,7 +8054,7 @@
                 <a:spcPct val="110000"/>
               </a:lnSpc>
             </a:pPr>
-            <a:endParaRPr lang="en-US" i="1" dirty="0">
+            <a:endParaRPr lang="en-US" sz="2667" i="1" dirty="0">
               <a:latin typeface="Cambria Math" panose="02040503050406030204" pitchFamily="18" charset="0"/>
               <a:ea typeface="Open Sans" panose="020B0606030504020204" pitchFamily="34" charset="0"/>
               <a:cs typeface="Open Sans" panose="020B0606030504020204" pitchFamily="34" charset="0"/>
@@ -7624,7 +8066,7 @@
                 <a:spcPct val="110000"/>
               </a:lnSpc>
             </a:pPr>
-            <a:endParaRPr lang="en-US" b="0" i="1" dirty="0">
+            <a:endParaRPr lang="en-US" sz="2667" i="1" dirty="0">
               <a:latin typeface="Cambria Math" panose="02040503050406030204" pitchFamily="18" charset="0"/>
               <a:ea typeface="Open Sans" panose="020B0606030504020204" pitchFamily="34" charset="0"/>
               <a:cs typeface="Open Sans" panose="020B0606030504020204" pitchFamily="34" charset="0"/>
@@ -7636,7 +8078,7 @@
                 <a:spcPct val="110000"/>
               </a:lnSpc>
             </a:pPr>
-            <a:endParaRPr lang="en-US" i="1" dirty="0">
+            <a:endParaRPr lang="en-US" sz="2667" i="1" dirty="0">
               <a:latin typeface="Cambria Math" panose="02040503050406030204" pitchFamily="18" charset="0"/>
               <a:ea typeface="Open Sans" panose="020B0606030504020204" pitchFamily="34" charset="0"/>
               <a:cs typeface="Open Sans" panose="020B0606030504020204" pitchFamily="34" charset="0"/>
@@ -7648,7 +8090,7 @@
                 <a:spcPct val="110000"/>
               </a:lnSpc>
             </a:pPr>
-            <a:endParaRPr lang="en-US" b="0" i="1" dirty="0">
+            <a:endParaRPr lang="en-US" sz="2667" i="1" dirty="0">
               <a:latin typeface="Cambria Math" panose="02040503050406030204" pitchFamily="18" charset="0"/>
               <a:ea typeface="Open Sans" panose="020B0606030504020204" pitchFamily="34" charset="0"/>
               <a:cs typeface="Open Sans" panose="020B0606030504020204" pitchFamily="34" charset="0"/>
@@ -7660,7 +8102,7 @@
                 <a:spcPct val="110000"/>
               </a:lnSpc>
             </a:pPr>
-            <a:endParaRPr lang="en-US" i="1" dirty="0">
+            <a:endParaRPr lang="en-US" sz="2667" i="1" dirty="0">
               <a:latin typeface="Cambria Math" panose="02040503050406030204" pitchFamily="18" charset="0"/>
               <a:ea typeface="Open Sans" panose="020B0606030504020204" pitchFamily="34" charset="0"/>
               <a:cs typeface="Open Sans" panose="020B0606030504020204" pitchFamily="34" charset="0"/>
@@ -7672,7 +8114,7 @@
                 <a:spcPct val="110000"/>
               </a:lnSpc>
             </a:pPr>
-            <a:endParaRPr lang="en-US" b="0" i="1" dirty="0">
+            <a:endParaRPr lang="en-US" sz="2667" i="1" dirty="0">
               <a:latin typeface="Cambria Math" panose="02040503050406030204" pitchFamily="18" charset="0"/>
               <a:ea typeface="Open Sans" panose="020B0606030504020204" pitchFamily="34" charset="0"/>
               <a:cs typeface="Open Sans" panose="020B0606030504020204" pitchFamily="34" charset="0"/>
@@ -7684,7 +8126,19 @@
                 <a:spcPct val="110000"/>
               </a:lnSpc>
             </a:pPr>
-            <a:endParaRPr lang="en-US" b="0" i="1" dirty="0">
+            <a:endParaRPr lang="en-US" sz="2667" i="1" dirty="0">
+              <a:latin typeface="Cambria Math" panose="02040503050406030204" pitchFamily="18" charset="0"/>
+              <a:ea typeface="Open Sans" panose="020B0606030504020204" pitchFamily="34" charset="0"/>
+              <a:cs typeface="Open Sans" panose="020B0606030504020204" pitchFamily="34" charset="0"/>
+            </a:endParaRPr>
+          </a:p>
+          <a:p>
+            <a:pPr algn="ctr">
+              <a:lnSpc>
+                <a:spcPct val="110000"/>
+              </a:lnSpc>
+            </a:pPr>
+            <a:endParaRPr lang="en-US" sz="2667" i="1" dirty="0">
               <a:latin typeface="Cambria Math" panose="02040503050406030204" pitchFamily="18" charset="0"/>
               <a:ea typeface="Open Sans" panose="020B0606030504020204" pitchFamily="34" charset="0"/>
               <a:cs typeface="Open Sans" panose="020B0606030504020204" pitchFamily="34" charset="0"/>
@@ -7706,8 +8160,8 @@
         </p:nvGrpSpPr>
         <p:grpSpPr>
           <a:xfrm>
-            <a:off x="8755544" y="9177313"/>
-            <a:ext cx="6743204" cy="3529874"/>
+            <a:off x="11057018" y="13491201"/>
+            <a:ext cx="8990939" cy="4706499"/>
             <a:chOff x="9041671" y="10053754"/>
             <a:chExt cx="6743204" cy="3529874"/>
           </a:xfrm>
@@ -7785,543 +8239,436 @@
           </p:spPr>
         </p:pic>
       </p:grpSp>
-      <p:sp>
-        <p:nvSpPr>
-          <p:cNvPr id="37" name="Rectangle 10">
+      <p:pic>
+        <p:nvPicPr>
+          <p:cNvPr id="55" name="Picture 54">
             <a:extLst>
               <a:ext uri="{FF2B5EF4-FFF2-40B4-BE49-F238E27FC236}">
-                <a16:creationId xmlns:a16="http://schemas.microsoft.com/office/drawing/2014/main" id="{9E2B1263-E340-3921-4347-4A8AF3F28462}"/>
+                <a16:creationId xmlns:a16="http://schemas.microsoft.com/office/drawing/2014/main" id="{63CAA6CC-D0DE-C436-EBF6-FC42E116B933}"/>
               </a:ext>
             </a:extLst>
           </p:cNvPr>
-          <p:cNvSpPr>
-            <a:spLocks noChangeArrowheads="1"/>
-          </p:cNvSpPr>
+          <p:cNvPicPr>
+            <a:picLocks noChangeAspect="1"/>
+          </p:cNvPicPr>
           <p:nvPr/>
-        </p:nvSpPr>
-        <p:spPr bwMode="auto">
+        </p:nvPicPr>
+        <p:blipFill>
+          <a:blip r:embed="rId6">
+            <a:extLst>
+              <a:ext uri="{28A0092B-C50C-407E-A947-70E740481C1C}">
+                <a14:useLocalDpi xmlns:a14="http://schemas.microsoft.com/office/drawing/2010/main" val="0"/>
+              </a:ext>
+            </a:extLst>
+          </a:blip>
+          <a:stretch>
+            <a:fillRect/>
+          </a:stretch>
+        </p:blipFill>
+        <p:spPr>
           <a:xfrm>
-            <a:off x="24878694" y="4755723"/>
-            <a:ext cx="7268693" cy="582201"/>
+            <a:off x="2745522" y="21652660"/>
+            <a:ext cx="5626932" cy="1018449"/>
           </a:xfrm>
           <a:prstGeom prst="rect">
             <a:avLst/>
           </a:prstGeom>
-          <a:solidFill>
-            <a:srgbClr val="1482A5"/>
-          </a:solidFill>
-          <a:ln w="12700">
-            <a:noFill/>
-            <a:miter lim="800000"/>
-          </a:ln>
         </p:spPr>
-        <p:txBody>
-          <a:bodyPr wrap="none" lIns="182880" tIns="48768" rIns="182880" bIns="45709" anchor="ctr" anchorCtr="0"/>
-          <a:lstStyle>
-            <a:defPPr>
-              <a:defRPr kern="1200"/>
-            </a:defPPr>
-          </a:lstStyle>
-          <a:p>
-            <a:pPr algn="ctr" defTabSz="3135215">
-              <a:defRPr/>
-            </a:pPr>
-            <a:r>
-              <a:rPr lang="en-US" sz="2800" b="1" dirty="0">
-                <a:solidFill>
-                  <a:schemeClr val="bg1"/>
-                </a:solidFill>
-                <a:latin typeface="Arial" panose="020B0604020202020204" pitchFamily="34" charset="0"/>
-                <a:cs typeface="Arial" panose="020B0604020202020204" pitchFamily="34" charset="0"/>
-              </a:rPr>
-              <a:t>Operations &amp; Examples (cont.)</a:t>
-            </a:r>
-          </a:p>
-        </p:txBody>
-      </p:sp>
-      <p:sp>
-        <p:nvSpPr>
-          <p:cNvPr id="42" name="TextBox 41">
+      </p:pic>
+      <p:pic>
+        <p:nvPicPr>
+          <p:cNvPr id="57" name="Picture 56">
             <a:extLst>
               <a:ext uri="{FF2B5EF4-FFF2-40B4-BE49-F238E27FC236}">
-                <a16:creationId xmlns:a16="http://schemas.microsoft.com/office/drawing/2014/main" id="{68FF7854-D008-3271-1B76-D3C5BAD8A8BB}"/>
+                <a16:creationId xmlns:a16="http://schemas.microsoft.com/office/drawing/2014/main" id="{84FEF396-7E2A-B792-EA42-EECA63C1FEFE}"/>
               </a:ext>
             </a:extLst>
           </p:cNvPr>
-          <p:cNvSpPr txBox="1">
-            <a:spLocks noChangeArrowheads="1"/>
-          </p:cNvSpPr>
+          <p:cNvPicPr>
+            <a:picLocks noChangeAspect="1"/>
+          </p:cNvPicPr>
           <p:nvPr/>
-        </p:nvSpPr>
-        <p:spPr bwMode="auto">
+        </p:nvPicPr>
+        <p:blipFill>
+          <a:blip r:embed="rId7">
+            <a:extLst>
+              <a:ext uri="{28A0092B-C50C-407E-A947-70E740481C1C}">
+                <a14:useLocalDpi xmlns:a14="http://schemas.microsoft.com/office/drawing/2010/main" val="0"/>
+              </a:ext>
+            </a:extLst>
+          </a:blip>
+          <a:stretch>
+            <a:fillRect/>
+          </a:stretch>
+        </p:blipFill>
+        <p:spPr>
           <a:xfrm>
-            <a:off x="8483367" y="5572470"/>
-            <a:ext cx="7268693" cy="7955191"/>
+            <a:off x="1757006" y="22575216"/>
+            <a:ext cx="7603964" cy="1066409"/>
           </a:xfrm>
           <a:prstGeom prst="rect">
             <a:avLst/>
           </a:prstGeom>
-          <a:solidFill>
-            <a:schemeClr val="bg1"/>
-          </a:solidFill>
-          <a:ln w="9525">
-            <a:solidFill>
-              <a:srgbClr val="000000"/>
-            </a:solidFill>
-            <a:miter lim="800000"/>
-            <a:headEnd/>
-            <a:tailEnd/>
-          </a:ln>
         </p:spPr>
-        <p:txBody>
-          <a:bodyPr wrap="square" lIns="91440" tIns="91440" rIns="91440" bIns="91440">
-            <a:spAutoFit/>
-          </a:bodyPr>
-          <a:lstStyle>
-            <a:defPPr>
-              <a:defRPr kern="1200"/>
-            </a:defPPr>
-            <a:lvl1pPr eaLnBrk="0" hangingPunct="0">
-              <a:defRPr sz="2000">
-                <a:solidFill>
-                  <a:schemeClr val="tx1"/>
-                </a:solidFill>
-                <a:latin typeface="Arial"/>
-                <a:ea typeface="ＭＳ Ｐゴシック" pitchFamily="-106" charset="-128"/>
-              </a:defRPr>
-            </a:lvl1pPr>
-            <a:lvl2pPr eaLnBrk="0" hangingPunct="0">
-              <a:defRPr sz="2000">
-                <a:solidFill>
-                  <a:schemeClr val="tx1"/>
-                </a:solidFill>
-                <a:latin typeface="Arial"/>
-                <a:ea typeface="ＭＳ Ｐゴシック" pitchFamily="-106" charset="-128"/>
-              </a:defRPr>
-            </a:lvl2pPr>
-            <a:lvl3pPr marL="1143000" indent="-228600" eaLnBrk="0" hangingPunct="0">
-              <a:defRPr sz="2000">
-                <a:solidFill>
-                  <a:schemeClr val="tx1"/>
-                </a:solidFill>
-                <a:latin typeface="Arial"/>
-                <a:ea typeface="ＭＳ Ｐゴシック" pitchFamily="-106" charset="-128"/>
-              </a:defRPr>
-            </a:lvl3pPr>
-            <a:lvl4pPr marL="1600200" indent="-228600" eaLnBrk="0" hangingPunct="0">
-              <a:defRPr sz="2000">
-                <a:solidFill>
-                  <a:schemeClr val="tx1"/>
-                </a:solidFill>
-                <a:latin typeface="Arial"/>
-                <a:ea typeface="ＭＳ Ｐゴシック" pitchFamily="-106" charset="-128"/>
-              </a:defRPr>
-            </a:lvl4pPr>
-            <a:lvl5pPr marL="2057400" indent="-228600" eaLnBrk="0" hangingPunct="0">
-              <a:defRPr sz="2000">
-                <a:solidFill>
-                  <a:schemeClr val="tx1"/>
-                </a:solidFill>
-                <a:latin typeface="Arial"/>
-                <a:ea typeface="ＭＳ Ｐゴシック" pitchFamily="-106" charset="-128"/>
-              </a:defRPr>
-            </a:lvl5pPr>
-            <a:lvl6pPr marL="2514600" indent="-228600" eaLnBrk="0" fontAlgn="base" hangingPunct="0">
-              <a:spcBef>
-                <a:spcPct val="0"/>
-              </a:spcBef>
-              <a:spcAft>
-                <a:spcPct val="0"/>
-              </a:spcAft>
-              <a:defRPr sz="2000">
-                <a:solidFill>
-                  <a:schemeClr val="tx1"/>
-                </a:solidFill>
-                <a:latin typeface="Arial"/>
-                <a:ea typeface="ＭＳ Ｐゴシック" pitchFamily="-106" charset="-128"/>
-              </a:defRPr>
-            </a:lvl6pPr>
-            <a:lvl7pPr marL="2971800" indent="-228600" eaLnBrk="0" fontAlgn="base" hangingPunct="0">
-              <a:spcBef>
-                <a:spcPct val="0"/>
-              </a:spcBef>
-              <a:spcAft>
-                <a:spcPct val="0"/>
-              </a:spcAft>
-              <a:defRPr sz="2000">
-                <a:solidFill>
-                  <a:schemeClr val="tx1"/>
-                </a:solidFill>
-                <a:latin typeface="Arial"/>
-                <a:ea typeface="ＭＳ Ｐゴシック" pitchFamily="-106" charset="-128"/>
-              </a:defRPr>
-            </a:lvl7pPr>
-            <a:lvl8pPr marL="3429000" indent="-228600" eaLnBrk="0" fontAlgn="base" hangingPunct="0">
-              <a:spcBef>
-                <a:spcPct val="0"/>
-              </a:spcBef>
-              <a:spcAft>
-                <a:spcPct val="0"/>
-              </a:spcAft>
-              <a:defRPr sz="2000">
-                <a:solidFill>
-                  <a:schemeClr val="tx1"/>
-                </a:solidFill>
-                <a:latin typeface="Arial"/>
-                <a:ea typeface="ＭＳ Ｐゴシック" pitchFamily="-106" charset="-128"/>
-              </a:defRPr>
-            </a:lvl8pPr>
-            <a:lvl9pPr marL="3886200" indent="-228600" eaLnBrk="0" fontAlgn="base" hangingPunct="0">
-              <a:spcBef>
-                <a:spcPct val="0"/>
-              </a:spcBef>
-              <a:spcAft>
-                <a:spcPct val="0"/>
-              </a:spcAft>
-              <a:defRPr sz="2000">
-                <a:solidFill>
-                  <a:schemeClr val="tx1"/>
-                </a:solidFill>
-                <a:latin typeface="Arial"/>
-                <a:ea typeface="ＭＳ Ｐゴシック" pitchFamily="-106" charset="-128"/>
-              </a:defRPr>
-            </a:lvl9pPr>
-          </a:lstStyle>
-          <a:p>
-            <a:pPr algn="just">
-              <a:lnSpc>
-                <a:spcPct val="110000"/>
-              </a:lnSpc>
-            </a:pPr>
-            <a:r>
-              <a:rPr lang="en-US" b="1" dirty="0">
-                <a:latin typeface="Open Sans" panose="020B0606030504020204" pitchFamily="34" charset="0"/>
-                <a:ea typeface="Open Sans" panose="020B0606030504020204" pitchFamily="34" charset="0"/>
-                <a:cs typeface="Open Sans" panose="020B0606030504020204" pitchFamily="34" charset="0"/>
-              </a:rPr>
-              <a:t>Addition Examples:</a:t>
-            </a:r>
-          </a:p>
-          <a:p>
-            <a:pPr algn="ctr">
-              <a:lnSpc>
-                <a:spcPct val="110000"/>
-              </a:lnSpc>
-            </a:pPr>
-            <a:endParaRPr lang="en-US" b="1" dirty="0">
-              <a:latin typeface="Open Sans" panose="020B0606030504020204" pitchFamily="34" charset="0"/>
-              <a:ea typeface="Open Sans" panose="020B0606030504020204" pitchFamily="34" charset="0"/>
-              <a:cs typeface="Open Sans" panose="020B0606030504020204" pitchFamily="34" charset="0"/>
-            </a:endParaRPr>
-          </a:p>
-          <a:p>
-            <a:pPr algn="just">
-              <a:lnSpc>
-                <a:spcPct val="110000"/>
-              </a:lnSpc>
-            </a:pPr>
-            <a:endParaRPr lang="en-US" b="1" dirty="0">
-              <a:latin typeface="Open Sans" panose="020B0606030504020204" pitchFamily="34" charset="0"/>
-              <a:ea typeface="Open Sans" panose="020B0606030504020204" pitchFamily="34" charset="0"/>
-              <a:cs typeface="Open Sans" panose="020B0606030504020204" pitchFamily="34" charset="0"/>
-            </a:endParaRPr>
-          </a:p>
-          <a:p>
-            <a:pPr algn="ctr">
-              <a:lnSpc>
-                <a:spcPct val="110000"/>
-              </a:lnSpc>
-            </a:pPr>
-            <a:endParaRPr lang="en-US" b="0" i="1" dirty="0">
-              <a:latin typeface="Cambria Math" panose="02040503050406030204" pitchFamily="18" charset="0"/>
-              <a:ea typeface="Open Sans" panose="020B0606030504020204" pitchFamily="34" charset="0"/>
-              <a:cs typeface="Open Sans" panose="020B0606030504020204" pitchFamily="34" charset="0"/>
-            </a:endParaRPr>
-          </a:p>
-          <a:p>
-            <a:pPr algn="ctr">
-              <a:lnSpc>
-                <a:spcPct val="110000"/>
-              </a:lnSpc>
-            </a:pPr>
-            <a:endParaRPr lang="en-US" i="1" dirty="0">
-              <a:latin typeface="Cambria Math" panose="02040503050406030204" pitchFamily="18" charset="0"/>
-              <a:ea typeface="Open Sans" panose="020B0606030504020204" pitchFamily="34" charset="0"/>
-              <a:cs typeface="Open Sans" panose="020B0606030504020204" pitchFamily="34" charset="0"/>
-            </a:endParaRPr>
-          </a:p>
-          <a:p>
-            <a:pPr algn="ctr">
-              <a:lnSpc>
-                <a:spcPct val="110000"/>
-              </a:lnSpc>
-            </a:pPr>
-            <a:endParaRPr lang="en-US" i="1" dirty="0">
-              <a:latin typeface="Cambria Math" panose="02040503050406030204" pitchFamily="18" charset="0"/>
-              <a:ea typeface="Open Sans" panose="020B0606030504020204" pitchFamily="34" charset="0"/>
-              <a:cs typeface="Open Sans" panose="020B0606030504020204" pitchFamily="34" charset="0"/>
-            </a:endParaRPr>
-          </a:p>
-          <a:p>
-            <a:pPr algn="ctr">
-              <a:lnSpc>
-                <a:spcPct val="110000"/>
-              </a:lnSpc>
-            </a:pPr>
-            <a:endParaRPr lang="en-US" i="1" dirty="0">
-              <a:latin typeface="Cambria Math" panose="02040503050406030204" pitchFamily="18" charset="0"/>
-              <a:ea typeface="Open Sans" panose="020B0606030504020204" pitchFamily="34" charset="0"/>
-              <a:cs typeface="Open Sans" panose="020B0606030504020204" pitchFamily="34" charset="0"/>
-            </a:endParaRPr>
-          </a:p>
-          <a:p>
-            <a:pPr algn="ctr">
-              <a:lnSpc>
-                <a:spcPct val="110000"/>
-              </a:lnSpc>
-            </a:pPr>
-            <a:endParaRPr lang="en-US" i="1" dirty="0">
-              <a:latin typeface="Cambria Math" panose="02040503050406030204" pitchFamily="18" charset="0"/>
-              <a:ea typeface="Open Sans" panose="020B0606030504020204" pitchFamily="34" charset="0"/>
-              <a:cs typeface="Open Sans" panose="020B0606030504020204" pitchFamily="34" charset="0"/>
-            </a:endParaRPr>
-          </a:p>
-          <a:p>
-            <a:pPr algn="ctr">
-              <a:lnSpc>
-                <a:spcPct val="110000"/>
-              </a:lnSpc>
-            </a:pPr>
-            <a:endParaRPr lang="en-US" i="1" dirty="0">
-              <a:latin typeface="Cambria Math" panose="02040503050406030204" pitchFamily="18" charset="0"/>
-              <a:ea typeface="Open Sans" panose="020B0606030504020204" pitchFamily="34" charset="0"/>
-              <a:cs typeface="Open Sans" panose="020B0606030504020204" pitchFamily="34" charset="0"/>
-            </a:endParaRPr>
-          </a:p>
-          <a:p>
-            <a:pPr algn="ctr">
-              <a:lnSpc>
-                <a:spcPct val="110000"/>
-              </a:lnSpc>
-            </a:pPr>
-            <a:endParaRPr lang="en-US" i="1" dirty="0">
-              <a:latin typeface="Cambria Math" panose="02040503050406030204" pitchFamily="18" charset="0"/>
-              <a:ea typeface="Open Sans" panose="020B0606030504020204" pitchFamily="34" charset="0"/>
-              <a:cs typeface="Open Sans" panose="020B0606030504020204" pitchFamily="34" charset="0"/>
-            </a:endParaRPr>
-          </a:p>
-          <a:p>
-            <a:pPr algn="ctr">
-              <a:lnSpc>
-                <a:spcPct val="110000"/>
-              </a:lnSpc>
-            </a:pPr>
-            <a:endParaRPr lang="en-US" i="1" dirty="0">
-              <a:latin typeface="Cambria Math" panose="02040503050406030204" pitchFamily="18" charset="0"/>
-              <a:ea typeface="Open Sans" panose="020B0606030504020204" pitchFamily="34" charset="0"/>
-              <a:cs typeface="Open Sans" panose="020B0606030504020204" pitchFamily="34" charset="0"/>
-            </a:endParaRPr>
-          </a:p>
-          <a:p>
-            <a:pPr algn="ctr">
-              <a:lnSpc>
-                <a:spcPct val="110000"/>
-              </a:lnSpc>
-            </a:pPr>
-            <a:endParaRPr lang="en-US" b="0" i="1" dirty="0">
-              <a:latin typeface="Cambria Math" panose="02040503050406030204" pitchFamily="18" charset="0"/>
-              <a:ea typeface="Open Sans" panose="020B0606030504020204" pitchFamily="34" charset="0"/>
-              <a:cs typeface="Open Sans" panose="020B0606030504020204" pitchFamily="34" charset="0"/>
-            </a:endParaRPr>
-          </a:p>
-          <a:p>
-            <a:pPr algn="ctr">
-              <a:lnSpc>
-                <a:spcPct val="110000"/>
-              </a:lnSpc>
-            </a:pPr>
-            <a:endParaRPr lang="en-US" i="1" dirty="0">
-              <a:latin typeface="Cambria Math" panose="02040503050406030204" pitchFamily="18" charset="0"/>
-              <a:ea typeface="Open Sans" panose="020B0606030504020204" pitchFamily="34" charset="0"/>
-              <a:cs typeface="Open Sans" panose="020B0606030504020204" pitchFamily="34" charset="0"/>
-            </a:endParaRPr>
-          </a:p>
-          <a:p>
-            <a:pPr algn="ctr">
-              <a:lnSpc>
-                <a:spcPct val="110000"/>
-              </a:lnSpc>
-            </a:pPr>
-            <a:endParaRPr lang="en-US" b="0" i="1" dirty="0">
-              <a:latin typeface="Cambria Math" panose="02040503050406030204" pitchFamily="18" charset="0"/>
-              <a:ea typeface="Open Sans" panose="020B0606030504020204" pitchFamily="34" charset="0"/>
-              <a:cs typeface="Open Sans" panose="020B0606030504020204" pitchFamily="34" charset="0"/>
-            </a:endParaRPr>
-          </a:p>
-          <a:p>
-            <a:pPr algn="ctr">
-              <a:lnSpc>
-                <a:spcPct val="110000"/>
-              </a:lnSpc>
-            </a:pPr>
-            <a:endParaRPr lang="en-US" i="1" dirty="0">
-              <a:latin typeface="Cambria Math" panose="02040503050406030204" pitchFamily="18" charset="0"/>
-              <a:ea typeface="Open Sans" panose="020B0606030504020204" pitchFamily="34" charset="0"/>
-              <a:cs typeface="Open Sans" panose="020B0606030504020204" pitchFamily="34" charset="0"/>
-            </a:endParaRPr>
-          </a:p>
-          <a:p>
-            <a:pPr algn="ctr">
-              <a:lnSpc>
-                <a:spcPct val="110000"/>
-              </a:lnSpc>
-            </a:pPr>
-            <a:endParaRPr lang="en-US" b="0" i="1" dirty="0">
-              <a:latin typeface="Cambria Math" panose="02040503050406030204" pitchFamily="18" charset="0"/>
-              <a:ea typeface="Open Sans" panose="020B0606030504020204" pitchFamily="34" charset="0"/>
-              <a:cs typeface="Open Sans" panose="020B0606030504020204" pitchFamily="34" charset="0"/>
-            </a:endParaRPr>
-          </a:p>
-          <a:p>
-            <a:pPr algn="ctr">
-              <a:lnSpc>
-                <a:spcPct val="110000"/>
-              </a:lnSpc>
-            </a:pPr>
-            <a:endParaRPr lang="en-US" i="1" dirty="0">
-              <a:latin typeface="Cambria Math" panose="02040503050406030204" pitchFamily="18" charset="0"/>
-              <a:ea typeface="Open Sans" panose="020B0606030504020204" pitchFamily="34" charset="0"/>
-              <a:cs typeface="Open Sans" panose="020B0606030504020204" pitchFamily="34" charset="0"/>
-            </a:endParaRPr>
-          </a:p>
-          <a:p>
-            <a:pPr algn="ctr">
-              <a:lnSpc>
-                <a:spcPct val="110000"/>
-              </a:lnSpc>
-            </a:pPr>
-            <a:endParaRPr lang="en-US" b="0" i="1" dirty="0">
-              <a:latin typeface="Cambria Math" panose="02040503050406030204" pitchFamily="18" charset="0"/>
-              <a:ea typeface="Open Sans" panose="020B0606030504020204" pitchFamily="34" charset="0"/>
-              <a:cs typeface="Open Sans" panose="020B0606030504020204" pitchFamily="34" charset="0"/>
-            </a:endParaRPr>
-          </a:p>
-          <a:p>
-            <a:pPr algn="ctr">
-              <a:lnSpc>
-                <a:spcPct val="110000"/>
-              </a:lnSpc>
-            </a:pPr>
-            <a:endParaRPr lang="en-US" i="1" dirty="0">
-              <a:latin typeface="Cambria Math" panose="02040503050406030204" pitchFamily="18" charset="0"/>
-              <a:ea typeface="Open Sans" panose="020B0606030504020204" pitchFamily="34" charset="0"/>
-              <a:cs typeface="Open Sans" panose="020B0606030504020204" pitchFamily="34" charset="0"/>
-            </a:endParaRPr>
-          </a:p>
-          <a:p>
-            <a:pPr algn="ctr">
-              <a:lnSpc>
-                <a:spcPct val="110000"/>
-              </a:lnSpc>
-            </a:pPr>
-            <a:endParaRPr lang="en-US" b="0" i="1" dirty="0">
-              <a:latin typeface="Cambria Math" panose="02040503050406030204" pitchFamily="18" charset="0"/>
-              <a:ea typeface="Open Sans" panose="020B0606030504020204" pitchFamily="34" charset="0"/>
-              <a:cs typeface="Open Sans" panose="020B0606030504020204" pitchFamily="34" charset="0"/>
-            </a:endParaRPr>
-          </a:p>
-          <a:p>
-            <a:pPr algn="ctr">
-              <a:lnSpc>
-                <a:spcPct val="110000"/>
-              </a:lnSpc>
-            </a:pPr>
-            <a:endParaRPr lang="en-US" b="0" i="1" dirty="0">
-              <a:latin typeface="Cambria Math" panose="02040503050406030204" pitchFamily="18" charset="0"/>
-              <a:ea typeface="Open Sans" panose="020B0606030504020204" pitchFamily="34" charset="0"/>
-              <a:cs typeface="Open Sans" panose="020B0606030504020204" pitchFamily="34" charset="0"/>
-            </a:endParaRPr>
-          </a:p>
-          <a:p>
-            <a:pPr algn="ctr">
-              <a:lnSpc>
-                <a:spcPct val="110000"/>
-              </a:lnSpc>
-            </a:pPr>
-            <a:endParaRPr lang="en-US" b="0" i="1" dirty="0">
-              <a:latin typeface="Cambria Math" panose="02040503050406030204" pitchFamily="18" charset="0"/>
-              <a:ea typeface="Open Sans" panose="020B0606030504020204" pitchFamily="34" charset="0"/>
-              <a:cs typeface="Open Sans" panose="020B0606030504020204" pitchFamily="34" charset="0"/>
-            </a:endParaRPr>
-          </a:p>
-          <a:p>
-            <a:pPr algn="ctr">
-              <a:lnSpc>
-                <a:spcPct val="110000"/>
-              </a:lnSpc>
-            </a:pPr>
-            <a:endParaRPr lang="en-US" i="1" dirty="0">
-              <a:latin typeface="Cambria Math" panose="02040503050406030204" pitchFamily="18" charset="0"/>
-              <a:ea typeface="Open Sans" panose="020B0606030504020204" pitchFamily="34" charset="0"/>
-              <a:cs typeface="Open Sans" panose="020B0606030504020204" pitchFamily="34" charset="0"/>
-            </a:endParaRPr>
-          </a:p>
-        </p:txBody>
-      </p:sp>
-      <p:sp>
-        <p:nvSpPr>
-          <p:cNvPr id="43" name="Rectangle 10">
+      </p:pic>
+      <p:grpSp>
+        <p:nvGrpSpPr>
+          <p:cNvPr id="2083" name="Group 2082">
             <a:extLst>
               <a:ext uri="{FF2B5EF4-FFF2-40B4-BE49-F238E27FC236}">
-                <a16:creationId xmlns:a16="http://schemas.microsoft.com/office/drawing/2014/main" id="{F9522775-0917-A637-2ED0-D78CA46CDCAC}"/>
+                <a16:creationId xmlns:a16="http://schemas.microsoft.com/office/drawing/2014/main" id="{20B311A5-4590-516A-106A-6995952A69E4}"/>
               </a:ext>
             </a:extLst>
           </p:cNvPr>
-          <p:cNvSpPr>
-            <a:spLocks noChangeArrowheads="1"/>
-          </p:cNvSpPr>
+          <p:cNvGrpSpPr/>
           <p:nvPr/>
-        </p:nvSpPr>
-        <p:spPr bwMode="auto">
+        </p:nvGrpSpPr>
+        <p:grpSpPr>
           <a:xfrm>
-            <a:off x="8483367" y="4755723"/>
-            <a:ext cx="7268693" cy="582201"/>
+            <a:off x="11756072" y="22586102"/>
+            <a:ext cx="7592833" cy="8501873"/>
+            <a:chOff x="18855822" y="6246418"/>
+            <a:chExt cx="4826844" cy="5854408"/>
           </a:xfrm>
-          <a:prstGeom prst="rect">
-            <a:avLst/>
-          </a:prstGeom>
-          <a:solidFill>
-            <a:srgbClr val="1482A5"/>
-          </a:solidFill>
-          <a:ln w="12700">
-            <a:noFill/>
-            <a:miter lim="800000"/>
-          </a:ln>
-        </p:spPr>
-        <p:txBody>
-          <a:bodyPr wrap="none" lIns="182880" tIns="48768" rIns="182880" bIns="45709" anchor="ctr" anchorCtr="0"/>
-          <a:lstStyle>
-            <a:defPPr>
-              <a:defRPr kern="1200"/>
-            </a:defPPr>
-          </a:lstStyle>
-          <a:p>
-            <a:pPr algn="ctr" defTabSz="3135215">
-              <a:defRPr/>
-            </a:pPr>
-            <a:r>
-              <a:rPr lang="en-US" sz="2800" b="1" dirty="0">
-                <a:solidFill>
-                  <a:schemeClr val="bg1"/>
-                </a:solidFill>
-                <a:latin typeface="Arial" panose="020B0604020202020204" pitchFamily="34" charset="0"/>
-                <a:cs typeface="Arial" panose="020B0604020202020204" pitchFamily="34" charset="0"/>
-              </a:rPr>
-              <a:t>Operations &amp; Examples (cont.)</a:t>
-            </a:r>
-          </a:p>
-        </p:txBody>
-      </p:sp>
+        </p:grpSpPr>
+        <p:pic>
+          <p:nvPicPr>
+            <p:cNvPr id="2062" name="Picture 2061">
+              <a:extLst>
+                <a:ext uri="{FF2B5EF4-FFF2-40B4-BE49-F238E27FC236}">
+                  <a16:creationId xmlns:a16="http://schemas.microsoft.com/office/drawing/2014/main" id="{BF5F4C9B-2239-9822-9A6C-E99DDF205E5A}"/>
+                </a:ext>
+              </a:extLst>
+            </p:cNvPr>
+            <p:cNvPicPr>
+              <a:picLocks noChangeAspect="1"/>
+            </p:cNvPicPr>
+            <p:nvPr/>
+          </p:nvPicPr>
+          <p:blipFill>
+            <a:blip r:embed="rId8">
+              <a:extLst>
+                <a:ext uri="{28A0092B-C50C-407E-A947-70E740481C1C}">
+                  <a14:useLocalDpi xmlns:a14="http://schemas.microsoft.com/office/drawing/2010/main" val="0"/>
+                </a:ext>
+              </a:extLst>
+            </a:blip>
+            <a:stretch>
+              <a:fillRect/>
+            </a:stretch>
+          </p:blipFill>
+          <p:spPr>
+            <a:xfrm>
+              <a:off x="18855822" y="6246418"/>
+              <a:ext cx="4826844" cy="5854408"/>
+            </a:xfrm>
+            <a:prstGeom prst="rect">
+              <a:avLst/>
+            </a:prstGeom>
+          </p:spPr>
+        </p:pic>
+        <p:sp>
+          <p:nvSpPr>
+            <p:cNvPr id="2070" name="Rectangle 2069">
+              <a:extLst>
+                <a:ext uri="{FF2B5EF4-FFF2-40B4-BE49-F238E27FC236}">
+                  <a16:creationId xmlns:a16="http://schemas.microsoft.com/office/drawing/2014/main" id="{802EF8DC-6092-B623-E1EE-607D0C68A7EC}"/>
+                </a:ext>
+              </a:extLst>
+            </p:cNvPr>
+            <p:cNvSpPr/>
+            <p:nvPr/>
+          </p:nvSpPr>
+          <p:spPr bwMode="auto">
+            <a:xfrm>
+              <a:off x="21869400" y="10055912"/>
+              <a:ext cx="347472" cy="612088"/>
+            </a:xfrm>
+            <a:prstGeom prst="rect">
+              <a:avLst/>
+            </a:prstGeom>
+            <a:solidFill>
+              <a:srgbClr val="FFFF00">
+                <a:alpha val="29804"/>
+              </a:srgbClr>
+            </a:solidFill>
+            <a:ln>
+              <a:noFill/>
+            </a:ln>
+          </p:spPr>
+          <p:style>
+            <a:lnRef idx="0">
+              <a:scrgbClr r="0" g="0" b="0"/>
+            </a:lnRef>
+            <a:fillRef idx="0">
+              <a:scrgbClr r="0" g="0" b="0"/>
+            </a:fillRef>
+            <a:effectRef idx="0">
+              <a:scrgbClr r="0" g="0" b="0"/>
+            </a:effectRef>
+            <a:fontRef idx="minor">
+              <a:schemeClr val="lt1"/>
+            </a:fontRef>
+          </p:style>
+          <p:txBody>
+            <a:bodyPr vert="horz" wrap="square" lIns="121920" tIns="60960" rIns="121920" bIns="60960" numCol="1" rtlCol="0" anchor="t" anchorCtr="0" compatLnSpc="1">
+              <a:prstTxWarp prst="textNoShape">
+                <a:avLst/>
+              </a:prstTxWarp>
+            </a:bodyPr>
+            <a:lstStyle/>
+            <a:p>
+              <a:pPr defTabSz="6271527"/>
+              <a:endParaRPr lang="en-US" sz="4000" dirty="0">
+                <a:solidFill>
+                  <a:schemeClr val="tx1"/>
+                </a:solidFill>
+                <a:latin typeface="Arial" pitchFamily="34" charset="0"/>
+              </a:endParaRPr>
+            </a:p>
+          </p:txBody>
+        </p:sp>
+        <p:sp>
+          <p:nvSpPr>
+            <p:cNvPr id="2071" name="Rectangle 2070">
+              <a:extLst>
+                <a:ext uri="{FF2B5EF4-FFF2-40B4-BE49-F238E27FC236}">
+                  <a16:creationId xmlns:a16="http://schemas.microsoft.com/office/drawing/2014/main" id="{0F70B369-5F38-42F3-411C-39D387CC0404}"/>
+                </a:ext>
+              </a:extLst>
+            </p:cNvPr>
+            <p:cNvSpPr/>
+            <p:nvPr/>
+          </p:nvSpPr>
+          <p:spPr bwMode="auto">
+            <a:xfrm>
+              <a:off x="22936200" y="8697204"/>
+              <a:ext cx="304800" cy="612088"/>
+            </a:xfrm>
+            <a:prstGeom prst="rect">
+              <a:avLst/>
+            </a:prstGeom>
+            <a:solidFill>
+              <a:srgbClr val="FFFF00">
+                <a:alpha val="29804"/>
+              </a:srgbClr>
+            </a:solidFill>
+            <a:ln>
+              <a:noFill/>
+            </a:ln>
+          </p:spPr>
+          <p:style>
+            <a:lnRef idx="0">
+              <a:scrgbClr r="0" g="0" b="0"/>
+            </a:lnRef>
+            <a:fillRef idx="0">
+              <a:scrgbClr r="0" g="0" b="0"/>
+            </a:fillRef>
+            <a:effectRef idx="0">
+              <a:scrgbClr r="0" g="0" b="0"/>
+            </a:effectRef>
+            <a:fontRef idx="minor">
+              <a:schemeClr val="lt1"/>
+            </a:fontRef>
+          </p:style>
+          <p:txBody>
+            <a:bodyPr vert="horz" wrap="square" lIns="121920" tIns="60960" rIns="121920" bIns="60960" numCol="1" rtlCol="0" anchor="t" anchorCtr="0" compatLnSpc="1">
+              <a:prstTxWarp prst="textNoShape">
+                <a:avLst/>
+              </a:prstTxWarp>
+            </a:bodyPr>
+            <a:lstStyle/>
+            <a:p>
+              <a:pPr defTabSz="6271527"/>
+              <a:endParaRPr lang="en-US" sz="4000" dirty="0">
+                <a:solidFill>
+                  <a:schemeClr val="tx1"/>
+                </a:solidFill>
+                <a:latin typeface="Arial" pitchFamily="34" charset="0"/>
+              </a:endParaRPr>
+            </a:p>
+          </p:txBody>
+        </p:sp>
+      </p:grpSp>
+      <p:grpSp>
+        <p:nvGrpSpPr>
+          <p:cNvPr id="2086" name="Group 2085">
+            <a:extLst>
+              <a:ext uri="{FF2B5EF4-FFF2-40B4-BE49-F238E27FC236}">
+                <a16:creationId xmlns:a16="http://schemas.microsoft.com/office/drawing/2014/main" id="{4D15E42D-42C3-7C11-C0A0-678837C4FF80}"/>
+              </a:ext>
+            </a:extLst>
+          </p:cNvPr>
+          <p:cNvGrpSpPr/>
+          <p:nvPr/>
+        </p:nvGrpSpPr>
+        <p:grpSpPr>
+          <a:xfrm>
+            <a:off x="20907333" y="11282180"/>
+            <a:ext cx="10698480" cy="11795760"/>
+            <a:chOff x="15727386" y="12247837"/>
+            <a:chExt cx="7955280" cy="8659481"/>
+          </a:xfrm>
+        </p:grpSpPr>
+        <p:pic>
+          <p:nvPicPr>
+            <p:cNvPr id="2064" name="Picture 2063">
+              <a:extLst>
+                <a:ext uri="{FF2B5EF4-FFF2-40B4-BE49-F238E27FC236}">
+                  <a16:creationId xmlns:a16="http://schemas.microsoft.com/office/drawing/2014/main" id="{46463C44-30E2-4529-CA50-2F6100785FA2}"/>
+                </a:ext>
+              </a:extLst>
+            </p:cNvPr>
+            <p:cNvPicPr>
+              <a:picLocks noChangeAspect="1"/>
+            </p:cNvPicPr>
+            <p:nvPr/>
+          </p:nvPicPr>
+          <p:blipFill>
+            <a:blip r:embed="rId9">
+              <a:extLst>
+                <a:ext uri="{28A0092B-C50C-407E-A947-70E740481C1C}">
+                  <a14:useLocalDpi xmlns:a14="http://schemas.microsoft.com/office/drawing/2010/main" val="0"/>
+                </a:ext>
+              </a:extLst>
+            </a:blip>
+            <a:stretch>
+              <a:fillRect/>
+            </a:stretch>
+          </p:blipFill>
+          <p:spPr>
+            <a:xfrm>
+              <a:off x="15727386" y="12247837"/>
+              <a:ext cx="7955280" cy="8659481"/>
+            </a:xfrm>
+            <a:prstGeom prst="rect">
+              <a:avLst/>
+            </a:prstGeom>
+          </p:spPr>
+        </p:pic>
+        <p:sp>
+          <p:nvSpPr>
+            <p:cNvPr id="2072" name="Rectangle 2071">
+              <a:extLst>
+                <a:ext uri="{FF2B5EF4-FFF2-40B4-BE49-F238E27FC236}">
+                  <a16:creationId xmlns:a16="http://schemas.microsoft.com/office/drawing/2014/main" id="{66CDF32E-461A-8C63-F7D9-A04FE76A45DB}"/>
+                </a:ext>
+              </a:extLst>
+            </p:cNvPr>
+            <p:cNvSpPr/>
+            <p:nvPr/>
+          </p:nvSpPr>
+          <p:spPr bwMode="auto">
+            <a:xfrm>
+              <a:off x="22097999" y="15392400"/>
+              <a:ext cx="329565" cy="457291"/>
+            </a:xfrm>
+            <a:prstGeom prst="rect">
+              <a:avLst/>
+            </a:prstGeom>
+            <a:solidFill>
+              <a:srgbClr val="FFFF00">
+                <a:alpha val="29804"/>
+              </a:srgbClr>
+            </a:solidFill>
+            <a:ln>
+              <a:noFill/>
+            </a:ln>
+          </p:spPr>
+          <p:style>
+            <a:lnRef idx="0">
+              <a:scrgbClr r="0" g="0" b="0"/>
+            </a:lnRef>
+            <a:fillRef idx="0">
+              <a:scrgbClr r="0" g="0" b="0"/>
+            </a:fillRef>
+            <a:effectRef idx="0">
+              <a:scrgbClr r="0" g="0" b="0"/>
+            </a:effectRef>
+            <a:fontRef idx="minor">
+              <a:schemeClr val="lt1"/>
+            </a:fontRef>
+          </p:style>
+          <p:txBody>
+            <a:bodyPr vert="horz" wrap="square" lIns="121920" tIns="60960" rIns="121920" bIns="60960" numCol="1" rtlCol="0" anchor="t" anchorCtr="0" compatLnSpc="1">
+              <a:prstTxWarp prst="textNoShape">
+                <a:avLst/>
+              </a:prstTxWarp>
+            </a:bodyPr>
+            <a:lstStyle/>
+            <a:p>
+              <a:pPr defTabSz="6271527"/>
+              <a:endParaRPr lang="en-US" sz="4000" dirty="0">
+                <a:solidFill>
+                  <a:schemeClr val="tx1"/>
+                </a:solidFill>
+                <a:latin typeface="Arial" pitchFamily="34" charset="0"/>
+              </a:endParaRPr>
+            </a:p>
+          </p:txBody>
+        </p:sp>
+        <p:sp>
+          <p:nvSpPr>
+            <p:cNvPr id="2073" name="Rectangle 2072">
+              <a:extLst>
+                <a:ext uri="{FF2B5EF4-FFF2-40B4-BE49-F238E27FC236}">
+                  <a16:creationId xmlns:a16="http://schemas.microsoft.com/office/drawing/2014/main" id="{A2155AFA-1819-7C94-FB00-3E49DD2B589F}"/>
+                </a:ext>
+              </a:extLst>
+            </p:cNvPr>
+            <p:cNvSpPr/>
+            <p:nvPr/>
+          </p:nvSpPr>
+          <p:spPr bwMode="auto">
+            <a:xfrm>
+              <a:off x="20269200" y="17602592"/>
+              <a:ext cx="329565" cy="457291"/>
+            </a:xfrm>
+            <a:prstGeom prst="rect">
+              <a:avLst/>
+            </a:prstGeom>
+            <a:solidFill>
+              <a:srgbClr val="FFFF00">
+                <a:alpha val="29804"/>
+              </a:srgbClr>
+            </a:solidFill>
+            <a:ln>
+              <a:noFill/>
+            </a:ln>
+          </p:spPr>
+          <p:style>
+            <a:lnRef idx="0">
+              <a:scrgbClr r="0" g="0" b="0"/>
+            </a:lnRef>
+            <a:fillRef idx="0">
+              <a:scrgbClr r="0" g="0" b="0"/>
+            </a:fillRef>
+            <a:effectRef idx="0">
+              <a:scrgbClr r="0" g="0" b="0"/>
+            </a:effectRef>
+            <a:fontRef idx="minor">
+              <a:schemeClr val="lt1"/>
+            </a:fontRef>
+          </p:style>
+          <p:txBody>
+            <a:bodyPr vert="horz" wrap="square" lIns="121920" tIns="60960" rIns="121920" bIns="60960" numCol="1" rtlCol="0" anchor="t" anchorCtr="0" compatLnSpc="1">
+              <a:prstTxWarp prst="textNoShape">
+                <a:avLst/>
+              </a:prstTxWarp>
+            </a:bodyPr>
+            <a:lstStyle/>
+            <a:p>
+              <a:pPr defTabSz="6271527"/>
+              <a:endParaRPr lang="en-US" sz="4000" dirty="0">
+                <a:solidFill>
+                  <a:schemeClr val="tx1"/>
+                </a:solidFill>
+                <a:latin typeface="Arial" pitchFamily="34" charset="0"/>
+              </a:endParaRPr>
+            </a:p>
+          </p:txBody>
+        </p:sp>
+      </p:grpSp>
       <p:grpSp>
         <p:nvGrpSpPr>
           <p:cNvPr id="61" name="Group 60">
@@ -8336,8 +8683,8 @@
         </p:nvGrpSpPr>
         <p:grpSpPr>
           <a:xfrm>
-            <a:off x="8746170" y="6248461"/>
-            <a:ext cx="6752578" cy="1969998"/>
+            <a:off x="11050770" y="10358040"/>
+            <a:ext cx="9003437" cy="2626664"/>
             <a:chOff x="9041671" y="8083756"/>
             <a:chExt cx="6752578" cy="1969998"/>
           </a:xfrm>
@@ -8357,7 +8704,7 @@
             <p:nvPr/>
           </p:nvPicPr>
           <p:blipFill>
-            <a:blip r:embed="rId6">
+            <a:blip r:embed="rId10">
               <a:extLst>
                 <a:ext uri="{28A0092B-C50C-407E-A947-70E740481C1C}">
                   <a14:useLocalDpi xmlns:a14="http://schemas.microsoft.com/office/drawing/2010/main" val="0"/>
@@ -8393,7 +8740,7 @@
             <p:nvPr/>
           </p:nvPicPr>
           <p:blipFill>
-            <a:blip r:embed="rId7">
+            <a:blip r:embed="rId11">
               <a:extLst>
                 <a:ext uri="{28A0092B-C50C-407E-A947-70E740481C1C}">
                   <a14:useLocalDpi xmlns:a14="http://schemas.microsoft.com/office/drawing/2010/main" val="0"/>
@@ -8415,120 +8762,1114 @@
           </p:spPr>
         </p:pic>
       </p:grpSp>
-      <p:pic>
-        <p:nvPicPr>
-          <p:cNvPr id="63" name="Picture 62">
+      <p:grpSp>
+        <p:nvGrpSpPr>
+          <p:cNvPr id="2092" name="Group 2091">
             <a:extLst>
               <a:ext uri="{FF2B5EF4-FFF2-40B4-BE49-F238E27FC236}">
-                <a16:creationId xmlns:a16="http://schemas.microsoft.com/office/drawing/2014/main" id="{21F3D84B-B416-4764-CC5A-799556D9A4EB}"/>
+                <a16:creationId xmlns:a16="http://schemas.microsoft.com/office/drawing/2014/main" id="{605ACE87-2E3A-5AE6-0737-7CE194976F42}"/>
               </a:ext>
             </a:extLst>
           </p:cNvPr>
-          <p:cNvPicPr>
-            <a:picLocks noChangeAspect="1"/>
-          </p:cNvPicPr>
+          <p:cNvGrpSpPr/>
           <p:nvPr/>
-        </p:nvPicPr>
-        <p:blipFill>
-          <a:blip r:embed="rId8">
+        </p:nvGrpSpPr>
+        <p:grpSpPr>
+          <a:xfrm>
+            <a:off x="32300328" y="9221215"/>
+            <a:ext cx="10728960" cy="9813180"/>
+            <a:chOff x="24225247" y="6089568"/>
+            <a:chExt cx="8046720" cy="7359885"/>
+          </a:xfrm>
+        </p:grpSpPr>
+        <p:pic>
+          <p:nvPicPr>
+            <p:cNvPr id="2075" name="Picture 2074">
+              <a:extLst>
+                <a:ext uri="{FF2B5EF4-FFF2-40B4-BE49-F238E27FC236}">
+                  <a16:creationId xmlns:a16="http://schemas.microsoft.com/office/drawing/2014/main" id="{C5D4D0C3-58D1-AB9A-6BDE-B630A176CE7F}"/>
+                </a:ext>
+              </a:extLst>
+            </p:cNvPr>
+            <p:cNvPicPr>
+              <a:picLocks noChangeAspect="1"/>
+            </p:cNvPicPr>
+            <p:nvPr/>
+          </p:nvPicPr>
+          <p:blipFill>
+            <a:blip r:embed="rId12">
+              <a:extLst>
+                <a:ext uri="{28A0092B-C50C-407E-A947-70E740481C1C}">
+                  <a14:useLocalDpi xmlns:a14="http://schemas.microsoft.com/office/drawing/2010/main" val="0"/>
+                </a:ext>
+              </a:extLst>
+            </a:blip>
+            <a:stretch>
+              <a:fillRect/>
+            </a:stretch>
+          </p:blipFill>
+          <p:spPr>
+            <a:xfrm>
+              <a:off x="24225247" y="6089568"/>
+              <a:ext cx="4470400" cy="558800"/>
+            </a:xfrm>
+            <a:prstGeom prst="rect">
+              <a:avLst/>
+            </a:prstGeom>
+          </p:spPr>
+        </p:pic>
+        <p:grpSp>
+          <p:nvGrpSpPr>
+            <p:cNvPr id="2087" name="Group 2086">
+              <a:extLst>
+                <a:ext uri="{FF2B5EF4-FFF2-40B4-BE49-F238E27FC236}">
+                  <a16:creationId xmlns:a16="http://schemas.microsoft.com/office/drawing/2014/main" id="{5BB7E07A-4747-EB70-F4D1-A18E9C18EA6D}"/>
+                </a:ext>
+              </a:extLst>
+            </p:cNvPr>
+            <p:cNvGrpSpPr/>
+            <p:nvPr/>
+          </p:nvGrpSpPr>
+          <p:grpSpPr>
+            <a:xfrm>
+              <a:off x="24225247" y="6764973"/>
+              <a:ext cx="8046720" cy="6684480"/>
+              <a:chOff x="24225247" y="7466166"/>
+              <a:chExt cx="8046720" cy="6684480"/>
+            </a:xfrm>
+          </p:grpSpPr>
+          <p:pic>
+            <p:nvPicPr>
+              <p:cNvPr id="2068" name="Picture 2067">
+                <a:extLst>
+                  <a:ext uri="{FF2B5EF4-FFF2-40B4-BE49-F238E27FC236}">
+                    <a16:creationId xmlns:a16="http://schemas.microsoft.com/office/drawing/2014/main" id="{380658F9-D5CE-234F-5048-2E98CCB5061E}"/>
+                  </a:ext>
+                </a:extLst>
+              </p:cNvPr>
+              <p:cNvPicPr>
+                <a:picLocks noChangeAspect="1"/>
+              </p:cNvPicPr>
+              <p:nvPr/>
+            </p:nvPicPr>
+            <p:blipFill>
+              <a:blip r:embed="rId13">
+                <a:extLst>
+                  <a:ext uri="{28A0092B-C50C-407E-A947-70E740481C1C}">
+                    <a14:useLocalDpi xmlns:a14="http://schemas.microsoft.com/office/drawing/2010/main" val="0"/>
+                  </a:ext>
+                </a:extLst>
+              </a:blip>
+              <a:stretch>
+                <a:fillRect/>
+              </a:stretch>
+            </p:blipFill>
+            <p:spPr>
+              <a:xfrm>
+                <a:off x="24225247" y="7466166"/>
+                <a:ext cx="8046720" cy="6684480"/>
+              </a:xfrm>
+              <a:prstGeom prst="rect">
+                <a:avLst/>
+              </a:prstGeom>
+            </p:spPr>
+          </p:pic>
+          <p:sp>
+            <p:nvSpPr>
+              <p:cNvPr id="2076" name="Rectangle 2075">
+                <a:extLst>
+                  <a:ext uri="{FF2B5EF4-FFF2-40B4-BE49-F238E27FC236}">
+                    <a16:creationId xmlns:a16="http://schemas.microsoft.com/office/drawing/2014/main" id="{8ED9E8FD-7BA9-8CBE-85CF-EF8ABBFD94ED}"/>
+                  </a:ext>
+                </a:extLst>
+              </p:cNvPr>
+              <p:cNvSpPr>
+                <a:spLocks/>
+              </p:cNvSpPr>
+              <p:nvPr/>
+            </p:nvSpPr>
+            <p:spPr bwMode="auto">
+              <a:xfrm>
+                <a:off x="29596203" y="9879541"/>
+                <a:ext cx="548640" cy="548640"/>
+              </a:xfrm>
+              <a:prstGeom prst="rect">
+                <a:avLst/>
+              </a:prstGeom>
+              <a:solidFill>
+                <a:srgbClr val="FFFF00">
+                  <a:alpha val="29804"/>
+                </a:srgbClr>
+              </a:solidFill>
+              <a:ln>
+                <a:noFill/>
+              </a:ln>
+            </p:spPr>
+            <p:style>
+              <a:lnRef idx="0">
+                <a:scrgbClr r="0" g="0" b="0"/>
+              </a:lnRef>
+              <a:fillRef idx="0">
+                <a:scrgbClr r="0" g="0" b="0"/>
+              </a:fillRef>
+              <a:effectRef idx="0">
+                <a:scrgbClr r="0" g="0" b="0"/>
+              </a:effectRef>
+              <a:fontRef idx="minor">
+                <a:schemeClr val="lt1"/>
+              </a:fontRef>
+            </p:style>
+            <p:txBody>
+              <a:bodyPr vert="horz" wrap="square" lIns="121920" tIns="60960" rIns="121920" bIns="60960" numCol="1" rtlCol="0" anchor="t" anchorCtr="0" compatLnSpc="1">
+                <a:prstTxWarp prst="textNoShape">
+                  <a:avLst/>
+                </a:prstTxWarp>
+              </a:bodyPr>
+              <a:lstStyle/>
+              <a:p>
+                <a:pPr defTabSz="6271527"/>
+                <a:endParaRPr lang="en-US" sz="4000" dirty="0">
+                  <a:solidFill>
+                    <a:schemeClr val="tx1"/>
+                  </a:solidFill>
+                  <a:latin typeface="Arial" pitchFamily="34" charset="0"/>
+                </a:endParaRPr>
+              </a:p>
+            </p:txBody>
+          </p:sp>
+          <p:sp>
+            <p:nvSpPr>
+              <p:cNvPr id="2077" name="Rectangle 2076">
+                <a:extLst>
+                  <a:ext uri="{FF2B5EF4-FFF2-40B4-BE49-F238E27FC236}">
+                    <a16:creationId xmlns:a16="http://schemas.microsoft.com/office/drawing/2014/main" id="{23D8E5B5-6A71-1DFE-1252-95B2AC80B350}"/>
+                  </a:ext>
+                </a:extLst>
+              </p:cNvPr>
+              <p:cNvSpPr>
+                <a:spLocks/>
+              </p:cNvSpPr>
+              <p:nvPr/>
+            </p:nvSpPr>
+            <p:spPr bwMode="auto">
+              <a:xfrm>
+                <a:off x="28864560" y="10431236"/>
+                <a:ext cx="530352" cy="521795"/>
+              </a:xfrm>
+              <a:prstGeom prst="rect">
+                <a:avLst/>
+              </a:prstGeom>
+              <a:solidFill>
+                <a:srgbClr val="FFFF00">
+                  <a:alpha val="29804"/>
+                </a:srgbClr>
+              </a:solidFill>
+              <a:ln>
+                <a:noFill/>
+              </a:ln>
+            </p:spPr>
+            <p:style>
+              <a:lnRef idx="0">
+                <a:scrgbClr r="0" g="0" b="0"/>
+              </a:lnRef>
+              <a:fillRef idx="0">
+                <a:scrgbClr r="0" g="0" b="0"/>
+              </a:fillRef>
+              <a:effectRef idx="0">
+                <a:scrgbClr r="0" g="0" b="0"/>
+              </a:effectRef>
+              <a:fontRef idx="minor">
+                <a:schemeClr val="lt1"/>
+              </a:fontRef>
+            </p:style>
+            <p:txBody>
+              <a:bodyPr vert="horz" wrap="square" lIns="121920" tIns="60960" rIns="121920" bIns="60960" numCol="1" rtlCol="0" anchor="t" anchorCtr="0" compatLnSpc="1">
+                <a:prstTxWarp prst="textNoShape">
+                  <a:avLst/>
+                </a:prstTxWarp>
+              </a:bodyPr>
+              <a:lstStyle/>
+              <a:p>
+                <a:pPr defTabSz="6271527"/>
+                <a:endParaRPr lang="en-US" sz="4000" dirty="0">
+                  <a:solidFill>
+                    <a:schemeClr val="tx1"/>
+                  </a:solidFill>
+                  <a:latin typeface="Arial" pitchFamily="34" charset="0"/>
+                </a:endParaRPr>
+              </a:p>
+            </p:txBody>
+          </p:sp>
+        </p:grpSp>
+      </p:grpSp>
+      <p:sp>
+        <p:nvSpPr>
+          <p:cNvPr id="2078" name="TextBox 2077">
             <a:extLst>
-              <a:ext uri="{28A0092B-C50C-407E-A947-70E740481C1C}">
-                <a14:useLocalDpi xmlns:a14="http://schemas.microsoft.com/office/drawing/2010/main" val="0"/>
+              <a:ext uri="{FF2B5EF4-FFF2-40B4-BE49-F238E27FC236}">
+                <a16:creationId xmlns:a16="http://schemas.microsoft.com/office/drawing/2014/main" id="{15D69131-D8A2-0086-AF8B-A015B29CC71D}"/>
               </a:ext>
             </a:extLst>
-          </a:blip>
-          <a:stretch>
-            <a:fillRect/>
-          </a:stretch>
-        </p:blipFill>
+          </p:cNvPr>
+          <p:cNvSpPr txBox="1"/>
+          <p:nvPr/>
+        </p:nvSpPr>
         <p:spPr>
           <a:xfrm>
-            <a:off x="1129638" y="18338253"/>
-            <a:ext cx="3655260" cy="2060238"/>
+            <a:off x="908490" y="30206837"/>
+            <a:ext cx="9243605" cy="913199"/>
           </a:xfrm>
           <a:prstGeom prst="rect">
             <a:avLst/>
           </a:prstGeom>
+          <a:noFill/>
         </p:spPr>
-      </p:pic>
-      <p:pic>
-        <p:nvPicPr>
-          <p:cNvPr id="55" name="Picture 54">
+        <p:txBody>
+          <a:bodyPr wrap="square" rtlCol="0">
+            <a:spAutoFit/>
+          </a:bodyPr>
+          <a:lstStyle/>
+          <a:p>
+            <a:pPr algn="just"/>
+            <a:r>
+              <a:rPr lang="en-US" sz="2667" dirty="0">
+                <a:latin typeface="Open Sans" panose="020B0606030504020204" pitchFamily="34" charset="0"/>
+                <a:ea typeface="Open Sans" panose="020B0606030504020204" pitchFamily="34" charset="0"/>
+                <a:cs typeface="Open Sans" panose="020B0606030504020204" pitchFamily="34" charset="0"/>
+              </a:rPr>
+              <a:t>The I-Cats are already aligned with matching repeating lengths, so no further adjustment is needed.</a:t>
+            </a:r>
+          </a:p>
+        </p:txBody>
+      </p:sp>
+      <p:sp>
+        <p:nvSpPr>
+          <p:cNvPr id="2079" name="TextBox 2078">
             <a:extLst>
               <a:ext uri="{FF2B5EF4-FFF2-40B4-BE49-F238E27FC236}">
-                <a16:creationId xmlns:a16="http://schemas.microsoft.com/office/drawing/2014/main" id="{63CAA6CC-D0DE-C436-EBF6-FC42E116B933}"/>
+                <a16:creationId xmlns:a16="http://schemas.microsoft.com/office/drawing/2014/main" id="{261E3652-19D5-5893-7D51-CBC07C82AFA1}"/>
               </a:ext>
             </a:extLst>
           </p:cNvPr>
-          <p:cNvPicPr>
-            <a:picLocks noChangeAspect="1"/>
-          </p:cNvPicPr>
+          <p:cNvSpPr txBox="1"/>
           <p:nvPr/>
-        </p:nvPicPr>
-        <p:blipFill>
-          <a:blip r:embed="rId9">
-            <a:extLst>
-              <a:ext uri="{28A0092B-C50C-407E-A947-70E740481C1C}">
-                <a14:useLocalDpi xmlns:a14="http://schemas.microsoft.com/office/drawing/2010/main" val="0"/>
-              </a:ext>
-            </a:extLst>
-          </a:blip>
-          <a:stretch>
-            <a:fillRect/>
-          </a:stretch>
-        </p:blipFill>
+        </p:nvSpPr>
         <p:spPr>
           <a:xfrm>
-            <a:off x="2711059" y="15237333"/>
-            <a:ext cx="3383280" cy="612358"/>
+            <a:off x="10986306" y="8666269"/>
+            <a:ext cx="9132364" cy="1323632"/>
           </a:xfrm>
           <a:prstGeom prst="rect">
             <a:avLst/>
           </a:prstGeom>
+          <a:noFill/>
         </p:spPr>
-      </p:pic>
-      <p:pic>
-        <p:nvPicPr>
-          <p:cNvPr id="57" name="Picture 56">
+        <p:txBody>
+          <a:bodyPr wrap="square" rtlCol="0">
+            <a:spAutoFit/>
+          </a:bodyPr>
+          <a:lstStyle/>
+          <a:p>
+            <a:pPr marL="457189" indent="-457189" algn="just">
+              <a:buFont typeface="Arial" panose="020B0604020202020204" pitchFamily="34" charset="0"/>
+              <a:buChar char="•"/>
+            </a:pPr>
+            <a:r>
+              <a:rPr lang="en-US" sz="2667" dirty="0">
+                <a:latin typeface="Open Sans" panose="020B0606030504020204" pitchFamily="34" charset="0"/>
+                <a:ea typeface="Open Sans" panose="020B0606030504020204" pitchFamily="34" charset="0"/>
+                <a:cs typeface="Open Sans" panose="020B0606030504020204" pitchFamily="34" charset="0"/>
+              </a:rPr>
+              <a:t>Each number is expressed in I-Cat form.</a:t>
+            </a:r>
+          </a:p>
+          <a:p>
+            <a:pPr marL="457189" indent="-457189" algn="just">
+              <a:buFont typeface="Arial" panose="020B0604020202020204" pitchFamily="34" charset="0"/>
+              <a:buChar char="•"/>
+            </a:pPr>
+            <a:r>
+              <a:rPr lang="en-US" sz="2667" dirty="0">
+                <a:latin typeface="Open Sans" panose="020B0606030504020204" pitchFamily="34" charset="0"/>
+                <a:ea typeface="Open Sans" panose="020B0606030504020204" pitchFamily="34" charset="0"/>
+                <a:cs typeface="Open Sans" panose="020B0606030504020204" pitchFamily="34" charset="0"/>
+              </a:rPr>
+              <a:t>Repeating units are expanded for alignment.</a:t>
+            </a:r>
+          </a:p>
+          <a:p>
+            <a:pPr marL="457189" indent="-457189" algn="just">
+              <a:buFont typeface="Arial" panose="020B0604020202020204" pitchFamily="34" charset="0"/>
+              <a:buChar char="•"/>
+            </a:pPr>
+            <a:r>
+              <a:rPr lang="en-US" sz="2667" dirty="0">
+                <a:latin typeface="Open Sans" panose="020B0606030504020204" pitchFamily="34" charset="0"/>
+                <a:ea typeface="Open Sans" panose="020B0606030504020204" pitchFamily="34" charset="0"/>
+                <a:cs typeface="Open Sans" panose="020B0606030504020204" pitchFamily="34" charset="0"/>
+              </a:rPr>
+              <a:t>The addition is then performed directly.</a:t>
+            </a:r>
+          </a:p>
+        </p:txBody>
+      </p:sp>
+      <p:sp>
+        <p:nvSpPr>
+          <p:cNvPr id="2080" name="TextBox 2079">
             <a:extLst>
               <a:ext uri="{FF2B5EF4-FFF2-40B4-BE49-F238E27FC236}">
-                <a16:creationId xmlns:a16="http://schemas.microsoft.com/office/drawing/2014/main" id="{84FEF396-7E2A-B792-EA42-EECA63C1FEFE}"/>
+                <a16:creationId xmlns:a16="http://schemas.microsoft.com/office/drawing/2014/main" id="{926C1E13-81C7-7ECE-8D87-98243E6AB21B}"/>
               </a:ext>
             </a:extLst>
           </p:cNvPr>
-          <p:cNvPicPr>
-            <a:picLocks noChangeAspect="1"/>
-          </p:cNvPicPr>
+          <p:cNvSpPr txBox="1"/>
           <p:nvPr/>
-        </p:nvPicPr>
-        <p:blipFill>
-          <a:blip r:embed="rId10">
-            <a:extLst>
-              <a:ext uri="{28A0092B-C50C-407E-A947-70E740481C1C}">
-                <a14:useLocalDpi xmlns:a14="http://schemas.microsoft.com/office/drawing/2010/main" val="0"/>
-              </a:ext>
-            </a:extLst>
-          </a:blip>
-          <a:stretch>
-            <a:fillRect/>
-          </a:stretch>
-        </p:blipFill>
+        </p:nvSpPr>
         <p:spPr>
           <a:xfrm>
-            <a:off x="2116699" y="15936383"/>
-            <a:ext cx="4572000" cy="641195"/>
+            <a:off x="10825475" y="15396145"/>
+            <a:ext cx="4500695" cy="3375796"/>
           </a:xfrm>
           <a:prstGeom prst="rect">
             <a:avLst/>
           </a:prstGeom>
+          <a:noFill/>
         </p:spPr>
-      </p:pic>
+        <p:txBody>
+          <a:bodyPr wrap="square" rtlCol="0">
+            <a:spAutoFit/>
+          </a:bodyPr>
+          <a:lstStyle/>
+          <a:p>
+            <a:pPr marL="457189" indent="-457189">
+              <a:buFont typeface="Arial" panose="020B0604020202020204" pitchFamily="34" charset="0"/>
+              <a:buChar char="•"/>
+            </a:pPr>
+            <a:r>
+              <a:rPr lang="en-US" sz="2667" dirty="0">
+                <a:latin typeface="Open Sans" panose="020B0606030504020204" pitchFamily="34" charset="0"/>
+                <a:ea typeface="Open Sans" panose="020B0606030504020204" pitchFamily="34" charset="0"/>
+                <a:cs typeface="Open Sans" panose="020B0606030504020204" pitchFamily="34" charset="0"/>
+              </a:rPr>
+              <a:t>No expansion required in this case.</a:t>
+            </a:r>
+          </a:p>
+          <a:p>
+            <a:pPr marL="457189" indent="-457189">
+              <a:buFont typeface="Arial" panose="020B0604020202020204" pitchFamily="34" charset="0"/>
+              <a:buChar char="•"/>
+            </a:pPr>
+            <a:r>
+              <a:rPr lang="en-US" sz="2667" dirty="0">
+                <a:latin typeface="Open Sans" panose="020B0606030504020204" pitchFamily="34" charset="0"/>
+                <a:ea typeface="Open Sans" panose="020B0606030504020204" pitchFamily="34" charset="0"/>
+                <a:cs typeface="Open Sans" panose="020B0606030504020204" pitchFamily="34" charset="0"/>
+              </a:rPr>
+              <a:t>Intermediate sums show how carries move across units.</a:t>
+            </a:r>
+          </a:p>
+          <a:p>
+            <a:pPr marL="457189" indent="-457189">
+              <a:buFont typeface="Arial" panose="020B0604020202020204" pitchFamily="34" charset="0"/>
+              <a:buChar char="•"/>
+            </a:pPr>
+            <a:r>
+              <a:rPr lang="en-US" sz="2667" dirty="0">
+                <a:latin typeface="Open Sans" panose="020B0606030504020204" pitchFamily="34" charset="0"/>
+                <a:ea typeface="Open Sans" panose="020B0606030504020204" pitchFamily="34" charset="0"/>
+                <a:cs typeface="Open Sans" panose="020B0606030504020204" pitchFamily="34" charset="0"/>
+              </a:rPr>
+              <a:t>The result is recompressed into I-Cat form.</a:t>
+            </a:r>
+          </a:p>
+        </p:txBody>
+      </p:sp>
       <p:sp>
         <p:nvSpPr>
-          <p:cNvPr id="2054" name="TextBox 2053">
+          <p:cNvPr id="2082" name="TextBox 2081">
             <a:extLst>
               <a:ext uri="{FF2B5EF4-FFF2-40B4-BE49-F238E27FC236}">
-                <a16:creationId xmlns:a16="http://schemas.microsoft.com/office/drawing/2014/main" id="{2A313C7D-9821-8CDD-DA1E-5919B6C4E2EE}"/>
+                <a16:creationId xmlns:a16="http://schemas.microsoft.com/office/drawing/2014/main" id="{0F1CC04B-FE74-9171-EA57-C913BDA548EF}"/>
+              </a:ext>
+            </a:extLst>
+          </p:cNvPr>
+          <p:cNvSpPr txBox="1"/>
+          <p:nvPr/>
+        </p:nvSpPr>
+        <p:spPr>
+          <a:xfrm>
+            <a:off x="10825475" y="20388859"/>
+            <a:ext cx="8318601" cy="2144498"/>
+          </a:xfrm>
+          <a:prstGeom prst="rect">
+            <a:avLst/>
+          </a:prstGeom>
+          <a:noFill/>
+        </p:spPr>
+        <p:txBody>
+          <a:bodyPr wrap="square" rtlCol="0">
+            <a:spAutoFit/>
+          </a:bodyPr>
+          <a:lstStyle/>
+          <a:p>
+            <a:pPr marL="457189" indent="-457189">
+              <a:buFont typeface="Arial" panose="020B0604020202020204" pitchFamily="34" charset="0"/>
+              <a:buChar char="•"/>
+            </a:pPr>
+            <a:r>
+              <a:rPr lang="en-US" sz="2667" dirty="0">
+                <a:latin typeface="Open Sans" panose="020B0606030504020204" pitchFamily="34" charset="0"/>
+                <a:ea typeface="Open Sans" panose="020B0606030504020204" pitchFamily="34" charset="0"/>
+                <a:cs typeface="Open Sans" panose="020B0606030504020204" pitchFamily="34" charset="0"/>
+              </a:rPr>
+              <a:t>Multiply using the </a:t>
+            </a:r>
+            <a:r>
+              <a:rPr lang="en-US" sz="2667" b="1" dirty="0">
+                <a:latin typeface="Open Sans" panose="020B0606030504020204" pitchFamily="34" charset="0"/>
+                <a:ea typeface="Open Sans" panose="020B0606030504020204" pitchFamily="34" charset="0"/>
+                <a:cs typeface="Open Sans" panose="020B0606030504020204" pitchFamily="34" charset="0"/>
+              </a:rPr>
+              <a:t>U = M/C method</a:t>
+            </a:r>
+            <a:r>
+              <a:rPr lang="en-US" sz="2667" dirty="0">
+                <a:latin typeface="Open Sans" panose="020B0606030504020204" pitchFamily="34" charset="0"/>
+                <a:ea typeface="Open Sans" panose="020B0606030504020204" pitchFamily="34" charset="0"/>
+                <a:cs typeface="Open Sans" panose="020B0606030504020204" pitchFamily="34" charset="0"/>
+              </a:rPr>
+              <a:t>:</a:t>
+            </a:r>
+          </a:p>
+          <a:p>
+            <a:pPr marL="892554" lvl="1" indent="-457189">
+              <a:buFont typeface="Arial" panose="020B0604020202020204" pitchFamily="34" charset="0"/>
+              <a:buChar char="•"/>
+            </a:pPr>
+            <a:r>
+              <a:rPr lang="en-US" sz="2667" b="1" dirty="0">
+                <a:latin typeface="Open Sans" panose="020B0606030504020204" pitchFamily="34" charset="0"/>
+                <a:ea typeface="Open Sans" panose="020B0606030504020204" pitchFamily="34" charset="0"/>
+                <a:cs typeface="Open Sans" panose="020B0606030504020204" pitchFamily="34" charset="0"/>
+              </a:rPr>
+              <a:t>M</a:t>
+            </a:r>
+            <a:r>
+              <a:rPr lang="en-US" sz="2667" dirty="0">
+                <a:latin typeface="Open Sans" panose="020B0606030504020204" pitchFamily="34" charset="0"/>
+                <a:ea typeface="Open Sans" panose="020B0606030504020204" pitchFamily="34" charset="0"/>
+                <a:cs typeface="Open Sans" panose="020B0606030504020204" pitchFamily="34" charset="0"/>
+              </a:rPr>
+              <a:t>: number of integers in the multiplier.</a:t>
+            </a:r>
+          </a:p>
+          <a:p>
+            <a:pPr marL="892554" lvl="1" indent="-457189">
+              <a:buFont typeface="Arial" panose="020B0604020202020204" pitchFamily="34" charset="0"/>
+              <a:buChar char="•"/>
+            </a:pPr>
+            <a:r>
+              <a:rPr lang="en-US" sz="2667" b="1" dirty="0">
+                <a:latin typeface="Open Sans" panose="020B0606030504020204" pitchFamily="34" charset="0"/>
+                <a:ea typeface="Open Sans" panose="020B0606030504020204" pitchFamily="34" charset="0"/>
+                <a:cs typeface="Open Sans" panose="020B0606030504020204" pitchFamily="34" charset="0"/>
+              </a:rPr>
+              <a:t>C</a:t>
+            </a:r>
+            <a:r>
+              <a:rPr lang="en-US" sz="2667" dirty="0">
+                <a:latin typeface="Open Sans" panose="020B0606030504020204" pitchFamily="34" charset="0"/>
+                <a:ea typeface="Open Sans" panose="020B0606030504020204" pitchFamily="34" charset="0"/>
+                <a:cs typeface="Open Sans" panose="020B0606030504020204" pitchFamily="34" charset="0"/>
+              </a:rPr>
+              <a:t>: number of integers in the I-Cat.</a:t>
+            </a:r>
+          </a:p>
+          <a:p>
+            <a:pPr marL="892554" lvl="1" indent="-457189">
+              <a:buFont typeface="Arial" panose="020B0604020202020204" pitchFamily="34" charset="0"/>
+              <a:buChar char="•"/>
+            </a:pPr>
+            <a:r>
+              <a:rPr lang="en-US" sz="2667" b="1" dirty="0">
+                <a:latin typeface="Open Sans" panose="020B0606030504020204" pitchFamily="34" charset="0"/>
+                <a:ea typeface="Open Sans" panose="020B0606030504020204" pitchFamily="34" charset="0"/>
+                <a:cs typeface="Open Sans" panose="020B0606030504020204" pitchFamily="34" charset="0"/>
+              </a:rPr>
+              <a:t>U</a:t>
+            </a:r>
+            <a:r>
+              <a:rPr lang="en-US" sz="2667" dirty="0">
+                <a:latin typeface="Open Sans" panose="020B0606030504020204" pitchFamily="34" charset="0"/>
+                <a:ea typeface="Open Sans" panose="020B0606030504020204" pitchFamily="34" charset="0"/>
+                <a:cs typeface="Open Sans" panose="020B0606030504020204" pitchFamily="34" charset="0"/>
+              </a:rPr>
+              <a:t>: number of times to unpack the I-Cat.</a:t>
+            </a:r>
+          </a:p>
+          <a:p>
+            <a:pPr marL="457189" indent="-457189">
+              <a:buFont typeface="Arial" panose="020B0604020202020204" pitchFamily="34" charset="0"/>
+              <a:buChar char="•"/>
+            </a:pPr>
+            <a:r>
+              <a:rPr lang="en-US" sz="2667" dirty="0">
+                <a:latin typeface="Open Sans" panose="020B0606030504020204" pitchFamily="34" charset="0"/>
+                <a:ea typeface="Open Sans" panose="020B0606030504020204" pitchFamily="34" charset="0"/>
+                <a:cs typeface="Open Sans" panose="020B0606030504020204" pitchFamily="34" charset="0"/>
+              </a:rPr>
+              <a:t>Carries are propagated across from left to right.</a:t>
+            </a:r>
+          </a:p>
+        </p:txBody>
+      </p:sp>
+      <p:grpSp>
+        <p:nvGrpSpPr>
+          <p:cNvPr id="2093" name="Group 2092">
+            <a:extLst>
+              <a:ext uri="{FF2B5EF4-FFF2-40B4-BE49-F238E27FC236}">
+                <a16:creationId xmlns:a16="http://schemas.microsoft.com/office/drawing/2014/main" id="{71C00DDF-1667-EAE1-F73A-03D2DE6331FE}"/>
+              </a:ext>
+            </a:extLst>
+          </p:cNvPr>
+          <p:cNvGrpSpPr/>
+          <p:nvPr/>
+        </p:nvGrpSpPr>
+        <p:grpSpPr>
+          <a:xfrm>
+            <a:off x="0" y="0"/>
+            <a:ext cx="43891200" cy="6000123"/>
+            <a:chOff x="0" y="1828800"/>
+            <a:chExt cx="43891200" cy="6000123"/>
+          </a:xfrm>
+        </p:grpSpPr>
+        <p:sp>
+          <p:nvSpPr>
+            <p:cNvPr id="2050" name="Rectangle 6"/>
+            <p:cNvSpPr>
+              <a:spLocks noChangeArrowheads="1"/>
+            </p:cNvSpPr>
+            <p:nvPr/>
+          </p:nvSpPr>
+          <p:spPr bwMode="auto">
+            <a:xfrm>
+              <a:off x="0" y="1828800"/>
+              <a:ext cx="43891200" cy="5754741"/>
+            </a:xfrm>
+            <a:prstGeom prst="rect">
+              <a:avLst/>
+            </a:prstGeom>
+            <a:solidFill>
+              <a:srgbClr val="1482A5"/>
+            </a:solidFill>
+            <a:ln w="9525">
+              <a:noFill/>
+              <a:miter lim="800000"/>
+            </a:ln>
+            <a:effectLst/>
+          </p:spPr>
+          <p:txBody>
+            <a:bodyPr lIns="121920" tIns="60960" rIns="121920" bIns="60960" anchor="ctr"/>
+            <a:lstStyle>
+              <a:defPPr>
+                <a:defRPr kern="1200"/>
+              </a:defPPr>
+            </a:lstStyle>
+            <a:p>
+              <a:pPr algn="ctr" defTabSz="4181227"/>
+              <a:endParaRPr lang="en-US" sz="4267">
+                <a:solidFill>
+                  <a:schemeClr val="bg1"/>
+                </a:solidFill>
+              </a:endParaRPr>
+            </a:p>
+          </p:txBody>
+        </p:sp>
+        <p:sp>
+          <p:nvSpPr>
+            <p:cNvPr id="16" name="Text Placeholder 5">
+              <a:extLst>
+                <a:ext uri="{FF2B5EF4-FFF2-40B4-BE49-F238E27FC236}">
+                  <a16:creationId xmlns:a16="http://schemas.microsoft.com/office/drawing/2014/main" id="{D3B51F6E-41A5-4D7C-9B15-CDBAC096BAD1}"/>
+                </a:ext>
+              </a:extLst>
+            </p:cNvPr>
+            <p:cNvSpPr txBox="1"/>
+            <p:nvPr/>
+          </p:nvSpPr>
+          <p:spPr>
+            <a:xfrm>
+              <a:off x="5689600" y="2453380"/>
+              <a:ext cx="32512000" cy="2611057"/>
+            </a:xfrm>
+            <a:prstGeom prst="rect">
+              <a:avLst/>
+            </a:prstGeom>
+          </p:spPr>
+          <p:txBody>
+            <a:bodyPr lIns="0" tIns="0" rIns="0" bIns="0">
+              <a:noAutofit/>
+            </a:bodyPr>
+            <a:lstStyle>
+              <a:defPPr>
+                <a:defRPr kern="1200"/>
+              </a:defPPr>
+              <a:lvl1pPr marL="0" marR="0" indent="0" algn="l" defTabSz="3783013" rtl="0" eaLnBrk="1" fontAlgn="auto" latinLnBrk="0" hangingPunct="1">
+                <a:lnSpc>
+                  <a:spcPct val="100000"/>
+                </a:lnSpc>
+                <a:spcBef>
+                  <a:spcPts val="600"/>
+                </a:spcBef>
+                <a:spcAft>
+                  <a:spcPct val="0"/>
+                </a:spcAft>
+                <a:buClrTx/>
+                <a:buSzTx/>
+                <a:buFontTx/>
+                <a:buNone/>
+                <a:defRPr sz="6000" kern="1200" baseline="0">
+                  <a:solidFill>
+                    <a:schemeClr val="tx2"/>
+                  </a:solidFill>
+                  <a:latin typeface="Franklin Gothic Heavy" pitchFamily="34" charset="0"/>
+                  <a:ea typeface="+mn-ea"/>
+                  <a:cs typeface="+mn-cs"/>
+                </a:defRPr>
+              </a:lvl1pPr>
+              <a:lvl2pPr marL="1880543" indent="0" algn="l" defTabSz="3761086" rtl="0" eaLnBrk="1" latinLnBrk="0" hangingPunct="1">
+                <a:spcBef>
+                  <a:spcPct val="20000"/>
+                </a:spcBef>
+                <a:buFontTx/>
+                <a:buNone/>
+                <a:defRPr sz="11500" kern="1200">
+                  <a:solidFill>
+                    <a:schemeClr val="tx1"/>
+                  </a:solidFill>
+                  <a:latin typeface="+mn-lt"/>
+                  <a:ea typeface="+mn-ea"/>
+                  <a:cs typeface="+mn-cs"/>
+                </a:defRPr>
+              </a:lvl2pPr>
+              <a:lvl3pPr marL="3761086" indent="0" algn="l" defTabSz="3761086" rtl="0" eaLnBrk="1" latinLnBrk="0" hangingPunct="1">
+                <a:spcBef>
+                  <a:spcPct val="20000"/>
+                </a:spcBef>
+                <a:buFontTx/>
+                <a:buNone/>
+                <a:defRPr sz="9900" kern="1200">
+                  <a:solidFill>
+                    <a:schemeClr val="tx1"/>
+                  </a:solidFill>
+                  <a:latin typeface="+mn-lt"/>
+                  <a:ea typeface="+mn-ea"/>
+                  <a:cs typeface="+mn-cs"/>
+                </a:defRPr>
+              </a:lvl3pPr>
+              <a:lvl4pPr marL="5641629" indent="0" algn="l" defTabSz="3761086" rtl="0" eaLnBrk="1" latinLnBrk="0" hangingPunct="1">
+                <a:spcBef>
+                  <a:spcPct val="20000"/>
+                </a:spcBef>
+                <a:buFontTx/>
+                <a:buNone/>
+                <a:defRPr sz="8200" kern="1200">
+                  <a:solidFill>
+                    <a:schemeClr val="tx1"/>
+                  </a:solidFill>
+                  <a:latin typeface="+mn-lt"/>
+                  <a:ea typeface="+mn-ea"/>
+                  <a:cs typeface="+mn-cs"/>
+                </a:defRPr>
+              </a:lvl4pPr>
+              <a:lvl5pPr marL="7522172" indent="0" algn="l" defTabSz="3761086" rtl="0" eaLnBrk="1" latinLnBrk="0" hangingPunct="1">
+                <a:spcBef>
+                  <a:spcPct val="20000"/>
+                </a:spcBef>
+                <a:buFontTx/>
+                <a:buNone/>
+                <a:defRPr sz="8200" kern="1200">
+                  <a:solidFill>
+                    <a:schemeClr val="tx1"/>
+                  </a:solidFill>
+                  <a:latin typeface="+mn-lt"/>
+                  <a:ea typeface="+mn-ea"/>
+                  <a:cs typeface="+mn-cs"/>
+                </a:defRPr>
+              </a:lvl5pPr>
+              <a:lvl6pPr marL="10342988" indent="-940272" algn="l" defTabSz="3761086" rtl="0" eaLnBrk="1" latinLnBrk="0" hangingPunct="1">
+                <a:spcBef>
+                  <a:spcPct val="20000"/>
+                </a:spcBef>
+                <a:buFont typeface="Arial" pitchFamily="34" charset="0"/>
+                <a:buChar char="•"/>
+                <a:defRPr sz="8200" kern="1200">
+                  <a:solidFill>
+                    <a:schemeClr val="tx1"/>
+                  </a:solidFill>
+                  <a:latin typeface="+mn-lt"/>
+                  <a:ea typeface="+mn-ea"/>
+                  <a:cs typeface="+mn-cs"/>
+                </a:defRPr>
+              </a:lvl6pPr>
+              <a:lvl7pPr marL="12223531" indent="-940272" algn="l" defTabSz="3761086" rtl="0" eaLnBrk="1" latinLnBrk="0" hangingPunct="1">
+                <a:spcBef>
+                  <a:spcPct val="20000"/>
+                </a:spcBef>
+                <a:buFont typeface="Arial" pitchFamily="34" charset="0"/>
+                <a:buChar char="•"/>
+                <a:defRPr sz="8200" kern="1200">
+                  <a:solidFill>
+                    <a:schemeClr val="tx1"/>
+                  </a:solidFill>
+                  <a:latin typeface="+mn-lt"/>
+                  <a:ea typeface="+mn-ea"/>
+                  <a:cs typeface="+mn-cs"/>
+                </a:defRPr>
+              </a:lvl7pPr>
+              <a:lvl8pPr marL="14104074" indent="-940272" algn="l" defTabSz="3761086" rtl="0" eaLnBrk="1" latinLnBrk="0" hangingPunct="1">
+                <a:spcBef>
+                  <a:spcPct val="20000"/>
+                </a:spcBef>
+                <a:buFont typeface="Arial" pitchFamily="34" charset="0"/>
+                <a:buChar char="•"/>
+                <a:defRPr sz="8200" kern="1200">
+                  <a:solidFill>
+                    <a:schemeClr val="tx1"/>
+                  </a:solidFill>
+                  <a:latin typeface="+mn-lt"/>
+                  <a:ea typeface="+mn-ea"/>
+                  <a:cs typeface="+mn-cs"/>
+                </a:defRPr>
+              </a:lvl8pPr>
+              <a:lvl9pPr marL="15984617" indent="-940272" algn="l" defTabSz="3761086" rtl="0" eaLnBrk="1" latinLnBrk="0" hangingPunct="1">
+                <a:spcBef>
+                  <a:spcPct val="20000"/>
+                </a:spcBef>
+                <a:buFont typeface="Arial" pitchFamily="34" charset="0"/>
+                <a:buChar char="•"/>
+                <a:defRPr sz="8200" kern="1200">
+                  <a:solidFill>
+                    <a:schemeClr val="tx1"/>
+                  </a:solidFill>
+                  <a:latin typeface="+mn-lt"/>
+                  <a:ea typeface="+mn-ea"/>
+                  <a:cs typeface="+mn-cs"/>
+                </a:defRPr>
+              </a:lvl9pPr>
+            </a:lstStyle>
+            <a:p>
+              <a:pPr algn="ctr" defTabSz="3343271">
+                <a:spcBef>
+                  <a:spcPct val="20000"/>
+                </a:spcBef>
+                <a:defRPr/>
+              </a:pPr>
+              <a:r>
+                <a:rPr lang="en-US" sz="8800" b="1" dirty="0">
+                  <a:solidFill>
+                    <a:schemeClr val="bg1"/>
+                  </a:solidFill>
+                  <a:latin typeface="Arial" panose="020B0604020202020204" pitchFamily="34" charset="0"/>
+                  <a:cs typeface="Arial" panose="020B0604020202020204" pitchFamily="34" charset="0"/>
+                </a:rPr>
+                <a:t>Indexed Concatenation (I-Cat): A Method for Representing and Operating on Repeating Numbers</a:t>
+              </a:r>
+            </a:p>
+          </p:txBody>
+        </p:sp>
+        <p:sp>
+          <p:nvSpPr>
+            <p:cNvPr id="17" name="Text Placeholder 5">
+              <a:extLst>
+                <a:ext uri="{FF2B5EF4-FFF2-40B4-BE49-F238E27FC236}">
+                  <a16:creationId xmlns:a16="http://schemas.microsoft.com/office/drawing/2014/main" id="{0A363635-BCEE-4B55-ADB3-58433C0697E0}"/>
+                </a:ext>
+              </a:extLst>
+            </p:cNvPr>
+            <p:cNvSpPr txBox="1"/>
+            <p:nvPr/>
+          </p:nvSpPr>
+          <p:spPr>
+            <a:xfrm>
+              <a:off x="5689600" y="5517736"/>
+              <a:ext cx="32512000" cy="1707070"/>
+            </a:xfrm>
+            <a:prstGeom prst="rect">
+              <a:avLst/>
+            </a:prstGeom>
+          </p:spPr>
+          <p:txBody>
+            <a:bodyPr lIns="0" tIns="0" rIns="0" bIns="0">
+              <a:spAutoFit/>
+            </a:bodyPr>
+            <a:lstStyle>
+              <a:defPPr>
+                <a:defRPr kern="1200"/>
+              </a:defPPr>
+              <a:lvl1pPr marL="0" marR="0" indent="0" algn="l" defTabSz="3761086" rtl="0" eaLnBrk="1" fontAlgn="auto" latinLnBrk="0" hangingPunct="1">
+                <a:lnSpc>
+                  <a:spcPct val="100000"/>
+                </a:lnSpc>
+                <a:spcBef>
+                  <a:spcPct val="20000"/>
+                </a:spcBef>
+                <a:spcAft>
+                  <a:spcPct val="0"/>
+                </a:spcAft>
+                <a:buClrTx/>
+                <a:buSzTx/>
+                <a:buFont typeface="Arial" pitchFamily="34" charset="0"/>
+                <a:buNone/>
+                <a:defRPr sz="6000" kern="1200" baseline="0">
+                  <a:solidFill>
+                    <a:schemeClr val="tx2"/>
+                  </a:solidFill>
+                  <a:latin typeface="Franklin Gothic Heavy" pitchFamily="34" charset="0"/>
+                  <a:ea typeface="+mn-ea"/>
+                  <a:cs typeface="+mn-cs"/>
+                </a:defRPr>
+              </a:lvl1pPr>
+              <a:lvl2pPr marL="1880543" indent="0" algn="l" defTabSz="3761086" rtl="0" eaLnBrk="1" latinLnBrk="0" hangingPunct="1">
+                <a:spcBef>
+                  <a:spcPct val="20000"/>
+                </a:spcBef>
+                <a:buFontTx/>
+                <a:buNone/>
+                <a:defRPr sz="11500" kern="1200">
+                  <a:solidFill>
+                    <a:schemeClr val="tx1"/>
+                  </a:solidFill>
+                  <a:latin typeface="+mn-lt"/>
+                  <a:ea typeface="+mn-ea"/>
+                  <a:cs typeface="+mn-cs"/>
+                </a:defRPr>
+              </a:lvl2pPr>
+              <a:lvl3pPr marL="3761086" indent="0" algn="l" defTabSz="3761086" rtl="0" eaLnBrk="1" latinLnBrk="0" hangingPunct="1">
+                <a:spcBef>
+                  <a:spcPct val="20000"/>
+                </a:spcBef>
+                <a:buFontTx/>
+                <a:buNone/>
+                <a:defRPr sz="9900" kern="1200">
+                  <a:solidFill>
+                    <a:schemeClr val="tx1"/>
+                  </a:solidFill>
+                  <a:latin typeface="+mn-lt"/>
+                  <a:ea typeface="+mn-ea"/>
+                  <a:cs typeface="+mn-cs"/>
+                </a:defRPr>
+              </a:lvl3pPr>
+              <a:lvl4pPr marL="5641629" indent="0" algn="l" defTabSz="3761086" rtl="0" eaLnBrk="1" latinLnBrk="0" hangingPunct="1">
+                <a:spcBef>
+                  <a:spcPct val="20000"/>
+                </a:spcBef>
+                <a:buFontTx/>
+                <a:buNone/>
+                <a:defRPr sz="8200" kern="1200">
+                  <a:solidFill>
+                    <a:schemeClr val="tx1"/>
+                  </a:solidFill>
+                  <a:latin typeface="+mn-lt"/>
+                  <a:ea typeface="+mn-ea"/>
+                  <a:cs typeface="+mn-cs"/>
+                </a:defRPr>
+              </a:lvl4pPr>
+              <a:lvl5pPr marL="7522172" indent="0" algn="l" defTabSz="3761086" rtl="0" eaLnBrk="1" latinLnBrk="0" hangingPunct="1">
+                <a:spcBef>
+                  <a:spcPct val="20000"/>
+                </a:spcBef>
+                <a:buFontTx/>
+                <a:buNone/>
+                <a:defRPr sz="8200" kern="1200">
+                  <a:solidFill>
+                    <a:schemeClr val="tx1"/>
+                  </a:solidFill>
+                  <a:latin typeface="+mn-lt"/>
+                  <a:ea typeface="+mn-ea"/>
+                  <a:cs typeface="+mn-cs"/>
+                </a:defRPr>
+              </a:lvl5pPr>
+              <a:lvl6pPr marL="10342988" indent="-940272" algn="l" defTabSz="3761086" rtl="0" eaLnBrk="1" latinLnBrk="0" hangingPunct="1">
+                <a:spcBef>
+                  <a:spcPct val="20000"/>
+                </a:spcBef>
+                <a:buFont typeface="Arial" pitchFamily="34" charset="0"/>
+                <a:buChar char="•"/>
+                <a:defRPr sz="8200" kern="1200">
+                  <a:solidFill>
+                    <a:schemeClr val="tx1"/>
+                  </a:solidFill>
+                  <a:latin typeface="+mn-lt"/>
+                  <a:ea typeface="+mn-ea"/>
+                  <a:cs typeface="+mn-cs"/>
+                </a:defRPr>
+              </a:lvl6pPr>
+              <a:lvl7pPr marL="12223531" indent="-940272" algn="l" defTabSz="3761086" rtl="0" eaLnBrk="1" latinLnBrk="0" hangingPunct="1">
+                <a:spcBef>
+                  <a:spcPct val="20000"/>
+                </a:spcBef>
+                <a:buFont typeface="Arial" pitchFamily="34" charset="0"/>
+                <a:buChar char="•"/>
+                <a:defRPr sz="8200" kern="1200">
+                  <a:solidFill>
+                    <a:schemeClr val="tx1"/>
+                  </a:solidFill>
+                  <a:latin typeface="+mn-lt"/>
+                  <a:ea typeface="+mn-ea"/>
+                  <a:cs typeface="+mn-cs"/>
+                </a:defRPr>
+              </a:lvl7pPr>
+              <a:lvl8pPr marL="14104074" indent="-940272" algn="l" defTabSz="3761086" rtl="0" eaLnBrk="1" latinLnBrk="0" hangingPunct="1">
+                <a:spcBef>
+                  <a:spcPct val="20000"/>
+                </a:spcBef>
+                <a:buFont typeface="Arial" pitchFamily="34" charset="0"/>
+                <a:buChar char="•"/>
+                <a:defRPr sz="8200" kern="1200">
+                  <a:solidFill>
+                    <a:schemeClr val="tx1"/>
+                  </a:solidFill>
+                  <a:latin typeface="+mn-lt"/>
+                  <a:ea typeface="+mn-ea"/>
+                  <a:cs typeface="+mn-cs"/>
+                </a:defRPr>
+              </a:lvl8pPr>
+              <a:lvl9pPr marL="15984617" indent="-940272" algn="l" defTabSz="3761086" rtl="0" eaLnBrk="1" latinLnBrk="0" hangingPunct="1">
+                <a:spcBef>
+                  <a:spcPct val="20000"/>
+                </a:spcBef>
+                <a:buFont typeface="Arial" pitchFamily="34" charset="0"/>
+                <a:buChar char="•"/>
+                <a:defRPr sz="8200" kern="1200">
+                  <a:solidFill>
+                    <a:schemeClr val="tx1"/>
+                  </a:solidFill>
+                  <a:latin typeface="+mn-lt"/>
+                  <a:ea typeface="+mn-ea"/>
+                  <a:cs typeface="+mn-cs"/>
+                </a:defRPr>
+              </a:lvl9pPr>
+            </a:lstStyle>
+            <a:p>
+              <a:pPr algn="ctr">
+                <a:defRPr/>
+              </a:pPr>
+              <a:r>
+                <a:rPr lang="en-US" sz="5333" dirty="0">
+                  <a:solidFill>
+                    <a:schemeClr val="bg1"/>
+                  </a:solidFill>
+                  <a:latin typeface="Arial" panose="020B0604020202020204" pitchFamily="34" charset="0"/>
+                  <a:ea typeface="Open Sans" panose="020B0606030504020204" pitchFamily="34" charset="0"/>
+                  <a:cs typeface="Arial" panose="020B0604020202020204" pitchFamily="34" charset="0"/>
+                </a:rPr>
+                <a:t>Abigail Touma, Isaac Wolford, and Kenneth Caviness</a:t>
+              </a:r>
+            </a:p>
+            <a:p>
+              <a:pPr algn="ctr">
+                <a:defRPr/>
+              </a:pPr>
+              <a:r>
+                <a:rPr lang="en-US" sz="4800" dirty="0">
+                  <a:solidFill>
+                    <a:schemeClr val="bg1"/>
+                  </a:solidFill>
+                  <a:latin typeface="Arial" panose="020B0604020202020204" pitchFamily="34" charset="0"/>
+                  <a:ea typeface="Open Sans" panose="020B0606030504020204" pitchFamily="34" charset="0"/>
+                  <a:cs typeface="Arial" panose="020B0604020202020204" pitchFamily="34" charset="0"/>
+                </a:rPr>
+                <a:t>School of Engineering and Physics, Department of Mathematics</a:t>
+              </a:r>
+            </a:p>
+          </p:txBody>
+        </p:sp>
+        <p:pic>
+          <p:nvPicPr>
+            <p:cNvPr id="2" name="Picture 2" descr="Southern Adventist University | Choose Chattanooga®">
+              <a:extLst>
+                <a:ext uri="{FF2B5EF4-FFF2-40B4-BE49-F238E27FC236}">
+                  <a16:creationId xmlns:a16="http://schemas.microsoft.com/office/drawing/2014/main" id="{3994A800-1F1F-B490-6674-C4B7A87127BA}"/>
+                </a:ext>
+              </a:extLst>
+            </p:cNvPr>
+            <p:cNvPicPr>
+              <a:picLocks noChangeAspect="1" noChangeArrowheads="1"/>
+            </p:cNvPicPr>
+            <p:nvPr/>
+          </p:nvPicPr>
+          <p:blipFill>
+            <a:blip r:embed="rId14">
+              <a:biLevel thresh="25000"/>
+              <a:extLst>
+                <a:ext uri="{28A0092B-C50C-407E-A947-70E740481C1C}">
+                  <a14:useLocalDpi xmlns:a14="http://schemas.microsoft.com/office/drawing/2010/main" val="0"/>
+                </a:ext>
+              </a:extLst>
+            </a:blip>
+            <a:srcRect/>
+            <a:stretch>
+              <a:fillRect/>
+            </a:stretch>
+          </p:blipFill>
+          <p:spPr bwMode="auto">
+            <a:xfrm>
+              <a:off x="1024471" y="1962971"/>
+              <a:ext cx="5486400" cy="5486400"/>
+            </a:xfrm>
+            <a:prstGeom prst="rect">
+              <a:avLst/>
+            </a:prstGeom>
+            <a:noFill/>
+            <a:extLst>
+              <a:ext uri="{909E8E84-426E-40DD-AFC4-6F175D3DCCD1}">
+                <a14:hiddenFill xmlns:a14="http://schemas.microsoft.com/office/drawing/2010/main">
+                  <a:solidFill>
+                    <a:srgbClr val="FFFFFF"/>
+                  </a:solidFill>
+                </a14:hiddenFill>
+              </a:ext>
+            </a:extLst>
+          </p:spPr>
+        </p:pic>
+        <p:pic>
+          <p:nvPicPr>
+            <p:cNvPr id="2085" name="Picture 2084">
+              <a:extLst>
+                <a:ext uri="{FF2B5EF4-FFF2-40B4-BE49-F238E27FC236}">
+                  <a16:creationId xmlns:a16="http://schemas.microsoft.com/office/drawing/2014/main" id="{6ADA64CF-045D-4115-12E8-3E0F0A06F6E9}"/>
+                </a:ext>
+              </a:extLst>
+            </p:cNvPr>
+            <p:cNvPicPr>
+              <a:picLocks noChangeAspect="1"/>
+            </p:cNvPicPr>
+            <p:nvPr/>
+          </p:nvPicPr>
+          <p:blipFill>
+            <a:blip r:embed="rId15"/>
+            <a:stretch>
+              <a:fillRect/>
+            </a:stretch>
+          </p:blipFill>
+          <p:spPr>
+            <a:xfrm>
+              <a:off x="37832987" y="2305703"/>
+              <a:ext cx="5486399" cy="5523220"/>
+            </a:xfrm>
+            <a:prstGeom prst="rect">
+              <a:avLst/>
+            </a:prstGeom>
+          </p:spPr>
+        </p:pic>
+      </p:grpSp>
+      <p:sp>
+        <p:nvSpPr>
+          <p:cNvPr id="2089" name="TextBox 2088">
+            <a:extLst>
+              <a:ext uri="{FF2B5EF4-FFF2-40B4-BE49-F238E27FC236}">
+                <a16:creationId xmlns:a16="http://schemas.microsoft.com/office/drawing/2014/main" id="{AF488AE2-D604-6E17-3C12-3E19144FC9D0}"/>
               </a:ext>
             </a:extLst>
           </p:cNvPr>
@@ -8539,8 +9880,8 @@
         </p:nvSpPr>
         <p:spPr bwMode="auto">
           <a:xfrm>
-            <a:off x="8484695" y="13802070"/>
-            <a:ext cx="7223760" cy="7315200"/>
+            <a:off x="20700191" y="24072752"/>
+            <a:ext cx="11143488" cy="1127488"/>
           </a:xfrm>
           <a:prstGeom prst="rect">
             <a:avLst/>
@@ -8558,7 +9899,7 @@
           </a:ln>
         </p:spPr>
         <p:txBody>
-          <a:bodyPr wrap="square" lIns="91440" tIns="91440" rIns="91440" bIns="91440">
+          <a:bodyPr wrap="square" lIns="121920" tIns="121920" rIns="121920" bIns="121920">
             <a:spAutoFit/>
           </a:bodyPr>
           <a:lstStyle>
@@ -8678,13 +10019,18 @@
               </a:lnSpc>
             </a:pPr>
             <a:r>
-              <a:rPr lang="en-US" b="1" dirty="0">
+              <a:rPr lang="en-US" sz="2667" b="1" dirty="0">
                 <a:latin typeface="Open Sans" panose="020B0606030504020204" pitchFamily="34" charset="0"/>
                 <a:ea typeface="Open Sans" panose="020B0606030504020204" pitchFamily="34" charset="0"/>
                 <a:cs typeface="Open Sans" panose="020B0606030504020204" pitchFamily="34" charset="0"/>
               </a:rPr>
-              <a:t>Multiplication Examples:</a:t>
-            </a:r>
+              <a:t>I-Cat x I-Cat Method:</a:t>
+            </a:r>
+            <a:endParaRPr lang="en-US" sz="2667" i="1" dirty="0">
+              <a:latin typeface="Cambria Math" panose="02040503050406030204" pitchFamily="18" charset="0"/>
+              <a:ea typeface="Open Sans" panose="020B0606030504020204" pitchFamily="34" charset="0"/>
+              <a:cs typeface="Open Sans" panose="020B0606030504020204" pitchFamily="34" charset="0"/>
+            </a:endParaRPr>
           </a:p>
           <a:p>
             <a:pPr algn="ctr">
@@ -8692,235 +10038,7 @@
                 <a:spcPct val="110000"/>
               </a:lnSpc>
             </a:pPr>
-            <a:endParaRPr lang="en-US" b="1" dirty="0">
-              <a:latin typeface="Open Sans" panose="020B0606030504020204" pitchFamily="34" charset="0"/>
-              <a:ea typeface="Open Sans" panose="020B0606030504020204" pitchFamily="34" charset="0"/>
-              <a:cs typeface="Open Sans" panose="020B0606030504020204" pitchFamily="34" charset="0"/>
-            </a:endParaRPr>
-          </a:p>
-          <a:p>
-            <a:pPr algn="just">
-              <a:lnSpc>
-                <a:spcPct val="110000"/>
-              </a:lnSpc>
-            </a:pPr>
-            <a:endParaRPr lang="en-US" b="1" dirty="0">
-              <a:latin typeface="Open Sans" panose="020B0606030504020204" pitchFamily="34" charset="0"/>
-              <a:ea typeface="Open Sans" panose="020B0606030504020204" pitchFamily="34" charset="0"/>
-              <a:cs typeface="Open Sans" panose="020B0606030504020204" pitchFamily="34" charset="0"/>
-            </a:endParaRPr>
-          </a:p>
-          <a:p>
-            <a:pPr algn="ctr">
-              <a:lnSpc>
-                <a:spcPct val="110000"/>
-              </a:lnSpc>
-            </a:pPr>
-            <a:endParaRPr lang="en-US" b="0" i="1" dirty="0">
-              <a:latin typeface="Cambria Math" panose="02040503050406030204" pitchFamily="18" charset="0"/>
-              <a:ea typeface="Open Sans" panose="020B0606030504020204" pitchFamily="34" charset="0"/>
-              <a:cs typeface="Open Sans" panose="020B0606030504020204" pitchFamily="34" charset="0"/>
-            </a:endParaRPr>
-          </a:p>
-          <a:p>
-            <a:pPr algn="ctr">
-              <a:lnSpc>
-                <a:spcPct val="110000"/>
-              </a:lnSpc>
-            </a:pPr>
-            <a:endParaRPr lang="en-US" i="1" dirty="0">
-              <a:latin typeface="Cambria Math" panose="02040503050406030204" pitchFamily="18" charset="0"/>
-              <a:ea typeface="Open Sans" panose="020B0606030504020204" pitchFamily="34" charset="0"/>
-              <a:cs typeface="Open Sans" panose="020B0606030504020204" pitchFamily="34" charset="0"/>
-            </a:endParaRPr>
-          </a:p>
-          <a:p>
-            <a:pPr algn="ctr">
-              <a:lnSpc>
-                <a:spcPct val="110000"/>
-              </a:lnSpc>
-            </a:pPr>
-            <a:endParaRPr lang="en-US" i="1" dirty="0">
-              <a:latin typeface="Cambria Math" panose="02040503050406030204" pitchFamily="18" charset="0"/>
-              <a:ea typeface="Open Sans" panose="020B0606030504020204" pitchFamily="34" charset="0"/>
-              <a:cs typeface="Open Sans" panose="020B0606030504020204" pitchFamily="34" charset="0"/>
-            </a:endParaRPr>
-          </a:p>
-          <a:p>
-            <a:pPr algn="ctr">
-              <a:lnSpc>
-                <a:spcPct val="110000"/>
-              </a:lnSpc>
-            </a:pPr>
-            <a:endParaRPr lang="en-US" i="1" dirty="0">
-              <a:latin typeface="Cambria Math" panose="02040503050406030204" pitchFamily="18" charset="0"/>
-              <a:ea typeface="Open Sans" panose="020B0606030504020204" pitchFamily="34" charset="0"/>
-              <a:cs typeface="Open Sans" panose="020B0606030504020204" pitchFamily="34" charset="0"/>
-            </a:endParaRPr>
-          </a:p>
-          <a:p>
-            <a:pPr algn="ctr">
-              <a:lnSpc>
-                <a:spcPct val="110000"/>
-              </a:lnSpc>
-            </a:pPr>
-            <a:endParaRPr lang="en-US" i="1" dirty="0">
-              <a:latin typeface="Cambria Math" panose="02040503050406030204" pitchFamily="18" charset="0"/>
-              <a:ea typeface="Open Sans" panose="020B0606030504020204" pitchFamily="34" charset="0"/>
-              <a:cs typeface="Open Sans" panose="020B0606030504020204" pitchFamily="34" charset="0"/>
-            </a:endParaRPr>
-          </a:p>
-          <a:p>
-            <a:pPr algn="ctr">
-              <a:lnSpc>
-                <a:spcPct val="110000"/>
-              </a:lnSpc>
-            </a:pPr>
-            <a:endParaRPr lang="en-US" i="1" dirty="0">
-              <a:latin typeface="Cambria Math" panose="02040503050406030204" pitchFamily="18" charset="0"/>
-              <a:ea typeface="Open Sans" panose="020B0606030504020204" pitchFamily="34" charset="0"/>
-              <a:cs typeface="Open Sans" panose="020B0606030504020204" pitchFamily="34" charset="0"/>
-            </a:endParaRPr>
-          </a:p>
-          <a:p>
-            <a:pPr algn="ctr">
-              <a:lnSpc>
-                <a:spcPct val="110000"/>
-              </a:lnSpc>
-            </a:pPr>
-            <a:endParaRPr lang="en-US" i="1" dirty="0">
-              <a:latin typeface="Cambria Math" panose="02040503050406030204" pitchFamily="18" charset="0"/>
-              <a:ea typeface="Open Sans" panose="020B0606030504020204" pitchFamily="34" charset="0"/>
-              <a:cs typeface="Open Sans" panose="020B0606030504020204" pitchFamily="34" charset="0"/>
-            </a:endParaRPr>
-          </a:p>
-          <a:p>
-            <a:pPr algn="ctr">
-              <a:lnSpc>
-                <a:spcPct val="110000"/>
-              </a:lnSpc>
-            </a:pPr>
-            <a:endParaRPr lang="en-US" i="1" dirty="0">
-              <a:latin typeface="Cambria Math" panose="02040503050406030204" pitchFamily="18" charset="0"/>
-              <a:ea typeface="Open Sans" panose="020B0606030504020204" pitchFamily="34" charset="0"/>
-              <a:cs typeface="Open Sans" panose="020B0606030504020204" pitchFamily="34" charset="0"/>
-            </a:endParaRPr>
-          </a:p>
-          <a:p>
-            <a:pPr algn="ctr">
-              <a:lnSpc>
-                <a:spcPct val="110000"/>
-              </a:lnSpc>
-            </a:pPr>
-            <a:endParaRPr lang="en-US" i="1" dirty="0">
-              <a:latin typeface="Cambria Math" panose="02040503050406030204" pitchFamily="18" charset="0"/>
-              <a:ea typeface="Open Sans" panose="020B0606030504020204" pitchFamily="34" charset="0"/>
-              <a:cs typeface="Open Sans" panose="020B0606030504020204" pitchFamily="34" charset="0"/>
-            </a:endParaRPr>
-          </a:p>
-          <a:p>
-            <a:pPr algn="ctr">
-              <a:lnSpc>
-                <a:spcPct val="110000"/>
-              </a:lnSpc>
-            </a:pPr>
-            <a:endParaRPr lang="en-US" i="1" dirty="0">
-              <a:latin typeface="Cambria Math" panose="02040503050406030204" pitchFamily="18" charset="0"/>
-              <a:ea typeface="Open Sans" panose="020B0606030504020204" pitchFamily="34" charset="0"/>
-              <a:cs typeface="Open Sans" panose="020B0606030504020204" pitchFamily="34" charset="0"/>
-            </a:endParaRPr>
-          </a:p>
-          <a:p>
-            <a:pPr algn="ctr">
-              <a:lnSpc>
-                <a:spcPct val="110000"/>
-              </a:lnSpc>
-            </a:pPr>
-            <a:endParaRPr lang="en-US" i="1" dirty="0">
-              <a:latin typeface="Cambria Math" panose="02040503050406030204" pitchFamily="18" charset="0"/>
-              <a:ea typeface="Open Sans" panose="020B0606030504020204" pitchFamily="34" charset="0"/>
-              <a:cs typeface="Open Sans" panose="020B0606030504020204" pitchFamily="34" charset="0"/>
-            </a:endParaRPr>
-          </a:p>
-          <a:p>
-            <a:pPr algn="ctr">
-              <a:lnSpc>
-                <a:spcPct val="110000"/>
-              </a:lnSpc>
-            </a:pPr>
-            <a:endParaRPr lang="en-US" i="1" dirty="0">
-              <a:latin typeface="Cambria Math" panose="02040503050406030204" pitchFamily="18" charset="0"/>
-              <a:ea typeface="Open Sans" panose="020B0606030504020204" pitchFamily="34" charset="0"/>
-              <a:cs typeface="Open Sans" panose="020B0606030504020204" pitchFamily="34" charset="0"/>
-            </a:endParaRPr>
-          </a:p>
-          <a:p>
-            <a:pPr algn="ctr">
-              <a:lnSpc>
-                <a:spcPct val="110000"/>
-              </a:lnSpc>
-            </a:pPr>
-            <a:endParaRPr lang="en-US" i="1" dirty="0">
-              <a:latin typeface="Cambria Math" panose="02040503050406030204" pitchFamily="18" charset="0"/>
-              <a:ea typeface="Open Sans" panose="020B0606030504020204" pitchFamily="34" charset="0"/>
-              <a:cs typeface="Open Sans" panose="020B0606030504020204" pitchFamily="34" charset="0"/>
-            </a:endParaRPr>
-          </a:p>
-          <a:p>
-            <a:pPr algn="ctr">
-              <a:lnSpc>
-                <a:spcPct val="110000"/>
-              </a:lnSpc>
-            </a:pPr>
-            <a:endParaRPr lang="en-US" i="1" dirty="0">
-              <a:latin typeface="Cambria Math" panose="02040503050406030204" pitchFamily="18" charset="0"/>
-              <a:ea typeface="Open Sans" panose="020B0606030504020204" pitchFamily="34" charset="0"/>
-              <a:cs typeface="Open Sans" panose="020B0606030504020204" pitchFamily="34" charset="0"/>
-            </a:endParaRPr>
-          </a:p>
-          <a:p>
-            <a:pPr algn="ctr">
-              <a:lnSpc>
-                <a:spcPct val="110000"/>
-              </a:lnSpc>
-            </a:pPr>
-            <a:endParaRPr lang="en-US" i="1" dirty="0">
-              <a:latin typeface="Cambria Math" panose="02040503050406030204" pitchFamily="18" charset="0"/>
-              <a:ea typeface="Open Sans" panose="020B0606030504020204" pitchFamily="34" charset="0"/>
-              <a:cs typeface="Open Sans" panose="020B0606030504020204" pitchFamily="34" charset="0"/>
-            </a:endParaRPr>
-          </a:p>
-          <a:p>
-            <a:pPr algn="ctr">
-              <a:lnSpc>
-                <a:spcPct val="110000"/>
-              </a:lnSpc>
-            </a:pPr>
-            <a:endParaRPr lang="en-US" b="0" i="1" dirty="0">
-              <a:latin typeface="Cambria Math" panose="02040503050406030204" pitchFamily="18" charset="0"/>
-              <a:ea typeface="Open Sans" panose="020B0606030504020204" pitchFamily="34" charset="0"/>
-              <a:cs typeface="Open Sans" panose="020B0606030504020204" pitchFamily="34" charset="0"/>
-            </a:endParaRPr>
-          </a:p>
-          <a:p>
-            <a:pPr algn="ctr">
-              <a:lnSpc>
-                <a:spcPct val="110000"/>
-              </a:lnSpc>
-            </a:pPr>
-            <a:endParaRPr lang="en-US" i="1" dirty="0">
-              <a:latin typeface="Cambria Math" panose="02040503050406030204" pitchFamily="18" charset="0"/>
-              <a:ea typeface="Open Sans" panose="020B0606030504020204" pitchFamily="34" charset="0"/>
-              <a:cs typeface="Open Sans" panose="020B0606030504020204" pitchFamily="34" charset="0"/>
-            </a:endParaRPr>
-          </a:p>
-          <a:p>
-            <a:pPr algn="ctr">
-              <a:lnSpc>
-                <a:spcPct val="110000"/>
-              </a:lnSpc>
-            </a:pPr>
-            <a:endParaRPr lang="en-US" b="0" i="1" dirty="0">
+            <a:endParaRPr lang="en-US" sz="2667" i="1" dirty="0">
               <a:latin typeface="Cambria Math" panose="02040503050406030204" pitchFamily="18" charset="0"/>
               <a:ea typeface="Open Sans" panose="020B0606030504020204" pitchFamily="34" charset="0"/>
               <a:cs typeface="Open Sans" panose="020B0606030504020204" pitchFamily="34" charset="0"/>
@@ -8928,194 +10046,49 @@
           </a:p>
         </p:txBody>
       </p:sp>
-      <p:pic>
-        <p:nvPicPr>
-          <p:cNvPr id="2059" name="Picture 2058">
+      <p:sp>
+        <p:nvSpPr>
+          <p:cNvPr id="2090" name="TextBox 2089">
             <a:extLst>
               <a:ext uri="{FF2B5EF4-FFF2-40B4-BE49-F238E27FC236}">
-                <a16:creationId xmlns:a16="http://schemas.microsoft.com/office/drawing/2014/main" id="{3EF30F8A-9952-F084-6E7B-9EB1307E5384}"/>
+                <a16:creationId xmlns:a16="http://schemas.microsoft.com/office/drawing/2014/main" id="{66E10282-E151-17F4-2120-FD7F38B8D9FE}"/>
               </a:ext>
             </a:extLst>
           </p:cNvPr>
-          <p:cNvPicPr>
-            <a:picLocks noChangeAspect="1"/>
-          </p:cNvPicPr>
+          <p:cNvSpPr txBox="1"/>
           <p:nvPr/>
-        </p:nvPicPr>
-        <p:blipFill>
-          <a:blip r:embed="rId11">
-            <a:extLst>
-              <a:ext uri="{28A0092B-C50C-407E-A947-70E740481C1C}">
-                <a14:useLocalDpi xmlns:a14="http://schemas.microsoft.com/office/drawing/2010/main" val="0"/>
-              </a:ext>
-            </a:extLst>
-          </a:blip>
-          <a:stretch>
-            <a:fillRect/>
-          </a:stretch>
-        </p:blipFill>
+        </p:nvSpPr>
         <p:spPr>
           <a:xfrm>
-            <a:off x="8829048" y="14305016"/>
-            <a:ext cx="6535055" cy="5858548"/>
+            <a:off x="21234400" y="9703839"/>
+            <a:ext cx="8669019" cy="502766"/>
           </a:xfrm>
           <a:prstGeom prst="rect">
             <a:avLst/>
           </a:prstGeom>
+          <a:noFill/>
         </p:spPr>
-      </p:pic>
-      <p:sp>
-        <p:nvSpPr>
-          <p:cNvPr id="2060" name="Rectangle 2059">
-            <a:extLst>
-              <a:ext uri="{FF2B5EF4-FFF2-40B4-BE49-F238E27FC236}">
-                <a16:creationId xmlns:a16="http://schemas.microsoft.com/office/drawing/2014/main" id="{740165E8-6502-4369-62B6-7D830E42FC11}"/>
-              </a:ext>
-            </a:extLst>
-          </p:cNvPr>
-          <p:cNvSpPr/>
-          <p:nvPr/>
-        </p:nvSpPr>
-        <p:spPr bwMode="auto">
-          <a:xfrm>
-            <a:off x="15087600" y="15392400"/>
-            <a:ext cx="228600" cy="609600"/>
-          </a:xfrm>
-          <a:prstGeom prst="rect">
-            <a:avLst/>
-          </a:prstGeom>
-          <a:solidFill>
-            <a:srgbClr val="FFFF00">
-              <a:alpha val="29804"/>
-            </a:srgbClr>
-          </a:solidFill>
-          <a:ln>
-            <a:noFill/>
-          </a:ln>
-        </p:spPr>
-        <p:style>
-          <a:lnRef idx="0">
-            <a:scrgbClr r="0" g="0" b="0"/>
-          </a:lnRef>
-          <a:fillRef idx="0">
-            <a:scrgbClr r="0" g="0" b="0"/>
-          </a:fillRef>
-          <a:effectRef idx="0">
-            <a:scrgbClr r="0" g="0" b="0"/>
-          </a:effectRef>
-          <a:fontRef idx="minor">
-            <a:schemeClr val="lt1"/>
-          </a:fontRef>
-        </p:style>
         <p:txBody>
-          <a:bodyPr vert="horz" wrap="square" lIns="91440" tIns="45720" rIns="91440" bIns="45720" numCol="1" rtlCol="0" anchor="t" anchorCtr="0" compatLnSpc="1">
-            <a:prstTxWarp prst="textNoShape">
-              <a:avLst/>
-            </a:prstTxWarp>
+          <a:bodyPr wrap="square" rtlCol="0">
+            <a:spAutoFit/>
           </a:bodyPr>
           <a:lstStyle/>
           <a:p>
-            <a:pPr marL="0" marR="0" indent="0" algn="l" defTabSz="4703763" rtl="0" eaLnBrk="1" fontAlgn="base" latinLnBrk="0" hangingPunct="1">
-              <a:lnSpc>
-                <a:spcPct val="100000"/>
-              </a:lnSpc>
-              <a:spcBef>
-                <a:spcPct val="0"/>
-              </a:spcBef>
-              <a:spcAft>
-                <a:spcPct val="0"/>
-              </a:spcAft>
-              <a:buClrTx/>
-              <a:buSzTx/>
-              <a:buFontTx/>
-              <a:buNone/>
-              <a:tabLst/>
-            </a:pPr>
-            <a:endParaRPr kumimoji="0" lang="en-US" sz="3000" b="0" i="0" u="none" strike="noStrike" cap="none" normalizeH="0" baseline="0">
-              <a:ln>
-                <a:noFill/>
-              </a:ln>
-              <a:solidFill>
-                <a:schemeClr val="tx1"/>
-              </a:solidFill>
-              <a:effectLst/>
-              <a:latin typeface="Arial" pitchFamily="34" charset="0"/>
-            </a:endParaRPr>
+            <a:pPr marL="457189" indent="-457189">
+              <a:buFont typeface="Arial" panose="020B0604020202020204" pitchFamily="34" charset="0"/>
+              <a:buChar char="•"/>
+            </a:pPr>
+            <a:r>
+              <a:rPr lang="en-US" sz="2667" dirty="0">
+                <a:latin typeface="Open Sans" panose="020B0606030504020204" pitchFamily="34" charset="0"/>
+                <a:ea typeface="Open Sans" panose="020B0606030504020204" pitchFamily="34" charset="0"/>
+                <a:cs typeface="Open Sans" panose="020B0606030504020204" pitchFamily="34" charset="0"/>
+              </a:rPr>
+              <a:t>Multiplication is performed on each individual cell.</a:t>
+            </a:r>
           </a:p>
         </p:txBody>
       </p:sp>
-      <p:pic>
-        <p:nvPicPr>
-          <p:cNvPr id="2062" name="Picture 2061">
-            <a:extLst>
-              <a:ext uri="{FF2B5EF4-FFF2-40B4-BE49-F238E27FC236}">
-                <a16:creationId xmlns:a16="http://schemas.microsoft.com/office/drawing/2014/main" id="{BF5F4C9B-2239-9822-9A6C-E99DDF205E5A}"/>
-              </a:ext>
-            </a:extLst>
-          </p:cNvPr>
-          <p:cNvPicPr>
-            <a:picLocks noChangeAspect="1"/>
-          </p:cNvPicPr>
-          <p:nvPr/>
-        </p:nvPicPr>
-        <p:blipFill>
-          <a:blip r:embed="rId12">
-            <a:extLst>
-              <a:ext uri="{28A0092B-C50C-407E-A947-70E740481C1C}">
-                <a14:useLocalDpi xmlns:a14="http://schemas.microsoft.com/office/drawing/2010/main" val="0"/>
-              </a:ext>
-            </a:extLst>
-          </a:blip>
-          <a:stretch>
-            <a:fillRect/>
-          </a:stretch>
-        </p:blipFill>
-        <p:spPr>
-          <a:xfrm>
-            <a:off x="19466035" y="6249485"/>
-            <a:ext cx="4826844" cy="5854408"/>
-          </a:xfrm>
-          <a:prstGeom prst="rect">
-            <a:avLst/>
-          </a:prstGeom>
-        </p:spPr>
-      </p:pic>
-      <p:pic>
-        <p:nvPicPr>
-          <p:cNvPr id="2064" name="Picture 2063">
-            <a:extLst>
-              <a:ext uri="{FF2B5EF4-FFF2-40B4-BE49-F238E27FC236}">
-                <a16:creationId xmlns:a16="http://schemas.microsoft.com/office/drawing/2014/main" id="{46463C44-30E2-4529-CA50-2F6100785FA2}"/>
-              </a:ext>
-            </a:extLst>
-          </p:cNvPr>
-          <p:cNvPicPr>
-            <a:picLocks noChangeAspect="1"/>
-          </p:cNvPicPr>
-          <p:nvPr/>
-        </p:nvPicPr>
-        <p:blipFill>
-          <a:blip r:embed="rId13">
-            <a:extLst>
-              <a:ext uri="{28A0092B-C50C-407E-A947-70E740481C1C}">
-                <a14:useLocalDpi xmlns:a14="http://schemas.microsoft.com/office/drawing/2010/main" val="0"/>
-              </a:ext>
-            </a:extLst>
-          </a:blip>
-          <a:stretch>
-            <a:fillRect/>
-          </a:stretch>
-        </p:blipFill>
-        <p:spPr>
-          <a:xfrm>
-            <a:off x="16337599" y="12247837"/>
-            <a:ext cx="7955280" cy="8659481"/>
-          </a:xfrm>
-          <a:prstGeom prst="rect">
-            <a:avLst/>
-          </a:prstGeom>
-        </p:spPr>
-      </p:pic>
     </p:spTree>
   </p:cSld>
   <p:clrMapOvr>
